--- a/Final_Presentation.pptx
+++ b/Final_Presentation.pptx
@@ -11,6 +11,8 @@
     <p:sldId id="259" r:id="rId5"/>
     <p:sldId id="260" r:id="rId6"/>
     <p:sldId id="261" r:id="rId7"/>
+    <p:sldId id="265" r:id="rId16"/>
+    <p:sldId id="266" r:id="rId17"/>
     <p:sldId id="262" r:id="rId8"/>
     <p:sldId id="263" r:id="rId9"/>
     <p:sldId id="264" r:id="rId10"/>
@@ -2042,17 +2044,34 @@
               <a:buNone/>
             </a:pPr>
             <a:r>
-              <a:rPr lang="en-US" sz="2800" b="1" dirty="0">
-                <a:solidFill>
-                  <a:srgbClr val="726656"/>
+              <a:rPr lang="en-US" sz="3200" dirty="0" b="1">
+                <a:solidFill>
+                  <a:srgbClr val="17306F"/>
                 </a:solidFill>
                 <a:latin typeface="Aptos Display" pitchFamily="34" charset="0"/>
                 <a:ea typeface="Aptos Display" pitchFamily="34" charset="-122"/>
                 <a:cs typeface="Aptos Display" pitchFamily="34" charset="-120"/>
               </a:rPr>
-              <a:t>Project Title</a:t>
-            </a:r>
-            <a:endParaRPr lang="en-US" sz="2800" dirty="0"/>
+              <a:t>Fivos — Automated Medical Device</a:t>
+            </a:r>
+            <a:endParaRPr lang="en-US" sz="3200" dirty="0"/>
+          </a:p>
+          <a:p>
+            <a:pPr indent="0" marL="0">
+              <a:buNone/>
+            </a:pPr>
+            <a:r>
+              <a:rPr lang="en-US" sz="3200" dirty="0" b="1">
+                <a:solidFill>
+                  <a:srgbClr val="17306F"/>
+                </a:solidFill>
+                <a:latin typeface="Aptos Display" pitchFamily="34" charset="0"/>
+                <a:ea typeface="Aptos Display" pitchFamily="34" charset="-122"/>
+                <a:cs typeface="Aptos Display" pitchFamily="34" charset="-120"/>
+              </a:rPr>
+              <a:t>Harvesting &amp; Regulatory Validation</a:t>
+            </a:r>
+            <a:endParaRPr lang="en-US" sz="3200" dirty="0"/>
           </a:p>
         </p:txBody>
       </p:sp>
@@ -2081,17 +2100,17 @@
               <a:buNone/>
             </a:pPr>
             <a:r>
-              <a:rPr lang="en-US" sz="1800" dirty="0">
-                <a:solidFill>
-                  <a:srgbClr val="17306F"/>
-                </a:solidFill>
-                <a:latin typeface="Aptos" pitchFamily="34" charset="0"/>
-                <a:ea typeface="Aptos" pitchFamily="34" charset="-122"/>
-                <a:cs typeface="Aptos" pitchFamily="34" charset="-120"/>
-              </a:rPr>
-              <a:t>Subtitle or one-line project description</a:t>
-            </a:r>
-            <a:endParaRPr lang="en-US" sz="1800" dirty="0"/>
+              <a:rPr lang="en-US" sz="1600" dirty="0">
+                <a:solidFill>
+                  <a:srgbClr val="726656"/>
+                </a:solidFill>
+                <a:latin typeface="Aptos Display" pitchFamily="34" charset="0"/>
+                <a:ea typeface="Aptos Display" pitchFamily="34" charset="-122"/>
+                <a:cs typeface="Aptos Display" pitchFamily="34" charset="-120"/>
+              </a:rPr>
+              <a:t>Collect → Compare → Correct</a:t>
+            </a:r>
+            <a:endParaRPr lang="en-US" sz="1600" dirty="0"/>
           </a:p>
         </p:txBody>
       </p:sp>
@@ -2120,51 +2139,51 @@
               <a:buNone/>
             </a:pPr>
             <a:r>
-              <a:rPr lang="en-US" sz="1700" dirty="0">
-                <a:solidFill>
-                  <a:srgbClr val="5F5A52"/>
-                </a:solidFill>
-                <a:latin typeface="Aptos" pitchFamily="34" charset="0"/>
-                <a:ea typeface="Aptos" pitchFamily="34" charset="-122"/>
-                <a:cs typeface="Aptos" pitchFamily="34" charset="-120"/>
-              </a:rPr>
-              <a:t>Presented by: [Your Name] + 5 Team Members</a:t>
-            </a:r>
-            <a:endParaRPr lang="en-US" sz="1700" dirty="0"/>
-          </a:p>
-          <a:p>
-            <a:pPr indent="0" marL="0">
-              <a:buNone/>
-            </a:pPr>
-            <a:r>
-              <a:rPr lang="en-US" sz="1700" dirty="0">
-                <a:solidFill>
-                  <a:srgbClr val="5F5A52"/>
-                </a:solidFill>
-                <a:latin typeface="Aptos" pitchFamily="34" charset="0"/>
-                <a:ea typeface="Aptos" pitchFamily="34" charset="-122"/>
-                <a:cs typeface="Aptos" pitchFamily="34" charset="-120"/>
-              </a:rPr>
-              <a:t>Course / Instructor</a:t>
-            </a:r>
-            <a:endParaRPr lang="en-US" sz="1700" dirty="0"/>
-          </a:p>
-          <a:p>
-            <a:pPr indent="0" marL="0">
-              <a:buNone/>
-            </a:pPr>
-            <a:r>
-              <a:rPr lang="en-US" sz="1700" dirty="0">
-                <a:solidFill>
-                  <a:srgbClr val="5F5A52"/>
-                </a:solidFill>
-                <a:latin typeface="Aptos" pitchFamily="34" charset="0"/>
-                <a:ea typeface="Aptos" pitchFamily="34" charset="-122"/>
-                <a:cs typeface="Aptos" pitchFamily="34" charset="-120"/>
-              </a:rPr>
-              <a:t>Date</a:t>
-            </a:r>
-            <a:endParaRPr lang="en-US" sz="1700" dirty="0"/>
+              <a:rPr lang="en-US" sz="1300" dirty="0">
+                <a:solidFill>
+                  <a:srgbClr val="4D4A45"/>
+                </a:solidFill>
+                <a:latin typeface="Aptos" pitchFamily="34" charset="0"/>
+                <a:ea typeface="Aptos" pitchFamily="34" charset="-122"/>
+                <a:cs typeface="Aptos" pitchFamily="34" charset="-120"/>
+              </a:rPr>
+              <a:t>Vibe Coders: Jonathan · Wyatt · Ryan · Jason · Ralph</a:t>
+            </a:r>
+            <a:endParaRPr lang="en-US" sz="1300" dirty="0"/>
+          </a:p>
+          <a:p>
+            <a:pPr indent="0" marL="0">
+              <a:buNone/>
+            </a:pPr>
+            <a:r>
+              <a:rPr lang="en-US" sz="1300" dirty="0">
+                <a:solidFill>
+                  <a:srgbClr val="4D4A45"/>
+                </a:solidFill>
+                <a:latin typeface="Aptos" pitchFamily="34" charset="0"/>
+                <a:ea typeface="Aptos" pitchFamily="34" charset="-122"/>
+                <a:cs typeface="Aptos" pitchFamily="34" charset="-120"/>
+              </a:rPr>
+              <a:t>CIS 497 Senior Design — Spring 2026</a:t>
+            </a:r>
+            <a:endParaRPr lang="en-US" sz="1300" dirty="0"/>
+          </a:p>
+          <a:p>
+            <a:pPr indent="0" marL="0">
+              <a:buNone/>
+            </a:pPr>
+            <a:r>
+              <a:rPr lang="en-US" sz="1300" dirty="0">
+                <a:solidFill>
+                  <a:srgbClr val="4D4A45"/>
+                </a:solidFill>
+                <a:latin typeface="Aptos" pitchFamily="34" charset="0"/>
+                <a:ea typeface="Aptos" pitchFamily="34" charset="-122"/>
+                <a:cs typeface="Aptos" pitchFamily="34" charset="-120"/>
+              </a:rPr>
+              <a:t>Client: Doug Greene — Fivos Health</a:t>
+            </a:r>
+            <a:endParaRPr lang="en-US" sz="1300" dirty="0"/>
           </a:p>
         </p:txBody>
       </p:sp>
@@ -2216,21 +2235,21 @@
           <a:bodyPr wrap="square" lIns="0" tIns="0" rIns="0" bIns="0" rtlCol="0" anchor="ctr"/>
           <a:lstStyle/>
           <a:p>
-            <a:pPr algn="ctr" indent="0" marL="0">
-              <a:buNone/>
-            </a:pPr>
-            <a:r>
-              <a:rPr lang="en-US" sz="2000" b="1" dirty="0">
-                <a:solidFill>
-                  <a:srgbClr val="17306F"/>
-                </a:solidFill>
-                <a:latin typeface="Aptos Display" pitchFamily="34" charset="0"/>
-                <a:ea typeface="Aptos Display" pitchFamily="34" charset="-122"/>
-                <a:cs typeface="Aptos Display" pitchFamily="34" charset="-120"/>
-              </a:rPr>
-              <a:t>Replace this panel with one of the following:</a:t>
-            </a:r>
-            <a:endParaRPr lang="en-US" sz="2000" dirty="0"/>
+            <a:pPr indent="0" marL="0">
+              <a:buNone/>
+            </a:pPr>
+            <a:r>
+              <a:rPr lang="en-US" sz="1100" dirty="0">
+                <a:solidFill>
+                  <a:srgbClr val="726656"/>
+                </a:solidFill>
+                <a:latin typeface="Aptos" pitchFamily="34" charset="0"/>
+                <a:ea typeface="Aptos" pitchFamily="34" charset="-122"/>
+                <a:cs typeface="Aptos" pitchFamily="34" charset="-120"/>
+              </a:rPr>
+              <a:t>Add one of the following to the right panel:</a:t>
+            </a:r>
+            <a:endParaRPr lang="en-US" sz="1100" dirty="0"/>
           </a:p>
         </p:txBody>
       </p:sp>
@@ -2255,13 +2274,47 @@
           <a:bodyPr wrap="square" lIns="0" tIns="0" rIns="0" bIns="0" rtlCol="0" anchor="ctr"/>
           <a:lstStyle/>
           <a:p>
-            <a:pPr algn="l" indent="0" marL="0">
-              <a:buNone/>
-            </a:pPr>
-            <a:r>
-              <a:rPr lang="en-US" sz="2000" dirty="0">
-                <a:solidFill>
-                  <a:srgbClr val="7A746C"/>
+            <a:pPr indent="0" marL="0">
+              <a:buNone/>
+            </a:pPr>
+            <a:r>
+              <a:rPr lang="en-US" sz="1400" dirty="0">
+                <a:solidFill>
+                  <a:srgbClr val="4D4A45"/>
+                </a:solidFill>
+                <a:latin typeface="Aptos" pitchFamily="34" charset="0"/>
+                <a:ea typeface="Aptos" pitchFamily="34" charset="-122"/>
+                <a:cs typeface="Aptos" pitchFamily="34" charset="-120"/>
+              </a:rPr>
+              <a:t>• Dashboard screenshot</a:t>
+            </a:r>
+            <a:endParaRPr lang="en-US" sz="1400" dirty="0"/>
+          </a:p>
+          <a:p>
+            <a:pPr indent="0" marL="0">
+              <a:buNone/>
+            </a:pPr>
+            <a:r>
+              <a:rPr lang="en-US" sz="1400" dirty="0">
+                <a:solidFill>
+                  <a:srgbClr val="4D4A45"/>
+                </a:solidFill>
+                <a:latin typeface="Aptos" pitchFamily="34" charset="0"/>
+                <a:ea typeface="Aptos" pitchFamily="34" charset="-122"/>
+                <a:cs typeface="Aptos" pitchFamily="34" charset="-120"/>
+              </a:rPr>
+              <a:t>• Fivos company logo</a:t>
+            </a:r>
+            <a:endParaRPr lang="en-US" sz="1400" dirty="0"/>
+          </a:p>
+          <a:p>
+            <a:pPr indent="0" marL="0">
+              <a:buNone/>
+            </a:pPr>
+            <a:r>
+              <a:rPr lang="en-US" sz="1400" dirty="0">
+                <a:solidFill>
+                  <a:srgbClr val="4D4A45"/>
                 </a:solidFill>
                 <a:latin typeface="Aptos" pitchFamily="34" charset="0"/>
                 <a:ea typeface="Aptos" pitchFamily="34" charset="-122"/>
@@ -2269,58 +2322,7 @@
               </a:rPr>
               <a:t>• Team photo</a:t>
             </a:r>
-            <a:endParaRPr lang="en-US" sz="2000" dirty="0"/>
-          </a:p>
-          <a:p>
-            <a:pPr algn="l" indent="0" marL="0">
-              <a:buNone/>
-            </a:pPr>
-            <a:r>
-              <a:rPr lang="en-US" sz="2000" dirty="0">
-                <a:solidFill>
-                  <a:srgbClr val="7A746C"/>
-                </a:solidFill>
-                <a:latin typeface="Aptos" pitchFamily="34" charset="0"/>
-                <a:ea typeface="Aptos" pitchFamily="34" charset="-122"/>
-                <a:cs typeface="Aptos" pitchFamily="34" charset="-120"/>
-              </a:rPr>
-              <a:t>• Project graphic</a:t>
-            </a:r>
-            <a:endParaRPr lang="en-US" sz="2000" dirty="0"/>
-          </a:p>
-          <a:p>
-            <a:pPr algn="l" indent="0" marL="0">
-              <a:buNone/>
-            </a:pPr>
-            <a:r>
-              <a:rPr lang="en-US" sz="2000" dirty="0">
-                <a:solidFill>
-                  <a:srgbClr val="7A746C"/>
-                </a:solidFill>
-                <a:latin typeface="Aptos" pitchFamily="34" charset="0"/>
-                <a:ea typeface="Aptos" pitchFamily="34" charset="-122"/>
-                <a:cs typeface="Aptos" pitchFamily="34" charset="-120"/>
-              </a:rPr>
-              <a:t>• Company logo</a:t>
-            </a:r>
-            <a:endParaRPr lang="en-US" sz="2000" dirty="0"/>
-          </a:p>
-          <a:p>
-            <a:pPr algn="l" indent="0" marL="0">
-              <a:buNone/>
-            </a:pPr>
-            <a:r>
-              <a:rPr lang="en-US" sz="2000" dirty="0">
-                <a:solidFill>
-                  <a:srgbClr val="7A746C"/>
-                </a:solidFill>
-                <a:latin typeface="Aptos" pitchFamily="34" charset="0"/>
-                <a:ea typeface="Aptos" pitchFamily="34" charset="-122"/>
-                <a:cs typeface="Aptos" pitchFamily="34" charset="-120"/>
-              </a:rPr>
-              <a:t>• Screenshot collage</a:t>
-            </a:r>
-            <a:endParaRPr lang="en-US" sz="2000" dirty="0"/>
+            <a:endParaRPr lang="en-US" sz="1400" dirty="0"/>
           </a:p>
         </p:txBody>
       </p:sp>
@@ -2345,21 +2347,21 @@
           <a:bodyPr wrap="square" lIns="0" tIns="0" rIns="0" bIns="0" rtlCol="0" anchor="ctr"/>
           <a:lstStyle/>
           <a:p>
-            <a:pPr algn="ctr" indent="0" marL="0">
-              <a:buNone/>
-            </a:pPr>
-            <a:r>
-              <a:rPr lang="en-US" sz="1200" i="1" dirty="0">
-                <a:solidFill>
-                  <a:srgbClr val="7A746C"/>
-                </a:solidFill>
-                <a:latin typeface="Aptos" pitchFamily="34" charset="0"/>
-                <a:ea typeface="Aptos" pitchFamily="34" charset="-122"/>
-                <a:cs typeface="Aptos" pitchFamily="34" charset="-120"/>
-              </a:rPr>
-              <a:t>Clean visual area for customization</a:t>
-            </a:r>
-            <a:endParaRPr lang="en-US" sz="1200" dirty="0"/>
+            <a:pPr indent="0" marL="0">
+              <a:buNone/>
+            </a:pPr>
+            <a:r>
+              <a:rPr lang="en-US" sz="1000" dirty="0">
+                <a:solidFill>
+                  <a:srgbClr val="9E9890"/>
+                </a:solidFill>
+                <a:latin typeface="Aptos" pitchFamily="34" charset="0"/>
+                <a:ea typeface="Aptos" pitchFamily="34" charset="-122"/>
+                <a:cs typeface="Aptos" pitchFamily="34" charset="-120"/>
+              </a:rPr>
+              <a:t>Visual area</a:t>
+            </a:r>
+            <a:endParaRPr lang="en-US" sz="1000" dirty="0"/>
           </a:p>
         </p:txBody>
       </p:sp>
@@ -2406,6 +2408,1714 @@
             <a:fld id="{F7021451-1387-4CA6-816F-3879F97B5CBC}" type="slidenum">
               <a:rPr b="0" lang="en-US"/>
               <a:t>1</a:t>
+            </a:fld>
+            <a:endParaRPr lang="en-US"/>
+          </a:p>
+        </p:txBody>
+      </p:sp>
+    </p:spTree>
+  </p:cSld>
+  <p:clrMapOvr>
+    <a:masterClrMapping/>
+  </p:clrMapOvr>
+</p:sld>
+</file>
+
+<file path=ppt/slides/slide10.xml><?xml version="1.0" encoding="utf-8"?>
+<p:sld xmlns:a="http://schemas.openxmlformats.org/drawingml/2006/main" xmlns:p="http://schemas.openxmlformats.org/presentationml/2006/main" xmlns:r="http://schemas.openxmlformats.org/officeDocument/2006/relationships">
+  <p:cSld>
+    <p:spTree>
+      <p:nvGrpSpPr>
+        <p:cNvPr id="1" name=""/>
+        <p:cNvGrpSpPr/>
+        <p:nvPr/>
+      </p:nvGrpSpPr>
+      <p:grpSpPr>
+        <a:xfrm>
+          <a:off x="0" y="0"/>
+          <a:ext cx="0" cy="0"/>
+          <a:chOff x="0" y="0"/>
+          <a:chExt cx="0" cy="0"/>
+        </a:xfrm>
+      </p:grpSpPr>
+      <p:sp>
+        <p:nvSpPr>
+          <p:cNvPr id="2" name="Shape 0"/>
+          <p:cNvSpPr/>
+          <p:nvPr/>
+        </p:nvSpPr>
+        <p:spPr>
+          <a:xfrm>
+            <a:off x="502920" y="347472"/>
+            <a:ext cx="914400" cy="73152"/>
+          </a:xfrm>
+          <a:prstGeom prst="rect">
+            <a:avLst/>
+          </a:prstGeom>
+          <a:solidFill>
+            <a:srgbClr val="E97886"/>
+          </a:solidFill>
+          <a:ln w="12700">
+            <a:solidFill>
+              <a:srgbClr val="E97886">
+                <a:alpha val="0"/>
+              </a:srgbClr>
+            </a:solidFill>
+            <a:prstDash val="solid"/>
+          </a:ln>
+        </p:spPr>
+      </p:sp>
+      <p:sp>
+        <p:nvSpPr>
+          <p:cNvPr id="3" name="Shape 1"/>
+          <p:cNvSpPr/>
+          <p:nvPr/>
+        </p:nvSpPr>
+        <p:spPr>
+          <a:xfrm>
+            <a:off x="1481328" y="347472"/>
+            <a:ext cx="1325880" cy="73152"/>
+          </a:xfrm>
+          <a:prstGeom prst="rect">
+            <a:avLst/>
+          </a:prstGeom>
+          <a:solidFill>
+            <a:srgbClr val="E8D0D0"/>
+          </a:solidFill>
+          <a:ln w="12700">
+            <a:solidFill>
+              <a:srgbClr val="E8D0D0">
+                <a:alpha val="0"/>
+              </a:srgbClr>
+            </a:solidFill>
+            <a:prstDash val="solid"/>
+          </a:ln>
+        </p:spPr>
+      </p:sp>
+      <p:sp>
+        <p:nvSpPr>
+          <p:cNvPr id="4" name="Shape 2"/>
+          <p:cNvSpPr/>
+          <p:nvPr/>
+        </p:nvSpPr>
+        <p:spPr>
+          <a:xfrm>
+            <a:off x="2816352" y="347472"/>
+            <a:ext cx="1554480" cy="73152"/>
+          </a:xfrm>
+          <a:prstGeom prst="rect">
+            <a:avLst/>
+          </a:prstGeom>
+          <a:solidFill>
+            <a:srgbClr val="D65F63"/>
+          </a:solidFill>
+          <a:ln w="12700">
+            <a:solidFill>
+              <a:srgbClr val="D65F63">
+                <a:alpha val="0"/>
+              </a:srgbClr>
+            </a:solidFill>
+            <a:prstDash val="solid"/>
+          </a:ln>
+        </p:spPr>
+      </p:sp>
+      <p:sp>
+        <p:nvSpPr>
+          <p:cNvPr id="5" name="Shape 3"/>
+          <p:cNvSpPr/>
+          <p:nvPr/>
+        </p:nvSpPr>
+        <p:spPr>
+          <a:xfrm>
+            <a:off x="4379976" y="347472"/>
+            <a:ext cx="1097280" cy="73152"/>
+          </a:xfrm>
+          <a:prstGeom prst="rect">
+            <a:avLst/>
+          </a:prstGeom>
+          <a:solidFill>
+            <a:srgbClr val="C74642"/>
+          </a:solidFill>
+          <a:ln w="12700">
+            <a:solidFill>
+              <a:srgbClr val="C74642">
+                <a:alpha val="0"/>
+              </a:srgbClr>
+            </a:solidFill>
+            <a:prstDash val="solid"/>
+          </a:ln>
+        </p:spPr>
+      </p:sp>
+      <p:sp>
+        <p:nvSpPr>
+          <p:cNvPr id="6" name="Text 4"/>
+          <p:cNvSpPr/>
+          <p:nvPr/>
+        </p:nvSpPr>
+        <p:spPr>
+          <a:xfrm>
+            <a:off x="749808" y="731520"/>
+            <a:ext cx="7223760" cy="411480"/>
+          </a:xfrm>
+          <a:prstGeom prst="rect">
+            <a:avLst/>
+          </a:prstGeom>
+          <a:noFill/>
+          <a:ln/>
+        </p:spPr>
+        <p:txBody>
+          <a:bodyPr wrap="square" lIns="0" tIns="0" rIns="0" bIns="0" rtlCol="0" anchor="ctr"/>
+          <a:lstStyle/>
+          <a:p>
+            <a:pPr indent="0" marL="0">
+              <a:buNone/>
+            </a:pPr>
+            <a:r>
+              <a:rPr lang="en-US" sz="2600" dirty="0" b="1">
+                <a:solidFill>
+                  <a:srgbClr val="17306F"/>
+                </a:solidFill>
+                <a:latin typeface="Aptos Display" pitchFamily="34" charset="0"/>
+                <a:ea typeface="Aptos Display" pitchFamily="34" charset="-122"/>
+                <a:cs typeface="Aptos Display" pitchFamily="34" charset="-120"/>
+              </a:rPr>
+              <a:t>Non-Functional Requirements</a:t>
+            </a:r>
+            <a:endParaRPr lang="en-US" sz="2600" dirty="0"/>
+          </a:p>
+        </p:txBody>
+      </p:sp>
+      <p:sp>
+        <p:nvSpPr>
+          <p:cNvPr id="7" name="Text 5"/>
+          <p:cNvSpPr/>
+          <p:nvPr/>
+        </p:nvSpPr>
+        <p:spPr>
+          <a:xfrm>
+            <a:off x="768096" y="1143000"/>
+            <a:ext cx="6766560" cy="274320"/>
+          </a:xfrm>
+          <a:prstGeom prst="rect">
+            <a:avLst/>
+          </a:prstGeom>
+          <a:noFill/>
+          <a:ln/>
+        </p:spPr>
+        <p:txBody>
+          <a:bodyPr wrap="square" lIns="0" tIns="0" rIns="0" bIns="0" rtlCol="0" anchor="ctr"/>
+          <a:lstStyle/>
+          <a:p>
+            <a:pPr indent="0" marL="0">
+              <a:buNone/>
+            </a:pPr>
+            <a:r>
+              <a:rPr lang="en-US" sz="1200" dirty="0">
+                <a:solidFill>
+                  <a:srgbClr val="7A746C"/>
+                </a:solidFill>
+                <a:latin typeface="Aptos" pitchFamily="34" charset="0"/>
+                <a:ea typeface="Aptos" pitchFamily="34" charset="-122"/>
+                <a:cs typeface="Aptos" pitchFamily="34" charset="-120"/>
+              </a:rPr>
+              <a:t>Quality attributes and operational constraints</a:t>
+            </a:r>
+            <a:endParaRPr lang="en-US" sz="1200" dirty="0"/>
+          </a:p>
+        </p:txBody>
+      </p:sp>
+      <p:sp>
+        <p:nvSpPr>
+          <p:cNvPr id="8" name="Shape 6"/>
+          <p:cNvSpPr/>
+          <p:nvPr/>
+        </p:nvSpPr>
+        <p:spPr>
+          <a:xfrm>
+            <a:off x="749808" y="1490472"/>
+            <a:ext cx="10698480" cy="0"/>
+          </a:xfrm>
+          <a:prstGeom prst="line">
+            <a:avLst/>
+          </a:prstGeom>
+          <a:noFill/>
+          <a:ln w="12700">
+            <a:solidFill>
+              <a:srgbClr val="D8D0C7"/>
+            </a:solidFill>
+            <a:prstDash val="solid"/>
+          </a:ln>
+        </p:spPr>
+      </p:sp>
+      <p:sp>
+        <p:nvSpPr>
+          <p:cNvPr id="9" name="Shape 7"/>
+          <p:cNvSpPr/>
+          <p:nvPr/>
+        </p:nvSpPr>
+        <p:spPr>
+          <a:xfrm>
+            <a:off x="4059936" y="1783080"/>
+            <a:ext cx="0" cy="3611880"/>
+          </a:xfrm>
+          <a:prstGeom prst="line">
+            <a:avLst/>
+          </a:prstGeom>
+          <a:noFill/>
+          <a:ln w="12700">
+            <a:solidFill>
+              <a:srgbClr val="D8D0C7"/>
+            </a:solidFill>
+            <a:prstDash val="solid"/>
+          </a:ln>
+        </p:spPr>
+      </p:sp>
+      <p:sp>
+        <p:nvSpPr>
+          <p:cNvPr id="10" name="Shape 8"/>
+          <p:cNvSpPr/>
+          <p:nvPr/>
+        </p:nvSpPr>
+        <p:spPr>
+          <a:xfrm>
+            <a:off x="8119872" y="1783080"/>
+            <a:ext cx="0" cy="3611880"/>
+          </a:xfrm>
+          <a:prstGeom prst="line">
+            <a:avLst/>
+          </a:prstGeom>
+          <a:noFill/>
+          <a:ln w="12700">
+            <a:solidFill>
+              <a:srgbClr val="D8D0C7"/>
+            </a:solidFill>
+            <a:prstDash val="solid"/>
+          </a:ln>
+        </p:spPr>
+      </p:sp>
+      <p:sp>
+        <p:nvSpPr>
+          <p:cNvPr id="11" name="Text 9"/>
+          <p:cNvSpPr/>
+          <p:nvPr/>
+        </p:nvSpPr>
+        <p:spPr>
+          <a:xfrm>
+            <a:off x="822960" y="1901952"/>
+            <a:ext cx="2743200" cy="256032"/>
+          </a:xfrm>
+          <a:prstGeom prst="rect">
+            <a:avLst/>
+          </a:prstGeom>
+          <a:noFill/>
+          <a:ln/>
+        </p:spPr>
+        <p:txBody>
+          <a:bodyPr wrap="square" lIns="0" tIns="0" rIns="0" bIns="0" rtlCol="0" anchor="ctr"/>
+          <a:lstStyle/>
+          <a:p>
+            <a:pPr indent="0" marL="0">
+              <a:buNone/>
+            </a:pPr>
+            <a:r>
+              <a:rPr lang="en-US" sz="1800" dirty="0" b="1">
+                <a:solidFill>
+                  <a:srgbClr val="726656"/>
+                </a:solidFill>
+                <a:latin typeface="Aptos Display" pitchFamily="34" charset="0"/>
+                <a:ea typeface="Aptos Display" pitchFamily="34" charset="-122"/>
+                <a:cs typeface="Aptos Display" pitchFamily="34" charset="-120"/>
+              </a:rPr>
+              <a:t>Security</a:t>
+            </a:r>
+            <a:endParaRPr lang="en-US" sz="1800" dirty="0"/>
+          </a:p>
+        </p:txBody>
+      </p:sp>
+      <p:sp>
+        <p:nvSpPr>
+          <p:cNvPr id="12" name="Text 10"/>
+          <p:cNvSpPr/>
+          <p:nvPr/>
+        </p:nvSpPr>
+        <p:spPr>
+          <a:xfrm>
+            <a:off x="822960" y="2468880"/>
+            <a:ext cx="2743200" cy="1280160"/>
+          </a:xfrm>
+          <a:prstGeom prst="rect">
+            <a:avLst/>
+          </a:prstGeom>
+          <a:noFill/>
+          <a:ln/>
+        </p:spPr>
+        <p:txBody>
+          <a:bodyPr wrap="square" lIns="254" tIns="254" rIns="254" bIns="254" rtlCol="0" anchor="ctr"/>
+          <a:lstStyle/>
+          <a:p>
+            <a:pPr indent="0" marL="0">
+              <a:buNone/>
+            </a:pPr>
+            <a:r>
+              <a:rPr lang="en-US" sz="1400" dirty="0">
+                <a:solidFill>
+                  <a:srgbClr val="4D4A45"/>
+                </a:solidFill>
+                <a:latin typeface="Aptos" pitchFamily="34" charset="0"/>
+                <a:ea typeface="Aptos" pitchFamily="34" charset="-122"/>
+                <a:cs typeface="Aptos" pitchFamily="34" charset="-120"/>
+              </a:rPr>
+              <a:t>• CSRF tokens on all 13 POST forms (secrets.compare_digest)</a:t>
+            </a:r>
+            <a:endParaRPr lang="en-US" sz="1400" dirty="0"/>
+          </a:p>
+          <a:p>
+            <a:pPr indent="0" marL="0">
+              <a:buNone/>
+            </a:pPr>
+            <a:r>
+              <a:rPr lang="en-US" sz="1400" dirty="0">
+                <a:solidFill>
+                  <a:srgbClr val="4D4A45"/>
+                </a:solidFill>
+                <a:latin typeface="Aptos" pitchFamily="34" charset="0"/>
+                <a:ea typeface="Aptos" pitchFamily="34" charset="-122"/>
+                <a:cs typeface="Aptos" pitchFamily="34" charset="-120"/>
+              </a:rPr>
+              <a:t>• Security headers: CSP, X-Frame-Options, Cache-Control, COEP</a:t>
+            </a:r>
+            <a:endParaRPr lang="en-US" sz="1400" dirty="0"/>
+          </a:p>
+          <a:p>
+            <a:pPr indent="0" marL="0">
+              <a:buNone/>
+            </a:pPr>
+            <a:r>
+              <a:rPr lang="en-US" sz="1400" dirty="0">
+                <a:solidFill>
+                  <a:srgbClr val="4D4A45"/>
+                </a:solidFill>
+                <a:latin typeface="Aptos" pitchFamily="34" charset="0"/>
+                <a:ea typeface="Aptos" pitchFamily="34" charset="-122"/>
+                <a:cs typeface="Aptos" pitchFamily="34" charset="-120"/>
+              </a:rPr>
+              <a:t>• bcrypt (work factor 12) + HIBP k-anonymity breach check</a:t>
+            </a:r>
+            <a:endParaRPr lang="en-US" sz="1400" dirty="0"/>
+          </a:p>
+          <a:p>
+            <a:pPr indent="0" marL="0">
+              <a:buNone/>
+            </a:pPr>
+            <a:r>
+              <a:rPr lang="en-US" sz="1400" dirty="0">
+                <a:solidFill>
+                  <a:srgbClr val="4D4A45"/>
+                </a:solidFill>
+                <a:latin typeface="Aptos" pitchFamily="34" charset="0"/>
+                <a:ea typeface="Aptos" pitchFamily="34" charset="-122"/>
+                <a:cs typeface="Aptos" pitchFamily="34" charset="-120"/>
+              </a:rPr>
+              <a:t>• MongoDB bound to 127.0.0.1 with authentication required</a:t>
+            </a:r>
+            <a:endParaRPr lang="en-US" sz="1400" dirty="0"/>
+          </a:p>
+        </p:txBody>
+      </p:sp>
+      <p:sp>
+        <p:nvSpPr>
+          <p:cNvPr id="13" name="Text 11"/>
+          <p:cNvSpPr/>
+          <p:nvPr/>
+        </p:nvSpPr>
+        <p:spPr>
+          <a:xfrm>
+            <a:off x="822960" y="4343400"/>
+            <a:ext cx="2743200" cy="201168"/>
+          </a:xfrm>
+          <a:prstGeom prst="rect">
+            <a:avLst/>
+          </a:prstGeom>
+          <a:noFill/>
+          <a:ln/>
+        </p:spPr>
+        <p:txBody>
+          <a:bodyPr wrap="square" lIns="0" tIns="0" rIns="0" bIns="0" rtlCol="0" anchor="ctr"/>
+          <a:lstStyle/>
+          <a:p>
+            <a:pPr indent="0" marL="0">
+              <a:buNone/>
+            </a:pPr>
+            <a:r>
+              <a:rPr lang="en-US" sz="1100" dirty="0">
+                <a:solidFill>
+                  <a:srgbClr val="9E9890"/>
+                </a:solidFill>
+                <a:latin typeface="Aptos" pitchFamily="34" charset="0"/>
+                <a:ea typeface="Aptos" pitchFamily="34" charset="-122"/>
+                <a:cs typeface="Aptos" pitchFamily="34" charset="-120"/>
+              </a:rPr>
+              <a:t>ZAP: 58 PASS, 0 FAIL</a:t>
+            </a:r>
+            <a:endParaRPr lang="en-US" sz="1100" dirty="0"/>
+          </a:p>
+        </p:txBody>
+      </p:sp>
+      <p:sp>
+        <p:nvSpPr>
+          <p:cNvPr id="14" name="Shape 12"/>
+          <p:cNvSpPr/>
+          <p:nvPr/>
+        </p:nvSpPr>
+        <p:spPr>
+          <a:xfrm>
+            <a:off x="822960" y="4572000"/>
+            <a:ext cx="2743200" cy="1005840"/>
+          </a:xfrm>
+          <a:prstGeom prst="roundRect">
+            <a:avLst>
+              <a:gd name="adj" fmla="val 4545"/>
+            </a:avLst>
+          </a:prstGeom>
+          <a:solidFill>
+            <a:srgbClr val="FCFBF9"/>
+          </a:solidFill>
+          <a:ln w="12700">
+            <a:solidFill>
+              <a:srgbClr val="D8D0C7"/>
+            </a:solidFill>
+            <a:prstDash val="solid"/>
+          </a:ln>
+        </p:spPr>
+      </p:sp>
+      <p:sp>
+        <p:nvSpPr>
+          <p:cNvPr id="15" name="Text 13"/>
+          <p:cNvSpPr/>
+          <p:nvPr/>
+        </p:nvSpPr>
+        <p:spPr>
+          <a:xfrm>
+            <a:off x="4572000" y="1901952"/>
+            <a:ext cx="2743200" cy="256032"/>
+          </a:xfrm>
+          <a:prstGeom prst="rect">
+            <a:avLst/>
+          </a:prstGeom>
+          <a:noFill/>
+          <a:ln/>
+        </p:spPr>
+        <p:txBody>
+          <a:bodyPr wrap="square" lIns="0" tIns="0" rIns="0" bIns="0" rtlCol="0" anchor="ctr"/>
+          <a:lstStyle/>
+          <a:p>
+            <a:pPr indent="0" marL="0">
+              <a:buNone/>
+            </a:pPr>
+            <a:r>
+              <a:rPr lang="en-US" sz="1800" dirty="0" b="1">
+                <a:solidFill>
+                  <a:srgbClr val="726656"/>
+                </a:solidFill>
+                <a:latin typeface="Aptos Display" pitchFamily="34" charset="0"/>
+                <a:ea typeface="Aptos Display" pitchFamily="34" charset="-122"/>
+                <a:cs typeface="Aptos Display" pitchFamily="34" charset="-120"/>
+              </a:rPr>
+              <a:t>Performance &amp; Portability</a:t>
+            </a:r>
+            <a:endParaRPr lang="en-US" sz="1800" dirty="0"/>
+          </a:p>
+        </p:txBody>
+      </p:sp>
+      <p:sp>
+        <p:nvSpPr>
+          <p:cNvPr id="16" name="Text 14"/>
+          <p:cNvSpPr/>
+          <p:nvPr/>
+        </p:nvSpPr>
+        <p:spPr>
+          <a:xfrm>
+            <a:off x="4572000" y="2468880"/>
+            <a:ext cx="2743200" cy="1280160"/>
+          </a:xfrm>
+          <a:prstGeom prst="rect">
+            <a:avLst/>
+          </a:prstGeom>
+          <a:noFill/>
+          <a:ln/>
+        </p:spPr>
+        <p:txBody>
+          <a:bodyPr wrap="square" lIns="254" tIns="254" rIns="254" bIns="254" rtlCol="0" anchor="ctr"/>
+          <a:lstStyle/>
+          <a:p>
+            <a:pPr indent="0" marL="0">
+              <a:buNone/>
+            </a:pPr>
+            <a:r>
+              <a:rPr lang="en-US" sz="1400" dirty="0">
+                <a:solidFill>
+                  <a:srgbClr val="4D4A45"/>
+                </a:solidFill>
+                <a:latin typeface="Aptos" pitchFamily="34" charset="0"/>
+                <a:ea typeface="Aptos" pitchFamily="34" charset="-122"/>
+                <a:cs typeface="Aptos" pitchFamily="34" charset="-120"/>
+              </a:rPr>
+              <a:t>• 4-worker parallel extraction with per-provider semaphores</a:t>
+            </a:r>
+            <a:endParaRPr lang="en-US" sz="1400" dirty="0"/>
+          </a:p>
+          <a:p>
+            <a:pPr indent="0" marL="0">
+              <a:buNone/>
+            </a:pPr>
+            <a:r>
+              <a:rPr lang="en-US" sz="1400" dirty="0">
+                <a:solidFill>
+                  <a:srgbClr val="4D4A45"/>
+                </a:solidFill>
+                <a:latin typeface="Aptos" pitchFamily="34" charset="0"/>
+                <a:ea typeface="Aptos" pitchFamily="34" charset="-122"/>
+                <a:cs typeface="Aptos" pitchFamily="34" charset="-120"/>
+              </a:rPr>
+              <a:t>• Cloud-first LLM (Groq/NVIDIA) with local Ollama fallback</a:t>
+            </a:r>
+            <a:endParaRPr lang="en-US" sz="1400" dirty="0"/>
+          </a:p>
+          <a:p>
+            <a:pPr indent="0" marL="0">
+              <a:buNone/>
+            </a:pPr>
+            <a:r>
+              <a:rPr lang="en-US" sz="1400" dirty="0">
+                <a:solidFill>
+                  <a:srgbClr val="4D4A45"/>
+                </a:solidFill>
+                <a:latin typeface="Aptos" pitchFamily="34" charset="0"/>
+                <a:ea typeface="Aptos" pitchFamily="34" charset="-122"/>
+                <a:cs typeface="Aptos" pitchFamily="34" charset="-120"/>
+              </a:rPr>
+              <a:t>• Full stack in Docker Compose — no host dependencies</a:t>
+            </a:r>
+            <a:endParaRPr lang="en-US" sz="1400" dirty="0"/>
+          </a:p>
+          <a:p>
+            <a:pPr indent="0" marL="0">
+              <a:buNone/>
+            </a:pPr>
+            <a:r>
+              <a:rPr lang="en-US" sz="1400" dirty="0">
+                <a:solidFill>
+                  <a:srgbClr val="4D4A45"/>
+                </a:solidFill>
+                <a:latin typeface="Aptos" pitchFamily="34" charset="0"/>
+                <a:ea typeface="Aptos" pitchFamily="34" charset="-122"/>
+                <a:cs typeface="Aptos" pitchFamily="34" charset="-120"/>
+              </a:rPr>
+              <a:t>• GPU passthrough opt-in via override compose file</a:t>
+            </a:r>
+            <a:endParaRPr lang="en-US" sz="1400" dirty="0"/>
+          </a:p>
+        </p:txBody>
+      </p:sp>
+      <p:sp>
+        <p:nvSpPr>
+          <p:cNvPr id="17" name="Text 15"/>
+          <p:cNvSpPr/>
+          <p:nvPr/>
+        </p:nvSpPr>
+        <p:spPr>
+          <a:xfrm>
+            <a:off x="4572000" y="4343400"/>
+            <a:ext cx="2743200" cy="201168"/>
+          </a:xfrm>
+          <a:prstGeom prst="rect">
+            <a:avLst/>
+          </a:prstGeom>
+          <a:noFill/>
+          <a:ln/>
+        </p:spPr>
+        <p:txBody>
+          <a:bodyPr wrap="square" lIns="0" tIns="0" rIns="0" bIns="0" rtlCol="0" anchor="ctr"/>
+          <a:lstStyle/>
+          <a:p>
+            <a:pPr indent="0" marL="0">
+              <a:buNone/>
+            </a:pPr>
+            <a:r>
+              <a:rPr lang="en-US" sz="1100" dirty="0">
+                <a:solidFill>
+                  <a:srgbClr val="9E9890"/>
+                </a:solidFill>
+                <a:latin typeface="Aptos" pitchFamily="34" charset="0"/>
+                <a:ea typeface="Aptos" pitchFamily="34" charset="-122"/>
+                <a:cs typeface="Aptos" pitchFamily="34" charset="-120"/>
+              </a:rPr>
+              <a:t>Docker + cloud-first AI</a:t>
+            </a:r>
+            <a:endParaRPr lang="en-US" sz="1100" dirty="0"/>
+          </a:p>
+        </p:txBody>
+      </p:sp>
+      <p:sp>
+        <p:nvSpPr>
+          <p:cNvPr id="18" name="Shape 16"/>
+          <p:cNvSpPr/>
+          <p:nvPr/>
+        </p:nvSpPr>
+        <p:spPr>
+          <a:xfrm>
+            <a:off x="4572000" y="4572000"/>
+            <a:ext cx="2743200" cy="1005840"/>
+          </a:xfrm>
+          <a:prstGeom prst="roundRect">
+            <a:avLst>
+              <a:gd name="adj" fmla="val 4545"/>
+            </a:avLst>
+          </a:prstGeom>
+          <a:solidFill>
+            <a:srgbClr val="FCFBF9"/>
+          </a:solidFill>
+          <a:ln w="12700">
+            <a:solidFill>
+              <a:srgbClr val="D8D0C7"/>
+            </a:solidFill>
+            <a:prstDash val="solid"/>
+          </a:ln>
+        </p:spPr>
+      </p:sp>
+      <p:sp>
+        <p:nvSpPr>
+          <p:cNvPr id="19" name="Text 17"/>
+          <p:cNvSpPr/>
+          <p:nvPr/>
+        </p:nvSpPr>
+        <p:spPr>
+          <a:xfrm>
+            <a:off x="8641080" y="1901952"/>
+            <a:ext cx="2743200" cy="256032"/>
+          </a:xfrm>
+          <a:prstGeom prst="rect">
+            <a:avLst/>
+          </a:prstGeom>
+          <a:noFill/>
+          <a:ln/>
+        </p:spPr>
+        <p:txBody>
+          <a:bodyPr wrap="square" lIns="0" tIns="0" rIns="0" bIns="0" rtlCol="0" anchor="ctr"/>
+          <a:lstStyle/>
+          <a:p>
+            <a:pPr indent="0" marL="0">
+              <a:buNone/>
+            </a:pPr>
+            <a:r>
+              <a:rPr lang="en-US" sz="1800" dirty="0" b="1">
+                <a:solidFill>
+                  <a:srgbClr val="726656"/>
+                </a:solidFill>
+                <a:latin typeface="Aptos Display" pitchFamily="34" charset="0"/>
+                <a:ea typeface="Aptos Display" pitchFamily="34" charset="-122"/>
+                <a:cs typeface="Aptos Display" pitchFamily="34" charset="-120"/>
+              </a:rPr>
+              <a:t>Observability &amp; Usability</a:t>
+            </a:r>
+            <a:endParaRPr lang="en-US" sz="1800" dirty="0"/>
+          </a:p>
+        </p:txBody>
+      </p:sp>
+      <p:sp>
+        <p:nvSpPr>
+          <p:cNvPr id="20" name="Text 18"/>
+          <p:cNvSpPr/>
+          <p:nvPr/>
+        </p:nvSpPr>
+        <p:spPr>
+          <a:xfrm>
+            <a:off x="8641080" y="2468880"/>
+            <a:ext cx="2743200" cy="1280160"/>
+          </a:xfrm>
+          <a:prstGeom prst="rect">
+            <a:avLst/>
+          </a:prstGeom>
+          <a:noFill/>
+          <a:ln/>
+        </p:spPr>
+        <p:txBody>
+          <a:bodyPr wrap="square" lIns="254" tIns="254" rIns="254" bIns="254" rtlCol="0" anchor="ctr"/>
+          <a:lstStyle/>
+          <a:p>
+            <a:pPr indent="0" marL="0">
+              <a:buNone/>
+            </a:pPr>
+            <a:r>
+              <a:rPr lang="en-US" sz="1400" dirty="0">
+                <a:solidFill>
+                  <a:srgbClr val="4D4A45"/>
+                </a:solidFill>
+                <a:latin typeface="Aptos" pitchFamily="34" charset="0"/>
+                <a:ea typeface="Aptos" pitchFamily="34" charset="-122"/>
+                <a:cs typeface="Aptos" pitchFamily="34" charset="-120"/>
+              </a:rPr>
+              <a:t>• Timestamped log files with thread-name prefixes (extract_0..3)</a:t>
+            </a:r>
+            <a:endParaRPr lang="en-US" sz="1400" dirty="0"/>
+          </a:p>
+          <a:p>
+            <a:pPr indent="0" marL="0">
+              <a:buNone/>
+            </a:pPr>
+            <a:r>
+              <a:rPr lang="en-US" sz="1400" dirty="0">
+                <a:solidFill>
+                  <a:srgbClr val="4D4A45"/>
+                </a:solidFill>
+                <a:latin typeface="Aptos" pitchFamily="34" charset="0"/>
+                <a:ea typeface="Aptos" pitchFamily="34" charset="-122"/>
+                <a:cs typeface="Aptos" pitchFamily="34" charset="-120"/>
+              </a:rPr>
+              <a:t>• Real-time job status polling via /api/jobs endpoint</a:t>
+            </a:r>
+            <a:endParaRPr lang="en-US" sz="1400" dirty="0"/>
+          </a:p>
+          <a:p>
+            <a:pPr indent="0" marL="0">
+              <a:buNone/>
+            </a:pPr>
+            <a:r>
+              <a:rPr lang="en-US" sz="1400" dirty="0">
+                <a:solidFill>
+                  <a:srgbClr val="4D4A45"/>
+                </a:solidFill>
+                <a:latin typeface="Aptos" pitchFamily="34" charset="0"/>
+                <a:ea typeface="Aptos" pitchFamily="34" charset="-122"/>
+                <a:cs typeface="Aptos" pitchFamily="34" charset="-120"/>
+              </a:rPr>
+              <a:t>• Role-based dashboard views (Admin vs. Reviewer)</a:t>
+            </a:r>
+            <a:endParaRPr lang="en-US" sz="1400" dirty="0"/>
+          </a:p>
+          <a:p>
+            <a:pPr indent="0" marL="0">
+              <a:buNone/>
+            </a:pPr>
+            <a:r>
+              <a:rPr lang="en-US" sz="1400" dirty="0">
+                <a:solidFill>
+                  <a:srgbClr val="4D4A45"/>
+                </a:solidFill>
+                <a:latin typeface="Aptos" pitchFamily="34" charset="0"/>
+                <a:ea typeface="Aptos" pitchFamily="34" charset="-122"/>
+                <a:cs typeface="Aptos" pitchFamily="34" charset="-120"/>
+              </a:rPr>
+              <a:t>• Force password change on first login (blocks all routes)</a:t>
+            </a:r>
+            <a:endParaRPr lang="en-US" sz="1400" dirty="0"/>
+          </a:p>
+        </p:txBody>
+      </p:sp>
+      <p:sp>
+        <p:nvSpPr>
+          <p:cNvPr id="21" name="Text 19"/>
+          <p:cNvSpPr/>
+          <p:nvPr/>
+        </p:nvSpPr>
+        <p:spPr>
+          <a:xfrm>
+            <a:off x="8641080" y="4343400"/>
+            <a:ext cx="2743200" cy="201168"/>
+          </a:xfrm>
+          <a:prstGeom prst="rect">
+            <a:avLst/>
+          </a:prstGeom>
+          <a:noFill/>
+          <a:ln/>
+        </p:spPr>
+        <p:txBody>
+          <a:bodyPr wrap="square" lIns="0" tIns="0" rIns="0" bIns="0" rtlCol="0" anchor="ctr"/>
+          <a:lstStyle/>
+          <a:p>
+            <a:pPr indent="0" marL="0">
+              <a:buNone/>
+            </a:pPr>
+            <a:r>
+              <a:rPr lang="en-US" sz="1100" dirty="0">
+                <a:solidFill>
+                  <a:srgbClr val="9E9890"/>
+                </a:solidFill>
+                <a:latin typeface="Aptos" pitchFamily="34" charset="0"/>
+                <a:ea typeface="Aptos" pitchFamily="34" charset="-122"/>
+                <a:cs typeface="Aptos" pitchFamily="34" charset="-120"/>
+              </a:rPr>
+              <a:t>Structured logs + RBAC</a:t>
+            </a:r>
+            <a:endParaRPr lang="en-US" sz="1100" dirty="0"/>
+          </a:p>
+        </p:txBody>
+      </p:sp>
+      <p:sp>
+        <p:nvSpPr>
+          <p:cNvPr id="22" name="Shape 20"/>
+          <p:cNvSpPr/>
+          <p:nvPr/>
+        </p:nvSpPr>
+        <p:spPr>
+          <a:xfrm>
+            <a:off x="8641080" y="4572000"/>
+            <a:ext cx="2743200" cy="1005840"/>
+          </a:xfrm>
+          <a:prstGeom prst="roundRect">
+            <a:avLst>
+              <a:gd name="adj" fmla="val 4545"/>
+            </a:avLst>
+          </a:prstGeom>
+          <a:solidFill>
+            <a:srgbClr val="FCFBF9"/>
+          </a:solidFill>
+          <a:ln w="12700">
+            <a:solidFill>
+              <a:srgbClr val="D8D0C7"/>
+            </a:solidFill>
+            <a:prstDash val="solid"/>
+          </a:ln>
+        </p:spPr>
+      </p:sp>
+      <p:sp>
+        <p:nvSpPr>
+          <p:cNvPr id="25" name="Slide Number Placeholder 0"/>
+          <p:cNvSpPr>
+            <a:spLocks noGrp="1"/>
+          </p:cNvSpPr>
+          <p:nvPr>
+            <p:ph type="sldNum" sz="quarter" idx="4294967295"/>
+          </p:nvPr>
+        </p:nvSpPr>
+        <p:spPr>
+          <a:xfrm>
+            <a:off x="11631168" y="6419088"/>
+            <a:ext cx="201168" cy="182880"/>
+          </a:xfrm>
+          <a:prstGeom prst="rect">
+            <a:avLst/>
+          </a:prstGeom>
+          <a:extLst>
+            <a:ext uri="{C572A759-6A51-4108-AA02-DFA0A04FC94B}">
+              <ma14:wrappingTextBoxFlag xmlns:ma14="http://schemas.microsoft.com/office/mac/drawingml/2011/main" val="0"/>
+            </a:ext>
+          </a:extLst>
+        </p:spPr>
+        <p:txBody>
+          <a:bodyPr/>
+          <a:lstStyle>
+            <a:lvl1pPr>
+              <a:defRPr sz="900">
+                <a:solidFill>
+                  <a:srgbClr val="7A746C"/>
+                </a:solidFill>
+                <a:latin typeface="Aptos"/>
+                <a:ea typeface="Aptos"/>
+                <a:cs typeface="Aptos"/>
+              </a:defRPr>
+            </a:lvl1pPr>
+          </a:lstStyle>
+          <a:p>
+            <a:pPr algn="r"/>
+            <a:fld id="{F7021451-1387-4CA6-816F-3879F97B5CBC}" type="slidenum">
+              <a:rPr b="0" lang="en-US"/>
+              <a:t>6</a:t>
+            </a:fld>
+            <a:endParaRPr lang="en-US"/>
+          </a:p>
+        </p:txBody>
+      </p:sp>
+    </p:spTree>
+  </p:cSld>
+  <p:clrMapOvr>
+    <a:masterClrMapping/>
+  </p:clrMapOvr>
+</p:sld>
+</file>
+
+<file path=ppt/slides/slide11.xml><?xml version="1.0" encoding="utf-8"?>
+<p:sld xmlns:a="http://schemas.openxmlformats.org/drawingml/2006/main" xmlns:p="http://schemas.openxmlformats.org/presentationml/2006/main" xmlns:r="http://schemas.openxmlformats.org/officeDocument/2006/relationships">
+  <p:cSld>
+    <p:spTree>
+      <p:nvGrpSpPr>
+        <p:cNvPr id="1" name=""/>
+        <p:cNvGrpSpPr/>
+        <p:nvPr/>
+      </p:nvGrpSpPr>
+      <p:grpSpPr>
+        <a:xfrm>
+          <a:off x="0" y="0"/>
+          <a:ext cx="0" cy="0"/>
+          <a:chOff x="0" y="0"/>
+          <a:chExt cx="0" cy="0"/>
+        </a:xfrm>
+      </p:grpSpPr>
+      <p:sp>
+        <p:nvSpPr>
+          <p:cNvPr id="2" name="Shape 0"/>
+          <p:cNvSpPr/>
+          <p:nvPr/>
+        </p:nvSpPr>
+        <p:spPr>
+          <a:xfrm>
+            <a:off x="502920" y="347472"/>
+            <a:ext cx="914400" cy="73152"/>
+          </a:xfrm>
+          <a:prstGeom prst="rect">
+            <a:avLst/>
+          </a:prstGeom>
+          <a:solidFill>
+            <a:srgbClr val="E97886"/>
+          </a:solidFill>
+          <a:ln w="12700">
+            <a:solidFill>
+              <a:srgbClr val="E97886">
+                <a:alpha val="0"/>
+              </a:srgbClr>
+            </a:solidFill>
+            <a:prstDash val="solid"/>
+          </a:ln>
+        </p:spPr>
+      </p:sp>
+      <p:sp>
+        <p:nvSpPr>
+          <p:cNvPr id="3" name="Shape 1"/>
+          <p:cNvSpPr/>
+          <p:nvPr/>
+        </p:nvSpPr>
+        <p:spPr>
+          <a:xfrm>
+            <a:off x="1481328" y="347472"/>
+            <a:ext cx="1325880" cy="73152"/>
+          </a:xfrm>
+          <a:prstGeom prst="rect">
+            <a:avLst/>
+          </a:prstGeom>
+          <a:solidFill>
+            <a:srgbClr val="E8D0D0"/>
+          </a:solidFill>
+          <a:ln w="12700">
+            <a:solidFill>
+              <a:srgbClr val="E8D0D0">
+                <a:alpha val="0"/>
+              </a:srgbClr>
+            </a:solidFill>
+            <a:prstDash val="solid"/>
+          </a:ln>
+        </p:spPr>
+      </p:sp>
+      <p:sp>
+        <p:nvSpPr>
+          <p:cNvPr id="4" name="Shape 2"/>
+          <p:cNvSpPr/>
+          <p:nvPr/>
+        </p:nvSpPr>
+        <p:spPr>
+          <a:xfrm>
+            <a:off x="2816352" y="347472"/>
+            <a:ext cx="1554480" cy="73152"/>
+          </a:xfrm>
+          <a:prstGeom prst="rect">
+            <a:avLst/>
+          </a:prstGeom>
+          <a:solidFill>
+            <a:srgbClr val="D65F63"/>
+          </a:solidFill>
+          <a:ln w="12700">
+            <a:solidFill>
+              <a:srgbClr val="D65F63">
+                <a:alpha val="0"/>
+              </a:srgbClr>
+            </a:solidFill>
+            <a:prstDash val="solid"/>
+          </a:ln>
+        </p:spPr>
+      </p:sp>
+      <p:sp>
+        <p:nvSpPr>
+          <p:cNvPr id="5" name="Shape 3"/>
+          <p:cNvSpPr/>
+          <p:nvPr/>
+        </p:nvSpPr>
+        <p:spPr>
+          <a:xfrm>
+            <a:off x="4379976" y="347472"/>
+            <a:ext cx="1097280" cy="73152"/>
+          </a:xfrm>
+          <a:prstGeom prst="rect">
+            <a:avLst/>
+          </a:prstGeom>
+          <a:solidFill>
+            <a:srgbClr val="C74642"/>
+          </a:solidFill>
+          <a:ln w="12700">
+            <a:solidFill>
+              <a:srgbClr val="C74642">
+                <a:alpha val="0"/>
+              </a:srgbClr>
+            </a:solidFill>
+            <a:prstDash val="solid"/>
+          </a:ln>
+        </p:spPr>
+      </p:sp>
+      <p:sp>
+        <p:nvSpPr>
+          <p:cNvPr id="6" name="Text 4"/>
+          <p:cNvSpPr/>
+          <p:nvPr/>
+        </p:nvSpPr>
+        <p:spPr>
+          <a:xfrm>
+            <a:off x="749808" y="731520"/>
+            <a:ext cx="7223760" cy="411480"/>
+          </a:xfrm>
+          <a:prstGeom prst="rect">
+            <a:avLst/>
+          </a:prstGeom>
+          <a:noFill/>
+          <a:ln/>
+        </p:spPr>
+        <p:txBody>
+          <a:bodyPr wrap="square" lIns="0" tIns="0" rIns="0" bIns="0" rtlCol="0" anchor="ctr"/>
+          <a:lstStyle/>
+          <a:p>
+            <a:pPr indent="0" marL="0">
+              <a:buNone/>
+            </a:pPr>
+            <a:r>
+              <a:rPr lang="en-US" sz="2600" dirty="0" b="1">
+                <a:solidFill>
+                  <a:srgbClr val="17306F"/>
+                </a:solidFill>
+                <a:latin typeface="Aptos Display" pitchFamily="34" charset="0"/>
+                <a:ea typeface="Aptos Display" pitchFamily="34" charset="-122"/>
+                <a:cs typeface="Aptos Display" pitchFamily="34" charset="-120"/>
+              </a:rPr>
+              <a:t>Methodology &amp; Solution</a:t>
+            </a:r>
+            <a:endParaRPr lang="en-US" sz="2600" dirty="0"/>
+          </a:p>
+        </p:txBody>
+      </p:sp>
+      <p:sp>
+        <p:nvSpPr>
+          <p:cNvPr id="7" name="Text 5"/>
+          <p:cNvSpPr/>
+          <p:nvPr/>
+        </p:nvSpPr>
+        <p:spPr>
+          <a:xfrm>
+            <a:off x="768096" y="1143000"/>
+            <a:ext cx="6766560" cy="274320"/>
+          </a:xfrm>
+          <a:prstGeom prst="rect">
+            <a:avLst/>
+          </a:prstGeom>
+          <a:noFill/>
+          <a:ln/>
+        </p:spPr>
+        <p:txBody>
+          <a:bodyPr wrap="square" lIns="0" tIns="0" rIns="0" bIns="0" rtlCol="0" anchor="ctr"/>
+          <a:lstStyle/>
+          <a:p>
+            <a:pPr indent="0" marL="0">
+              <a:buNone/>
+            </a:pPr>
+            <a:r>
+              <a:rPr lang="en-US" sz="1200" dirty="0">
+                <a:solidFill>
+                  <a:srgbClr val="7A746C"/>
+                </a:solidFill>
+                <a:latin typeface="Aptos" pitchFamily="34" charset="0"/>
+                <a:ea typeface="Aptos" pitchFamily="34" charset="-122"/>
+                <a:cs typeface="Aptos" pitchFamily="34" charset="-120"/>
+              </a:rPr>
+              <a:t>How we built it and what we delivered</a:t>
+            </a:r>
+            <a:endParaRPr lang="en-US" sz="1200" dirty="0"/>
+          </a:p>
+        </p:txBody>
+      </p:sp>
+      <p:sp>
+        <p:nvSpPr>
+          <p:cNvPr id="8" name="Shape 6"/>
+          <p:cNvSpPr/>
+          <p:nvPr/>
+        </p:nvSpPr>
+        <p:spPr>
+          <a:xfrm>
+            <a:off x="749808" y="1490472"/>
+            <a:ext cx="10698480" cy="0"/>
+          </a:xfrm>
+          <a:prstGeom prst="line">
+            <a:avLst/>
+          </a:prstGeom>
+          <a:noFill/>
+          <a:ln w="12700">
+            <a:solidFill>
+              <a:srgbClr val="D8D0C7"/>
+            </a:solidFill>
+            <a:prstDash val="solid"/>
+          </a:ln>
+        </p:spPr>
+      </p:sp>
+      <p:sp>
+        <p:nvSpPr>
+          <p:cNvPr id="9" name="Shape 7"/>
+          <p:cNvSpPr/>
+          <p:nvPr/>
+        </p:nvSpPr>
+        <p:spPr>
+          <a:xfrm>
+            <a:off x="868680" y="1783080"/>
+            <a:ext cx="1051560" cy="292608"/>
+          </a:xfrm>
+          <a:prstGeom prst="roundRect">
+            <a:avLst>
+              <a:gd name="adj" fmla="val 25000"/>
+            </a:avLst>
+          </a:prstGeom>
+          <a:solidFill>
+            <a:srgbClr val="C74642"/>
+          </a:solidFill>
+          <a:ln w="12700">
+            <a:solidFill>
+              <a:srgbClr val="C74642">
+                <a:alpha val="0"/>
+              </a:srgbClr>
+            </a:solidFill>
+            <a:prstDash val="solid"/>
+          </a:ln>
+        </p:spPr>
+      </p:sp>
+      <p:sp>
+        <p:nvSpPr>
+          <p:cNvPr id="10" name="Text 8"/>
+          <p:cNvSpPr/>
+          <p:nvPr/>
+        </p:nvSpPr>
+        <p:spPr>
+          <a:xfrm>
+            <a:off x="868680" y="1828800"/>
+            <a:ext cx="1051560" cy="182880"/>
+          </a:xfrm>
+          <a:prstGeom prst="rect">
+            <a:avLst/>
+          </a:prstGeom>
+          <a:noFill/>
+          <a:ln/>
+        </p:spPr>
+        <p:txBody>
+          <a:bodyPr wrap="square" lIns="0" tIns="0" rIns="0" bIns="0" rtlCol="0" anchor="ctr"/>
+          <a:lstStyle/>
+          <a:p>
+            <a:pPr indent="0" marL="0">
+              <a:buNone/>
+            </a:pPr>
+            <a:r>
+              <a:rPr lang="en-US" sz="1100" dirty="0" b="1">
+                <a:solidFill>
+                  <a:srgbClr val="FFFFFF"/>
+                </a:solidFill>
+                <a:latin typeface="Aptos" pitchFamily="34" charset="0"/>
+                <a:ea typeface="Aptos" pitchFamily="34" charset="-122"/>
+                <a:cs typeface="Aptos" pitchFamily="34" charset="-120"/>
+              </a:rPr>
+              <a:t>METHODOLOGY</a:t>
+            </a:r>
+            <a:endParaRPr lang="en-US" sz="1100" dirty="0"/>
+          </a:p>
+        </p:txBody>
+      </p:sp>
+      <p:sp>
+        <p:nvSpPr>
+          <p:cNvPr id="11" name="Shape 9"/>
+          <p:cNvSpPr/>
+          <p:nvPr/>
+        </p:nvSpPr>
+        <p:spPr>
+          <a:xfrm>
+            <a:off x="868680" y="2148840"/>
+            <a:ext cx="4754880" cy="3474720"/>
+          </a:xfrm>
+          <a:prstGeom prst="roundRect">
+            <a:avLst>
+              <a:gd name="adj" fmla="val 2105"/>
+            </a:avLst>
+          </a:prstGeom>
+          <a:solidFill>
+            <a:srgbClr val="FCFBF9"/>
+          </a:solidFill>
+          <a:ln w="12700">
+            <a:solidFill>
+              <a:srgbClr val="D8D0C7"/>
+            </a:solidFill>
+            <a:prstDash val="solid"/>
+          </a:ln>
+          <a:effectLst>
+            <a:outerShdw sx="100000" sy="100000" kx="0" ky="0" algn="bl" rotWithShape="0" blurRad="19050" dist="6350" dir="2700000">
+              <a:srgbClr val="000000">
+                <a:alpha val="12000"/>
+              </a:srgbClr>
+            </a:outerShdw>
+          </a:effectLst>
+        </p:spPr>
+      </p:sp>
+      <p:sp>
+        <p:nvSpPr>
+          <p:cNvPr id="12" name="Text 10"/>
+          <p:cNvSpPr/>
+          <p:nvPr/>
+        </p:nvSpPr>
+        <p:spPr>
+          <a:xfrm>
+            <a:off x="1069848" y="2313432"/>
+            <a:ext cx="4352544" cy="256032"/>
+          </a:xfrm>
+          <a:prstGeom prst="rect">
+            <a:avLst/>
+          </a:prstGeom>
+          <a:noFill/>
+          <a:ln/>
+        </p:spPr>
+        <p:txBody>
+          <a:bodyPr wrap="square" lIns="0" tIns="0" rIns="0" bIns="0" rtlCol="0" anchor="ctr"/>
+          <a:lstStyle/>
+          <a:p>
+            <a:pPr indent="0" marL="0">
+              <a:buNone/>
+            </a:pPr>
+            <a:r>
+              <a:rPr lang="en-US" sz="1800" dirty="0" b="1">
+                <a:solidFill>
+                  <a:srgbClr val="726656"/>
+                </a:solidFill>
+                <a:latin typeface="Aptos Display" pitchFamily="34" charset="0"/>
+                <a:ea typeface="Aptos Display" pitchFamily="34" charset="-122"/>
+                <a:cs typeface="Aptos Display" pitchFamily="34" charset="-120"/>
+              </a:rPr>
+              <a:t>Development Approach</a:t>
+            </a:r>
+            <a:endParaRPr lang="en-US" sz="1800" dirty="0"/>
+          </a:p>
+        </p:txBody>
+      </p:sp>
+      <p:sp>
+        <p:nvSpPr>
+          <p:cNvPr id="13" name="Text 11"/>
+          <p:cNvSpPr/>
+          <p:nvPr/>
+        </p:nvSpPr>
+        <p:spPr>
+          <a:xfrm>
+            <a:off x="1088136" y="2697480"/>
+            <a:ext cx="4315968" cy="2761488"/>
+          </a:xfrm>
+          <a:prstGeom prst="rect">
+            <a:avLst/>
+          </a:prstGeom>
+          <a:noFill/>
+          <a:ln/>
+        </p:spPr>
+        <p:txBody>
+          <a:bodyPr wrap="square" lIns="254" tIns="254" rIns="254" bIns="254" rtlCol="0" anchor="t"/>
+          <a:lstStyle/>
+          <a:p>
+            <a:pPr indent="0" marL="0">
+              <a:buNone/>
+            </a:pPr>
+            <a:r>
+              <a:rPr lang="en-US" sz="1400" dirty="0">
+                <a:solidFill>
+                  <a:srgbClr val="4D4A45"/>
+                </a:solidFill>
+                <a:latin typeface="Aptos" pitchFamily="34" charset="0"/>
+                <a:ea typeface="Aptos" pitchFamily="34" charset="-122"/>
+                <a:cs typeface="Aptos" pitchFamily="34" charset="-120"/>
+              </a:rPr>
+              <a:t>• Agile-influenced iterative delivery</a:t>
+            </a:r>
+            <a:endParaRPr lang="en-US" sz="1400" dirty="0"/>
+          </a:p>
+          <a:p>
+            <a:pPr indent="0" marL="0">
+              <a:buNone/>
+            </a:pPr>
+            <a:r>
+              <a:rPr lang="en-US" sz="1400" dirty="0">
+                <a:solidFill>
+                  <a:srgbClr val="4D4A45"/>
+                </a:solidFill>
+                <a:latin typeface="Aptos" pitchFamily="34" charset="0"/>
+                <a:ea typeface="Aptos" pitchFamily="34" charset="-122"/>
+                <a:cs typeface="Aptos" pitchFamily="34" charset="-120"/>
+              </a:rPr>
+              <a:t>• Feature spec + implementation plan before any coding</a:t>
+            </a:r>
+            <a:endParaRPr lang="en-US" sz="1400" dirty="0"/>
+          </a:p>
+          <a:p>
+            <a:pPr indent="0" marL="0">
+              <a:buNone/>
+            </a:pPr>
+            <a:r>
+              <a:rPr lang="en-US" sz="1400" dirty="0">
+                <a:solidFill>
+                  <a:srgbClr val="4D4A45"/>
+                </a:solidFill>
+                <a:latin typeface="Aptos" pitchFamily="34" charset="0"/>
+                <a:ea typeface="Aptos" pitchFamily="34" charset="-122"/>
+                <a:cs typeface="Aptos" pitchFamily="34" charset="-120"/>
+              </a:rPr>
+              <a:t>• Weekly standups via Google Meet</a:t>
+            </a:r>
+            <a:endParaRPr lang="en-US" sz="1400" dirty="0"/>
+          </a:p>
+          <a:p>
+            <a:pPr indent="0" marL="0">
+              <a:buNone/>
+            </a:pPr>
+            <a:r>
+              <a:rPr lang="en-US" sz="1400" dirty="0">
+                <a:solidFill>
+                  <a:srgbClr val="4D4A45"/>
+                </a:solidFill>
+                <a:latin typeface="Aptos" pitchFamily="34" charset="0"/>
+                <a:ea typeface="Aptos" pitchFamily="34" charset="-122"/>
+                <a:cs typeface="Aptos" pitchFamily="34" charset="-120"/>
+              </a:rPr>
+              <a:t>• Branch-per-developer workflow on GitHub</a:t>
+            </a:r>
+            <a:endParaRPr lang="en-US" sz="1400" dirty="0"/>
+          </a:p>
+          <a:p>
+            <a:pPr indent="0" marL="0">
+              <a:buNone/>
+            </a:pPr>
+            <a:r>
+              <a:rPr lang="en-US" sz="1400" dirty="0">
+                <a:solidFill>
+                  <a:srgbClr val="4D4A45"/>
+                </a:solidFill>
+                <a:latin typeface="Aptos" pitchFamily="34" charset="0"/>
+                <a:ea typeface="Aptos" pitchFamily="34" charset="-122"/>
+                <a:cs typeface="Aptos" pitchFamily="34" charset="-120"/>
+              </a:rPr>
+              <a:t>• OWASP ZAP security scan at each major feature</a:t>
+            </a:r>
+            <a:endParaRPr lang="en-US" sz="1400" dirty="0"/>
+          </a:p>
+        </p:txBody>
+      </p:sp>
+      <p:sp>
+        <p:nvSpPr>
+          <p:cNvPr id="14" name="Shape 12"/>
+          <p:cNvSpPr/>
+          <p:nvPr/>
+        </p:nvSpPr>
+        <p:spPr>
+          <a:xfrm>
+            <a:off x="5989320" y="1783080"/>
+            <a:ext cx="1051560" cy="292608"/>
+          </a:xfrm>
+          <a:prstGeom prst="roundRect">
+            <a:avLst>
+              <a:gd name="adj" fmla="val 25000"/>
+            </a:avLst>
+          </a:prstGeom>
+          <a:solidFill>
+            <a:srgbClr val="6BC5C5"/>
+          </a:solidFill>
+          <a:ln w="12700">
+            <a:solidFill>
+              <a:srgbClr val="6BC5C5">
+                <a:alpha val="0"/>
+              </a:srgbClr>
+            </a:solidFill>
+            <a:prstDash val="solid"/>
+          </a:ln>
+        </p:spPr>
+      </p:sp>
+      <p:sp>
+        <p:nvSpPr>
+          <p:cNvPr id="15" name="Text 13"/>
+          <p:cNvSpPr/>
+          <p:nvPr/>
+        </p:nvSpPr>
+        <p:spPr>
+          <a:xfrm>
+            <a:off x="5989320" y="1828800"/>
+            <a:ext cx="1051560" cy="182880"/>
+          </a:xfrm>
+          <a:prstGeom prst="rect">
+            <a:avLst/>
+          </a:prstGeom>
+          <a:noFill/>
+          <a:ln/>
+        </p:spPr>
+        <p:txBody>
+          <a:bodyPr wrap="square" lIns="0" tIns="0" rIns="0" bIns="0" rtlCol="0" anchor="ctr"/>
+          <a:lstStyle/>
+          <a:p>
+            <a:pPr indent="0" marL="0">
+              <a:buNone/>
+            </a:pPr>
+            <a:r>
+              <a:rPr lang="en-US" sz="1100" dirty="0" b="1">
+                <a:solidFill>
+                  <a:srgbClr val="FFFFFF"/>
+                </a:solidFill>
+                <a:latin typeface="Aptos" pitchFamily="34" charset="0"/>
+                <a:ea typeface="Aptos" pitchFamily="34" charset="-122"/>
+                <a:cs typeface="Aptos" pitchFamily="34" charset="-120"/>
+              </a:rPr>
+              <a:t>SOLUTION</a:t>
+            </a:r>
+            <a:endParaRPr lang="en-US" sz="1100" dirty="0"/>
+          </a:p>
+        </p:txBody>
+      </p:sp>
+      <p:sp>
+        <p:nvSpPr>
+          <p:cNvPr id="16" name="Shape 14"/>
+          <p:cNvSpPr/>
+          <p:nvPr/>
+        </p:nvSpPr>
+        <p:spPr>
+          <a:xfrm>
+            <a:off x="5989320" y="2148840"/>
+            <a:ext cx="5303520" cy="3474720"/>
+          </a:xfrm>
+          <a:prstGeom prst="roundRect">
+            <a:avLst>
+              <a:gd name="adj" fmla="val 2105"/>
+            </a:avLst>
+          </a:prstGeom>
+          <a:solidFill>
+            <a:srgbClr val="FCFBF9"/>
+          </a:solidFill>
+          <a:ln w="12700">
+            <a:solidFill>
+              <a:srgbClr val="D8D0C7"/>
+            </a:solidFill>
+            <a:prstDash val="solid"/>
+          </a:ln>
+          <a:effectLst>
+            <a:outerShdw sx="100000" sy="100000" kx="0" ky="0" algn="bl" rotWithShape="0" blurRad="19050" dist="6350" dir="2700000">
+              <a:srgbClr val="000000">
+                <a:alpha val="12000"/>
+              </a:srgbClr>
+            </a:outerShdw>
+          </a:effectLst>
+        </p:spPr>
+      </p:sp>
+      <p:sp>
+        <p:nvSpPr>
+          <p:cNvPr id="17" name="Text 15"/>
+          <p:cNvSpPr/>
+          <p:nvPr/>
+        </p:nvSpPr>
+        <p:spPr>
+          <a:xfrm>
+            <a:off x="6190488" y="2313432"/>
+            <a:ext cx="4901184" cy="256032"/>
+          </a:xfrm>
+          <a:prstGeom prst="rect">
+            <a:avLst/>
+          </a:prstGeom>
+          <a:noFill/>
+          <a:ln/>
+        </p:spPr>
+        <p:txBody>
+          <a:bodyPr wrap="square" lIns="0" tIns="0" rIns="0" bIns="0" rtlCol="0" anchor="ctr"/>
+          <a:lstStyle/>
+          <a:p>
+            <a:pPr indent="0" marL="0">
+              <a:buNone/>
+            </a:pPr>
+            <a:r>
+              <a:rPr lang="en-US" sz="1800" dirty="0" b="1">
+                <a:solidFill>
+                  <a:srgbClr val="726656"/>
+                </a:solidFill>
+                <a:latin typeface="Aptos Display" pitchFamily="34" charset="0"/>
+                <a:ea typeface="Aptos Display" pitchFamily="34" charset="-122"/>
+                <a:cs typeface="Aptos Display" pitchFamily="34" charset="-120"/>
+              </a:rPr>
+              <a:t>Tech Stack</a:t>
+            </a:r>
+            <a:endParaRPr lang="en-US" sz="1800" dirty="0"/>
+          </a:p>
+        </p:txBody>
+      </p:sp>
+      <p:sp>
+        <p:nvSpPr>
+          <p:cNvPr id="18" name="Text 16"/>
+          <p:cNvSpPr/>
+          <p:nvPr/>
+        </p:nvSpPr>
+        <p:spPr>
+          <a:xfrm>
+            <a:off x="6208776" y="2697480"/>
+            <a:ext cx="4864608" cy="2761488"/>
+          </a:xfrm>
+          <a:prstGeom prst="rect">
+            <a:avLst/>
+          </a:prstGeom>
+          <a:noFill/>
+          <a:ln/>
+        </p:spPr>
+        <p:txBody>
+          <a:bodyPr wrap="square" lIns="254" tIns="254" rIns="254" bIns="254" rtlCol="0" anchor="t"/>
+          <a:lstStyle/>
+          <a:p>
+            <a:pPr indent="0" marL="0">
+              <a:buNone/>
+            </a:pPr>
+            <a:r>
+              <a:rPr lang="en-US" sz="1400" dirty="0">
+                <a:solidFill>
+                  <a:srgbClr val="4D4A45"/>
+                </a:solidFill>
+                <a:latin typeface="Aptos" pitchFamily="34" charset="0"/>
+                <a:ea typeface="Aptos" pitchFamily="34" charset="-122"/>
+                <a:cs typeface="Aptos" pitchFamily="34" charset="-120"/>
+              </a:rPr>
+              <a:t>• FastAPI + Jinja2 web framework (Python 3.13)</a:t>
+            </a:r>
+            <a:endParaRPr lang="en-US" sz="1400" dirty="0"/>
+          </a:p>
+          <a:p>
+            <a:pPr indent="0" marL="0">
+              <a:buNone/>
+            </a:pPr>
+            <a:r>
+              <a:rPr lang="en-US" sz="1400" dirty="0">
+                <a:solidFill>
+                  <a:srgbClr val="4D4A45"/>
+                </a:solidFill>
+                <a:latin typeface="Aptos" pitchFamily="34" charset="0"/>
+                <a:ea typeface="Aptos" pitchFamily="34" charset="-122"/>
+                <a:cs typeface="Aptos" pitchFamily="34" charset="-120"/>
+              </a:rPr>
+              <a:t>• Playwright browser automation + BeautifulSoup4</a:t>
+            </a:r>
+            <a:endParaRPr lang="en-US" sz="1400" dirty="0"/>
+          </a:p>
+          <a:p>
+            <a:pPr indent="0" marL="0">
+              <a:buNone/>
+            </a:pPr>
+            <a:r>
+              <a:rPr lang="en-US" sz="1400" dirty="0">
+                <a:solidFill>
+                  <a:srgbClr val="4D4A45"/>
+                </a:solidFill>
+                <a:latin typeface="Aptos" pitchFamily="34" charset="0"/>
+                <a:ea typeface="Aptos" pitchFamily="34" charset="-122"/>
+                <a:cs typeface="Aptos" pitchFamily="34" charset="-120"/>
+              </a:rPr>
+              <a:t>• MongoDB 7 document store</a:t>
+            </a:r>
+            <a:endParaRPr lang="en-US" sz="1400" dirty="0"/>
+          </a:p>
+          <a:p>
+            <a:pPr indent="0" marL="0">
+              <a:buNone/>
+            </a:pPr>
+            <a:r>
+              <a:rPr lang="en-US" sz="1400" dirty="0">
+                <a:solidFill>
+                  <a:srgbClr val="4D4A45"/>
+                </a:solidFill>
+                <a:latin typeface="Aptos" pitchFamily="34" charset="0"/>
+                <a:ea typeface="Aptos" pitchFamily="34" charset="-122"/>
+                <a:cs typeface="Aptos" pitchFamily="34" charset="-120"/>
+              </a:rPr>
+              <a:t>• Groq API, NVIDIA NIM, Ollama LLM providers</a:t>
+            </a:r>
+            <a:endParaRPr lang="en-US" sz="1400" dirty="0"/>
+          </a:p>
+          <a:p>
+            <a:pPr indent="0" marL="0">
+              <a:buNone/>
+            </a:pPr>
+            <a:r>
+              <a:rPr lang="en-US" sz="1400" dirty="0">
+                <a:solidFill>
+                  <a:srgbClr val="4D4A45"/>
+                </a:solidFill>
+                <a:latin typeface="Aptos" pitchFamily="34" charset="0"/>
+                <a:ea typeface="Aptos" pitchFamily="34" charset="-122"/>
+                <a:cs typeface="Aptos" pitchFamily="34" charset="-120"/>
+              </a:rPr>
+              <a:t>• Docker Compose full-stack containerization</a:t>
+            </a:r>
+            <a:endParaRPr lang="en-US" sz="1400" dirty="0"/>
+          </a:p>
+          <a:p>
+            <a:pPr indent="0" marL="0">
+              <a:buNone/>
+            </a:pPr>
+            <a:r>
+              <a:rPr lang="en-US" sz="1400" dirty="0">
+                <a:solidFill>
+                  <a:srgbClr val="4D4A45"/>
+                </a:solidFill>
+                <a:latin typeface="Aptos" pitchFamily="34" charset="0"/>
+                <a:ea typeface="Aptos" pitchFamily="34" charset="-122"/>
+                <a:cs typeface="Aptos" pitchFamily="34" charset="-120"/>
+              </a:rPr>
+              <a:t>• bcrypt · OWASP ZAP · GitHub</a:t>
+            </a:r>
+            <a:endParaRPr lang="en-US" sz="1400" dirty="0"/>
+          </a:p>
+        </p:txBody>
+      </p:sp>
+      <p:sp>
+        <p:nvSpPr>
+          <p:cNvPr id="25" name="Slide Number Placeholder 0"/>
+          <p:cNvSpPr>
+            <a:spLocks noGrp="1"/>
+          </p:cNvSpPr>
+          <p:nvPr>
+            <p:ph type="sldNum" sz="quarter" idx="4294967295"/>
+          </p:nvPr>
+        </p:nvSpPr>
+        <p:spPr>
+          <a:xfrm>
+            <a:off x="11631168" y="6419088"/>
+            <a:ext cx="201168" cy="182880"/>
+          </a:xfrm>
+          <a:prstGeom prst="rect">
+            <a:avLst/>
+          </a:prstGeom>
+          <a:extLst>
+            <a:ext uri="{C572A759-6A51-4108-AA02-DFA0A04FC94B}">
+              <ma14:wrappingTextBoxFlag xmlns:ma14="http://schemas.microsoft.com/office/mac/drawingml/2011/main" val="0"/>
+            </a:ext>
+          </a:extLst>
+        </p:spPr>
+        <p:txBody>
+          <a:bodyPr/>
+          <a:lstStyle>
+            <a:lvl1pPr>
+              <a:defRPr sz="900">
+                <a:solidFill>
+                  <a:srgbClr val="7A746C"/>
+                </a:solidFill>
+                <a:latin typeface="Aptos"/>
+                <a:ea typeface="Aptos"/>
+                <a:cs typeface="Aptos"/>
+              </a:defRPr>
+            </a:lvl1pPr>
+          </a:lstStyle>
+          <a:p>
+            <a:pPr algn="r"/>
+            <a:fld id="{F7021451-1387-4CA6-816F-3879F97B5CBC}" type="slidenum">
+              <a:rPr b="0" lang="en-US"/>
+              <a:t>3</a:t>
             </a:fld>
             <a:endParaRPr lang="en-US"/>
           </a:p>
@@ -2569,7 +4279,7 @@
               <a:buNone/>
             </a:pPr>
             <a:r>
-              <a:rPr lang="en-US" sz="2600" b="1" dirty="0">
+              <a:rPr lang="en-US" sz="2600" dirty="0" b="1">
                 <a:solidFill>
                   <a:srgbClr val="17306F"/>
                 </a:solidFill>
@@ -2577,7 +4287,7 @@
                 <a:ea typeface="Aptos Display" pitchFamily="34" charset="-122"/>
                 <a:cs typeface="Aptos Display" pitchFamily="34" charset="-120"/>
               </a:rPr>
-              <a:t>Presentation Roadmap</a:t>
+              <a:t>Agenda</a:t>
             </a:r>
             <a:endParaRPr lang="en-US" sz="2600" dirty="0"/>
           </a:p>
@@ -2616,7 +4326,7 @@
                 <a:ea typeface="Aptos" pitchFamily="34" charset="-122"/>
                 <a:cs typeface="Aptos" pitchFamily="34" charset="-120"/>
               </a:rPr>
-              <a:t>Use, rename, or remove sections as needed</a:t>
+              <a:t>~25 minutes including live demo and Q&amp;A — all members present</a:t>
             </a:r>
             <a:endParaRPr lang="en-US" sz="1200" dirty="0"/>
           </a:p>
@@ -2695,11 +4405,11 @@
           <a:bodyPr wrap="square" lIns="0" tIns="0" rIns="0" bIns="0" rtlCol="0" anchor="ctr"/>
           <a:lstStyle/>
           <a:p>
-            <a:pPr algn="ctr" indent="0" marL="0">
-              <a:buNone/>
-            </a:pPr>
-            <a:r>
-              <a:rPr lang="en-US" sz="1400" b="1" dirty="0">
+            <a:pPr indent="0" marL="0">
+              <a:buNone/>
+            </a:pPr>
+            <a:r>
+              <a:rPr lang="en-US" sz="1400" dirty="0" b="1">
                 <a:solidFill>
                   <a:srgbClr val="FFFFFF"/>
                 </a:solidFill>
@@ -2738,7 +4448,7 @@
               <a:buNone/>
             </a:pPr>
             <a:r>
-              <a:rPr lang="en-US" sz="2200" dirty="0">
+              <a:rPr lang="en-US" sz="1400" dirty="0" b="1">
                 <a:solidFill>
                   <a:srgbClr val="17306F"/>
                 </a:solidFill>
@@ -2746,9 +4456,9 @@
                 <a:ea typeface="Aptos Display" pitchFamily="34" charset="-122"/>
                 <a:cs typeface="Aptos Display" pitchFamily="34" charset="-120"/>
               </a:rPr>
-              <a:t>Problem / context</a:t>
-            </a:r>
-            <a:endParaRPr lang="en-US" sz="2200" dirty="0"/>
+              <a:t>Project Description</a:t>
+            </a:r>
+            <a:endParaRPr lang="en-US" sz="1400" dirty="0"/>
           </a:p>
         </p:txBody>
       </p:sp>
@@ -2777,7 +4487,7 @@
               <a:buNone/>
             </a:pPr>
             <a:r>
-              <a:rPr lang="en-US" sz="1300" i="1" dirty="0">
+              <a:rPr lang="en-US" sz="1200" dirty="0">
                 <a:solidFill>
                   <a:srgbClr val="7A746C"/>
                 </a:solidFill>
@@ -2785,9 +4495,9 @@
                 <a:ea typeface="Aptos" pitchFamily="34" charset="-122"/>
                 <a:cs typeface="Aptos" pitchFamily="34" charset="-120"/>
               </a:rPr>
-              <a:t>Add 1–2 talking points here</a:t>
-            </a:r>
-            <a:endParaRPr lang="en-US" sz="1300" dirty="0"/>
+              <a:t>Background, problem statement, client benefit</a:t>
+            </a:r>
+            <a:endParaRPr lang="en-US" sz="1200" dirty="0"/>
           </a:p>
         </p:txBody>
       </p:sp>
@@ -2841,11 +4551,11 @@
           <a:bodyPr wrap="square" lIns="0" tIns="0" rIns="0" bIns="0" rtlCol="0" anchor="ctr"/>
           <a:lstStyle/>
           <a:p>
-            <a:pPr algn="ctr" indent="0" marL="0">
-              <a:buNone/>
-            </a:pPr>
-            <a:r>
-              <a:rPr lang="en-US" sz="1400" b="1" dirty="0">
+            <a:pPr indent="0" marL="0">
+              <a:buNone/>
+            </a:pPr>
+            <a:r>
+              <a:rPr lang="en-US" sz="1400" dirty="0" b="1">
                 <a:solidFill>
                   <a:srgbClr val="FFFFFF"/>
                 </a:solidFill>
@@ -2884,7 +4594,7 @@
               <a:buNone/>
             </a:pPr>
             <a:r>
-              <a:rPr lang="en-US" sz="2200" dirty="0">
+              <a:rPr lang="en-US" sz="1400" dirty="0" b="1">
                 <a:solidFill>
                   <a:srgbClr val="17306F"/>
                 </a:solidFill>
@@ -2892,9 +4602,9 @@
                 <a:ea typeface="Aptos Display" pitchFamily="34" charset="-122"/>
                 <a:cs typeface="Aptos Display" pitchFamily="34" charset="-120"/>
               </a:rPr>
-              <a:t>Objectives and scope</a:t>
-            </a:r>
-            <a:endParaRPr lang="en-US" sz="2200" dirty="0"/>
+              <a:t>Stakeholders</a:t>
+            </a:r>
+            <a:endParaRPr lang="en-US" sz="1400" dirty="0"/>
           </a:p>
         </p:txBody>
       </p:sp>
@@ -2923,7 +4633,7 @@
               <a:buNone/>
             </a:pPr>
             <a:r>
-              <a:rPr lang="en-US" sz="1300" i="1" dirty="0">
+              <a:rPr lang="en-US" sz="1200" dirty="0">
                 <a:solidFill>
                   <a:srgbClr val="7A746C"/>
                 </a:solidFill>
@@ -2931,9 +4641,9 @@
                 <a:ea typeface="Aptos" pitchFamily="34" charset="-122"/>
                 <a:cs typeface="Aptos" pitchFamily="34" charset="-120"/>
               </a:rPr>
-              <a:t>Add 1–2 talking points here</a:t>
-            </a:r>
-            <a:endParaRPr lang="en-US" sz="1300" dirty="0"/>
+              <a:t>Who is impacted and how</a:t>
+            </a:r>
+            <a:endParaRPr lang="en-US" sz="1200" dirty="0"/>
           </a:p>
         </p:txBody>
       </p:sp>
@@ -2987,11 +4697,11 @@
           <a:bodyPr wrap="square" lIns="0" tIns="0" rIns="0" bIns="0" rtlCol="0" anchor="ctr"/>
           <a:lstStyle/>
           <a:p>
-            <a:pPr algn="ctr" indent="0" marL="0">
-              <a:buNone/>
-            </a:pPr>
-            <a:r>
-              <a:rPr lang="en-US" sz="1400" b="1" dirty="0">
+            <a:pPr indent="0" marL="0">
+              <a:buNone/>
+            </a:pPr>
+            <a:r>
+              <a:rPr lang="en-US" sz="1400" dirty="0" b="1">
                 <a:solidFill>
                   <a:srgbClr val="FFFFFF"/>
                 </a:solidFill>
@@ -3030,7 +4740,7 @@
               <a:buNone/>
             </a:pPr>
             <a:r>
-              <a:rPr lang="en-US" sz="2200" dirty="0">
+              <a:rPr lang="en-US" sz="1400" dirty="0" b="1">
                 <a:solidFill>
                   <a:srgbClr val="17306F"/>
                 </a:solidFill>
@@ -3038,9 +4748,9 @@
                 <a:ea typeface="Aptos Display" pitchFamily="34" charset="-122"/>
                 <a:cs typeface="Aptos Display" pitchFamily="34" charset="-120"/>
               </a:rPr>
-              <a:t>System design or workflow</a:t>
-            </a:r>
-            <a:endParaRPr lang="en-US" sz="2200" dirty="0"/>
+              <a:t>System Architecture</a:t>
+            </a:r>
+            <a:endParaRPr lang="en-US" sz="1400" dirty="0"/>
           </a:p>
         </p:txBody>
       </p:sp>
@@ -3069,7 +4779,7 @@
               <a:buNone/>
             </a:pPr>
             <a:r>
-              <a:rPr lang="en-US" sz="1300" i="1" dirty="0">
+              <a:rPr lang="en-US" sz="1200" dirty="0">
                 <a:solidFill>
                   <a:srgbClr val="7A746C"/>
                 </a:solidFill>
@@ -3077,9 +4787,9 @@
                 <a:ea typeface="Aptos" pitchFamily="34" charset="-122"/>
                 <a:cs typeface="Aptos" pitchFamily="34" charset="-120"/>
               </a:rPr>
-              <a:t>Add 1–2 talking points here</a:t>
-            </a:r>
-            <a:endParaRPr lang="en-US" sz="1300" dirty="0"/>
+              <a:t>End-to-end pipeline overview</a:t>
+            </a:r>
+            <a:endParaRPr lang="en-US" sz="1200" dirty="0"/>
           </a:p>
         </p:txBody>
       </p:sp>
@@ -3133,11 +4843,11 @@
           <a:bodyPr wrap="square" lIns="0" tIns="0" rIns="0" bIns="0" rtlCol="0" anchor="ctr"/>
           <a:lstStyle/>
           <a:p>
-            <a:pPr algn="ctr" indent="0" marL="0">
-              <a:buNone/>
-            </a:pPr>
-            <a:r>
-              <a:rPr lang="en-US" sz="1400" b="1" dirty="0">
+            <a:pPr indent="0" marL="0">
+              <a:buNone/>
+            </a:pPr>
+            <a:r>
+              <a:rPr lang="en-US" sz="1400" dirty="0" b="1">
                 <a:solidFill>
                   <a:srgbClr val="FFFFFF"/>
                 </a:solidFill>
@@ -3176,7 +4886,7 @@
               <a:buNone/>
             </a:pPr>
             <a:r>
-              <a:rPr lang="en-US" sz="2200" dirty="0">
+              <a:rPr lang="en-US" sz="1400" dirty="0" b="1">
                 <a:solidFill>
                   <a:srgbClr val="17306F"/>
                 </a:solidFill>
@@ -3184,9 +4894,9 @@
                 <a:ea typeface="Aptos Display" pitchFamily="34" charset="-122"/>
                 <a:cs typeface="Aptos Display" pitchFamily="34" charset="-120"/>
               </a:rPr>
-              <a:t>Implementation approach</a:t>
-            </a:r>
-            <a:endParaRPr lang="en-US" sz="2200" dirty="0"/>
+              <a:t>Requirements</a:t>
+            </a:r>
+            <a:endParaRPr lang="en-US" sz="1400" dirty="0"/>
           </a:p>
         </p:txBody>
       </p:sp>
@@ -3215,7 +4925,7 @@
               <a:buNone/>
             </a:pPr>
             <a:r>
-              <a:rPr lang="en-US" sz="1300" i="1" dirty="0">
+              <a:rPr lang="en-US" sz="1200" dirty="0">
                 <a:solidFill>
                   <a:srgbClr val="7A746C"/>
                 </a:solidFill>
@@ -3223,9 +4933,9 @@
                 <a:ea typeface="Aptos" pitchFamily="34" charset="-122"/>
                 <a:cs typeface="Aptos" pitchFamily="34" charset="-120"/>
               </a:rPr>
-              <a:t>Add 1–2 talking points here</a:t>
-            </a:r>
-            <a:endParaRPr lang="en-US" sz="1300" dirty="0"/>
+              <a:t>Functional and non-functional</a:t>
+            </a:r>
+            <a:endParaRPr lang="en-US" sz="1200" dirty="0"/>
           </a:p>
         </p:txBody>
       </p:sp>
@@ -3279,11 +4989,11 @@
           <a:bodyPr wrap="square" lIns="0" tIns="0" rIns="0" bIns="0" rtlCol="0" anchor="ctr"/>
           <a:lstStyle/>
           <a:p>
-            <a:pPr algn="ctr" indent="0" marL="0">
-              <a:buNone/>
-            </a:pPr>
-            <a:r>
-              <a:rPr lang="en-US" sz="1400" b="1" dirty="0">
+            <a:pPr indent="0" marL="0">
+              <a:buNone/>
+            </a:pPr>
+            <a:r>
+              <a:rPr lang="en-US" sz="1400" dirty="0" b="1">
                 <a:solidFill>
                   <a:srgbClr val="FFFFFF"/>
                 </a:solidFill>
@@ -3322,7 +5032,7 @@
               <a:buNone/>
             </a:pPr>
             <a:r>
-              <a:rPr lang="en-US" sz="2200" dirty="0">
+              <a:rPr lang="en-US" sz="1400" dirty="0" b="1">
                 <a:solidFill>
                   <a:srgbClr val="17306F"/>
                 </a:solidFill>
@@ -3330,9 +5040,9 @@
                 <a:ea typeface="Aptos Display" pitchFamily="34" charset="-122"/>
                 <a:cs typeface="Aptos Display" pitchFamily="34" charset="-120"/>
               </a:rPr>
-              <a:t>Results / evaluation</a:t>
-            </a:r>
-            <a:endParaRPr lang="en-US" sz="2200" dirty="0"/>
+              <a:t>Methodology &amp; Solution</a:t>
+            </a:r>
+            <a:endParaRPr lang="en-US" sz="1400" dirty="0"/>
           </a:p>
         </p:txBody>
       </p:sp>
@@ -3361,7 +5071,7 @@
               <a:buNone/>
             </a:pPr>
             <a:r>
-              <a:rPr lang="en-US" sz="1300" i="1" dirty="0">
+              <a:rPr lang="en-US" sz="1200" dirty="0">
                 <a:solidFill>
                   <a:srgbClr val="7A746C"/>
                 </a:solidFill>
@@ -3369,9 +5079,9 @@
                 <a:ea typeface="Aptos" pitchFamily="34" charset="-122"/>
                 <a:cs typeface="Aptos" pitchFamily="34" charset="-120"/>
               </a:rPr>
-              <a:t>Add 1–2 talking points here</a:t>
-            </a:r>
-            <a:endParaRPr lang="en-US" sz="1300" dirty="0"/>
+              <a:t>How we built it and tech stack</a:t>
+            </a:r>
+            <a:endParaRPr lang="en-US" sz="1200" dirty="0"/>
           </a:p>
         </p:txBody>
       </p:sp>
@@ -3425,11 +5135,11 @@
           <a:bodyPr wrap="square" lIns="0" tIns="0" rIns="0" bIns="0" rtlCol="0" anchor="ctr"/>
           <a:lstStyle/>
           <a:p>
-            <a:pPr algn="ctr" indent="0" marL="0">
-              <a:buNone/>
-            </a:pPr>
-            <a:r>
-              <a:rPr lang="en-US" sz="1400" b="1" dirty="0">
+            <a:pPr indent="0" marL="0">
+              <a:buNone/>
+            </a:pPr>
+            <a:r>
+              <a:rPr lang="en-US" sz="1400" dirty="0" b="1">
                 <a:solidFill>
                   <a:srgbClr val="FFFFFF"/>
                 </a:solidFill>
@@ -3468,7 +5178,7 @@
               <a:buNone/>
             </a:pPr>
             <a:r>
-              <a:rPr lang="en-US" sz="2200" dirty="0">
+              <a:rPr lang="en-US" sz="1400" dirty="0" b="1">
                 <a:solidFill>
                   <a:srgbClr val="17306F"/>
                 </a:solidFill>
@@ -3476,9 +5186,9 @@
                 <a:ea typeface="Aptos Display" pitchFamily="34" charset="-122"/>
                 <a:cs typeface="Aptos Display" pitchFamily="34" charset="-120"/>
               </a:rPr>
-              <a:t>Lessons learned / next steps</a:t>
-            </a:r>
-            <a:endParaRPr lang="en-US" sz="2200" dirty="0"/>
+              <a:t>Testing &amp; Live Demo</a:t>
+            </a:r>
+            <a:endParaRPr lang="en-US" sz="1400" dirty="0"/>
           </a:p>
         </p:txBody>
       </p:sp>
@@ -3507,7 +5217,7 @@
               <a:buNone/>
             </a:pPr>
             <a:r>
-              <a:rPr lang="en-US" sz="1300" i="1" dirty="0">
+              <a:rPr lang="en-US" sz="1200" dirty="0">
                 <a:solidFill>
                   <a:srgbClr val="7A746C"/>
                 </a:solidFill>
@@ -3515,9 +5225,9 @@
                 <a:ea typeface="Aptos" pitchFamily="34" charset="-122"/>
                 <a:cs typeface="Aptos" pitchFamily="34" charset="-120"/>
               </a:rPr>
-              <a:t>Add 1–2 talking points here</a:t>
-            </a:r>
-            <a:endParaRPr lang="en-US" sz="1300" dirty="0"/>
+              <a:t>407+ tests, OWASP ZAP, live demonstration</a:t>
+            </a:r>
+            <a:endParaRPr lang="en-US" sz="1200" dirty="0"/>
           </a:p>
         </p:txBody>
       </p:sp>
@@ -3727,7 +5437,7 @@
               <a:buNone/>
             </a:pPr>
             <a:r>
-              <a:rPr lang="en-US" sz="2600" b="1" dirty="0">
+              <a:rPr lang="en-US" sz="2600" dirty="0" b="1">
                 <a:solidFill>
                   <a:srgbClr val="17306F"/>
                 </a:solidFill>
@@ -3735,7 +5445,7 @@
                 <a:ea typeface="Aptos Display" pitchFamily="34" charset="-122"/>
                 <a:cs typeface="Aptos Display" pitchFamily="34" charset="-120"/>
               </a:rPr>
-              <a:t>Problem / Context</a:t>
+              <a:t>Project Description</a:t>
             </a:r>
             <a:endParaRPr lang="en-US" sz="2600" dirty="0"/>
           </a:p>
@@ -3774,7 +5484,7 @@
                 <a:ea typeface="Aptos" pitchFamily="34" charset="-122"/>
                 <a:cs typeface="Aptos" pitchFamily="34" charset="-120"/>
               </a:rPr>
-              <a:t>A flexible layout for your project motivation and audience setup</a:t>
+              <a:t>The regulatory gap Fivos Health needed bridged</a:t>
             </a:r>
             <a:endParaRPr lang="en-US" sz="1200" dirty="0"/>
           </a:p>
@@ -3853,11 +5563,11 @@
           <a:bodyPr wrap="square" lIns="0" tIns="0" rIns="0" bIns="0" rtlCol="0" anchor="ctr"/>
           <a:lstStyle/>
           <a:p>
-            <a:pPr algn="ctr" indent="0" marL="0">
-              <a:buNone/>
-            </a:pPr>
-            <a:r>
-              <a:rPr lang="en-US" sz="1100" b="1" dirty="0">
+            <a:pPr indent="0" marL="0">
+              <a:buNone/>
+            </a:pPr>
+            <a:r>
+              <a:rPr lang="en-US" sz="1100" dirty="0" b="1">
                 <a:solidFill>
                   <a:srgbClr val="FFFFFF"/>
                 </a:solidFill>
@@ -3865,7 +5575,7 @@
                 <a:ea typeface="Aptos" pitchFamily="34" charset="-122"/>
                 <a:cs typeface="Aptos" pitchFamily="34" charset="-120"/>
               </a:rPr>
-              <a:t>OPTION A</a:t>
+              <a:t>CHALLENGE</a:t>
             </a:r>
             <a:endParaRPr lang="en-US" sz="1100" dirty="0"/>
           </a:p>
@@ -3930,7 +5640,7 @@
               <a:buNone/>
             </a:pPr>
             <a:r>
-              <a:rPr lang="en-US" sz="1800" b="1" dirty="0">
+              <a:rPr lang="en-US" sz="1800" dirty="0" b="1">
                 <a:solidFill>
                   <a:srgbClr val="726656"/>
                 </a:solidFill>
@@ -3938,7 +5648,7 @@
                 <a:ea typeface="Aptos Display" pitchFamily="34" charset="-122"/>
                 <a:cs typeface="Aptos Display" pitchFamily="34" charset="-120"/>
               </a:rPr>
-              <a:t>Context summary</a:t>
+              <a:t>The Problem</a:t>
             </a:r>
             <a:endParaRPr lang="en-US" sz="1800" dirty="0"/>
           </a:p>
@@ -3969,7 +5679,7 @@
               <a:buNone/>
             </a:pPr>
             <a:r>
-              <a:rPr lang="en-US" sz="1500" dirty="0">
+              <a:rPr lang="en-US" sz="1400" dirty="0">
                 <a:solidFill>
                   <a:srgbClr val="4D4A45"/>
                 </a:solidFill>
@@ -3977,16 +5687,16 @@
                 <a:ea typeface="Aptos" pitchFamily="34" charset="-122"/>
                 <a:cs typeface="Aptos" pitchFamily="34" charset="-120"/>
               </a:rPr>
-              <a:t>• What challenge existed before the project?</a:t>
-            </a:r>
-            <a:endParaRPr lang="en-US" sz="1500" dirty="0"/>
-          </a:p>
-          <a:p>
-            <a:pPr indent="0" marL="0">
-              <a:buNone/>
-            </a:pPr>
-            <a:r>
-              <a:rPr lang="en-US" sz="1500" dirty="0">
+              <a:t>• FDA GUDID is the source of truth for 2M+ medical device records</a:t>
+            </a:r>
+            <a:endParaRPr lang="en-US" sz="1400" dirty="0"/>
+          </a:p>
+          <a:p>
+            <a:pPr indent="0" marL="0">
+              <a:buNone/>
+            </a:pPr>
+            <a:r>
+              <a:rPr lang="en-US" sz="1400" dirty="0">
                 <a:solidFill>
                   <a:srgbClr val="4D4A45"/>
                 </a:solidFill>
@@ -3994,16 +5704,16 @@
                 <a:ea typeface="Aptos" pitchFamily="34" charset="-122"/>
                 <a:cs typeface="Aptos" pitchFamily="34" charset="-120"/>
               </a:rPr>
-              <a:t>• Who experiences the problem?</a:t>
-            </a:r>
-            <a:endParaRPr lang="en-US" sz="1500" dirty="0"/>
-          </a:p>
-          <a:p>
-            <a:pPr indent="0" marL="0">
-              <a:buNone/>
-            </a:pPr>
-            <a:r>
-              <a:rPr lang="en-US" sz="1500" dirty="0">
+              <a:t>• Manufacturer websites frequently diverge from GUDID entries</a:t>
+            </a:r>
+            <a:endParaRPr lang="en-US" sz="1400" dirty="0"/>
+          </a:p>
+          <a:p>
+            <a:pPr indent="0" marL="0">
+              <a:buNone/>
+            </a:pPr>
+            <a:r>
+              <a:rPr lang="en-US" sz="1400" dirty="0">
                 <a:solidFill>
                   <a:srgbClr val="4D4A45"/>
                 </a:solidFill>
@@ -4011,16 +5721,16 @@
                 <a:ea typeface="Aptos" pitchFamily="34" charset="-122"/>
                 <a:cs typeface="Aptos" pitchFamily="34" charset="-120"/>
               </a:rPr>
-              <a:t>• Why does it matter now?</a:t>
-            </a:r>
-            <a:endParaRPr lang="en-US" sz="1500" dirty="0"/>
-          </a:p>
-          <a:p>
-            <a:pPr indent="0" marL="0">
-              <a:buNone/>
-            </a:pPr>
-            <a:r>
-              <a:rPr lang="en-US" sz="1500" dirty="0">
+              <a:t>• Discrepancies range from mismatched model numbers to wrong dimensions</a:t>
+            </a:r>
+            <a:endParaRPr lang="en-US" sz="1400" dirty="0"/>
+          </a:p>
+          <a:p>
+            <a:pPr indent="0" marL="0">
+              <a:buNone/>
+            </a:pPr>
+            <a:r>
+              <a:rPr lang="en-US" sz="1400" dirty="0">
                 <a:solidFill>
                   <a:srgbClr val="4D4A45"/>
                 </a:solidFill>
@@ -4028,9 +5738,26 @@
                 <a:ea typeface="Aptos" pitchFamily="34" charset="-122"/>
                 <a:cs typeface="Aptos" pitchFamily="34" charset="-120"/>
               </a:rPr>
-              <a:t>• What are the consequences of inaction?</a:t>
-            </a:r>
-            <a:endParaRPr lang="en-US" sz="1500" dirty="0"/>
+              <a:t>• Inaccurate records cause patient safety risks and procurement errors</a:t>
+            </a:r>
+            <a:endParaRPr lang="en-US" sz="1400" dirty="0"/>
+          </a:p>
+          <a:p>
+            <a:pPr indent="0" marL="0">
+              <a:buNone/>
+            </a:pPr>
+            <a:r>
+              <a:rPr lang="en-US" sz="1400" dirty="0">
+                <a:solidFill>
+                  <a:srgbClr val="4D4A45"/>
+                </a:solidFill>
+                <a:latin typeface="Aptos" pitchFamily="34" charset="0"/>
+                <a:ea typeface="Aptos" pitchFamily="34" charset="-122"/>
+                <a:cs typeface="Aptos" pitchFamily="34" charset="-120"/>
+              </a:rPr>
+              <a:t>• Manual cross-referencing of thousands of SKUs is impractical at scale</a:t>
+            </a:r>
+            <a:endParaRPr lang="en-US" sz="1400" dirty="0"/>
           </a:p>
         </p:txBody>
       </p:sp>
@@ -4084,11 +5811,11 @@
           <a:bodyPr wrap="square" lIns="0" tIns="0" rIns="0" bIns="0" rtlCol="0" anchor="ctr"/>
           <a:lstStyle/>
           <a:p>
-            <a:pPr algn="ctr" indent="0" marL="0">
-              <a:buNone/>
-            </a:pPr>
-            <a:r>
-              <a:rPr lang="en-US" sz="1100" b="1" dirty="0">
+            <a:pPr indent="0" marL="0">
+              <a:buNone/>
+            </a:pPr>
+            <a:r>
+              <a:rPr lang="en-US" sz="1100" dirty="0" b="1">
                 <a:solidFill>
                   <a:srgbClr val="FFFFFF"/>
                 </a:solidFill>
@@ -4096,7 +5823,7 @@
                 <a:ea typeface="Aptos" pitchFamily="34" charset="-122"/>
                 <a:cs typeface="Aptos" pitchFamily="34" charset="-120"/>
               </a:rPr>
-              <a:t>OPTION B</a:t>
+              <a:t>SOLUTION</a:t>
             </a:r>
             <a:endParaRPr lang="en-US" sz="1100" dirty="0"/>
           </a:p>
@@ -4161,7 +5888,7 @@
               <a:buNone/>
             </a:pPr>
             <a:r>
-              <a:rPr lang="en-US" sz="1800" b="1" dirty="0">
+              <a:rPr lang="en-US" sz="1800" dirty="0" b="1">
                 <a:solidFill>
                   <a:srgbClr val="726656"/>
                 </a:solidFill>
@@ -4169,7 +5896,7 @@
                 <a:ea typeface="Aptos Display" pitchFamily="34" charset="-122"/>
                 <a:cs typeface="Aptos Display" pitchFamily="34" charset="-120"/>
               </a:rPr>
-              <a:t>Evidence / framing</a:t>
+              <a:t>Our Approach</a:t>
             </a:r>
             <a:endParaRPr lang="en-US" sz="1800" dirty="0"/>
           </a:p>
@@ -4200,7 +5927,7 @@
               <a:buNone/>
             </a:pPr>
             <a:r>
-              <a:rPr lang="en-US" sz="1500" dirty="0">
+              <a:rPr lang="en-US" sz="1400" dirty="0">
                 <a:solidFill>
                   <a:srgbClr val="4D4A45"/>
                 </a:solidFill>
@@ -4208,16 +5935,16 @@
                 <a:ea typeface="Aptos" pitchFamily="34" charset="-122"/>
                 <a:cs typeface="Aptos" pitchFamily="34" charset="-120"/>
               </a:rPr>
-              <a:t>• Add pain points, observations, or sponsor needs</a:t>
-            </a:r>
-            <a:endParaRPr lang="en-US" sz="1500" dirty="0"/>
-          </a:p>
-          <a:p>
-            <a:pPr indent="0" marL="0">
-              <a:buNone/>
-            </a:pPr>
-            <a:r>
-              <a:rPr lang="en-US" sz="1500" dirty="0">
+              <a:t>• Two autonomous agents: Harvester (scrape) + Validator (compare)</a:t>
+            </a:r>
+            <a:endParaRPr lang="en-US" sz="1400" dirty="0"/>
+          </a:p>
+          <a:p>
+            <a:pPr indent="0" marL="0">
+              <a:buNone/>
+            </a:pPr>
+            <a:r>
+              <a:rPr lang="en-US" sz="1400" dirty="0">
                 <a:solidFill>
                   <a:srgbClr val="4D4A45"/>
                 </a:solidFill>
@@ -4225,16 +5952,16 @@
                 <a:ea typeface="Aptos" pitchFamily="34" charset="-122"/>
                 <a:cs typeface="Aptos" pitchFamily="34" charset="-120"/>
               </a:rPr>
-              <a:t>• Insert a screenshot, quote, or data point if helpful</a:t>
-            </a:r>
-            <a:endParaRPr lang="en-US" sz="1500" dirty="0"/>
-          </a:p>
-          <a:p>
-            <a:pPr indent="0" marL="0">
-              <a:buNone/>
-            </a:pPr>
-            <a:r>
-              <a:rPr lang="en-US" sz="1500" dirty="0">
+              <a:t>• AI-powered extraction using a 6-model LLM fallback chain</a:t>
+            </a:r>
+            <a:endParaRPr lang="en-US" sz="1400" dirty="0"/>
+          </a:p>
+          <a:p>
+            <a:pPr indent="0" marL="0">
+              <a:buNone/>
+            </a:pPr>
+            <a:r>
+              <a:rPr lang="en-US" sz="1400" dirty="0">
                 <a:solidFill>
                   <a:srgbClr val="4D4A45"/>
                 </a:solidFill>
@@ -4242,9 +5969,43 @@
                 <a:ea typeface="Aptos" pitchFamily="34" charset="-122"/>
                 <a:cs typeface="Aptos" pitchFamily="34" charset="-120"/>
               </a:rPr>
-              <a:t>• Keep this side visual rather than text-heavy</a:t>
-            </a:r>
-            <a:endParaRPr lang="en-US" sz="1500" dirty="0"/>
+              <a:t>• Automated GUDID validation with per-field match/mismatch scoring</a:t>
+            </a:r>
+            <a:endParaRPr lang="en-US" sz="1400" dirty="0"/>
+          </a:p>
+          <a:p>
+            <a:pPr indent="0" marL="0">
+              <a:buNone/>
+            </a:pPr>
+            <a:r>
+              <a:rPr lang="en-US" sz="1400" dirty="0">
+                <a:solidFill>
+                  <a:srgbClr val="4D4A45"/>
+                </a:solidFill>
+                <a:latin typeface="Aptos" pitchFamily="34" charset="0"/>
+                <a:ea typeface="Aptos" pitchFamily="34" charset="-122"/>
+                <a:cs typeface="Aptos" pitchFamily="34" charset="-120"/>
+              </a:rPr>
+              <a:t>• FastAPI web dashboard for Human-in-the-Loop reviewer correction</a:t>
+            </a:r>
+            <a:endParaRPr lang="en-US" sz="1400" dirty="0"/>
+          </a:p>
+          <a:p>
+            <a:pPr indent="0" marL="0">
+              <a:buNone/>
+            </a:pPr>
+            <a:r>
+              <a:rPr lang="en-US" sz="1400" dirty="0">
+                <a:solidFill>
+                  <a:srgbClr val="4D4A45"/>
+                </a:solidFill>
+                <a:latin typeface="Aptos" pitchFamily="34" charset="0"/>
+                <a:ea typeface="Aptos" pitchFamily="34" charset="-122"/>
+                <a:cs typeface="Aptos" pitchFamily="34" charset="-120"/>
+              </a:rPr>
+              <a:t>• Closed loop: reviewer choices improve data quality over time</a:t>
+            </a:r>
+            <a:endParaRPr lang="en-US" sz="1400" dirty="0"/>
           </a:p>
         </p:txBody>
       </p:sp>
@@ -4454,7 +6215,7 @@
               <a:buNone/>
             </a:pPr>
             <a:r>
-              <a:rPr lang="en-US" sz="2600" b="1" dirty="0">
+              <a:rPr lang="en-US" sz="2600" dirty="0" b="1">
                 <a:solidFill>
                   <a:srgbClr val="17306F"/>
                 </a:solidFill>
@@ -4462,7 +6223,7 @@
                 <a:ea typeface="Aptos Display" pitchFamily="34" charset="-122"/>
                 <a:cs typeface="Aptos Display" pitchFamily="34" charset="-120"/>
               </a:rPr>
-              <a:t>Goals, Scope, and Success Criteria</a:t>
+              <a:t>Stakeholders</a:t>
             </a:r>
             <a:endParaRPr lang="en-US" sz="2600" dirty="0"/>
           </a:p>
@@ -4501,7 +6262,7 @@
                 <a:ea typeface="Aptos" pitchFamily="34" charset="-122"/>
                 <a:cs typeface="Aptos" pitchFamily="34" charset="-120"/>
               </a:rPr>
-              <a:t>Use this when explaining what the team set out to deliver</a:t>
+              <a:t>Who is impacted by the system and how</a:t>
             </a:r>
             <a:endParaRPr lang="en-US" sz="1200" dirty="0"/>
           </a:p>
@@ -4589,7 +6350,7 @@
               <a:buNone/>
             </a:pPr>
             <a:r>
-              <a:rPr lang="en-US" sz="1800" b="1" dirty="0">
+              <a:rPr lang="en-US" sz="1800" dirty="0" b="1">
                 <a:solidFill>
                   <a:srgbClr val="726656"/>
                 </a:solidFill>
@@ -4597,7 +6358,7 @@
                 <a:ea typeface="Aptos Display" pitchFamily="34" charset="-122"/>
                 <a:cs typeface="Aptos Display" pitchFamily="34" charset="-120"/>
               </a:rPr>
-              <a:t>Objectives</a:t>
+              <a:t>Client &amp; Reviewers</a:t>
             </a:r>
             <a:endParaRPr lang="en-US" sz="1800" dirty="0"/>
           </a:p>
@@ -4628,7 +6389,7 @@
               <a:buNone/>
             </a:pPr>
             <a:r>
-              <a:rPr lang="en-US" sz="1500" dirty="0">
+              <a:rPr lang="en-US" sz="1400" dirty="0">
                 <a:solidFill>
                   <a:srgbClr val="4D4A45"/>
                 </a:solidFill>
@@ -4636,16 +6397,16 @@
                 <a:ea typeface="Aptos" pitchFamily="34" charset="-122"/>
                 <a:cs typeface="Aptos" pitchFamily="34" charset="-120"/>
               </a:rPr>
-              <a:t>• Primary objective #1</a:t>
-            </a:r>
-            <a:endParaRPr lang="en-US" sz="1500" dirty="0"/>
-          </a:p>
-          <a:p>
-            <a:pPr indent="0" marL="0">
-              <a:buNone/>
-            </a:pPr>
-            <a:r>
-              <a:rPr lang="en-US" sz="1500" dirty="0">
+              <a:t>• Doug Greene / Fivos Health — client sponsor; receives production tool</a:t>
+            </a:r>
+            <a:endParaRPr lang="en-US" sz="1400" dirty="0"/>
+          </a:p>
+          <a:p>
+            <a:pPr indent="0" marL="0">
+              <a:buNone/>
+            </a:pPr>
+            <a:r>
+              <a:rPr lang="en-US" sz="1400" dirty="0">
                 <a:solidFill>
                   <a:srgbClr val="4D4A45"/>
                 </a:solidFill>
@@ -4653,16 +6414,16 @@
                 <a:ea typeface="Aptos" pitchFamily="34" charset="-122"/>
                 <a:cs typeface="Aptos" pitchFamily="34" charset="-120"/>
               </a:rPr>
-              <a:t>• Primary objective #2</a:t>
-            </a:r>
-            <a:endParaRPr lang="en-US" sz="1500" dirty="0"/>
-          </a:p>
-          <a:p>
-            <a:pPr indent="0" marL="0">
-              <a:buNone/>
-            </a:pPr>
-            <a:r>
-              <a:rPr lang="en-US" sz="1500" dirty="0">
+              <a:t>• Clinical Data Reviewers — use the dashboard to validate and correct records</a:t>
+            </a:r>
+            <a:endParaRPr lang="en-US" sz="1400" dirty="0"/>
+          </a:p>
+          <a:p>
+            <a:pPr indent="0" marL="0">
+              <a:buNone/>
+            </a:pPr>
+            <a:r>
+              <a:rPr lang="en-US" sz="1400" dirty="0">
                 <a:solidFill>
                   <a:srgbClr val="4D4A45"/>
                 </a:solidFill>
@@ -4670,9 +6431,9 @@
                 <a:ea typeface="Aptos" pitchFamily="34" charset="-122"/>
                 <a:cs typeface="Aptos" pitchFamily="34" charset="-120"/>
               </a:rPr>
-              <a:t>• Primary objective #3</a:t>
-            </a:r>
-            <a:endParaRPr lang="en-US" sz="1500" dirty="0"/>
+              <a:t>• FDA — maintains GUDID as the regulatory standard (indirect)</a:t>
+            </a:r>
+            <a:endParaRPr lang="en-US" sz="1400" dirty="0"/>
           </a:p>
         </p:txBody>
       </p:sp>
@@ -4735,7 +6496,7 @@
               <a:buNone/>
             </a:pPr>
             <a:r>
-              <a:rPr lang="en-US" sz="1800" b="1" dirty="0">
+              <a:rPr lang="en-US" sz="1800" dirty="0" b="1">
                 <a:solidFill>
                   <a:srgbClr val="726656"/>
                 </a:solidFill>
@@ -4743,7 +6504,7 @@
                 <a:ea typeface="Aptos Display" pitchFamily="34" charset="-122"/>
                 <a:cs typeface="Aptos Display" pitchFamily="34" charset="-120"/>
               </a:rPr>
-              <a:t>In scope</a:t>
+              <a:t>Industry &amp; Downstream</a:t>
             </a:r>
             <a:endParaRPr lang="en-US" sz="1800" dirty="0"/>
           </a:p>
@@ -4774,7 +6535,7 @@
               <a:buNone/>
             </a:pPr>
             <a:r>
-              <a:rPr lang="en-US" sz="1500" dirty="0">
+              <a:rPr lang="en-US" sz="1400" dirty="0">
                 <a:solidFill>
                   <a:srgbClr val="4D4A45"/>
                 </a:solidFill>
@@ -4782,16 +6543,16 @@
                 <a:ea typeface="Aptos" pitchFamily="34" charset="-122"/>
                 <a:cs typeface="Aptos" pitchFamily="34" charset="-120"/>
               </a:rPr>
-              <a:t>• Feature / deliverable</a:t>
-            </a:r>
-            <a:endParaRPr lang="en-US" sz="1500" dirty="0"/>
-          </a:p>
-          <a:p>
-            <a:pPr indent="0" marL="0">
-              <a:buNone/>
-            </a:pPr>
-            <a:r>
-              <a:rPr lang="en-US" sz="1500" dirty="0">
+              <a:t>• Medical Device Manufacturers — their catalog data is harvested and validated</a:t>
+            </a:r>
+            <a:endParaRPr lang="en-US" sz="1400" dirty="0"/>
+          </a:p>
+          <a:p>
+            <a:pPr indent="0" marL="0">
+              <a:buNone/>
+            </a:pPr>
+            <a:r>
+              <a:rPr lang="en-US" sz="1400" dirty="0">
                 <a:solidFill>
                   <a:srgbClr val="4D4A45"/>
                 </a:solidFill>
@@ -4799,16 +6560,16 @@
                 <a:ea typeface="Aptos" pitchFamily="34" charset="-122"/>
                 <a:cs typeface="Aptos" pitchFamily="34" charset="-120"/>
               </a:rPr>
-              <a:t>• Feature / deliverable</a:t>
-            </a:r>
-            <a:endParaRPr lang="en-US" sz="1500" dirty="0"/>
-          </a:p>
-          <a:p>
-            <a:pPr indent="0" marL="0">
-              <a:buNone/>
-            </a:pPr>
-            <a:r>
-              <a:rPr lang="en-US" sz="1500" dirty="0">
+              <a:t>• Patients — downstream beneficiaries; accurate records reduce medical errors</a:t>
+            </a:r>
+            <a:endParaRPr lang="en-US" sz="1400" dirty="0"/>
+          </a:p>
+          <a:p>
+            <a:pPr indent="0" marL="0">
+              <a:buNone/>
+            </a:pPr>
+            <a:r>
+              <a:rPr lang="en-US" sz="1400" dirty="0">
                 <a:solidFill>
                   <a:srgbClr val="4D4A45"/>
                 </a:solidFill>
@@ -4816,9 +6577,9 @@
                 <a:ea typeface="Aptos" pitchFamily="34" charset="-122"/>
                 <a:cs typeface="Aptos" pitchFamily="34" charset="-120"/>
               </a:rPr>
-              <a:t>• Feature / deliverable</a:t>
-            </a:r>
-            <a:endParaRPr lang="en-US" sz="1500" dirty="0"/>
+              <a:t>• Medical Registries — consume Fivos-validated device data</a:t>
+            </a:r>
+            <a:endParaRPr lang="en-US" sz="1400" dirty="0"/>
           </a:p>
         </p:txBody>
       </p:sp>
@@ -4881,7 +6642,7 @@
               <a:buNone/>
             </a:pPr>
             <a:r>
-              <a:rPr lang="en-US" sz="1800" b="1" dirty="0">
+              <a:rPr lang="en-US" sz="1800" dirty="0" b="1">
                 <a:solidFill>
                   <a:srgbClr val="726656"/>
                 </a:solidFill>
@@ -4889,7 +6650,7 @@
                 <a:ea typeface="Aptos Display" pitchFamily="34" charset="-122"/>
                 <a:cs typeface="Aptos Display" pitchFamily="34" charset="-120"/>
               </a:rPr>
-              <a:t>Out of scope</a:t>
+              <a:t>Development Team</a:t>
             </a:r>
             <a:endParaRPr lang="en-US" sz="1800" dirty="0"/>
           </a:p>
@@ -4920,7 +6681,7 @@
               <a:buNone/>
             </a:pPr>
             <a:r>
-              <a:rPr lang="en-US" sz="1500" dirty="0">
+              <a:rPr lang="en-US" sz="1400" dirty="0">
                 <a:solidFill>
                   <a:srgbClr val="4D4A45"/>
                 </a:solidFill>
@@ -4928,16 +6689,16 @@
                 <a:ea typeface="Aptos" pitchFamily="34" charset="-122"/>
                 <a:cs typeface="Aptos" pitchFamily="34" charset="-120"/>
               </a:rPr>
-              <a:t>• Deferred item</a:t>
-            </a:r>
-            <a:endParaRPr lang="en-US" sz="1500" dirty="0"/>
-          </a:p>
-          <a:p>
-            <a:pPr indent="0" marL="0">
-              <a:buNone/>
-            </a:pPr>
-            <a:r>
-              <a:rPr lang="en-US" sz="1500" dirty="0">
+              <a:t>• Vibe Coders — CIS 497 Senior Design team delivering the system</a:t>
+            </a:r>
+            <a:endParaRPr lang="en-US" sz="1400" dirty="0"/>
+          </a:p>
+          <a:p>
+            <a:pPr indent="0" marL="0">
+              <a:buNone/>
+            </a:pPr>
+            <a:r>
+              <a:rPr lang="en-US" sz="1400" dirty="0">
                 <a:solidFill>
                   <a:srgbClr val="4D4A45"/>
                 </a:solidFill>
@@ -4945,16 +6706,16 @@
                 <a:ea typeface="Aptos" pitchFamily="34" charset="-122"/>
                 <a:cs typeface="Aptos" pitchFamily="34" charset="-120"/>
               </a:rPr>
-              <a:t>• Constraint or limitation</a:t>
-            </a:r>
-            <a:endParaRPr lang="en-US" sz="1500" dirty="0"/>
-          </a:p>
-          <a:p>
-            <a:pPr indent="0" marL="0">
-              <a:buNone/>
-            </a:pPr>
-            <a:r>
-              <a:rPr lang="en-US" sz="1500" dirty="0">
+              <a:t>• Jonathan, Wyatt, Ryan, Jason, Ralph</a:t>
+            </a:r>
+            <a:endParaRPr lang="en-US" sz="1400" dirty="0"/>
+          </a:p>
+          <a:p>
+            <a:pPr indent="0" marL="0">
+              <a:buNone/>
+            </a:pPr>
+            <a:r>
+              <a:rPr lang="en-US" sz="1400" dirty="0">
                 <a:solidFill>
                   <a:srgbClr val="4D4A45"/>
                 </a:solidFill>
@@ -4962,9 +6723,9 @@
                 <a:ea typeface="Aptos" pitchFamily="34" charset="-122"/>
                 <a:cs typeface="Aptos" pitchFamily="34" charset="-120"/>
               </a:rPr>
-              <a:t>• Future extension</a:t>
-            </a:r>
-            <a:endParaRPr lang="en-US" sz="1500" dirty="0"/>
+              <a:t>• Gain hands-on experience with AI pipelines, security, and client delivery</a:t>
+            </a:r>
+            <a:endParaRPr lang="en-US" sz="1400" dirty="0"/>
           </a:p>
         </p:txBody>
       </p:sp>
@@ -5174,7 +6935,7 @@
               <a:buNone/>
             </a:pPr>
             <a:r>
-              <a:rPr lang="en-US" sz="2600" b="1" dirty="0">
+              <a:rPr lang="en-US" sz="2600" dirty="0" b="1">
                 <a:solidFill>
                   <a:srgbClr val="17306F"/>
                 </a:solidFill>
@@ -5182,7 +6943,7 @@
                 <a:ea typeface="Aptos Display" pitchFamily="34" charset="-122"/>
                 <a:cs typeface="Aptos Display" pitchFamily="34" charset="-120"/>
               </a:rPr>
-              <a:t>System Overview / Workflow</a:t>
+              <a:t>System Architecture</a:t>
             </a:r>
             <a:endParaRPr lang="en-US" sz="2600" dirty="0"/>
           </a:p>
@@ -5221,7 +6982,7 @@
                 <a:ea typeface="Aptos" pitchFamily="34" charset="-122"/>
                 <a:cs typeface="Aptos" pitchFamily="34" charset="-120"/>
               </a:rPr>
-              <a:t>A process-oriented slide for architecture, stages, or pipeline views</a:t>
+              <a:t>End-to-end pipeline across three phases</a:t>
             </a:r>
             <a:endParaRPr lang="en-US" sz="1200" dirty="0"/>
           </a:p>
@@ -5298,21 +7059,21 @@
           <a:bodyPr wrap="square" lIns="0" tIns="0" rIns="0" bIns="0" rtlCol="0" anchor="ctr"/>
           <a:lstStyle/>
           <a:p>
-            <a:pPr algn="ctr" indent="0" marL="0">
-              <a:buNone/>
-            </a:pPr>
-            <a:r>
-              <a:rPr lang="en-US" sz="2000" b="1" dirty="0">
-                <a:solidFill>
-                  <a:srgbClr val="E97886"/>
-                </a:solidFill>
-                <a:latin typeface="Aptos Display" pitchFamily="34" charset="0"/>
-                <a:ea typeface="Aptos Display" pitchFamily="34" charset="-122"/>
-                <a:cs typeface="Aptos Display" pitchFamily="34" charset="-120"/>
-              </a:rPr>
-              <a:t>Step 1</a:t>
-            </a:r>
-            <a:endParaRPr lang="en-US" sz="2000" dirty="0"/>
+            <a:pPr indent="0" marL="0">
+              <a:buNone/>
+            </a:pPr>
+            <a:r>
+              <a:rPr lang="en-US" sz="1400" dirty="0" b="1">
+                <a:solidFill>
+                  <a:srgbClr val="FFFFFF"/>
+                </a:solidFill>
+                <a:latin typeface="Aptos" pitchFamily="34" charset="0"/>
+                <a:ea typeface="Aptos" pitchFamily="34" charset="-122"/>
+                <a:cs typeface="Aptos" pitchFamily="34" charset="-120"/>
+              </a:rPr>
+              <a:t>Phase 1</a:t>
+            </a:r>
+            <a:endParaRPr lang="en-US" sz="1400" dirty="0"/>
           </a:p>
         </p:txBody>
       </p:sp>
@@ -5337,36 +7098,53 @@
           <a:bodyPr wrap="square" lIns="0" tIns="0" rIns="0" bIns="0" rtlCol="0" anchor="ctr"/>
           <a:lstStyle/>
           <a:p>
-            <a:pPr algn="ctr" indent="0" marL="0">
+            <a:pPr indent="0" marL="0">
               <a:buNone/>
             </a:pPr>
             <a:r>
               <a:rPr lang="en-US" sz="1400" dirty="0">
                 <a:solidFill>
-                  <a:srgbClr val="7A746C"/>
-                </a:solidFill>
-                <a:latin typeface="Aptos" pitchFamily="34" charset="0"/>
-                <a:ea typeface="Aptos" pitchFamily="34" charset="-122"/>
-                <a:cs typeface="Aptos" pitchFamily="34" charset="-120"/>
-              </a:rPr>
-              <a:t>Replace with stage</a:t>
+                  <a:srgbClr val="4D4A45"/>
+                </a:solidFill>
+                <a:latin typeface="Aptos" pitchFamily="34" charset="0"/>
+                <a:ea typeface="Aptos" pitchFamily="34" charset="-122"/>
+                <a:cs typeface="Aptos" pitchFamily="34" charset="-120"/>
+              </a:rPr>
+              <a:t>Scrape</a:t>
             </a:r>
             <a:endParaRPr lang="en-US" sz="1400" dirty="0"/>
           </a:p>
           <a:p>
-            <a:pPr algn="ctr" indent="0" marL="0">
+            <a:pPr indent="0" marL="0">
               <a:buNone/>
             </a:pPr>
             <a:r>
               <a:rPr lang="en-US" sz="1400" dirty="0">
                 <a:solidFill>
-                  <a:srgbClr val="7A746C"/>
-                </a:solidFill>
-                <a:latin typeface="Aptos" pitchFamily="34" charset="0"/>
-                <a:ea typeface="Aptos" pitchFamily="34" charset="-122"/>
-                <a:cs typeface="Aptos" pitchFamily="34" charset="-120"/>
-              </a:rPr>
-              <a:t>name</a:t>
+                  <a:srgbClr val="4D4A45"/>
+                </a:solidFill>
+                <a:latin typeface="Aptos" pitchFamily="34" charset="0"/>
+                <a:ea typeface="Aptos" pitchFamily="34" charset="-122"/>
+                <a:cs typeface="Aptos" pitchFamily="34" charset="-120"/>
+              </a:rPr>
+              <a:t>Playwright + asyncio</a:t>
+            </a:r>
+            <a:endParaRPr lang="en-US" sz="1400" dirty="0"/>
+          </a:p>
+          <a:p>
+            <a:pPr indent="0" marL="0">
+              <a:buNone/>
+            </a:pPr>
+            <a:r>
+              <a:rPr lang="en-US" sz="1400" dirty="0">
+                <a:solidFill>
+                  <a:srgbClr val="4D4A45"/>
+                </a:solidFill>
+                <a:latin typeface="Aptos" pitchFamily="34" charset="0"/>
+                <a:ea typeface="Aptos" pitchFamily="34" charset="-122"/>
+                <a:cs typeface="Aptos" pitchFamily="34" charset="-120"/>
+              </a:rPr>
+              <a:t>(max 3 concurrent)</a:t>
             </a:r>
             <a:endParaRPr lang="en-US" sz="1400" dirty="0"/>
           </a:p>
@@ -5420,21 +7198,21 @@
           <a:bodyPr wrap="square" lIns="0" tIns="0" rIns="0" bIns="0" rtlCol="0" anchor="ctr"/>
           <a:lstStyle/>
           <a:p>
-            <a:pPr algn="ctr" indent="0" marL="0">
-              <a:buNone/>
-            </a:pPr>
-            <a:r>
-              <a:rPr lang="en-US" sz="2000" b="1" dirty="0">
-                <a:solidFill>
-                  <a:srgbClr val="6BC5C5"/>
-                </a:solidFill>
-                <a:latin typeface="Aptos Display" pitchFamily="34" charset="0"/>
-                <a:ea typeface="Aptos Display" pitchFamily="34" charset="-122"/>
-                <a:cs typeface="Aptos Display" pitchFamily="34" charset="-120"/>
-              </a:rPr>
-              <a:t>Step 2</a:t>
-            </a:r>
-            <a:endParaRPr lang="en-US" sz="2000" dirty="0"/>
+            <a:pPr indent="0" marL="0">
+              <a:buNone/>
+            </a:pPr>
+            <a:r>
+              <a:rPr lang="en-US" sz="1400" dirty="0" b="1">
+                <a:solidFill>
+                  <a:srgbClr val="FFFFFF"/>
+                </a:solidFill>
+                <a:latin typeface="Aptos" pitchFamily="34" charset="0"/>
+                <a:ea typeface="Aptos" pitchFamily="34" charset="-122"/>
+                <a:cs typeface="Aptos" pitchFamily="34" charset="-120"/>
+              </a:rPr>
+              <a:t>Phase 2</a:t>
+            </a:r>
+            <a:endParaRPr lang="en-US" sz="1400" dirty="0"/>
           </a:p>
         </p:txBody>
       </p:sp>
@@ -5459,36 +7237,53 @@
           <a:bodyPr wrap="square" lIns="0" tIns="0" rIns="0" bIns="0" rtlCol="0" anchor="ctr"/>
           <a:lstStyle/>
           <a:p>
-            <a:pPr algn="ctr" indent="0" marL="0">
+            <a:pPr indent="0" marL="0">
               <a:buNone/>
             </a:pPr>
             <a:r>
               <a:rPr lang="en-US" sz="1400" dirty="0">
                 <a:solidFill>
-                  <a:srgbClr val="7A746C"/>
-                </a:solidFill>
-                <a:latin typeface="Aptos" pitchFamily="34" charset="0"/>
-                <a:ea typeface="Aptos" pitchFamily="34" charset="-122"/>
-                <a:cs typeface="Aptos" pitchFamily="34" charset="-120"/>
-              </a:rPr>
-              <a:t>Replace with stage</a:t>
+                  <a:srgbClr val="4D4A45"/>
+                </a:solidFill>
+                <a:latin typeface="Aptos" pitchFamily="34" charset="0"/>
+                <a:ea typeface="Aptos" pitchFamily="34" charset="-122"/>
+                <a:cs typeface="Aptos" pitchFamily="34" charset="-120"/>
+              </a:rPr>
+              <a:t>Extract</a:t>
             </a:r>
             <a:endParaRPr lang="en-US" sz="1400" dirty="0"/>
           </a:p>
           <a:p>
-            <a:pPr algn="ctr" indent="0" marL="0">
+            <a:pPr indent="0" marL="0">
               <a:buNone/>
             </a:pPr>
             <a:r>
               <a:rPr lang="en-US" sz="1400" dirty="0">
                 <a:solidFill>
-                  <a:srgbClr val="7A746C"/>
-                </a:solidFill>
-                <a:latin typeface="Aptos" pitchFamily="34" charset="0"/>
-                <a:ea typeface="Aptos" pitchFamily="34" charset="-122"/>
-                <a:cs typeface="Aptos" pitchFamily="34" charset="-120"/>
-              </a:rPr>
-              <a:t>name</a:t>
+                  <a:srgbClr val="4D4A45"/>
+                </a:solidFill>
+                <a:latin typeface="Aptos" pitchFamily="34" charset="0"/>
+                <a:ea typeface="Aptos" pitchFamily="34" charset="-122"/>
+                <a:cs typeface="Aptos" pitchFamily="34" charset="-120"/>
+              </a:rPr>
+              <a:t>6-model LLM chain</a:t>
+            </a:r>
+            <a:endParaRPr lang="en-US" sz="1400" dirty="0"/>
+          </a:p>
+          <a:p>
+            <a:pPr indent="0" marL="0">
+              <a:buNone/>
+            </a:pPr>
+            <a:r>
+              <a:rPr lang="en-US" sz="1400" dirty="0">
+                <a:solidFill>
+                  <a:srgbClr val="4D4A45"/>
+                </a:solidFill>
+                <a:latin typeface="Aptos" pitchFamily="34" charset="0"/>
+                <a:ea typeface="Aptos" pitchFamily="34" charset="-122"/>
+                <a:cs typeface="Aptos" pitchFamily="34" charset="-120"/>
+              </a:rPr>
+              <a:t>4 parallel workers</a:t>
             </a:r>
             <a:endParaRPr lang="en-US" sz="1400" dirty="0"/>
           </a:p>
@@ -5542,21 +7337,21 @@
           <a:bodyPr wrap="square" lIns="0" tIns="0" rIns="0" bIns="0" rtlCol="0" anchor="ctr"/>
           <a:lstStyle/>
           <a:p>
-            <a:pPr algn="ctr" indent="0" marL="0">
-              <a:buNone/>
-            </a:pPr>
-            <a:r>
-              <a:rPr lang="en-US" sz="2000" b="1" dirty="0">
-                <a:solidFill>
-                  <a:srgbClr val="17306F"/>
-                </a:solidFill>
-                <a:latin typeface="Aptos Display" pitchFamily="34" charset="0"/>
-                <a:ea typeface="Aptos Display" pitchFamily="34" charset="-122"/>
-                <a:cs typeface="Aptos Display" pitchFamily="34" charset="-120"/>
-              </a:rPr>
-              <a:t>Step 3</a:t>
-            </a:r>
-            <a:endParaRPr lang="en-US" sz="2000" dirty="0"/>
+            <a:pPr indent="0" marL="0">
+              <a:buNone/>
+            </a:pPr>
+            <a:r>
+              <a:rPr lang="en-US" sz="1400" dirty="0" b="1">
+                <a:solidFill>
+                  <a:srgbClr val="FFFFFF"/>
+                </a:solidFill>
+                <a:latin typeface="Aptos" pitchFamily="34" charset="0"/>
+                <a:ea typeface="Aptos" pitchFamily="34" charset="-122"/>
+                <a:cs typeface="Aptos" pitchFamily="34" charset="-120"/>
+              </a:rPr>
+              <a:t>Phase 3</a:t>
+            </a:r>
+            <a:endParaRPr lang="en-US" sz="1400" dirty="0"/>
           </a:p>
         </p:txBody>
       </p:sp>
@@ -5581,36 +7376,53 @@
           <a:bodyPr wrap="square" lIns="0" tIns="0" rIns="0" bIns="0" rtlCol="0" anchor="ctr"/>
           <a:lstStyle/>
           <a:p>
-            <a:pPr algn="ctr" indent="0" marL="0">
+            <a:pPr indent="0" marL="0">
               <a:buNone/>
             </a:pPr>
             <a:r>
               <a:rPr lang="en-US" sz="1400" dirty="0">
                 <a:solidFill>
-                  <a:srgbClr val="7A746C"/>
-                </a:solidFill>
-                <a:latin typeface="Aptos" pitchFamily="34" charset="0"/>
-                <a:ea typeface="Aptos" pitchFamily="34" charset="-122"/>
-                <a:cs typeface="Aptos" pitchFamily="34" charset="-120"/>
-              </a:rPr>
-              <a:t>Replace with stage</a:t>
+                  <a:srgbClr val="4D4A45"/>
+                </a:solidFill>
+                <a:latin typeface="Aptos" pitchFamily="34" charset="0"/>
+                <a:ea typeface="Aptos" pitchFamily="34" charset="-122"/>
+                <a:cs typeface="Aptos" pitchFamily="34" charset="-120"/>
+              </a:rPr>
+              <a:t>Validate</a:t>
             </a:r>
             <a:endParaRPr lang="en-US" sz="1400" dirty="0"/>
           </a:p>
           <a:p>
-            <a:pPr algn="ctr" indent="0" marL="0">
+            <a:pPr indent="0" marL="0">
               <a:buNone/>
             </a:pPr>
             <a:r>
               <a:rPr lang="en-US" sz="1400" dirty="0">
                 <a:solidFill>
-                  <a:srgbClr val="7A746C"/>
-                </a:solidFill>
-                <a:latin typeface="Aptos" pitchFamily="34" charset="0"/>
-                <a:ea typeface="Aptos" pitchFamily="34" charset="-122"/>
-                <a:cs typeface="Aptos" pitchFamily="34" charset="-120"/>
-              </a:rPr>
-              <a:t>name</a:t>
+                  <a:srgbClr val="4D4A45"/>
+                </a:solidFill>
+                <a:latin typeface="Aptos" pitchFamily="34" charset="0"/>
+                <a:ea typeface="Aptos" pitchFamily="34" charset="-122"/>
+                <a:cs typeface="Aptos" pitchFamily="34" charset="-120"/>
+              </a:rPr>
+              <a:t>FDA GUDID API v3</a:t>
+            </a:r>
+            <a:endParaRPr lang="en-US" sz="1400" dirty="0"/>
+          </a:p>
+          <a:p>
+            <a:pPr indent="0" marL="0">
+              <a:buNone/>
+            </a:pPr>
+            <a:r>
+              <a:rPr lang="en-US" sz="1400" dirty="0">
+                <a:solidFill>
+                  <a:srgbClr val="4D4A45"/>
+                </a:solidFill>
+                <a:latin typeface="Aptos" pitchFamily="34" charset="0"/>
+                <a:ea typeface="Aptos" pitchFamily="34" charset="-122"/>
+                <a:cs typeface="Aptos" pitchFamily="34" charset="-120"/>
+              </a:rPr>
+              <a:t>per-field scoring</a:t>
             </a:r>
             <a:endParaRPr lang="en-US" sz="1400" dirty="0"/>
           </a:p>
@@ -5664,21 +7476,21 @@
           <a:bodyPr wrap="square" lIns="0" tIns="0" rIns="0" bIns="0" rtlCol="0" anchor="ctr"/>
           <a:lstStyle/>
           <a:p>
-            <a:pPr algn="ctr" indent="0" marL="0">
-              <a:buNone/>
-            </a:pPr>
-            <a:r>
-              <a:rPr lang="en-US" sz="2000" b="1" dirty="0">
-                <a:solidFill>
-                  <a:srgbClr val="C74642"/>
-                </a:solidFill>
-                <a:latin typeface="Aptos Display" pitchFamily="34" charset="0"/>
-                <a:ea typeface="Aptos Display" pitchFamily="34" charset="-122"/>
-                <a:cs typeface="Aptos Display" pitchFamily="34" charset="-120"/>
-              </a:rPr>
-              <a:t>Step 4</a:t>
-            </a:r>
-            <a:endParaRPr lang="en-US" sz="2000" dirty="0"/>
+            <a:pPr indent="0" marL="0">
+              <a:buNone/>
+            </a:pPr>
+            <a:r>
+              <a:rPr lang="en-US" sz="1400" dirty="0" b="1">
+                <a:solidFill>
+                  <a:srgbClr val="FFFFFF"/>
+                </a:solidFill>
+                <a:latin typeface="Aptos" pitchFamily="34" charset="0"/>
+                <a:ea typeface="Aptos" pitchFamily="34" charset="-122"/>
+                <a:cs typeface="Aptos" pitchFamily="34" charset="-120"/>
+              </a:rPr>
+              <a:t>Review</a:t>
+            </a:r>
+            <a:endParaRPr lang="en-US" sz="1400" dirty="0"/>
           </a:p>
         </p:txBody>
       </p:sp>
@@ -5703,36 +7515,53 @@
           <a:bodyPr wrap="square" lIns="0" tIns="0" rIns="0" bIns="0" rtlCol="0" anchor="ctr"/>
           <a:lstStyle/>
           <a:p>
-            <a:pPr algn="ctr" indent="0" marL="0">
+            <a:pPr indent="0" marL="0">
               <a:buNone/>
             </a:pPr>
             <a:r>
               <a:rPr lang="en-US" sz="1400" dirty="0">
                 <a:solidFill>
-                  <a:srgbClr val="7A746C"/>
-                </a:solidFill>
-                <a:latin typeface="Aptos" pitchFamily="34" charset="0"/>
-                <a:ea typeface="Aptos" pitchFamily="34" charset="-122"/>
-                <a:cs typeface="Aptos" pitchFamily="34" charset="-120"/>
-              </a:rPr>
-              <a:t>Replace with stage</a:t>
+                  <a:srgbClr val="4D4A45"/>
+                </a:solidFill>
+                <a:latin typeface="Aptos" pitchFamily="34" charset="0"/>
+                <a:ea typeface="Aptos" pitchFamily="34" charset="-122"/>
+                <a:cs typeface="Aptos" pitchFamily="34" charset="-120"/>
+              </a:rPr>
+              <a:t>Dashboard</a:t>
             </a:r>
             <a:endParaRPr lang="en-US" sz="1400" dirty="0"/>
           </a:p>
           <a:p>
-            <a:pPr algn="ctr" indent="0" marL="0">
+            <a:pPr indent="0" marL="0">
               <a:buNone/>
             </a:pPr>
             <a:r>
               <a:rPr lang="en-US" sz="1400" dirty="0">
                 <a:solidFill>
-                  <a:srgbClr val="7A746C"/>
-                </a:solidFill>
-                <a:latin typeface="Aptos" pitchFamily="34" charset="0"/>
-                <a:ea typeface="Aptos" pitchFamily="34" charset="-122"/>
-                <a:cs typeface="Aptos" pitchFamily="34" charset="-120"/>
-              </a:rPr>
-              <a:t>name</a:t>
+                  <a:srgbClr val="4D4A45"/>
+                </a:solidFill>
+                <a:latin typeface="Aptos" pitchFamily="34" charset="0"/>
+                <a:ea typeface="Aptos" pitchFamily="34" charset="-122"/>
+                <a:cs typeface="Aptos" pitchFamily="34" charset="-120"/>
+              </a:rPr>
+              <a:t>Human-in-the-Loop</a:t>
+            </a:r>
+            <a:endParaRPr lang="en-US" sz="1400" dirty="0"/>
+          </a:p>
+          <a:p>
+            <a:pPr indent="0" marL="0">
+              <a:buNone/>
+            </a:pPr>
+            <a:r>
+              <a:rPr lang="en-US" sz="1400" dirty="0">
+                <a:solidFill>
+                  <a:srgbClr val="4D4A45"/>
+                </a:solidFill>
+                <a:latin typeface="Aptos" pitchFamily="34" charset="0"/>
+                <a:ea typeface="Aptos" pitchFamily="34" charset="-122"/>
+                <a:cs typeface="Aptos" pitchFamily="34" charset="-120"/>
+              </a:rPr>
+              <a:t>accept / override</a:t>
             </a:r>
             <a:endParaRPr lang="en-US" sz="1400" dirty="0"/>
           </a:p>
@@ -5914,7 +7743,7 @@
               <a:buNone/>
             </a:pPr>
             <a:r>
-              <a:rPr lang="en-US" sz="1800" b="1" dirty="0">
+              <a:rPr lang="en-US" sz="1400" dirty="0" b="1">
                 <a:solidFill>
                   <a:srgbClr val="726656"/>
                 </a:solidFill>
@@ -5922,9 +7751,9 @@
                 <a:ea typeface="Aptos Display" pitchFamily="34" charset="-122"/>
                 <a:cs typeface="Aptos Display" pitchFamily="34" charset="-120"/>
               </a:rPr>
-              <a:t>How to use this slide</a:t>
-            </a:r>
-            <a:endParaRPr lang="en-US" sz="1800" dirty="0"/>
+              <a:t>Data Stores</a:t>
+            </a:r>
+            <a:endParaRPr lang="en-US" sz="1400" dirty="0"/>
           </a:p>
         </p:txBody>
       </p:sp>
@@ -5953,7 +7782,7 @@
               <a:buNone/>
             </a:pPr>
             <a:r>
-              <a:rPr lang="en-US" sz="1500" dirty="0">
+              <a:rPr lang="en-US" sz="1400" dirty="0">
                 <a:solidFill>
                   <a:srgbClr val="4D4A45"/>
                 </a:solidFill>
@@ -5961,9 +7790,9 @@
                 <a:ea typeface="Aptos" pitchFamily="34" charset="-122"/>
                 <a:cs typeface="Aptos" pitchFamily="34" charset="-120"/>
               </a:rPr>
-              <a:t>• Swap the four boxes for agents, modules, phases, or data flow stages.</a:t>
-            </a:r>
-            <a:endParaRPr lang="en-US" sz="1500" dirty="0"/>
+              <a:t>HTML → web-scraper/out_html/  |  JSON → harvester/output/  |  MongoDB: devices + validationResults + users</a:t>
+            </a:r>
+            <a:endParaRPr lang="en-US" sz="1400" dirty="0"/>
           </a:p>
         </p:txBody>
       </p:sp>
@@ -6026,7 +7855,7 @@
               <a:buNone/>
             </a:pPr>
             <a:r>
-              <a:rPr lang="en-US" sz="1800" b="1" dirty="0">
+              <a:rPr lang="en-US" sz="1400" dirty="0" b="1">
                 <a:solidFill>
                   <a:srgbClr val="726656"/>
                 </a:solidFill>
@@ -6034,9 +7863,9 @@
                 <a:ea typeface="Aptos Display" pitchFamily="34" charset="-122"/>
                 <a:cs typeface="Aptos Display" pitchFamily="34" charset="-120"/>
               </a:rPr>
-              <a:t>Suggested fill-ins</a:t>
-            </a:r>
-            <a:endParaRPr lang="en-US" sz="1800" dirty="0"/>
+              <a:t>LLM Fallback Chain</a:t>
+            </a:r>
+            <a:endParaRPr lang="en-US" sz="1400" dirty="0"/>
           </a:p>
         </p:txBody>
       </p:sp>
@@ -6065,7 +7894,7 @@
               <a:buNone/>
             </a:pPr>
             <a:r>
-              <a:rPr lang="en-US" sz="1500" dirty="0">
+              <a:rPr lang="en-US" sz="1400" dirty="0">
                 <a:solidFill>
                   <a:srgbClr val="4D4A45"/>
                 </a:solidFill>
@@ -6073,9 +7902,9 @@
                 <a:ea typeface="Aptos" pitchFamily="34" charset="-122"/>
                 <a:cs typeface="Aptos" pitchFamily="34" charset="-120"/>
               </a:rPr>
-              <a:t>• Short labels + 1 line of explanation per stage work best.</a:t>
-            </a:r>
-            <a:endParaRPr lang="en-US" sz="1500" dirty="0"/>
+              <a:t>Groq llama-3.3-70b → Groq llama-3.1-8b → NVIDIA llama-3.3-70b → NVIDIA mistral-large → NVIDIA gemma-2-27b → Ollama qwen2.5:3b (local)</a:t>
+            </a:r>
+            <a:endParaRPr lang="en-US" sz="1400" dirty="0"/>
           </a:p>
         </p:txBody>
       </p:sp>
@@ -6285,7 +8114,7 @@
               <a:buNone/>
             </a:pPr>
             <a:r>
-              <a:rPr lang="en-US" sz="2600" b="1" dirty="0">
+              <a:rPr lang="en-US" sz="2600" dirty="0" b="1">
                 <a:solidFill>
                   <a:srgbClr val="17306F"/>
                 </a:solidFill>
@@ -6293,7 +8122,7 @@
                 <a:ea typeface="Aptos Display" pitchFamily="34" charset="-122"/>
                 <a:cs typeface="Aptos Display" pitchFamily="34" charset="-120"/>
               </a:rPr>
-              <a:t>Approach / Implementation</a:t>
+              <a:t>Functional Requirements</a:t>
             </a:r>
             <a:endParaRPr lang="en-US" sz="2600" dirty="0"/>
           </a:p>
@@ -6332,7 +8161,7 @@
                 <a:ea typeface="Aptos" pitchFamily="34" charset="-122"/>
                 <a:cs typeface="Aptos" pitchFamily="34" charset="-120"/>
               </a:rPr>
-              <a:t>Use for methods, responsibilities, or design choices</a:t>
+              <a:t>Core capabilities the system must deliver</a:t>
             </a:r>
             <a:endParaRPr lang="en-US" sz="1200" dirty="0"/>
           </a:p>
@@ -6432,17 +8261,17 @@
               <a:buNone/>
             </a:pPr>
             <a:r>
-              <a:rPr lang="en-US" sz="2200" b="1" dirty="0">
-                <a:solidFill>
-                  <a:srgbClr val="C74642"/>
+              <a:rPr lang="en-US" sz="1800" dirty="0" b="1">
+                <a:solidFill>
+                  <a:srgbClr val="726656"/>
                 </a:solidFill>
                 <a:latin typeface="Aptos Display" pitchFamily="34" charset="0"/>
                 <a:ea typeface="Aptos Display" pitchFamily="34" charset="-122"/>
                 <a:cs typeface="Aptos Display" pitchFamily="34" charset="-120"/>
               </a:rPr>
-              <a:t>Workstream A</a:t>
-            </a:r>
-            <a:endParaRPr lang="en-US" sz="2200" dirty="0"/>
+              <a:t>Data Collection</a:t>
+            </a:r>
+            <a:endParaRPr lang="en-US" sz="1800" dirty="0"/>
           </a:p>
         </p:txBody>
       </p:sp>
@@ -6471,7 +8300,7 @@
               <a:buNone/>
             </a:pPr>
             <a:r>
-              <a:rPr lang="en-US" sz="1600" dirty="0">
+              <a:rPr lang="en-US" sz="1400" dirty="0">
                 <a:solidFill>
                   <a:srgbClr val="4D4A45"/>
                 </a:solidFill>
@@ -6479,16 +8308,16 @@
                 <a:ea typeface="Aptos" pitchFamily="34" charset="-122"/>
                 <a:cs typeface="Aptos" pitchFamily="34" charset="-120"/>
               </a:rPr>
-              <a:t>• Key component</a:t>
-            </a:r>
-            <a:endParaRPr lang="en-US" sz="1600" dirty="0"/>
-          </a:p>
-          <a:p>
-            <a:pPr indent="0" marL="0">
-              <a:buNone/>
-            </a:pPr>
-            <a:r>
-              <a:rPr lang="en-US" sz="1600" dirty="0">
+              <a:t>• Scrape manufacturer sites via Playwright</a:t>
+            </a:r>
+            <a:endParaRPr lang="en-US" sz="1400" dirty="0"/>
+          </a:p>
+          <a:p>
+            <a:pPr indent="0" marL="0">
+              <a:buNone/>
+            </a:pPr>
+            <a:r>
+              <a:rPr lang="en-US" sz="1400" dirty="0">
                 <a:solidFill>
                   <a:srgbClr val="4D4A45"/>
                 </a:solidFill>
@@ -6496,16 +8325,16 @@
                 <a:ea typeface="Aptos" pitchFamily="34" charset="-122"/>
                 <a:cs typeface="Aptos" pitchFamily="34" charset="-120"/>
               </a:rPr>
-              <a:t>• Core task</a:t>
-            </a:r>
-            <a:endParaRPr lang="en-US" sz="1600" dirty="0"/>
-          </a:p>
-          <a:p>
-            <a:pPr indent="0" marL="0">
-              <a:buNone/>
-            </a:pPr>
-            <a:r>
-              <a:rPr lang="en-US" sz="1600" dirty="0">
+              <a:t>• Handle dynamic JS content</a:t>
+            </a:r>
+            <a:endParaRPr lang="en-US" sz="1400" dirty="0"/>
+          </a:p>
+          <a:p>
+            <a:pPr indent="0" marL="0">
+              <a:buNone/>
+            </a:pPr>
+            <a:r>
+              <a:rPr lang="en-US" sz="1400" dirty="0">
                 <a:solidFill>
                   <a:srgbClr val="4D4A45"/>
                 </a:solidFill>
@@ -6513,9 +8342,26 @@
                 <a:ea typeface="Aptos" pitchFamily="34" charset="-122"/>
                 <a:cs typeface="Aptos" pitchFamily="34" charset="-120"/>
               </a:rPr>
-              <a:t>• Tool or method</a:t>
-            </a:r>
-            <a:endParaRPr lang="en-US" sz="1600" dirty="0"/>
+              <a:t>• Batch URL processing from .txt upload</a:t>
+            </a:r>
+            <a:endParaRPr lang="en-US" sz="1400" dirty="0"/>
+          </a:p>
+          <a:p>
+            <a:pPr indent="0" marL="0">
+              <a:buNone/>
+            </a:pPr>
+            <a:r>
+              <a:rPr lang="en-US" sz="1400" dirty="0">
+                <a:solidFill>
+                  <a:srgbClr val="4D4A45"/>
+                </a:solidFill>
+                <a:latin typeface="Aptos" pitchFamily="34" charset="0"/>
+                <a:ea typeface="Aptos" pitchFamily="34" charset="-122"/>
+                <a:cs typeface="Aptos" pitchFamily="34" charset="-120"/>
+              </a:rPr>
+              <a:t>• Store raw HTML to filesystem</a:t>
+            </a:r>
+            <a:endParaRPr lang="en-US" sz="1400" dirty="0"/>
           </a:p>
         </p:txBody>
       </p:sp>
@@ -6540,21 +8386,21 @@
           <a:bodyPr wrap="square" lIns="0" tIns="0" rIns="0" bIns="0" rtlCol="0" anchor="ctr"/>
           <a:lstStyle/>
           <a:p>
-            <a:pPr algn="ctr" indent="0" marL="0">
-              <a:buNone/>
-            </a:pPr>
-            <a:r>
-              <a:rPr lang="en-US" sz="1200" i="1" dirty="0">
-                <a:solidFill>
-                  <a:srgbClr val="7A746C"/>
-                </a:solidFill>
-                <a:latin typeface="Aptos" pitchFamily="34" charset="0"/>
-                <a:ea typeface="Aptos" pitchFamily="34" charset="-122"/>
-                <a:cs typeface="Aptos" pitchFamily="34" charset="-120"/>
-              </a:rPr>
-              <a:t>Optional visual, icon, or screenshot</a:t>
-            </a:r>
-            <a:endParaRPr lang="en-US" sz="1200" dirty="0"/>
+            <a:pPr indent="0" marL="0">
+              <a:buNone/>
+            </a:pPr>
+            <a:r>
+              <a:rPr lang="en-US" sz="1100" dirty="0">
+                <a:solidFill>
+                  <a:srgbClr val="9E9890"/>
+                </a:solidFill>
+                <a:latin typeface="Aptos" pitchFamily="34" charset="0"/>
+                <a:ea typeface="Aptos" pitchFamily="34" charset="-122"/>
+                <a:cs typeface="Aptos" pitchFamily="34" charset="-120"/>
+              </a:rPr>
+              <a:t>Harvester Agent</a:t>
+            </a:r>
+            <a:endParaRPr lang="en-US" sz="1100" dirty="0"/>
           </a:p>
         </p:txBody>
       </p:sp>
@@ -6610,17 +8456,17 @@
               <a:buNone/>
             </a:pPr>
             <a:r>
-              <a:rPr lang="en-US" sz="2200" b="1" dirty="0">
-                <a:solidFill>
-                  <a:srgbClr val="6BC5C5"/>
+              <a:rPr lang="en-US" sz="1800" dirty="0" b="1">
+                <a:solidFill>
+                  <a:srgbClr val="726656"/>
                 </a:solidFill>
                 <a:latin typeface="Aptos Display" pitchFamily="34" charset="0"/>
                 <a:ea typeface="Aptos Display" pitchFamily="34" charset="-122"/>
                 <a:cs typeface="Aptos Display" pitchFamily="34" charset="-120"/>
               </a:rPr>
-              <a:t>Workstream B</a:t>
-            </a:r>
-            <a:endParaRPr lang="en-US" sz="2200" dirty="0"/>
+              <a:t>AI Extraction</a:t>
+            </a:r>
+            <a:endParaRPr lang="en-US" sz="1800" dirty="0"/>
           </a:p>
         </p:txBody>
       </p:sp>
@@ -6649,7 +8495,7 @@
               <a:buNone/>
             </a:pPr>
             <a:r>
-              <a:rPr lang="en-US" sz="1600" dirty="0">
+              <a:rPr lang="en-US" sz="1400" dirty="0">
                 <a:solidFill>
                   <a:srgbClr val="4D4A45"/>
                 </a:solidFill>
@@ -6657,16 +8503,16 @@
                 <a:ea typeface="Aptos" pitchFamily="34" charset="-122"/>
                 <a:cs typeface="Aptos" pitchFamily="34" charset="-120"/>
               </a:rPr>
-              <a:t>• Key component</a:t>
-            </a:r>
-            <a:endParaRPr lang="en-US" sz="1600" dirty="0"/>
-          </a:p>
-          <a:p>
-            <a:pPr indent="0" marL="0">
-              <a:buNone/>
-            </a:pPr>
-            <a:r>
-              <a:rPr lang="en-US" sz="1600" dirty="0">
+              <a:t>• Two-pass LLM extraction (page-level + product rows)</a:t>
+            </a:r>
+            <a:endParaRPr lang="en-US" sz="1400" dirty="0"/>
+          </a:p>
+          <a:p>
+            <a:pPr indent="0" marL="0">
+              <a:buNone/>
+            </a:pPr>
+            <a:r>
+              <a:rPr lang="en-US" sz="1400" dirty="0">
                 <a:solidFill>
                   <a:srgbClr val="4D4A45"/>
                 </a:solidFill>
@@ -6674,16 +8520,16 @@
                 <a:ea typeface="Aptos" pitchFamily="34" charset="-122"/>
                 <a:cs typeface="Aptos" pitchFamily="34" charset="-120"/>
               </a:rPr>
-              <a:t>• Core task</a:t>
-            </a:r>
-            <a:endParaRPr lang="en-US" sz="1600" dirty="0"/>
-          </a:p>
-          <a:p>
-            <a:pPr indent="0" marL="0">
-              <a:buNone/>
-            </a:pPr>
-            <a:r>
-              <a:rPr lang="en-US" sz="1600" dirty="0">
+              <a:t>• 6-model fallback chain (Groq → NVIDIA → Ollama)</a:t>
+            </a:r>
+            <a:endParaRPr lang="en-US" sz="1400" dirty="0"/>
+          </a:p>
+          <a:p>
+            <a:pPr indent="0" marL="0">
+              <a:buNone/>
+            </a:pPr>
+            <a:r>
+              <a:rPr lang="en-US" sz="1400" dirty="0">
                 <a:solidFill>
                   <a:srgbClr val="4D4A45"/>
                 </a:solidFill>
@@ -6691,9 +8537,26 @@
                 <a:ea typeface="Aptos" pitchFamily="34" charset="-122"/>
                 <a:cs typeface="Aptos" pitchFamily="34" charset="-120"/>
               </a:rPr>
-              <a:t>• Tool or method</a:t>
-            </a:r>
-            <a:endParaRPr lang="en-US" sz="1600" dirty="0"/>
+              <a:t>• Normalize units, text, dates, booleans</a:t>
+            </a:r>
+            <a:endParaRPr lang="en-US" sz="1400" dirty="0"/>
+          </a:p>
+          <a:p>
+            <a:pPr indent="0" marL="0">
+              <a:buNone/>
+            </a:pPr>
+            <a:r>
+              <a:rPr lang="en-US" sz="1400" dirty="0">
+                <a:solidFill>
+                  <a:srgbClr val="4D4A45"/>
+                </a:solidFill>
+                <a:latin typeface="Aptos" pitchFamily="34" charset="0"/>
+                <a:ea typeface="Aptos" pitchFamily="34" charset="-122"/>
+                <a:cs typeface="Aptos" pitchFamily="34" charset="-120"/>
+              </a:rPr>
+              <a:t>• Parallel processing via ThreadPoolExecutor</a:t>
+            </a:r>
+            <a:endParaRPr lang="en-US" sz="1400" dirty="0"/>
           </a:p>
         </p:txBody>
       </p:sp>
@@ -6718,21 +8581,21 @@
           <a:bodyPr wrap="square" lIns="0" tIns="0" rIns="0" bIns="0" rtlCol="0" anchor="ctr"/>
           <a:lstStyle/>
           <a:p>
-            <a:pPr algn="ctr" indent="0" marL="0">
-              <a:buNone/>
-            </a:pPr>
-            <a:r>
-              <a:rPr lang="en-US" sz="1200" i="1" dirty="0">
-                <a:solidFill>
-                  <a:srgbClr val="7A746C"/>
-                </a:solidFill>
-                <a:latin typeface="Aptos" pitchFamily="34" charset="0"/>
-                <a:ea typeface="Aptos" pitchFamily="34" charset="-122"/>
-                <a:cs typeface="Aptos" pitchFamily="34" charset="-120"/>
-              </a:rPr>
-              <a:t>Optional visual, icon, or screenshot</a:t>
-            </a:r>
-            <a:endParaRPr lang="en-US" sz="1200" dirty="0"/>
+            <a:pPr indent="0" marL="0">
+              <a:buNone/>
+            </a:pPr>
+            <a:r>
+              <a:rPr lang="en-US" sz="1100" dirty="0">
+                <a:solidFill>
+                  <a:srgbClr val="9E9890"/>
+                </a:solidFill>
+                <a:latin typeface="Aptos" pitchFamily="34" charset="0"/>
+                <a:ea typeface="Aptos" pitchFamily="34" charset="-122"/>
+                <a:cs typeface="Aptos" pitchFamily="34" charset="-120"/>
+              </a:rPr>
+              <a:t>LLM Pipeline</a:t>
+            </a:r>
+            <a:endParaRPr lang="en-US" sz="1100" dirty="0"/>
           </a:p>
         </p:txBody>
       </p:sp>
@@ -6788,17 +8651,17 @@
               <a:buNone/>
             </a:pPr>
             <a:r>
-              <a:rPr lang="en-US" sz="2200" b="1" dirty="0">
-                <a:solidFill>
-                  <a:srgbClr val="17306F"/>
+              <a:rPr lang="en-US" sz="1800" dirty="0" b="1">
+                <a:solidFill>
+                  <a:srgbClr val="726656"/>
                 </a:solidFill>
                 <a:latin typeface="Aptos Display" pitchFamily="34" charset="0"/>
                 <a:ea typeface="Aptos Display" pitchFamily="34" charset="-122"/>
                 <a:cs typeface="Aptos Display" pitchFamily="34" charset="-120"/>
               </a:rPr>
-              <a:t>Workstream C</a:t>
-            </a:r>
-            <a:endParaRPr lang="en-US" sz="2200" dirty="0"/>
+              <a:t>Validation &amp; Review</a:t>
+            </a:r>
+            <a:endParaRPr lang="en-US" sz="1800" dirty="0"/>
           </a:p>
         </p:txBody>
       </p:sp>
@@ -6827,7 +8690,7 @@
               <a:buNone/>
             </a:pPr>
             <a:r>
-              <a:rPr lang="en-US" sz="1600" dirty="0">
+              <a:rPr lang="en-US" sz="1400" dirty="0">
                 <a:solidFill>
                   <a:srgbClr val="4D4A45"/>
                 </a:solidFill>
@@ -6835,16 +8698,16 @@
                 <a:ea typeface="Aptos" pitchFamily="34" charset="-122"/>
                 <a:cs typeface="Aptos" pitchFamily="34" charset="-120"/>
               </a:rPr>
-              <a:t>• Key component</a:t>
-            </a:r>
-            <a:endParaRPr lang="en-US" sz="1600" dirty="0"/>
-          </a:p>
-          <a:p>
-            <a:pPr indent="0" marL="0">
-              <a:buNone/>
-            </a:pPr>
-            <a:r>
-              <a:rPr lang="en-US" sz="1600" dirty="0">
+              <a:t>• Query FDA GUDID API per device identifier</a:t>
+            </a:r>
+            <a:endParaRPr lang="en-US" sz="1400" dirty="0"/>
+          </a:p>
+          <a:p>
+            <a:pPr indent="0" marL="0">
+              <a:buNone/>
+            </a:pPr>
+            <a:r>
+              <a:rPr lang="en-US" sz="1400" dirty="0">
                 <a:solidFill>
                   <a:srgbClr val="4D4A45"/>
                 </a:solidFill>
@@ -6852,16 +8715,16 @@
                 <a:ea typeface="Aptos" pitchFamily="34" charset="-122"/>
                 <a:cs typeface="Aptos" pitchFamily="34" charset="-120"/>
               </a:rPr>
-              <a:t>• Core task</a:t>
-            </a:r>
-            <a:endParaRPr lang="en-US" sz="1600" dirty="0"/>
-          </a:p>
-          <a:p>
-            <a:pPr indent="0" marL="0">
-              <a:buNone/>
-            </a:pPr>
-            <a:r>
-              <a:rPr lang="en-US" sz="1600" dirty="0">
+              <a:t>• Per-field match / mismatch / partial scoring</a:t>
+            </a:r>
+            <a:endParaRPr lang="en-US" sz="1400" dirty="0"/>
+          </a:p>
+          <a:p>
+            <a:pPr indent="0" marL="0">
+              <a:buNone/>
+            </a:pPr>
+            <a:r>
+              <a:rPr lang="en-US" sz="1400" dirty="0">
                 <a:solidFill>
                   <a:srgbClr val="4D4A45"/>
                 </a:solidFill>
@@ -6869,9 +8732,43 @@
                 <a:ea typeface="Aptos" pitchFamily="34" charset="-122"/>
                 <a:cs typeface="Aptos" pitchFamily="34" charset="-120"/>
               </a:rPr>
-              <a:t>• Tool or method</a:t>
-            </a:r>
-            <a:endParaRPr lang="en-US" sz="1600" dirty="0"/>
+              <a:t>• Discrepancy queue in review dashboard</a:t>
+            </a:r>
+            <a:endParaRPr lang="en-US" sz="1400" dirty="0"/>
+          </a:p>
+          <a:p>
+            <a:pPr indent="0" marL="0">
+              <a:buNone/>
+            </a:pPr>
+            <a:r>
+              <a:rPr lang="en-US" sz="1400" dirty="0">
+                <a:solidFill>
+                  <a:srgbClr val="4D4A45"/>
+                </a:solidFill>
+                <a:latin typeface="Aptos" pitchFamily="34" charset="0"/>
+                <a:ea typeface="Aptos" pitchFamily="34" charset="-122"/>
+                <a:cs typeface="Aptos" pitchFamily="34" charset="-120"/>
+              </a:rPr>
+              <a:t>• Human reviewer accept or override per field</a:t>
+            </a:r>
+            <a:endParaRPr lang="en-US" sz="1400" dirty="0"/>
+          </a:p>
+          <a:p>
+            <a:pPr indent="0" marL="0">
+              <a:buNone/>
+            </a:pPr>
+            <a:r>
+              <a:rPr lang="en-US" sz="1400" dirty="0">
+                <a:solidFill>
+                  <a:srgbClr val="4D4A45"/>
+                </a:solidFill>
+                <a:latin typeface="Aptos" pitchFamily="34" charset="0"/>
+                <a:ea typeface="Aptos" pitchFamily="34" charset="-122"/>
+                <a:cs typeface="Aptos" pitchFamily="34" charset="-120"/>
+              </a:rPr>
+              <a:t>• Role-based access (Admin + Reviewer)</a:t>
+            </a:r>
+            <a:endParaRPr lang="en-US" sz="1400" dirty="0"/>
           </a:p>
         </p:txBody>
       </p:sp>
@@ -6896,21 +8793,21 @@
           <a:bodyPr wrap="square" lIns="0" tIns="0" rIns="0" bIns="0" rtlCol="0" anchor="ctr"/>
           <a:lstStyle/>
           <a:p>
-            <a:pPr algn="ctr" indent="0" marL="0">
-              <a:buNone/>
-            </a:pPr>
-            <a:r>
-              <a:rPr lang="en-US" sz="1200" i="1" dirty="0">
-                <a:solidFill>
-                  <a:srgbClr val="7A746C"/>
-                </a:solidFill>
-                <a:latin typeface="Aptos" pitchFamily="34" charset="0"/>
-                <a:ea typeface="Aptos" pitchFamily="34" charset="-122"/>
-                <a:cs typeface="Aptos" pitchFamily="34" charset="-120"/>
-              </a:rPr>
-              <a:t>Optional visual, icon, or screenshot</a:t>
-            </a:r>
-            <a:endParaRPr lang="en-US" sz="1200" dirty="0"/>
+            <a:pPr indent="0" marL="0">
+              <a:buNone/>
+            </a:pPr>
+            <a:r>
+              <a:rPr lang="en-US" sz="1100" dirty="0">
+                <a:solidFill>
+                  <a:srgbClr val="9E9890"/>
+                </a:solidFill>
+                <a:latin typeface="Aptos" pitchFamily="34" charset="0"/>
+                <a:ea typeface="Aptos" pitchFamily="34" charset="-122"/>
+                <a:cs typeface="Aptos" pitchFamily="34" charset="-120"/>
+              </a:rPr>
+              <a:t>Validator Agent + HITL</a:t>
+            </a:r>
+            <a:endParaRPr lang="en-US" sz="1100" dirty="0"/>
           </a:p>
         </p:txBody>
       </p:sp>
@@ -7147,7 +9044,7 @@
               <a:buNone/>
             </a:pPr>
             <a:r>
-              <a:rPr lang="en-US" sz="2600" b="1" dirty="0">
+              <a:rPr lang="en-US" sz="2600" dirty="0" b="1">
                 <a:solidFill>
                   <a:srgbClr val="17306F"/>
                 </a:solidFill>
@@ -7155,7 +9052,7 @@
                 <a:ea typeface="Aptos Display" pitchFamily="34" charset="-122"/>
                 <a:cs typeface="Aptos Display" pitchFamily="34" charset="-120"/>
               </a:rPr>
-              <a:t>Results / Evaluation</a:t>
+              <a:t>Testing</a:t>
             </a:r>
             <a:endParaRPr lang="en-US" sz="2600" dirty="0"/>
           </a:p>
@@ -7194,7 +9091,7 @@
                 <a:ea typeface="Aptos" pitchFamily="34" charset="-122"/>
                 <a:cs typeface="Aptos" pitchFamily="34" charset="-120"/>
               </a:rPr>
-              <a:t>A template for metrics, outcomes, or comparison snapshots</a:t>
+              <a:t>Automated pytest suite + OWASP ZAP security audit</a:t>
             </a:r>
             <a:endParaRPr lang="en-US" sz="1200" dirty="0"/>
           </a:p>
@@ -7271,60 +9168,60 @@
           <a:bodyPr wrap="square" lIns="0" tIns="0" rIns="0" bIns="0" rtlCol="0" anchor="ctr"/>
           <a:lstStyle/>
           <a:p>
-            <a:pPr algn="ctr" indent="0" marL="0">
-              <a:buNone/>
-            </a:pPr>
-            <a:r>
-              <a:rPr lang="en-US" sz="1900" b="1" dirty="0">
-                <a:solidFill>
-                  <a:srgbClr val="726656"/>
+            <a:pPr indent="0" marL="0">
+              <a:buNone/>
+            </a:pPr>
+            <a:r>
+              <a:rPr lang="en-US" sz="1200" dirty="0">
+                <a:solidFill>
+                  <a:srgbClr val="7A746C"/>
+                </a:solidFill>
+                <a:latin typeface="Aptos" pitchFamily="34" charset="0"/>
+                <a:ea typeface="Aptos" pitchFamily="34" charset="-122"/>
+                <a:cs typeface="Aptos" pitchFamily="34" charset="-120"/>
+              </a:rPr>
+              <a:t>Tests</a:t>
+            </a:r>
+            <a:endParaRPr lang="en-US" sz="1200" dirty="0"/>
+          </a:p>
+        </p:txBody>
+      </p:sp>
+      <p:sp>
+        <p:nvSpPr>
+          <p:cNvPr id="11" name="Text 9"/>
+          <p:cNvSpPr/>
+          <p:nvPr/>
+        </p:nvSpPr>
+        <p:spPr>
+          <a:xfrm>
+            <a:off x="1051560" y="2395728"/>
+            <a:ext cx="2788920" cy="411480"/>
+          </a:xfrm>
+          <a:prstGeom prst="rect">
+            <a:avLst/>
+          </a:prstGeom>
+          <a:noFill/>
+          <a:ln/>
+        </p:spPr>
+        <p:txBody>
+          <a:bodyPr wrap="square" lIns="0" tIns="0" rIns="0" bIns="0" rtlCol="0" anchor="ctr"/>
+          <a:lstStyle/>
+          <a:p>
+            <a:pPr indent="0" marL="0">
+              <a:buNone/>
+            </a:pPr>
+            <a:r>
+              <a:rPr lang="en-US" sz="3600" dirty="0" b="1">
+                <a:solidFill>
+                  <a:srgbClr val="17306F"/>
                 </a:solidFill>
                 <a:latin typeface="Aptos Display" pitchFamily="34" charset="0"/>
                 <a:ea typeface="Aptos Display" pitchFamily="34" charset="-122"/>
                 <a:cs typeface="Aptos Display" pitchFamily="34" charset="-120"/>
               </a:rPr>
-              <a:t>Metric 1</a:t>
-            </a:r>
-            <a:endParaRPr lang="en-US" sz="1900" dirty="0"/>
-          </a:p>
-        </p:txBody>
-      </p:sp>
-      <p:sp>
-        <p:nvSpPr>
-          <p:cNvPr id="11" name="Text 9"/>
-          <p:cNvSpPr/>
-          <p:nvPr/>
-        </p:nvSpPr>
-        <p:spPr>
-          <a:xfrm>
-            <a:off x="1051560" y="2395728"/>
-            <a:ext cx="2788920" cy="411480"/>
-          </a:xfrm>
-          <a:prstGeom prst="rect">
-            <a:avLst/>
-          </a:prstGeom>
-          <a:noFill/>
-          <a:ln/>
-        </p:spPr>
-        <p:txBody>
-          <a:bodyPr wrap="square" lIns="0" tIns="0" rIns="0" bIns="0" rtlCol="0" anchor="ctr"/>
-          <a:lstStyle/>
-          <a:p>
-            <a:pPr algn="ctr" indent="0" marL="0">
-              <a:buNone/>
-            </a:pPr>
-            <a:r>
-              <a:rPr lang="en-US" sz="2800" b="1" dirty="0">
-                <a:solidFill>
-                  <a:srgbClr val="C74642"/>
-                </a:solidFill>
-                <a:latin typeface="Aptos Display" pitchFamily="34" charset="0"/>
-                <a:ea typeface="Aptos Display" pitchFamily="34" charset="-122"/>
-                <a:cs typeface="Aptos Display" pitchFamily="34" charset="-120"/>
-              </a:rPr>
-              <a:t>XX%</a:t>
-            </a:r>
-            <a:endParaRPr lang="en-US" sz="2800" dirty="0"/>
+              <a:t>407+</a:t>
+            </a:r>
+            <a:endParaRPr lang="en-US" sz="3600" dirty="0"/>
           </a:p>
         </p:txBody>
       </p:sp>
@@ -7349,19 +9246,19 @@
           <a:bodyPr wrap="square" lIns="0" tIns="0" rIns="0" bIns="0" rtlCol="0" anchor="ctr"/>
           <a:lstStyle/>
           <a:p>
-            <a:pPr algn="ctr" indent="0" marL="0">
-              <a:buNone/>
-            </a:pPr>
-            <a:r>
-              <a:rPr lang="en-US" sz="1200" i="1" dirty="0">
-                <a:solidFill>
-                  <a:srgbClr val="7A746C"/>
-                </a:solidFill>
-                <a:latin typeface="Aptos" pitchFamily="34" charset="0"/>
-                <a:ea typeface="Aptos" pitchFamily="34" charset="-122"/>
-                <a:cs typeface="Aptos" pitchFamily="34" charset="-120"/>
-              </a:rPr>
-              <a:t>Short interpretation</a:t>
+            <a:pPr indent="0" marL="0">
+              <a:buNone/>
+            </a:pPr>
+            <a:r>
+              <a:rPr lang="en-US" sz="1200" dirty="0">
+                <a:solidFill>
+                  <a:srgbClr val="726656"/>
+                </a:solidFill>
+                <a:latin typeface="Aptos" pitchFamily="34" charset="0"/>
+                <a:ea typeface="Aptos" pitchFamily="34" charset="-122"/>
+                <a:cs typeface="Aptos" pitchFamily="34" charset="-120"/>
+              </a:rPr>
+              <a:t>Pytest Passing</a:t>
             </a:r>
             <a:endParaRPr lang="en-US" sz="1200" dirty="0"/>
           </a:p>
@@ -7415,60 +9312,60 @@
           <a:bodyPr wrap="square" lIns="0" tIns="0" rIns="0" bIns="0" rtlCol="0" anchor="ctr"/>
           <a:lstStyle/>
           <a:p>
-            <a:pPr algn="ctr" indent="0" marL="0">
-              <a:buNone/>
-            </a:pPr>
-            <a:r>
-              <a:rPr lang="en-US" sz="1900" b="1" dirty="0">
-                <a:solidFill>
-                  <a:srgbClr val="726656"/>
+            <a:pPr indent="0" marL="0">
+              <a:buNone/>
+            </a:pPr>
+            <a:r>
+              <a:rPr lang="en-US" sz="1200" dirty="0">
+                <a:solidFill>
+                  <a:srgbClr val="7A746C"/>
+                </a:solidFill>
+                <a:latin typeface="Aptos" pitchFamily="34" charset="0"/>
+                <a:ea typeface="Aptos" pitchFamily="34" charset="-122"/>
+                <a:cs typeface="Aptos" pitchFamily="34" charset="-120"/>
+              </a:rPr>
+              <a:t>ZAP</a:t>
+            </a:r>
+            <a:endParaRPr lang="en-US" sz="1200" dirty="0"/>
+          </a:p>
+        </p:txBody>
+      </p:sp>
+      <p:sp>
+        <p:nvSpPr>
+          <p:cNvPr id="15" name="Text 13"/>
+          <p:cNvSpPr/>
+          <p:nvPr/>
+        </p:nvSpPr>
+        <p:spPr>
+          <a:xfrm>
+            <a:off x="4846320" y="2395728"/>
+            <a:ext cx="2788920" cy="411480"/>
+          </a:xfrm>
+          <a:prstGeom prst="rect">
+            <a:avLst/>
+          </a:prstGeom>
+          <a:noFill/>
+          <a:ln/>
+        </p:spPr>
+        <p:txBody>
+          <a:bodyPr wrap="square" lIns="0" tIns="0" rIns="0" bIns="0" rtlCol="0" anchor="ctr"/>
+          <a:lstStyle/>
+          <a:p>
+            <a:pPr indent="0" marL="0">
+              <a:buNone/>
+            </a:pPr>
+            <a:r>
+              <a:rPr lang="en-US" sz="3600" dirty="0" b="1">
+                <a:solidFill>
+                  <a:srgbClr val="17306F"/>
                 </a:solidFill>
                 <a:latin typeface="Aptos Display" pitchFamily="34" charset="0"/>
                 <a:ea typeface="Aptos Display" pitchFamily="34" charset="-122"/>
                 <a:cs typeface="Aptos Display" pitchFamily="34" charset="-120"/>
               </a:rPr>
-              <a:t>Metric 2</a:t>
-            </a:r>
-            <a:endParaRPr lang="en-US" sz="1900" dirty="0"/>
-          </a:p>
-        </p:txBody>
-      </p:sp>
-      <p:sp>
-        <p:nvSpPr>
-          <p:cNvPr id="15" name="Text 13"/>
-          <p:cNvSpPr/>
-          <p:nvPr/>
-        </p:nvSpPr>
-        <p:spPr>
-          <a:xfrm>
-            <a:off x="4846320" y="2395728"/>
-            <a:ext cx="2788920" cy="411480"/>
-          </a:xfrm>
-          <a:prstGeom prst="rect">
-            <a:avLst/>
-          </a:prstGeom>
-          <a:noFill/>
-          <a:ln/>
-        </p:spPr>
-        <p:txBody>
-          <a:bodyPr wrap="square" lIns="0" tIns="0" rIns="0" bIns="0" rtlCol="0" anchor="ctr"/>
-          <a:lstStyle/>
-          <a:p>
-            <a:pPr algn="ctr" indent="0" marL="0">
-              <a:buNone/>
-            </a:pPr>
-            <a:r>
-              <a:rPr lang="en-US" sz="2800" b="1" dirty="0">
-                <a:solidFill>
-                  <a:srgbClr val="6BC5C5"/>
-                </a:solidFill>
-                <a:latin typeface="Aptos Display" pitchFamily="34" charset="0"/>
-                <a:ea typeface="Aptos Display" pitchFamily="34" charset="-122"/>
-                <a:cs typeface="Aptos Display" pitchFamily="34" charset="-120"/>
-              </a:rPr>
-              <a:t>XX%</a:t>
-            </a:r>
-            <a:endParaRPr lang="en-US" sz="2800" dirty="0"/>
+              <a:t>58</a:t>
+            </a:r>
+            <a:endParaRPr lang="en-US" sz="3600" dirty="0"/>
           </a:p>
         </p:txBody>
       </p:sp>
@@ -7493,19 +9390,19 @@
           <a:bodyPr wrap="square" lIns="0" tIns="0" rIns="0" bIns="0" rtlCol="0" anchor="ctr"/>
           <a:lstStyle/>
           <a:p>
-            <a:pPr algn="ctr" indent="0" marL="0">
-              <a:buNone/>
-            </a:pPr>
-            <a:r>
-              <a:rPr lang="en-US" sz="1200" i="1" dirty="0">
-                <a:solidFill>
-                  <a:srgbClr val="7A746C"/>
-                </a:solidFill>
-                <a:latin typeface="Aptos" pitchFamily="34" charset="0"/>
-                <a:ea typeface="Aptos" pitchFamily="34" charset="-122"/>
-                <a:cs typeface="Aptos" pitchFamily="34" charset="-120"/>
-              </a:rPr>
-              <a:t>Short interpretation</a:t>
+            <a:pPr indent="0" marL="0">
+              <a:buNone/>
+            </a:pPr>
+            <a:r>
+              <a:rPr lang="en-US" sz="1200" dirty="0">
+                <a:solidFill>
+                  <a:srgbClr val="726656"/>
+                </a:solidFill>
+                <a:latin typeface="Aptos" pitchFamily="34" charset="0"/>
+                <a:ea typeface="Aptos" pitchFamily="34" charset="-122"/>
+                <a:cs typeface="Aptos" pitchFamily="34" charset="-120"/>
+              </a:rPr>
+              <a:t>PASS (0 FAIL)</a:t>
             </a:r>
             <a:endParaRPr lang="en-US" sz="1200" dirty="0"/>
           </a:p>
@@ -7559,60 +9456,60 @@
           <a:bodyPr wrap="square" lIns="0" tIns="0" rIns="0" bIns="0" rtlCol="0" anchor="ctr"/>
           <a:lstStyle/>
           <a:p>
-            <a:pPr algn="ctr" indent="0" marL="0">
-              <a:buNone/>
-            </a:pPr>
-            <a:r>
-              <a:rPr lang="en-US" sz="1900" b="1" dirty="0">
-                <a:solidFill>
-                  <a:srgbClr val="726656"/>
+            <a:pPr indent="0" marL="0">
+              <a:buNone/>
+            </a:pPr>
+            <a:r>
+              <a:rPr lang="en-US" sz="1200" dirty="0">
+                <a:solidFill>
+                  <a:srgbClr val="7A746C"/>
+                </a:solidFill>
+                <a:latin typeface="Aptos" pitchFamily="34" charset="0"/>
+                <a:ea typeface="Aptos" pitchFamily="34" charset="-122"/>
+                <a:cs typeface="Aptos" pitchFamily="34" charset="-120"/>
+              </a:rPr>
+              <a:t>Security</a:t>
+            </a:r>
+            <a:endParaRPr lang="en-US" sz="1200" dirty="0"/>
+          </a:p>
+        </p:txBody>
+      </p:sp>
+      <p:sp>
+        <p:nvSpPr>
+          <p:cNvPr id="19" name="Text 17"/>
+          <p:cNvSpPr/>
+          <p:nvPr/>
+        </p:nvSpPr>
+        <p:spPr>
+          <a:xfrm>
+            <a:off x="8641080" y="2395728"/>
+            <a:ext cx="2788920" cy="411480"/>
+          </a:xfrm>
+          <a:prstGeom prst="rect">
+            <a:avLst/>
+          </a:prstGeom>
+          <a:noFill/>
+          <a:ln/>
+        </p:spPr>
+        <p:txBody>
+          <a:bodyPr wrap="square" lIns="0" tIns="0" rIns="0" bIns="0" rtlCol="0" anchor="ctr"/>
+          <a:lstStyle/>
+          <a:p>
+            <a:pPr indent="0" marL="0">
+              <a:buNone/>
+            </a:pPr>
+            <a:r>
+              <a:rPr lang="en-US" sz="3600" dirty="0" b="1">
+                <a:solidFill>
+                  <a:srgbClr val="17306F"/>
                 </a:solidFill>
                 <a:latin typeface="Aptos Display" pitchFamily="34" charset="0"/>
                 <a:ea typeface="Aptos Display" pitchFamily="34" charset="-122"/>
                 <a:cs typeface="Aptos Display" pitchFamily="34" charset="-120"/>
               </a:rPr>
-              <a:t>Metric 3</a:t>
-            </a:r>
-            <a:endParaRPr lang="en-US" sz="1900" dirty="0"/>
-          </a:p>
-        </p:txBody>
-      </p:sp>
-      <p:sp>
-        <p:nvSpPr>
-          <p:cNvPr id="19" name="Text 17"/>
-          <p:cNvSpPr/>
-          <p:nvPr/>
-        </p:nvSpPr>
-        <p:spPr>
-          <a:xfrm>
-            <a:off x="8641080" y="2395728"/>
-            <a:ext cx="2788920" cy="411480"/>
-          </a:xfrm>
-          <a:prstGeom prst="rect">
-            <a:avLst/>
-          </a:prstGeom>
-          <a:noFill/>
-          <a:ln/>
-        </p:spPr>
-        <p:txBody>
-          <a:bodyPr wrap="square" lIns="0" tIns="0" rIns="0" bIns="0" rtlCol="0" anchor="ctr"/>
-          <a:lstStyle/>
-          <a:p>
-            <a:pPr algn="ctr" indent="0" marL="0">
-              <a:buNone/>
-            </a:pPr>
-            <a:r>
-              <a:rPr lang="en-US" sz="2800" b="1" dirty="0">
-                <a:solidFill>
-                  <a:srgbClr val="17306F"/>
-                </a:solidFill>
-                <a:latin typeface="Aptos Display" pitchFamily="34" charset="0"/>
-                <a:ea typeface="Aptos Display" pitchFamily="34" charset="-122"/>
-                <a:cs typeface="Aptos Display" pitchFamily="34" charset="-120"/>
-              </a:rPr>
-              <a:t>XX%</a:t>
-            </a:r>
-            <a:endParaRPr lang="en-US" sz="2800" dirty="0"/>
+              <a:t>6</a:t>
+            </a:r>
+            <a:endParaRPr lang="en-US" sz="3600" dirty="0"/>
           </a:p>
         </p:txBody>
       </p:sp>
@@ -7637,19 +9534,19 @@
           <a:bodyPr wrap="square" lIns="0" tIns="0" rIns="0" bIns="0" rtlCol="0" anchor="ctr"/>
           <a:lstStyle/>
           <a:p>
-            <a:pPr algn="ctr" indent="0" marL="0">
-              <a:buNone/>
-            </a:pPr>
-            <a:r>
-              <a:rPr lang="en-US" sz="1200" i="1" dirty="0">
-                <a:solidFill>
-                  <a:srgbClr val="7A746C"/>
-                </a:solidFill>
-                <a:latin typeface="Aptos" pitchFamily="34" charset="0"/>
-                <a:ea typeface="Aptos" pitchFamily="34" charset="-122"/>
-                <a:cs typeface="Aptos" pitchFamily="34" charset="-120"/>
-              </a:rPr>
-              <a:t>Short interpretation</a:t>
+            <a:pPr indent="0" marL="0">
+              <a:buNone/>
+            </a:pPr>
+            <a:r>
+              <a:rPr lang="en-US" sz="1200" dirty="0">
+                <a:solidFill>
+                  <a:srgbClr val="726656"/>
+                </a:solidFill>
+                <a:latin typeface="Aptos" pitchFamily="34" charset="0"/>
+                <a:ea typeface="Aptos" pitchFamily="34" charset="-122"/>
+                <a:cs typeface="Aptos" pitchFamily="34" charset="-120"/>
+              </a:rPr>
+              <a:t>Vulns Remediated</a:t>
             </a:r>
             <a:endParaRPr lang="en-US" sz="1200" dirty="0"/>
           </a:p>
@@ -7714,7 +9611,7 @@
               <a:buNone/>
             </a:pPr>
             <a:r>
-              <a:rPr lang="en-US" sz="1800" b="1" dirty="0">
+              <a:rPr lang="en-US" sz="1400" dirty="0" b="1">
                 <a:solidFill>
                   <a:srgbClr val="726656"/>
                 </a:solidFill>
@@ -7722,9 +9619,9 @@
                 <a:ea typeface="Aptos Display" pitchFamily="34" charset="-122"/>
                 <a:cs typeface="Aptos Display" pitchFamily="34" charset="-120"/>
               </a:rPr>
-              <a:t>Chart / table area</a:t>
-            </a:r>
-            <a:endParaRPr lang="en-US" sz="1800" dirty="0"/>
+              <a:t>OWASP ZAP Findings</a:t>
+            </a:r>
+            <a:endParaRPr lang="en-US" sz="1400" dirty="0"/>
           </a:p>
         </p:txBody>
       </p:sp>
@@ -7753,7 +9650,7 @@
               <a:buNone/>
             </a:pPr>
             <a:r>
-              <a:rPr lang="en-US" sz="1500" dirty="0">
+              <a:rPr lang="en-US" sz="1400" dirty="0">
                 <a:solidFill>
                   <a:srgbClr val="4D4A45"/>
                 </a:solidFill>
@@ -7761,9 +9658,94 @@
                 <a:ea typeface="Aptos" pitchFamily="34" charset="-122"/>
                 <a:cs typeface="Aptos" pitchFamily="34" charset="-120"/>
               </a:rPr>
-              <a:t>• Replace this with one clean chart, confusion matrix, before/after comparison, or dashboard screenshot.</a:t>
-            </a:r>
-            <a:endParaRPr lang="en-US" sz="1500" dirty="0"/>
+              <a:t>VULN-001  HIGH     Unauthenticated MongoDB exposed on 0.0.0.0:27017  —  Remediated</a:t>
+            </a:r>
+            <a:endParaRPr lang="en-US" sz="1400" dirty="0"/>
+          </a:p>
+          <a:p>
+            <a:pPr indent="0" marL="0">
+              <a:buNone/>
+            </a:pPr>
+            <a:r>
+              <a:rPr lang="en-US" sz="1400" dirty="0">
+                <a:solidFill>
+                  <a:srgbClr val="4D4A45"/>
+                </a:solidFill>
+                <a:latin typeface="Aptos" pitchFamily="34" charset="0"/>
+                <a:ea typeface="Aptos" pitchFamily="34" charset="-122"/>
+                <a:cs typeface="Aptos" pitchFamily="34" charset="-120"/>
+              </a:rPr>
+              <a:t>VULN-002  MEDIUM  Missing HTTP security headers (CSP, X-Frame, etc.)  —  Remediated</a:t>
+            </a:r>
+            <a:endParaRPr lang="en-US" sz="1400" dirty="0"/>
+          </a:p>
+          <a:p>
+            <a:pPr indent="0" marL="0">
+              <a:buNone/>
+            </a:pPr>
+            <a:r>
+              <a:rPr lang="en-US" sz="1400" dirty="0">
+                <a:solidFill>
+                  <a:srgbClr val="4D4A45"/>
+                </a:solidFill>
+                <a:latin typeface="Aptos" pitchFamily="34" charset="0"/>
+                <a:ea typeface="Aptos" pitchFamily="34" charset="-122"/>
+                <a:cs typeface="Aptos" pitchFamily="34" charset="-120"/>
+              </a:rPr>
+              <a:t>VULN-003  MEDIUM  No CSRF tokens on 13 POST forms                     —  Remediated</a:t>
+            </a:r>
+            <a:endParaRPr lang="en-US" sz="1400" dirty="0"/>
+          </a:p>
+          <a:p>
+            <a:pPr indent="0" marL="0">
+              <a:buNone/>
+            </a:pPr>
+            <a:r>
+              <a:rPr lang="en-US" sz="1400" dirty="0">
+                <a:solidFill>
+                  <a:srgbClr val="4D4A45"/>
+                </a:solidFill>
+                <a:latin typeface="Aptos" pitchFamily="34" charset="0"/>
+                <a:ea typeface="Aptos" pitchFamily="34" charset="-122"/>
+                <a:cs typeface="Aptos" pitchFamily="34" charset="-120"/>
+              </a:rPr>
+              <a:t>VULN-004  LOW      Cacheable HTML responses (no Cache-Control)         —  Remediated</a:t>
+            </a:r>
+            <a:endParaRPr lang="en-US" sz="1400" dirty="0"/>
+          </a:p>
+          <a:p>
+            <a:pPr indent="0" marL="0">
+              <a:buNone/>
+            </a:pPr>
+            <a:r>
+              <a:rPr lang="en-US" sz="1400" dirty="0">
+                <a:solidFill>
+                  <a:srgbClr val="4D4A45"/>
+                </a:solidFill>
+                <a:latin typeface="Aptos" pitchFamily="34" charset="0"/>
+                <a:ea typeface="Aptos" pitchFamily="34" charset="-122"/>
+                <a:cs typeface="Aptos" pitchFamily="34" charset="-120"/>
+              </a:rPr>
+              <a:t>VULN-005  INFO     Demo credentials visible in login page source       —  Remediated</a:t>
+            </a:r>
+            <a:endParaRPr lang="en-US" sz="1400" dirty="0"/>
+          </a:p>
+          <a:p>
+            <a:pPr indent="0" marL="0">
+              <a:buNone/>
+            </a:pPr>
+            <a:r>
+              <a:rPr lang="en-US" sz="1400" dirty="0">
+                <a:solidFill>
+                  <a:srgbClr val="4D4A45"/>
+                </a:solidFill>
+                <a:latin typeface="Aptos" pitchFamily="34" charset="0"/>
+                <a:ea typeface="Aptos" pitchFamily="34" charset="-122"/>
+                <a:cs typeface="Aptos" pitchFamily="34" charset="-120"/>
+              </a:rPr>
+              <a:t>VULN-006  LOW      Cross-Origin-Embedder-Policy header missing         —  Remediated</a:t>
+            </a:r>
+            <a:endParaRPr lang="en-US" sz="1400" dirty="0"/>
           </a:p>
         </p:txBody>
       </p:sp>
@@ -7826,7 +9808,7 @@
               <a:buNone/>
             </a:pPr>
             <a:r>
-              <a:rPr lang="en-US" sz="1800" b="1" dirty="0">
+              <a:rPr lang="en-US" sz="1400" dirty="0" b="1">
                 <a:solidFill>
                   <a:srgbClr val="726656"/>
                 </a:solidFill>
@@ -7834,9 +9816,9 @@
                 <a:ea typeface="Aptos Display" pitchFamily="34" charset="-122"/>
                 <a:cs typeface="Aptos Display" pitchFamily="34" charset="-120"/>
               </a:rPr>
-              <a:t>Takeaways</a:t>
-            </a:r>
-            <a:endParaRPr lang="en-US" sz="1800" dirty="0"/>
+              <a:t>Key Takeaways</a:t>
+            </a:r>
+            <a:endParaRPr lang="en-US" sz="1400" dirty="0"/>
           </a:p>
         </p:txBody>
       </p:sp>
@@ -7865,7 +9847,7 @@
               <a:buNone/>
             </a:pPr>
             <a:r>
-              <a:rPr lang="en-US" sz="1500" dirty="0">
+              <a:rPr lang="en-US" sz="1400" dirty="0">
                 <a:solidFill>
                   <a:srgbClr val="4D4A45"/>
                 </a:solidFill>
@@ -7873,16 +9855,16 @@
                 <a:ea typeface="Aptos" pitchFamily="34" charset="-122"/>
                 <a:cs typeface="Aptos" pitchFamily="34" charset="-120"/>
               </a:rPr>
-              <a:t>• What worked best?</a:t>
-            </a:r>
-            <a:endParaRPr lang="en-US" sz="1500" dirty="0"/>
-          </a:p>
-          <a:p>
-            <a:pPr indent="0" marL="0">
-              <a:buNone/>
-            </a:pPr>
-            <a:r>
-              <a:rPr lang="en-US" sz="1500" dirty="0">
+              <a:t>• All 6 vulnerabilities fully remediated</a:t>
+            </a:r>
+            <a:endParaRPr lang="en-US" sz="1400" dirty="0"/>
+          </a:p>
+          <a:p>
+            <a:pPr indent="0" marL="0">
+              <a:buNone/>
+            </a:pPr>
+            <a:r>
+              <a:rPr lang="en-US" sz="1400" dirty="0">
                 <a:solidFill>
                   <a:srgbClr val="4D4A45"/>
                 </a:solidFill>
@@ -7890,16 +9872,16 @@
                 <a:ea typeface="Aptos" pitchFamily="34" charset="-122"/>
                 <a:cs typeface="Aptos" pitchFamily="34" charset="-120"/>
               </a:rPr>
-              <a:t>• What is the headline result?</a:t>
-            </a:r>
-            <a:endParaRPr lang="en-US" sz="1500" dirty="0"/>
-          </a:p>
-          <a:p>
-            <a:pPr indent="0" marL="0">
-              <a:buNone/>
-            </a:pPr>
-            <a:r>
-              <a:rPr lang="en-US" sz="1500" dirty="0">
+              <a:t>• ZAP baseline: 58 PASS, 0 FAIL after remediation</a:t>
+            </a:r>
+            <a:endParaRPr lang="en-US" sz="1400" dirty="0"/>
+          </a:p>
+          <a:p>
+            <a:pPr indent="0" marL="0">
+              <a:buNone/>
+            </a:pPr>
+            <a:r>
+              <a:rPr lang="en-US" sz="1400" dirty="0">
                 <a:solidFill>
                   <a:srgbClr val="4D4A45"/>
                 </a:solidFill>
@@ -7907,9 +9889,26 @@
                 <a:ea typeface="Aptos" pitchFamily="34" charset="-122"/>
                 <a:cs typeface="Aptos" pitchFamily="34" charset="-120"/>
               </a:rPr>
-              <a:t>• What should the audience remember?</a:t>
-            </a:r>
-            <a:endParaRPr lang="en-US" sz="1500" dirty="0"/>
+              <a:t>• Integration tests hit real MongoDB (no mocks)</a:t>
+            </a:r>
+            <a:endParaRPr lang="en-US" sz="1400" dirty="0"/>
+          </a:p>
+          <a:p>
+            <a:pPr indent="0" marL="0">
+              <a:buNone/>
+            </a:pPr>
+            <a:r>
+              <a:rPr lang="en-US" sz="1400" dirty="0">
+                <a:solidFill>
+                  <a:srgbClr val="4D4A45"/>
+                </a:solidFill>
+                <a:latin typeface="Aptos" pitchFamily="34" charset="0"/>
+                <a:ea typeface="Aptos" pitchFamily="34" charset="-122"/>
+                <a:cs typeface="Aptos" pitchFamily="34" charset="-120"/>
+              </a:rPr>
+              <a:t>• Security headers, CSRF, auth, and caching hardened</a:t>
+            </a:r>
+            <a:endParaRPr lang="en-US" sz="1400" dirty="0"/>
           </a:p>
         </p:txBody>
       </p:sp>
@@ -8119,7 +10118,7 @@
               <a:buNone/>
             </a:pPr>
             <a:r>
-              <a:rPr lang="en-US" sz="2600" b="1" dirty="0">
+              <a:rPr lang="en-US" sz="2600" dirty="0" b="1">
                 <a:solidFill>
                   <a:srgbClr val="17306F"/>
                 </a:solidFill>
@@ -8127,7 +10126,7 @@
                 <a:ea typeface="Aptos Display" pitchFamily="34" charset="-122"/>
                 <a:cs typeface="Aptos Display" pitchFamily="34" charset="-120"/>
               </a:rPr>
-              <a:t>Team and Contributions</a:t>
+              <a:t>Meet the Team — Vibe Coders</a:t>
             </a:r>
             <a:endParaRPr lang="en-US" sz="2600" dirty="0"/>
           </a:p>
@@ -8166,7 +10165,7 @@
                 <a:ea typeface="Aptos" pitchFamily="34" charset="-122"/>
                 <a:cs typeface="Aptos" pitchFamily="34" charset="-120"/>
               </a:rPr>
-              <a:t>Designed for 6 members, with room for roles or ownership</a:t>
+              <a:t>CIS 497 Senior Design, Spring 2026  |  Client: Doug Greene, Fivos Health</a:t>
             </a:r>
             <a:endParaRPr lang="en-US" sz="1200" dirty="0"/>
           </a:p>
@@ -8241,11 +10240,11 @@
           <a:bodyPr wrap="square" lIns="0" tIns="0" rIns="0" bIns="0" rtlCol="0" anchor="ctr"/>
           <a:lstStyle/>
           <a:p>
-            <a:pPr algn="ctr" indent="0" marL="0">
-              <a:buNone/>
-            </a:pPr>
-            <a:r>
-              <a:rPr lang="en-US" sz="1700" b="1" dirty="0">
+            <a:pPr indent="0" marL="0">
+              <a:buNone/>
+            </a:pPr>
+            <a:r>
+              <a:rPr lang="en-US" sz="1600" dirty="0" b="1">
                 <a:solidFill>
                   <a:srgbClr val="17306F"/>
                 </a:solidFill>
@@ -8253,9 +10252,9 @@
                 <a:ea typeface="Aptos Display" pitchFamily="34" charset="-122"/>
                 <a:cs typeface="Aptos Display" pitchFamily="34" charset="-120"/>
               </a:rPr>
-              <a:t>Member 1</a:t>
-            </a:r>
-            <a:endParaRPr lang="en-US" sz="1700" dirty="0"/>
+              <a:t>Jonathan</a:t>
+            </a:r>
+            <a:endParaRPr lang="en-US" sz="1600" dirty="0"/>
           </a:p>
         </p:txBody>
       </p:sp>
@@ -8280,21 +10279,21 @@
           <a:bodyPr wrap="square" lIns="0" tIns="0" rIns="0" bIns="0" rtlCol="0" anchor="ctr"/>
           <a:lstStyle/>
           <a:p>
-            <a:pPr algn="ctr" indent="0" marL="0">
-              <a:buNone/>
-            </a:pPr>
-            <a:r>
-              <a:rPr lang="en-US" sz="1100" dirty="0">
-                <a:solidFill>
-                  <a:srgbClr val="7A746C"/>
-                </a:solidFill>
-                <a:latin typeface="Aptos" pitchFamily="34" charset="0"/>
-                <a:ea typeface="Aptos" pitchFamily="34" charset="-122"/>
-                <a:cs typeface="Aptos" pitchFamily="34" charset="-120"/>
-              </a:rPr>
-              <a:t>Role / focus area</a:t>
-            </a:r>
-            <a:endParaRPr lang="en-US" sz="1100" dirty="0"/>
+            <a:pPr indent="0" marL="0">
+              <a:buNone/>
+            </a:pPr>
+            <a:r>
+              <a:rPr lang="en-US" sz="1200" dirty="0">
+                <a:solidFill>
+                  <a:srgbClr val="726656"/>
+                </a:solidFill>
+                <a:latin typeface="Aptos" pitchFamily="34" charset="0"/>
+                <a:ea typeface="Aptos" pitchFamily="34" charset="-122"/>
+                <a:cs typeface="Aptos" pitchFamily="34" charset="-120"/>
+              </a:rPr>
+              <a:t>Orchestration &amp; Runner</a:t>
+            </a:r>
+            <a:endParaRPr lang="en-US" sz="1200" dirty="0"/>
           </a:p>
         </p:txBody>
       </p:sp>
@@ -8344,11 +10343,11 @@
           <a:bodyPr wrap="square" lIns="0" tIns="0" rIns="0" bIns="0" rtlCol="0" anchor="ctr"/>
           <a:lstStyle/>
           <a:p>
-            <a:pPr algn="ctr" indent="0" marL="0">
-              <a:buNone/>
-            </a:pPr>
-            <a:r>
-              <a:rPr lang="en-US" sz="1700" b="1" dirty="0">
+            <a:pPr indent="0" marL="0">
+              <a:buNone/>
+            </a:pPr>
+            <a:r>
+              <a:rPr lang="en-US" sz="1600" dirty="0" b="1">
                 <a:solidFill>
                   <a:srgbClr val="17306F"/>
                 </a:solidFill>
@@ -8356,9 +10355,9 @@
                 <a:ea typeface="Aptos Display" pitchFamily="34" charset="-122"/>
                 <a:cs typeface="Aptos Display" pitchFamily="34" charset="-120"/>
               </a:rPr>
-              <a:t>Member 2</a:t>
-            </a:r>
-            <a:endParaRPr lang="en-US" sz="1700" dirty="0"/>
+              <a:t>Wyatt</a:t>
+            </a:r>
+            <a:endParaRPr lang="en-US" sz="1600" dirty="0"/>
           </a:p>
         </p:txBody>
       </p:sp>
@@ -8383,21 +10382,21 @@
           <a:bodyPr wrap="square" lIns="0" tIns="0" rIns="0" bIns="0" rtlCol="0" anchor="ctr"/>
           <a:lstStyle/>
           <a:p>
-            <a:pPr algn="ctr" indent="0" marL="0">
-              <a:buNone/>
-            </a:pPr>
-            <a:r>
-              <a:rPr lang="en-US" sz="1100" dirty="0">
-                <a:solidFill>
-                  <a:srgbClr val="7A746C"/>
-                </a:solidFill>
-                <a:latin typeface="Aptos" pitchFamily="34" charset="0"/>
-                <a:ea typeface="Aptos" pitchFamily="34" charset="-122"/>
-                <a:cs typeface="Aptos" pitchFamily="34" charset="-120"/>
-              </a:rPr>
-              <a:t>Role / focus area</a:t>
-            </a:r>
-            <a:endParaRPr lang="en-US" sz="1100" dirty="0"/>
+            <a:pPr indent="0" marL="0">
+              <a:buNone/>
+            </a:pPr>
+            <a:r>
+              <a:rPr lang="en-US" sz="1200" dirty="0">
+                <a:solidFill>
+                  <a:srgbClr val="726656"/>
+                </a:solidFill>
+                <a:latin typeface="Aptos" pitchFamily="34" charset="0"/>
+                <a:ea typeface="Aptos" pitchFamily="34" charset="-122"/>
+                <a:cs typeface="Aptos" pitchFamily="34" charset="-120"/>
+              </a:rPr>
+              <a:t>Web Scraping (Playwright)</a:t>
+            </a:r>
+            <a:endParaRPr lang="en-US" sz="1200" dirty="0"/>
           </a:p>
         </p:txBody>
       </p:sp>
@@ -8447,11 +10446,11 @@
           <a:bodyPr wrap="square" lIns="0" tIns="0" rIns="0" bIns="0" rtlCol="0" anchor="ctr"/>
           <a:lstStyle/>
           <a:p>
-            <a:pPr algn="ctr" indent="0" marL="0">
-              <a:buNone/>
-            </a:pPr>
-            <a:r>
-              <a:rPr lang="en-US" sz="1700" b="1" dirty="0">
+            <a:pPr indent="0" marL="0">
+              <a:buNone/>
+            </a:pPr>
+            <a:r>
+              <a:rPr lang="en-US" sz="1600" dirty="0" b="1">
                 <a:solidFill>
                   <a:srgbClr val="17306F"/>
                 </a:solidFill>
@@ -8459,9 +10458,9 @@
                 <a:ea typeface="Aptos Display" pitchFamily="34" charset="-122"/>
                 <a:cs typeface="Aptos Display" pitchFamily="34" charset="-120"/>
               </a:rPr>
-              <a:t>Member 3</a:t>
-            </a:r>
-            <a:endParaRPr lang="en-US" sz="1700" dirty="0"/>
+              <a:t>Ryan</a:t>
+            </a:r>
+            <a:endParaRPr lang="en-US" sz="1600" dirty="0"/>
           </a:p>
         </p:txBody>
       </p:sp>
@@ -8486,21 +10485,21 @@
           <a:bodyPr wrap="square" lIns="0" tIns="0" rIns="0" bIns="0" rtlCol="0" anchor="ctr"/>
           <a:lstStyle/>
           <a:p>
-            <a:pPr algn="ctr" indent="0" marL="0">
-              <a:buNone/>
-            </a:pPr>
-            <a:r>
-              <a:rPr lang="en-US" sz="1100" dirty="0">
-                <a:solidFill>
-                  <a:srgbClr val="7A746C"/>
-                </a:solidFill>
-                <a:latin typeface="Aptos" pitchFamily="34" charset="0"/>
-                <a:ea typeface="Aptos" pitchFamily="34" charset="-122"/>
-                <a:cs typeface="Aptos" pitchFamily="34" charset="-120"/>
-              </a:rPr>
-              <a:t>Role / focus area</a:t>
-            </a:r>
-            <a:endParaRPr lang="en-US" sz="1100" dirty="0"/>
+            <a:pPr indent="0" marL="0">
+              <a:buNone/>
+            </a:pPr>
+            <a:r>
+              <a:rPr lang="en-US" sz="1200" dirty="0">
+                <a:solidFill>
+                  <a:srgbClr val="726656"/>
+                </a:solidFill>
+                <a:latin typeface="Aptos" pitchFamily="34" charset="0"/>
+                <a:ea typeface="Aptos" pitchFamily="34" charset="-122"/>
+                <a:cs typeface="Aptos" pitchFamily="34" charset="-120"/>
+              </a:rPr>
+              <a:t>Site Adapters (YAML)</a:t>
+            </a:r>
+            <a:endParaRPr lang="en-US" sz="1200" dirty="0"/>
           </a:p>
         </p:txBody>
       </p:sp>
@@ -8550,11 +10549,11 @@
           <a:bodyPr wrap="square" lIns="0" tIns="0" rIns="0" bIns="0" rtlCol="0" anchor="ctr"/>
           <a:lstStyle/>
           <a:p>
-            <a:pPr algn="ctr" indent="0" marL="0">
-              <a:buNone/>
-            </a:pPr>
-            <a:r>
-              <a:rPr lang="en-US" sz="1700" b="1" dirty="0">
+            <a:pPr indent="0" marL="0">
+              <a:buNone/>
+            </a:pPr>
+            <a:r>
+              <a:rPr lang="en-US" sz="1600" dirty="0" b="1">
                 <a:solidFill>
                   <a:srgbClr val="17306F"/>
                 </a:solidFill>
@@ -8562,9 +10561,9 @@
                 <a:ea typeface="Aptos Display" pitchFamily="34" charset="-122"/>
                 <a:cs typeface="Aptos Display" pitchFamily="34" charset="-120"/>
               </a:rPr>
-              <a:t>Member 4</a:t>
-            </a:r>
-            <a:endParaRPr lang="en-US" sz="1700" dirty="0"/>
+              <a:t>Jason</a:t>
+            </a:r>
+            <a:endParaRPr lang="en-US" sz="1600" dirty="0"/>
           </a:p>
         </p:txBody>
       </p:sp>
@@ -8589,21 +10588,21 @@
           <a:bodyPr wrap="square" lIns="0" tIns="0" rIns="0" bIns="0" rtlCol="0" anchor="ctr"/>
           <a:lstStyle/>
           <a:p>
-            <a:pPr algn="ctr" indent="0" marL="0">
-              <a:buNone/>
-            </a:pPr>
-            <a:r>
-              <a:rPr lang="en-US" sz="1100" dirty="0">
-                <a:solidFill>
-                  <a:srgbClr val="7A746C"/>
-                </a:solidFill>
-                <a:latin typeface="Aptos" pitchFamily="34" charset="0"/>
-                <a:ea typeface="Aptos" pitchFamily="34" charset="-122"/>
-                <a:cs typeface="Aptos" pitchFamily="34" charset="-120"/>
-              </a:rPr>
-              <a:t>Role / focus area</a:t>
-            </a:r>
-            <a:endParaRPr lang="en-US" sz="1100" dirty="0"/>
+            <a:pPr indent="0" marL="0">
+              <a:buNone/>
+            </a:pPr>
+            <a:r>
+              <a:rPr lang="en-US" sz="1200" dirty="0">
+                <a:solidFill>
+                  <a:srgbClr val="726656"/>
+                </a:solidFill>
+                <a:latin typeface="Aptos" pitchFamily="34" charset="0"/>
+                <a:ea typeface="Aptos" pitchFamily="34" charset="-122"/>
+                <a:cs typeface="Aptos" pitchFamily="34" charset="-120"/>
+              </a:rPr>
+              <a:t>Pipeline + Security</a:t>
+            </a:r>
+            <a:endParaRPr lang="en-US" sz="1200" dirty="0"/>
           </a:p>
         </p:txBody>
       </p:sp>
@@ -8653,11 +10652,11 @@
           <a:bodyPr wrap="square" lIns="0" tIns="0" rIns="0" bIns="0" rtlCol="0" anchor="ctr"/>
           <a:lstStyle/>
           <a:p>
-            <a:pPr algn="ctr" indent="0" marL="0">
-              <a:buNone/>
-            </a:pPr>
-            <a:r>
-              <a:rPr lang="en-US" sz="1700" b="1" dirty="0">
+            <a:pPr indent="0" marL="0">
+              <a:buNone/>
+            </a:pPr>
+            <a:r>
+              <a:rPr lang="en-US" sz="1600" dirty="0" b="1">
                 <a:solidFill>
                   <a:srgbClr val="17306F"/>
                 </a:solidFill>
@@ -8665,9 +10664,9 @@
                 <a:ea typeface="Aptos Display" pitchFamily="34" charset="-122"/>
                 <a:cs typeface="Aptos Display" pitchFamily="34" charset="-120"/>
               </a:rPr>
-              <a:t>Member 5</a:t>
-            </a:r>
-            <a:endParaRPr lang="en-US" sz="1700" dirty="0"/>
+              <a:t>Ralph</a:t>
+            </a:r>
+            <a:endParaRPr lang="en-US" sz="1600" dirty="0"/>
           </a:p>
         </p:txBody>
       </p:sp>
@@ -8692,21 +10691,21 @@
           <a:bodyPr wrap="square" lIns="0" tIns="0" rIns="0" bIns="0" rtlCol="0" anchor="ctr"/>
           <a:lstStyle/>
           <a:p>
-            <a:pPr algn="ctr" indent="0" marL="0">
-              <a:buNone/>
-            </a:pPr>
-            <a:r>
-              <a:rPr lang="en-US" sz="1100" dirty="0">
-                <a:solidFill>
-                  <a:srgbClr val="7A746C"/>
-                </a:solidFill>
-                <a:latin typeface="Aptos" pitchFamily="34" charset="0"/>
-                <a:ea typeface="Aptos" pitchFamily="34" charset="-122"/>
-                <a:cs typeface="Aptos" pitchFamily="34" charset="-120"/>
-              </a:rPr>
-              <a:t>Role / focus area</a:t>
-            </a:r>
-            <a:endParaRPr lang="en-US" sz="1100" dirty="0"/>
+            <a:pPr indent="0" marL="0">
+              <a:buNone/>
+            </a:pPr>
+            <a:r>
+              <a:rPr lang="en-US" sz="1200" dirty="0">
+                <a:solidFill>
+                  <a:srgbClr val="726656"/>
+                </a:solidFill>
+                <a:latin typeface="Aptos" pitchFamily="34" charset="0"/>
+                <a:ea typeface="Aptos" pitchFamily="34" charset="-122"/>
+                <a:cs typeface="Aptos" pitchFamily="34" charset="-120"/>
+              </a:rPr>
+              <a:t>Storage (MongoDB)</a:t>
+            </a:r>
+            <a:endParaRPr lang="en-US" sz="1200" dirty="0"/>
           </a:p>
         </p:txBody>
       </p:sp>
@@ -8756,11 +10755,11 @@
           <a:bodyPr wrap="square" lIns="0" tIns="0" rIns="0" bIns="0" rtlCol="0" anchor="ctr"/>
           <a:lstStyle/>
           <a:p>
-            <a:pPr algn="ctr" indent="0" marL="0">
-              <a:buNone/>
-            </a:pPr>
-            <a:r>
-              <a:rPr lang="en-US" sz="1700" b="1" dirty="0">
+            <a:pPr indent="0" marL="0">
+              <a:buNone/>
+            </a:pPr>
+            <a:r>
+              <a:rPr lang="en-US" sz="1600" dirty="0" b="1">
                 <a:solidFill>
                   <a:srgbClr val="17306F"/>
                 </a:solidFill>
@@ -8768,9 +10767,9 @@
                 <a:ea typeface="Aptos Display" pitchFamily="34" charset="-122"/>
                 <a:cs typeface="Aptos Display" pitchFamily="34" charset="-120"/>
               </a:rPr>
-              <a:t>Member 6</a:t>
-            </a:r>
-            <a:endParaRPr lang="en-US" sz="1700" dirty="0"/>
+              <a:t>Doug Greene</a:t>
+            </a:r>
+            <a:endParaRPr lang="en-US" sz="1600" dirty="0"/>
           </a:p>
         </p:txBody>
       </p:sp>
@@ -8795,21 +10794,21 @@
           <a:bodyPr wrap="square" lIns="0" tIns="0" rIns="0" bIns="0" rtlCol="0" anchor="ctr"/>
           <a:lstStyle/>
           <a:p>
-            <a:pPr algn="ctr" indent="0" marL="0">
-              <a:buNone/>
-            </a:pPr>
-            <a:r>
-              <a:rPr lang="en-US" sz="1100" dirty="0">
-                <a:solidFill>
-                  <a:srgbClr val="7A746C"/>
-                </a:solidFill>
-                <a:latin typeface="Aptos" pitchFamily="34" charset="0"/>
-                <a:ea typeface="Aptos" pitchFamily="34" charset="-122"/>
-                <a:cs typeface="Aptos" pitchFamily="34" charset="-120"/>
-              </a:rPr>
-              <a:t>Role / focus area</a:t>
-            </a:r>
-            <a:endParaRPr lang="en-US" sz="1100" dirty="0"/>
+            <a:pPr indent="0" marL="0">
+              <a:buNone/>
+            </a:pPr>
+            <a:r>
+              <a:rPr lang="en-US" sz="1200" dirty="0">
+                <a:solidFill>
+                  <a:srgbClr val="726656"/>
+                </a:solidFill>
+                <a:latin typeface="Aptos" pitchFamily="34" charset="0"/>
+                <a:ea typeface="Aptos" pitchFamily="34" charset="-122"/>
+                <a:cs typeface="Aptos" pitchFamily="34" charset="-120"/>
+              </a:rPr>
+              <a:t>Client — Fivos Health</a:t>
+            </a:r>
+            <a:endParaRPr lang="en-US" sz="1200" dirty="0"/>
           </a:p>
         </p:txBody>
       </p:sp>
@@ -8834,21 +10833,21 @@
           <a:bodyPr wrap="square" lIns="0" tIns="0" rIns="0" bIns="0" rtlCol="0" anchor="ctr"/>
           <a:lstStyle/>
           <a:p>
-            <a:pPr algn="ctr" indent="0" marL="0">
-              <a:buNone/>
-            </a:pPr>
-            <a:r>
-              <a:rPr lang="en-US" sz="1200" i="1" dirty="0">
-                <a:solidFill>
-                  <a:srgbClr val="7A746C"/>
-                </a:solidFill>
-                <a:latin typeface="Aptos" pitchFamily="34" charset="0"/>
-                <a:ea typeface="Aptos" pitchFamily="34" charset="-122"/>
-                <a:cs typeface="Aptos" pitchFamily="34" charset="-120"/>
-              </a:rPr>
-              <a:t>Tip: replace circles with headshots, initials, or icons if you want a more polished team slide.</a:t>
-            </a:r>
-            <a:endParaRPr lang="en-US" sz="1200" dirty="0"/>
+            <a:pPr indent="0" marL="0">
+              <a:buNone/>
+            </a:pPr>
+            <a:r>
+              <a:rPr lang="en-US" sz="1000" dirty="0">
+                <a:solidFill>
+                  <a:srgbClr val="9E9890"/>
+                </a:solidFill>
+                <a:latin typeface="Aptos" pitchFamily="34" charset="0"/>
+                <a:ea typeface="Aptos" pitchFamily="34" charset="-122"/>
+                <a:cs typeface="Aptos" pitchFamily="34" charset="-120"/>
+              </a:rPr>
+              <a:t>Replace circles with headshots or initials for a polished look</a:t>
+            </a:r>
+            <a:endParaRPr lang="en-US" sz="1000" dirty="0"/>
           </a:p>
         </p:txBody>
       </p:sp>
@@ -9058,17 +11057,17 @@
               <a:buNone/>
             </a:pPr>
             <a:r>
-              <a:rPr lang="en-US" sz="3000" b="1" dirty="0">
-                <a:solidFill>
-                  <a:srgbClr val="726656"/>
+              <a:rPr lang="en-US" sz="4800" dirty="0" b="1">
+                <a:solidFill>
+                  <a:srgbClr val="17306F"/>
                 </a:solidFill>
                 <a:latin typeface="Aptos Display" pitchFamily="34" charset="0"/>
                 <a:ea typeface="Aptos Display" pitchFamily="34" charset="-122"/>
                 <a:cs typeface="Aptos Display" pitchFamily="34" charset="-120"/>
               </a:rPr>
-              <a:t>Questions?</a:t>
-            </a:r>
-            <a:endParaRPr lang="en-US" sz="3000" dirty="0"/>
+              <a:t>Live Demo + Q&amp;A</a:t>
+            </a:r>
+            <a:endParaRPr lang="en-US" sz="4800" dirty="0"/>
           </a:p>
         </p:txBody>
       </p:sp>
@@ -9097,17 +11096,17 @@
               <a:buNone/>
             </a:pPr>
             <a:r>
-              <a:rPr lang="en-US" sz="2000" dirty="0">
-                <a:solidFill>
-                  <a:srgbClr val="17306F"/>
-                </a:solidFill>
-                <a:latin typeface="Aptos" pitchFamily="34" charset="0"/>
-                <a:ea typeface="Aptos" pitchFamily="34" charset="-122"/>
-                <a:cs typeface="Aptos" pitchFamily="34" charset="-120"/>
-              </a:rPr>
-              <a:t>Thank you</a:t>
-            </a:r>
-            <a:endParaRPr lang="en-US" sz="2000" dirty="0"/>
+              <a:rPr lang="en-US" sz="2400" dirty="0">
+                <a:solidFill>
+                  <a:srgbClr val="726656"/>
+                </a:solidFill>
+                <a:latin typeface="Aptos Display" pitchFamily="34" charset="0"/>
+                <a:ea typeface="Aptos Display" pitchFamily="34" charset="-122"/>
+                <a:cs typeface="Aptos Display" pitchFamily="34" charset="-120"/>
+              </a:rPr>
+              <a:t>Thank you — Vibe Coders</a:t>
+            </a:r>
+            <a:endParaRPr lang="en-US" sz="2400" dirty="0"/>
           </a:p>
         </p:txBody>
       </p:sp>
@@ -9136,7 +11135,7 @@
               <a:buNone/>
             </a:pPr>
             <a:r>
-              <a:rPr lang="en-US" sz="1600" dirty="0">
+              <a:rPr lang="en-US" sz="1300" dirty="0">
                 <a:solidFill>
                   <a:srgbClr val="7A746C"/>
                 </a:solidFill>
@@ -9144,9 +11143,9 @@
                 <a:ea typeface="Aptos" pitchFamily="34" charset="-122"/>
                 <a:cs typeface="Aptos" pitchFamily="34" charset="-120"/>
               </a:rPr>
-              <a:t>Add contact info, GitHub link, or demo QR code here</a:t>
-            </a:r>
-            <a:endParaRPr lang="en-US" sz="1600" dirty="0"/>
+              <a:t>GitHub: Fivos_Senior_Project  ·  Client: doug.greene@fivoshealth.com</a:t>
+            </a:r>
+            <a:endParaRPr lang="en-US" sz="1300" dirty="0"/>
           </a:p>
         </p:txBody>
       </p:sp>
@@ -9198,21 +11197,21 @@
           <a:bodyPr wrap="square" lIns="0" tIns="0" rIns="0" bIns="0" rtlCol="0" anchor="ctr"/>
           <a:lstStyle/>
           <a:p>
-            <a:pPr algn="ctr" indent="0" marL="0">
-              <a:buNone/>
-            </a:pPr>
-            <a:r>
-              <a:rPr lang="en-US" sz="2200" b="1" dirty="0">
-                <a:solidFill>
-                  <a:srgbClr val="17306F"/>
+            <a:pPr indent="0" marL="0">
+              <a:buNone/>
+            </a:pPr>
+            <a:r>
+              <a:rPr lang="en-US" sz="1400" dirty="0" b="1">
+                <a:solidFill>
+                  <a:srgbClr val="726656"/>
                 </a:solidFill>
                 <a:latin typeface="Aptos Display" pitchFamily="34" charset="0"/>
                 <a:ea typeface="Aptos Display" pitchFamily="34" charset="-122"/>
                 <a:cs typeface="Aptos Display" pitchFamily="34" charset="-120"/>
               </a:rPr>
-              <a:t>Optional end slide content</a:t>
-            </a:r>
-            <a:endParaRPr lang="en-US" sz="2200" dirty="0"/>
+              <a:t>Demo Script</a:t>
+            </a:r>
+            <a:endParaRPr lang="en-US" sz="1400" dirty="0"/>
           </a:p>
         </p:txBody>
       </p:sp>
@@ -9241,68 +11240,102 @@
               <a:buNone/>
             </a:pPr>
             <a:r>
-              <a:rPr lang="en-US" sz="2000" dirty="0">
-                <a:solidFill>
-                  <a:srgbClr val="7A746C"/>
-                </a:solidFill>
-                <a:latin typeface="Aptos" pitchFamily="34" charset="0"/>
-                <a:ea typeface="Aptos" pitchFamily="34" charset="-122"/>
-                <a:cs typeface="Aptos" pitchFamily="34" charset="-120"/>
-              </a:rPr>
-              <a:t>• Demo QR code</a:t>
-            </a:r>
-            <a:endParaRPr lang="en-US" sz="2000" dirty="0"/>
-          </a:p>
-          <a:p>
-            <a:pPr indent="0" marL="0">
-              <a:buNone/>
-            </a:pPr>
-            <a:r>
-              <a:rPr lang="en-US" sz="2000" dirty="0">
-                <a:solidFill>
-                  <a:srgbClr val="7A746C"/>
-                </a:solidFill>
-                <a:latin typeface="Aptos" pitchFamily="34" charset="0"/>
-                <a:ea typeface="Aptos" pitchFamily="34" charset="-122"/>
-                <a:cs typeface="Aptos" pitchFamily="34" charset="-120"/>
-              </a:rPr>
-              <a:t>• Repository link</a:t>
-            </a:r>
-            <a:endParaRPr lang="en-US" sz="2000" dirty="0"/>
-          </a:p>
-          <a:p>
-            <a:pPr indent="0" marL="0">
-              <a:buNone/>
-            </a:pPr>
-            <a:r>
-              <a:rPr lang="en-US" sz="2000" dirty="0">
-                <a:solidFill>
-                  <a:srgbClr val="7A746C"/>
-                </a:solidFill>
-                <a:latin typeface="Aptos" pitchFamily="34" charset="0"/>
-                <a:ea typeface="Aptos" pitchFamily="34" charset="-122"/>
-                <a:cs typeface="Aptos" pitchFamily="34" charset="-120"/>
-              </a:rPr>
-              <a:t>• Sponsor logo</a:t>
-            </a:r>
-            <a:endParaRPr lang="en-US" sz="2000" dirty="0"/>
-          </a:p>
-          <a:p>
-            <a:pPr indent="0" marL="0">
-              <a:buNone/>
-            </a:pPr>
-            <a:r>
-              <a:rPr lang="en-US" sz="2000" dirty="0">
-                <a:solidFill>
-                  <a:srgbClr val="7A746C"/>
-                </a:solidFill>
-                <a:latin typeface="Aptos" pitchFamily="34" charset="0"/>
-                <a:ea typeface="Aptos" pitchFamily="34" charset="-122"/>
-                <a:cs typeface="Aptos" pitchFamily="34" charset="-120"/>
-              </a:rPr>
-              <a:t>• Final visual</a:t>
-            </a:r>
-            <a:endParaRPr lang="en-US" sz="2000" dirty="0"/>
+              <a:rPr lang="en-US" sz="1400" dirty="0">
+                <a:solidFill>
+                  <a:srgbClr val="4D4A45"/>
+                </a:solidFill>
+                <a:latin typeface="Aptos" pitchFamily="34" charset="0"/>
+                <a:ea typeface="Aptos" pitchFamily="34" charset="-122"/>
+                <a:cs typeface="Aptos" pitchFamily="34" charset="-120"/>
+              </a:rPr>
+              <a:t>• Trigger a single-URL harvest from /harvester</a:t>
+            </a:r>
+            <a:endParaRPr lang="en-US" sz="1400" dirty="0"/>
+          </a:p>
+          <a:p>
+            <a:pPr indent="0" marL="0">
+              <a:buNone/>
+            </a:pPr>
+            <a:r>
+              <a:rPr lang="en-US" sz="1400" dirty="0">
+                <a:solidFill>
+                  <a:srgbClr val="4D4A45"/>
+                </a:solidFill>
+                <a:latin typeface="Aptos" pitchFamily="34" charset="0"/>
+                <a:ea typeface="Aptos" pitchFamily="34" charset="-122"/>
+                <a:cs typeface="Aptos" pitchFamily="34" charset="-120"/>
+              </a:rPr>
+              <a:t>• Show the extracted device record</a:t>
+            </a:r>
+            <a:endParaRPr lang="en-US" sz="1400" dirty="0"/>
+          </a:p>
+          <a:p>
+            <a:pPr indent="0" marL="0">
+              <a:buNone/>
+            </a:pPr>
+            <a:r>
+              <a:rPr lang="en-US" sz="1400" dirty="0">
+                <a:solidFill>
+                  <a:srgbClr val="4D4A45"/>
+                </a:solidFill>
+                <a:latin typeface="Aptos" pitchFamily="34" charset="0"/>
+                <a:ea typeface="Aptos" pitchFamily="34" charset="-122"/>
+                <a:cs typeface="Aptos" pitchFamily="34" charset="-120"/>
+              </a:rPr>
+              <a:t>• Run GUDID validation on the batch</a:t>
+            </a:r>
+            <a:endParaRPr lang="en-US" sz="1400" dirty="0"/>
+          </a:p>
+          <a:p>
+            <a:pPr indent="0" marL="0">
+              <a:buNone/>
+            </a:pPr>
+            <a:r>
+              <a:rPr lang="en-US" sz="1400" dirty="0">
+                <a:solidFill>
+                  <a:srgbClr val="4D4A45"/>
+                </a:solidFill>
+                <a:latin typeface="Aptos" pitchFamily="34" charset="0"/>
+                <a:ea typeface="Aptos" pitchFamily="34" charset="-122"/>
+                <a:cs typeface="Aptos" pitchFamily="34" charset="-120"/>
+              </a:rPr>
+              <a:t>• Open a mismatch in the /review dashboard</a:t>
+            </a:r>
+            <a:endParaRPr lang="en-US" sz="1400" dirty="0"/>
+          </a:p>
+          <a:p>
+            <a:pPr indent="0" marL="0">
+              <a:buNone/>
+            </a:pPr>
+            <a:r>
+              <a:rPr lang="en-US" sz="1400" dirty="0">
+                <a:solidFill>
+                  <a:srgbClr val="4D4A45"/>
+                </a:solidFill>
+                <a:latin typeface="Aptos" pitchFamily="34" charset="0"/>
+                <a:ea typeface="Aptos" pitchFamily="34" charset="-122"/>
+                <a:cs typeface="Aptos" pitchFamily="34" charset="-120"/>
+              </a:rPr>
+              <a:t>• Accept or override a field value</a:t>
+            </a:r>
+            <a:endParaRPr lang="en-US" sz="1400" dirty="0"/>
+          </a:p>
+          <a:p>
+            <a:pPr indent="0" marL="0">
+              <a:buNone/>
+            </a:pPr>
+            <a:r>
+              <a:rPr lang="en-US" sz="1400" dirty="0">
+                <a:solidFill>
+                  <a:srgbClr val="4D4A45"/>
+                </a:solidFill>
+                <a:latin typeface="Aptos" pitchFamily="34" charset="0"/>
+                <a:ea typeface="Aptos" pitchFamily="34" charset="-122"/>
+                <a:cs typeface="Aptos" pitchFamily="34" charset="-120"/>
+              </a:rPr>
+              <a:t>• (Admin) Create a reviewer account at /admin/users</a:t>
+            </a:r>
+            <a:endParaRPr lang="en-US" sz="1400" dirty="0"/>
           </a:p>
         </p:txBody>
       </p:sp>

--- a/Final_Presentation.pptx
+++ b/Final_Presentation.pptx
@@ -4,6 +4,9 @@
   <p:sldMasterIdLst>
     <p:sldMasterId id="2147483648" r:id="rId1"/>
   </p:sldMasterIdLst>
+  <p:notesMasterIdLst>
+    <p:notesMasterId r:id="rId13"/>
+  </p:notesMasterIdLst>
   <p:sldIdLst>
     <p:sldId id="256" r:id="rId2"/>
     <p:sldId id="257" r:id="rId3"/>
@@ -11,15 +14,12 @@
     <p:sldId id="259" r:id="rId5"/>
     <p:sldId id="260" r:id="rId6"/>
     <p:sldId id="261" r:id="rId7"/>
-    <p:sldId id="265" r:id="rId16"/>
-    <p:sldId id="266" r:id="rId17"/>
-    <p:sldId id="262" r:id="rId8"/>
-    <p:sldId id="263" r:id="rId9"/>
-    <p:sldId id="264" r:id="rId10"/>
+    <p:sldId id="265" r:id="rId8"/>
+    <p:sldId id="266" r:id="rId9"/>
+    <p:sldId id="262" r:id="rId10"/>
+    <p:sldId id="263" r:id="rId11"/>
+    <p:sldId id="264" r:id="rId12"/>
   </p:sldIdLst>
-  <p:notesMasterIdLst>
-    <p:notesMasterId r:id="rId11"/>
-  </p:notesMasterIdLst>
   <p:sldSz cx="12192000" cy="6858000"/>
   <p:notesSz cx="6858000" cy="12192000"/>
   <p:defaultTextStyle>
@@ -114,6 +114,11 @@
       </a:defRPr>
     </a:lvl9pPr>
   </p:defaultTextStyle>
+  <p:extLst>
+    <p:ext uri="{EFAFB233-063F-42B5-8137-9DF3F51BA10A}">
+      <p15:sldGuideLst xmlns:p15="http://schemas.microsoft.com/office/powerpoint/2012/main"/>
+    </p:ext>
+  </p:extLst>
 </p:presentation>
 </file>
 
@@ -139,234 +144,10 @@
           <a:chExt cx="0" cy="0"/>
         </a:xfrm>
       </p:grpSpPr>
-      <p:sp>
-        <p:nvSpPr>
-          <p:cNvPr id="2" name="Header Placeholder 1"/>
-          <p:cNvSpPr>
-            <a:spLocks noGrp="1"/>
-          </p:cNvSpPr>
-          <p:nvPr>
-            <p:ph type="hdr" sz="quarter"/>
-          </p:nvPr>
-        </p:nvSpPr>
-        <p:spPr>
-          <a:xfrm>
-            <a:off x="0" y="0"/>
-            <a:ext cx="2971800" cy="458788"/>
-          </a:xfrm>
-          <a:prstGeom prst="rect">
-            <a:avLst/>
-          </a:prstGeom>
-        </p:spPr>
-        <p:txBody>
-          <a:bodyPr vert="horz" lIns="91440" tIns="45720" rIns="91440" bIns="45720" rtlCol="0"/>
-          <a:lstStyle>
-            <a:lvl1pPr algn="l">
-              <a:defRPr sz="1200"/>
-            </a:lvl1pPr>
-          </a:lstStyle>
-          <a:p>
-            <a:endParaRPr lang="en-US"/>
-          </a:p>
-        </p:txBody>
-      </p:sp>
-      <p:sp>
-        <p:nvSpPr>
-          <p:cNvPr id="3" name="Date Placeholder 2"/>
-          <p:cNvSpPr>
-            <a:spLocks noGrp="1"/>
-          </p:cNvSpPr>
-          <p:nvPr>
-            <p:ph type="dt" idx="1"/>
-          </p:nvPr>
-        </p:nvSpPr>
-        <p:spPr>
-          <a:xfrm>
-            <a:off x="3884613" y="0"/>
-            <a:ext cx="2971800" cy="458788"/>
-          </a:xfrm>
-          <a:prstGeom prst="rect">
-            <a:avLst/>
-          </a:prstGeom>
-        </p:spPr>
-        <p:txBody>
-          <a:bodyPr vert="horz" lIns="91440" tIns="45720" rIns="91440" bIns="45720" rtlCol="0"/>
-          <a:lstStyle>
-            <a:lvl1pPr algn="r">
-              <a:defRPr sz="1200"/>
-            </a:lvl1pPr>
-          </a:lstStyle>
-          <a:p>
-            <a:fld id="{5282F153-3F37-0F45-9E97-73ACFA13230C}" type="datetimeFigureOut">
-              <a:rPr lang="en-US"/>
-              <a:t>7/23/19</a:t>
-            </a:fld>
-            <a:endParaRPr lang="en-US"/>
-          </a:p>
-        </p:txBody>
-      </p:sp>
-      <p:sp>
-        <p:nvSpPr>
-          <p:cNvPr id="4" name="Slide Image Placeholder 3"/>
-          <p:cNvSpPr>
-            <a:spLocks noGrp="1" noRot="1" noChangeAspect="1"/>
-          </p:cNvSpPr>
-          <p:nvPr>
-            <p:ph type="sldImg" idx="2"/>
-          </p:nvPr>
-        </p:nvSpPr>
-        <p:spPr>
-          <a:xfrm>
-            <a:off x="685800" y="1143000"/>
-            <a:ext cx="5486400" cy="3086100"/>
-          </a:xfrm>
-          <a:prstGeom prst="rect">
-            <a:avLst/>
-          </a:prstGeom>
-          <a:noFill/>
-          <a:ln w="12700">
-            <a:solidFill>
-              <a:prstClr val="black"/>
-            </a:solidFill>
-          </a:ln>
-        </p:spPr>
-        <p:txBody>
-          <a:bodyPr vert="horz" lIns="91440" tIns="45720" rIns="91440" bIns="45720" rtlCol="0" anchor="ctr"/>
-          <a:lstStyle/>
-          <a:p>
-            <a:endParaRPr lang="en-US"/>
-          </a:p>
-        </p:txBody>
-      </p:sp>
-      <p:sp>
-        <p:nvSpPr>
-          <p:cNvPr id="5" name="Notes Placeholder 4"/>
-          <p:cNvSpPr>
-            <a:spLocks noGrp="1"/>
-          </p:cNvSpPr>
-          <p:nvPr>
-            <p:ph type="body" sz="quarter" idx="3"/>
-          </p:nvPr>
-        </p:nvSpPr>
-        <p:spPr>
-          <a:xfrm>
-            <a:off x="685800" y="4400550"/>
-            <a:ext cx="5486400" cy="3600450"/>
-          </a:xfrm>
-          <a:prstGeom prst="rect">
-            <a:avLst/>
-          </a:prstGeom>
-        </p:spPr>
-        <p:txBody>
-          <a:bodyPr vert="horz" lIns="91440" tIns="45720" rIns="91440" bIns="45720" rtlCol="0"/>
-          <a:lstStyle/>
-          <a:p>
-            <a:pPr lvl="0"/>
-            <a:r>
-              <a:rPr lang="en-US"/>
-              <a:t>Click to edit Master text styles</a:t>
-            </a:r>
-          </a:p>
-          <a:p>
-            <a:pPr lvl="1"/>
-            <a:r>
-              <a:rPr lang="en-US"/>
-              <a:t>Second level</a:t>
-            </a:r>
-          </a:p>
-          <a:p>
-            <a:pPr lvl="2"/>
-            <a:r>
-              <a:rPr lang="en-US"/>
-              <a:t>Third level</a:t>
-            </a:r>
-          </a:p>
-          <a:p>
-            <a:pPr lvl="3"/>
-            <a:r>
-              <a:rPr lang="en-US"/>
-              <a:t>Fourth level</a:t>
-            </a:r>
-          </a:p>
-          <a:p>
-            <a:pPr lvl="4"/>
-            <a:r>
-              <a:rPr lang="en-US"/>
-              <a:t>Fifth level</a:t>
-            </a:r>
-          </a:p>
-        </p:txBody>
-      </p:sp>
-      <p:sp>
-        <p:nvSpPr>
-          <p:cNvPr id="6" name="Footer Placeholder 5"/>
-          <p:cNvSpPr>
-            <a:spLocks noGrp="1"/>
-          </p:cNvSpPr>
-          <p:nvPr>
-            <p:ph type="ftr" sz="quarter" idx="4"/>
-          </p:nvPr>
-        </p:nvSpPr>
-        <p:spPr>
-          <a:xfrm>
-            <a:off x="0" y="8685213"/>
-            <a:ext cx="2971800" cy="458787"/>
-          </a:xfrm>
-          <a:prstGeom prst="rect">
-            <a:avLst/>
-          </a:prstGeom>
-        </p:spPr>
-        <p:txBody>
-          <a:bodyPr vert="horz" lIns="91440" tIns="45720" rIns="91440" bIns="45720" rtlCol="0" anchor="b"/>
-          <a:lstStyle>
-            <a:lvl1pPr algn="l">
-              <a:defRPr sz="1200"/>
-            </a:lvl1pPr>
-          </a:lstStyle>
-          <a:p>
-            <a:endParaRPr lang="en-US"/>
-          </a:p>
-        </p:txBody>
-      </p:sp>
-      <p:sp>
-        <p:nvSpPr>
-          <p:cNvPr id="7" name="Slide Number Placeholder 6"/>
-          <p:cNvSpPr>
-            <a:spLocks noGrp="1"/>
-          </p:cNvSpPr>
-          <p:nvPr>
-            <p:ph type="sldNum" sz="quarter" idx="5"/>
-          </p:nvPr>
-        </p:nvSpPr>
-        <p:spPr>
-          <a:xfrm>
-            <a:off x="3884613" y="8685213"/>
-            <a:ext cx="2971800" cy="458787"/>
-          </a:xfrm>
-          <a:prstGeom prst="rect">
-            <a:avLst/>
-          </a:prstGeom>
-        </p:spPr>
-        <p:txBody>
-          <a:bodyPr vert="horz" lIns="91440" tIns="45720" rIns="91440" bIns="45720" rtlCol="0" anchor="b"/>
-          <a:lstStyle>
-            <a:lvl1pPr algn="r">
-              <a:defRPr sz="1200"/>
-            </a:lvl1pPr>
-          </a:lstStyle>
-          <a:p>
-            <a:fld id="{CE5E9CC1-C706-0F49-92D6-E571CC5EEA8F}" type="slidenum">
-              <a:rPr lang="en-US"/>
-              <a:t>‹#›</a:t>
-            </a:fld>
-            <a:endParaRPr lang="en-US"/>
-          </a:p>
-        </p:txBody>
-      </p:sp>
     </p:spTree>
     <p:extLst>
       <p:ext uri="{BB962C8B-B14F-4D97-AF65-F5344CB8AC3E}">
-        <p14:creationId xmlns:p14="http://schemas.microsoft.com/office/powerpoint/2010/main" val="1024086991"/>
+        <p14:creationId xmlns:p14="http://schemas.microsoft.com/office/powerpoint/2010/main" val="164069836"/>
       </p:ext>
     </p:extLst>
   </p:cSld>
@@ -517,7 +298,6 @@
 - Project brief and branding cues from uploaded PDF: /mnt/data/Fivos Multi-Agent AI System for Automated Medical Device Data Harvesting and Regulatory Validation.pdf
 - Project scope context from uploaded Phase 1 and Phase 2 documents.</a:t>
             </a:r>
-            <a:endParaRPr lang="en-US" dirty="0"/>
           </a:p>
         </p:txBody>
       </p:sp>
@@ -601,10 +381,6 @@
           <a:bodyPr/>
           <a:lstStyle/>
           <a:p>
-            <a:r>
-              <a:rPr lang="en-US" dirty="0"/>
-              <a:t/>
-            </a:r>
             <a:endParaRPr lang="en-US" dirty="0"/>
           </a:p>
         </p:txBody>
@@ -689,10 +465,6 @@
           <a:bodyPr/>
           <a:lstStyle/>
           <a:p>
-            <a:r>
-              <a:rPr lang="en-US" dirty="0"/>
-              <a:t/>
-            </a:r>
             <a:endParaRPr lang="en-US" dirty="0"/>
           </a:p>
         </p:txBody>
@@ -777,10 +549,6 @@
           <a:bodyPr/>
           <a:lstStyle/>
           <a:p>
-            <a:r>
-              <a:rPr lang="en-US" dirty="0"/>
-              <a:t/>
-            </a:r>
             <a:endParaRPr lang="en-US" dirty="0"/>
           </a:p>
         </p:txBody>
@@ -865,10 +633,6 @@
           <a:bodyPr/>
           <a:lstStyle/>
           <a:p>
-            <a:r>
-              <a:rPr lang="en-US" dirty="0"/>
-              <a:t/>
-            </a:r>
             <a:endParaRPr lang="en-US" dirty="0"/>
           </a:p>
         </p:txBody>
@@ -953,10 +717,6 @@
           <a:bodyPr/>
           <a:lstStyle/>
           <a:p>
-            <a:r>
-              <a:rPr lang="en-US" dirty="0"/>
-              <a:t/>
-            </a:r>
             <a:endParaRPr lang="en-US" dirty="0"/>
           </a:p>
         </p:txBody>
@@ -1041,10 +801,6 @@
           <a:bodyPr/>
           <a:lstStyle/>
           <a:p>
-            <a:r>
-              <a:rPr lang="en-US" dirty="0"/>
-              <a:t/>
-            </a:r>
             <a:endParaRPr lang="en-US" dirty="0"/>
           </a:p>
         </p:txBody>
@@ -1066,7 +822,7 @@
           <a:p>
             <a:fld id="{F7021451-1387-4CA6-816F-3879F97B5CBC}" type="slidenum">
               <a:rPr lang="en-US"/>
-              <a:t>7</a:t>
+              <a:t>9</a:t>
             </a:fld>
             <a:endParaRPr lang="en-US"/>
           </a:p>
@@ -1129,10 +885,6 @@
           <a:bodyPr/>
           <a:lstStyle/>
           <a:p>
-            <a:r>
-              <a:rPr lang="en-US" dirty="0"/>
-              <a:t/>
-            </a:r>
             <a:endParaRPr lang="en-US" dirty="0"/>
           </a:p>
         </p:txBody>
@@ -1154,7 +906,7 @@
           <a:p>
             <a:fld id="{F7021451-1387-4CA6-816F-3879F97B5CBC}" type="slidenum">
               <a:rPr lang="en-US"/>
-              <a:t>8</a:t>
+              <a:t>10</a:t>
             </a:fld>
             <a:endParaRPr lang="en-US"/>
           </a:p>
@@ -1217,10 +969,6 @@
           <a:bodyPr/>
           <a:lstStyle/>
           <a:p>
-            <a:r>
-              <a:rPr lang="en-US" dirty="0"/>
-              <a:t/>
-            </a:r>
             <a:endParaRPr lang="en-US" dirty="0"/>
           </a:p>
         </p:txBody>
@@ -1242,7 +990,7 @@
           <a:p>
             <a:fld id="{F7021451-1387-4CA6-816F-3879F97B5CBC}" type="slidenum">
               <a:rPr lang="en-US"/>
-              <a:t>9</a:t>
+              <a:t>11</a:t>
             </a:fld>
             <a:endParaRPr lang="en-US"/>
           </a:p>
@@ -1299,6 +1047,7 @@
         <a:solidFill>
           <a:srgbClr val="F7F5F2"/>
         </a:solidFill>
+        <a:effectLst/>
       </p:bgPr>
     </p:bg>
     <p:spTree>
@@ -1341,6 +1090,13 @@
             <a:prstDash val="solid"/>
           </a:ln>
         </p:spPr>
+        <p:txBody>
+          <a:bodyPr/>
+          <a:lstStyle/>
+          <a:p>
+            <a:endParaRPr lang="en-US"/>
+          </a:p>
+        </p:txBody>
       </p:sp>
       <p:sp>
         <p:nvSpPr>
@@ -1363,7 +1119,7 @@
           <a:bodyPr wrap="square" lIns="0" tIns="0" rIns="0" bIns="0" rtlCol="0" anchor="ctr"/>
           <a:lstStyle/>
           <a:p>
-            <a:pPr indent="0" marL="0">
+            <a:pPr marL="0" indent="0">
               <a:buNone/>
             </a:pPr>
             <a:r>
@@ -1402,7 +1158,7 @@
           <a:bodyPr wrap="square" lIns="0" tIns="0" rIns="0" bIns="0" rtlCol="0" anchor="ctr"/>
           <a:lstStyle/>
           <a:p>
-            <a:pPr algn="r" indent="0" marL="0">
+            <a:pPr marL="0" indent="0" algn="r">
               <a:buNone/>
             </a:pPr>
             <a:r>
@@ -1440,7 +1196,7 @@
           </a:prstGeom>
           <a:extLst>
             <a:ext uri="{C572A759-6A51-4108-AA02-DFA0A04FC94B}">
-              <ma14:wrappingTextBoxFlag xmlns:ma14="http://schemas.microsoft.com/office/mac/drawingml/2011/main" val="0"/>
+              <ma14:wrappingTextBoxFlag xmlns:ma14="http://schemas.microsoft.com/office/mac/drawingml/2011/main" xmlns="" val="0"/>
             </a:ext>
           </a:extLst>
         </p:spPr>
@@ -1461,8 +1217,8 @@
           <a:p>
             <a:pPr algn="r"/>
             <a:fld id="{F7021451-1387-4CA6-816F-3879F97B5CBC}" type="slidenum">
-              <a:rPr b="0" lang="en-US"/>
-              <a:t>1002</a:t>
+              <a:rPr lang="en-US" b="0"/>
+              <a:t>‹#›</a:t>
             </a:fld>
             <a:endParaRPr lang="en-US"/>
           </a:p>
@@ -1479,6 +1235,11 @@
 <file path=ppt/slideMasters/slideMaster1.xml><?xml version="1.0" encoding="utf-8"?>
 <p:sldMaster xmlns:a="http://schemas.openxmlformats.org/drawingml/2006/main" xmlns:r="http://schemas.openxmlformats.org/officeDocument/2006/relationships" xmlns:p="http://schemas.openxmlformats.org/presentationml/2006/main">
   <p:cSld>
+    <p:bg>
+      <p:bgRef idx="1001">
+        <a:schemeClr val="bg1"/>
+      </p:bgRef>
+    </p:bg>
     <p:spTree>
       <p:nvGrpSpPr>
         <p:cNvPr id="1" name=""/>
@@ -1513,7 +1274,7 @@
           </a:prstGeom>
           <a:extLst>
             <a:ext uri="{C572A759-6A51-4108-AA02-DFA0A04FC94B}">
-              <ma14:wrappingTextBoxFlag xmlns:ma14="http://schemas.microsoft.com/office/mac/drawingml/2011/main" val="0"/>
+              <ma14:wrappingTextBoxFlag xmlns:ma14="http://schemas.microsoft.com/office/mac/drawingml/2011/main" xmlns="" val="0"/>
             </a:ext>
           </a:extLst>
         </p:spPr>
@@ -1534,8 +1295,8 @@
           <a:p>
             <a:pPr algn="r"/>
             <a:fld id="{F7021451-1387-4CA6-816F-3879F97B5CBC}" type="slidenum">
-              <a:rPr b="0" lang="en-US"/>
-              <a:t>null</a:t>
+              <a:rPr lang="en-US" b="0"/>
+              <a:t>‹#›</a:t>
             </a:fld>
             <a:endParaRPr lang="en-US"/>
           </a:p>
@@ -1810,6 +1571,7 @@
         <a:solidFill>
           <a:srgbClr val="F7F5F2"/>
         </a:solidFill>
+        <a:effectLst/>
       </p:bgPr>
     </p:bg>
     <p:spTree>
@@ -1852,6 +1614,13 @@
             <a:prstDash val="solid"/>
           </a:ln>
         </p:spPr>
+        <p:txBody>
+          <a:bodyPr/>
+          <a:lstStyle/>
+          <a:p>
+            <a:endParaRPr lang="en-US"/>
+          </a:p>
+        </p:txBody>
       </p:sp>
       <p:sp>
         <p:nvSpPr>
@@ -1879,6 +1648,13 @@
             <a:prstDash val="solid"/>
           </a:ln>
         </p:spPr>
+        <p:txBody>
+          <a:bodyPr/>
+          <a:lstStyle/>
+          <a:p>
+            <a:endParaRPr lang="en-US"/>
+          </a:p>
+        </p:txBody>
       </p:sp>
       <p:sp>
         <p:nvSpPr>
@@ -1906,6 +1682,13 @@
             <a:prstDash val="solid"/>
           </a:ln>
         </p:spPr>
+        <p:txBody>
+          <a:bodyPr/>
+          <a:lstStyle/>
+          <a:p>
+            <a:endParaRPr lang="en-US"/>
+          </a:p>
+        </p:txBody>
       </p:sp>
       <p:sp>
         <p:nvSpPr>
@@ -1933,6 +1716,13 @@
             <a:prstDash val="solid"/>
           </a:ln>
         </p:spPr>
+        <p:txBody>
+          <a:bodyPr/>
+          <a:lstStyle/>
+          <a:p>
+            <a:endParaRPr lang="en-US"/>
+          </a:p>
+        </p:txBody>
       </p:sp>
       <p:sp>
         <p:nvSpPr>
@@ -1942,7 +1732,7 @@
         </p:nvSpPr>
         <p:spPr>
           <a:xfrm rot="9600000">
-            <a:off x="658368" y="868680"/>
+            <a:off x="676656" y="926984"/>
             <a:ext cx="566928" cy="256032"/>
           </a:xfrm>
           <a:prstGeom prst="chevron">
@@ -1962,6 +1752,13 @@
             <a:prstDash val="solid"/>
           </a:ln>
         </p:spPr>
+        <p:txBody>
+          <a:bodyPr/>
+          <a:lstStyle/>
+          <a:p>
+            <a:endParaRPr lang="en-US"/>
+          </a:p>
+        </p:txBody>
       </p:sp>
       <p:sp>
         <p:nvSpPr>
@@ -1991,6 +1788,13 @@
             <a:prstDash val="solid"/>
           </a:ln>
         </p:spPr>
+        <p:txBody>
+          <a:bodyPr/>
+          <a:lstStyle/>
+          <a:p>
+            <a:endParaRPr lang="en-US"/>
+          </a:p>
+        </p:txBody>
       </p:sp>
       <p:sp>
         <p:nvSpPr>
@@ -2018,6 +1822,13 @@
             <a:prstDash val="solid"/>
           </a:ln>
         </p:spPr>
+        <p:txBody>
+          <a:bodyPr/>
+          <a:lstStyle/>
+          <a:p>
+            <a:endParaRPr lang="en-US"/>
+          </a:p>
+        </p:txBody>
       </p:sp>
       <p:sp>
         <p:nvSpPr>
@@ -2040,11 +1851,11 @@
           <a:bodyPr wrap="square" lIns="0" tIns="0" rIns="0" bIns="0" rtlCol="0" anchor="ctr"/>
           <a:lstStyle/>
           <a:p>
-            <a:pPr indent="0" marL="0">
-              <a:buNone/>
-            </a:pPr>
-            <a:r>
-              <a:rPr lang="en-US" sz="3200" dirty="0" b="1">
+            <a:pPr marL="0" indent="0">
+              <a:buNone/>
+            </a:pPr>
+            <a:r>
+              <a:rPr lang="en-US" sz="2800" b="1" dirty="0">
                 <a:solidFill>
                   <a:srgbClr val="17306F"/>
                 </a:solidFill>
@@ -2054,14 +1865,14 @@
               </a:rPr>
               <a:t>Fivos — Automated Medical Device</a:t>
             </a:r>
-            <a:endParaRPr lang="en-US" sz="3200" dirty="0"/>
-          </a:p>
-          <a:p>
-            <a:pPr indent="0" marL="0">
-              <a:buNone/>
-            </a:pPr>
-            <a:r>
-              <a:rPr lang="en-US" sz="3200" dirty="0" b="1">
+            <a:endParaRPr lang="en-US" sz="2800" dirty="0"/>
+          </a:p>
+          <a:p>
+            <a:pPr marL="0" indent="0">
+              <a:buNone/>
+            </a:pPr>
+            <a:r>
+              <a:rPr lang="en-US" sz="2800" b="1" dirty="0">
                 <a:solidFill>
                   <a:srgbClr val="17306F"/>
                 </a:solidFill>
@@ -2071,7 +1882,7 @@
               </a:rPr>
               <a:t>Harvesting &amp; Regulatory Validation</a:t>
             </a:r>
-            <a:endParaRPr lang="en-US" sz="3200" dirty="0"/>
+            <a:endParaRPr lang="en-US" sz="2800" dirty="0"/>
           </a:p>
         </p:txBody>
       </p:sp>
@@ -2096,7 +1907,7 @@
           <a:bodyPr wrap="square" lIns="0" tIns="0" rIns="0" bIns="0" rtlCol="0" anchor="ctr"/>
           <a:lstStyle/>
           <a:p>
-            <a:pPr indent="0" marL="0">
+            <a:pPr marL="0" indent="0">
               <a:buNone/>
             </a:pPr>
             <a:r>
@@ -2135,7 +1946,7 @@
           <a:bodyPr wrap="square" lIns="0" tIns="0" rIns="0" bIns="0" rtlCol="0" anchor="ctr"/>
           <a:lstStyle/>
           <a:p>
-            <a:pPr indent="0" marL="0">
+            <a:pPr marL="0" indent="0">
               <a:buNone/>
             </a:pPr>
             <a:r>
@@ -2152,7 +1963,7 @@
             <a:endParaRPr lang="en-US" sz="1300" dirty="0"/>
           </a:p>
           <a:p>
-            <a:pPr indent="0" marL="0">
+            <a:pPr marL="0" indent="0">
               <a:buNone/>
             </a:pPr>
             <a:r>
@@ -2169,7 +1980,7 @@
             <a:endParaRPr lang="en-US" sz="1300" dirty="0"/>
           </a:p>
           <a:p>
-            <a:pPr indent="0" marL="0">
+            <a:pPr marL="0" indent="0">
               <a:buNone/>
             </a:pPr>
             <a:r>
@@ -2213,6 +2024,13 @@
             <a:prstDash val="solid"/>
           </a:ln>
         </p:spPr>
+        <p:txBody>
+          <a:bodyPr/>
+          <a:lstStyle/>
+          <a:p>
+            <a:endParaRPr lang="en-US"/>
+          </a:p>
+        </p:txBody>
       </p:sp>
       <p:sp>
         <p:nvSpPr>
@@ -2235,7 +2053,7 @@
           <a:bodyPr wrap="square" lIns="0" tIns="0" rIns="0" bIns="0" rtlCol="0" anchor="ctr"/>
           <a:lstStyle/>
           <a:p>
-            <a:pPr indent="0" marL="0">
+            <a:pPr marL="0" indent="0">
               <a:buNone/>
             </a:pPr>
             <a:r>
@@ -2274,7 +2092,7 @@
           <a:bodyPr wrap="square" lIns="0" tIns="0" rIns="0" bIns="0" rtlCol="0" anchor="ctr"/>
           <a:lstStyle/>
           <a:p>
-            <a:pPr indent="0" marL="0">
+            <a:pPr marL="0" indent="0">
               <a:buNone/>
             </a:pPr>
             <a:r>
@@ -2291,7 +2109,7 @@
             <a:endParaRPr lang="en-US" sz="1400" dirty="0"/>
           </a:p>
           <a:p>
-            <a:pPr indent="0" marL="0">
+            <a:pPr marL="0" indent="0">
               <a:buNone/>
             </a:pPr>
             <a:r>
@@ -2308,7 +2126,7 @@
             <a:endParaRPr lang="en-US" sz="1400" dirty="0"/>
           </a:p>
           <a:p>
-            <a:pPr indent="0" marL="0">
+            <a:pPr marL="0" indent="0">
               <a:buNone/>
             </a:pPr>
             <a:r>
@@ -2347,7 +2165,7 @@
           <a:bodyPr wrap="square" lIns="0" tIns="0" rIns="0" bIns="0" rtlCol="0" anchor="ctr"/>
           <a:lstStyle/>
           <a:p>
-            <a:pPr indent="0" marL="0">
+            <a:pPr marL="0" indent="0">
               <a:buNone/>
             </a:pPr>
             <a:r>
@@ -2385,7 +2203,7 @@
           </a:prstGeom>
           <a:extLst>
             <a:ext uri="{C572A759-6A51-4108-AA02-DFA0A04FC94B}">
-              <ma14:wrappingTextBoxFlag xmlns:ma14="http://schemas.microsoft.com/office/mac/drawingml/2011/main" val="0"/>
+              <ma14:wrappingTextBoxFlag xmlns:ma14="http://schemas.microsoft.com/office/mac/drawingml/2011/main" xmlns="" val="0"/>
             </a:ext>
           </a:extLst>
         </p:spPr>
@@ -2406,7 +2224,7 @@
           <a:p>
             <a:pPr algn="r"/>
             <a:fld id="{F7021451-1387-4CA6-816F-3879F97B5CBC}" type="slidenum">
-              <a:rPr b="0" lang="en-US"/>
+              <a:rPr lang="en-US" b="0"/>
               <a:t>1</a:t>
             </a:fld>
             <a:endParaRPr lang="en-US"/>
@@ -2422,8 +2240,8 @@
 </file>
 
 <file path=ppt/slides/slide10.xml><?xml version="1.0" encoding="utf-8"?>
-<p:sld xmlns:a="http://schemas.openxmlformats.org/drawingml/2006/main" xmlns:p="http://schemas.openxmlformats.org/presentationml/2006/main" xmlns:r="http://schemas.openxmlformats.org/officeDocument/2006/relationships">
-  <p:cSld>
+<p:sld xmlns:a="http://schemas.openxmlformats.org/drawingml/2006/main" xmlns:r="http://schemas.openxmlformats.org/officeDocument/2006/relationships" xmlns:p="http://schemas.openxmlformats.org/presentationml/2006/main">
+  <p:cSld name="Slide 8">
     <p:spTree>
       <p:nvGrpSpPr>
         <p:cNvPr id="1" name=""/>
@@ -2464,6 +2282,13 @@
             <a:prstDash val="solid"/>
           </a:ln>
         </p:spPr>
+        <p:txBody>
+          <a:bodyPr/>
+          <a:lstStyle/>
+          <a:p>
+            <a:endParaRPr lang="en-US"/>
+          </a:p>
+        </p:txBody>
       </p:sp>
       <p:sp>
         <p:nvSpPr>
@@ -2491,6 +2316,13 @@
             <a:prstDash val="solid"/>
           </a:ln>
         </p:spPr>
+        <p:txBody>
+          <a:bodyPr/>
+          <a:lstStyle/>
+          <a:p>
+            <a:endParaRPr lang="en-US"/>
+          </a:p>
+        </p:txBody>
       </p:sp>
       <p:sp>
         <p:nvSpPr>
@@ -2518,6 +2350,13 @@
             <a:prstDash val="solid"/>
           </a:ln>
         </p:spPr>
+        <p:txBody>
+          <a:bodyPr/>
+          <a:lstStyle/>
+          <a:p>
+            <a:endParaRPr lang="en-US"/>
+          </a:p>
+        </p:txBody>
       </p:sp>
       <p:sp>
         <p:nvSpPr>
@@ -2545,6 +2384,13 @@
             <a:prstDash val="solid"/>
           </a:ln>
         </p:spPr>
+        <p:txBody>
+          <a:bodyPr/>
+          <a:lstStyle/>
+          <a:p>
+            <a:endParaRPr lang="en-US"/>
+          </a:p>
+        </p:txBody>
       </p:sp>
       <p:sp>
         <p:nvSpPr>
@@ -2567,11 +2413,11 @@
           <a:bodyPr wrap="square" lIns="0" tIns="0" rIns="0" bIns="0" rtlCol="0" anchor="ctr"/>
           <a:lstStyle/>
           <a:p>
-            <a:pPr indent="0" marL="0">
-              <a:buNone/>
-            </a:pPr>
-            <a:r>
-              <a:rPr lang="en-US" sz="2600" dirty="0" b="1">
+            <a:pPr marL="0" indent="0">
+              <a:buNone/>
+            </a:pPr>
+            <a:r>
+              <a:rPr lang="en-US" sz="2600" b="1" dirty="0">
                 <a:solidFill>
                   <a:srgbClr val="17306F"/>
                 </a:solidFill>
@@ -2579,7 +2425,7 @@
                 <a:ea typeface="Aptos Display" pitchFamily="34" charset="-122"/>
                 <a:cs typeface="Aptos Display" pitchFamily="34" charset="-120"/>
               </a:rPr>
-              <a:t>Non-Functional Requirements</a:t>
+              <a:t>Meet the Team — Vibe Coders</a:t>
             </a:r>
             <a:endParaRPr lang="en-US" sz="2600" dirty="0"/>
           </a:p>
@@ -2606,7 +2452,7 @@
           <a:bodyPr wrap="square" lIns="0" tIns="0" rIns="0" bIns="0" rtlCol="0" anchor="ctr"/>
           <a:lstStyle/>
           <a:p>
-            <a:pPr indent="0" marL="0">
+            <a:pPr marL="0" indent="0">
               <a:buNone/>
             </a:pPr>
             <a:r>
@@ -2618,7 +2464,7 @@
                 <a:ea typeface="Aptos" pitchFamily="34" charset="-122"/>
                 <a:cs typeface="Aptos" pitchFamily="34" charset="-120"/>
               </a:rPr>
-              <a:t>Quality attributes and operational constraints</a:t>
+              <a:t>CIS 497 Senior Design, Spring 2026  |  Client: Doug Greene, Fivos Health</a:t>
             </a:r>
             <a:endParaRPr lang="en-US" sz="1200" dirty="0"/>
           </a:p>
@@ -2646,6 +2492,13 @@
             <a:prstDash val="solid"/>
           </a:ln>
         </p:spPr>
+        <p:txBody>
+          <a:bodyPr/>
+          <a:lstStyle/>
+          <a:p>
+            <a:endParaRPr lang="en-US"/>
+          </a:p>
+        </p:txBody>
       </p:sp>
       <p:sp>
         <p:nvSpPr>
@@ -2655,54 +2508,150 @@
         </p:nvSpPr>
         <p:spPr>
           <a:xfrm>
-            <a:off x="4059936" y="1783080"/>
-            <a:ext cx="0" cy="3611880"/>
-          </a:xfrm>
-          <a:prstGeom prst="line">
-            <a:avLst/>
-          </a:prstGeom>
-          <a:noFill/>
+            <a:off x="960120" y="1920240"/>
+            <a:ext cx="960120" cy="960120"/>
+          </a:xfrm>
+          <a:prstGeom prst="ellipse">
+            <a:avLst/>
+          </a:prstGeom>
+          <a:solidFill>
+            <a:srgbClr val="FBFAF8"/>
+          </a:solidFill>
           <a:ln w="12700">
             <a:solidFill>
-              <a:srgbClr val="D8D0C7"/>
+              <a:srgbClr val="6BC5C5"/>
             </a:solidFill>
             <a:prstDash val="solid"/>
           </a:ln>
         </p:spPr>
-      </p:sp>
-      <p:sp>
-        <p:nvSpPr>
-          <p:cNvPr id="10" name="Shape 8"/>
-          <p:cNvSpPr/>
-          <p:nvPr/>
-        </p:nvSpPr>
-        <p:spPr>
-          <a:xfrm>
-            <a:off x="8119872" y="1783080"/>
-            <a:ext cx="0" cy="3611880"/>
-          </a:xfrm>
-          <a:prstGeom prst="line">
-            <a:avLst/>
-          </a:prstGeom>
-          <a:noFill/>
+        <p:txBody>
+          <a:bodyPr/>
+          <a:lstStyle/>
+          <a:p>
+            <a:endParaRPr lang="en-US"/>
+          </a:p>
+        </p:txBody>
+      </p:sp>
+      <p:sp>
+        <p:nvSpPr>
+          <p:cNvPr id="10" name="Text 8"/>
+          <p:cNvSpPr/>
+          <p:nvPr/>
+        </p:nvSpPr>
+        <p:spPr>
+          <a:xfrm>
+            <a:off x="731520" y="2999232"/>
+            <a:ext cx="1417320" cy="228600"/>
+          </a:xfrm>
+          <a:prstGeom prst="rect">
+            <a:avLst/>
+          </a:prstGeom>
+          <a:noFill/>
+          <a:ln/>
+        </p:spPr>
+        <p:txBody>
+          <a:bodyPr wrap="square" lIns="0" tIns="0" rIns="0" bIns="0" rtlCol="0" anchor="ctr"/>
+          <a:lstStyle/>
+          <a:p>
+            <a:pPr marL="0" indent="0">
+              <a:buNone/>
+            </a:pPr>
+            <a:r>
+              <a:rPr lang="en-US" sz="1600" b="1" dirty="0">
+                <a:solidFill>
+                  <a:srgbClr val="17306F"/>
+                </a:solidFill>
+                <a:latin typeface="Aptos Display" pitchFamily="34" charset="0"/>
+                <a:ea typeface="Aptos Display" pitchFamily="34" charset="-122"/>
+                <a:cs typeface="Aptos Display" pitchFamily="34" charset="-120"/>
+              </a:rPr>
+              <a:t>Jonathan</a:t>
+            </a:r>
+            <a:endParaRPr lang="en-US" sz="1600" dirty="0"/>
+          </a:p>
+        </p:txBody>
+      </p:sp>
+      <p:sp>
+        <p:nvSpPr>
+          <p:cNvPr id="11" name="Text 9"/>
+          <p:cNvSpPr/>
+          <p:nvPr/>
+        </p:nvSpPr>
+        <p:spPr>
+          <a:xfrm>
+            <a:off x="640080" y="3246120"/>
+            <a:ext cx="1600200" cy="182880"/>
+          </a:xfrm>
+          <a:prstGeom prst="rect">
+            <a:avLst/>
+          </a:prstGeom>
+          <a:noFill/>
+          <a:ln/>
+        </p:spPr>
+        <p:txBody>
+          <a:bodyPr wrap="square" lIns="0" tIns="0" rIns="0" bIns="0" rtlCol="0" anchor="ctr"/>
+          <a:lstStyle/>
+          <a:p>
+            <a:pPr marL="0" indent="0">
+              <a:buNone/>
+            </a:pPr>
+            <a:r>
+              <a:rPr lang="en-US" sz="1200" dirty="0">
+                <a:solidFill>
+                  <a:srgbClr val="726656"/>
+                </a:solidFill>
+                <a:latin typeface="Aptos" pitchFamily="34" charset="0"/>
+                <a:ea typeface="Aptos" pitchFamily="34" charset="-122"/>
+                <a:cs typeface="Aptos" pitchFamily="34" charset="-120"/>
+              </a:rPr>
+              <a:t>Orchestration &amp; Runner</a:t>
+            </a:r>
+            <a:endParaRPr lang="en-US" sz="1200" dirty="0"/>
+          </a:p>
+        </p:txBody>
+      </p:sp>
+      <p:sp>
+        <p:nvSpPr>
+          <p:cNvPr id="12" name="Shape 10"/>
+          <p:cNvSpPr/>
+          <p:nvPr/>
+        </p:nvSpPr>
+        <p:spPr>
+          <a:xfrm>
+            <a:off x="3886200" y="1920240"/>
+            <a:ext cx="960120" cy="960120"/>
+          </a:xfrm>
+          <a:prstGeom prst="ellipse">
+            <a:avLst/>
+          </a:prstGeom>
+          <a:solidFill>
+            <a:srgbClr val="FBFAF8"/>
+          </a:solidFill>
           <a:ln w="12700">
             <a:solidFill>
-              <a:srgbClr val="D8D0C7"/>
+              <a:srgbClr val="6BC5C5"/>
             </a:solidFill>
             <a:prstDash val="solid"/>
           </a:ln>
         </p:spPr>
-      </p:sp>
-      <p:sp>
-        <p:nvSpPr>
-          <p:cNvPr id="11" name="Text 9"/>
-          <p:cNvSpPr/>
-          <p:nvPr/>
-        </p:nvSpPr>
-        <p:spPr>
-          <a:xfrm>
-            <a:off x="822960" y="1901952"/>
-            <a:ext cx="2743200" cy="256032"/>
+        <p:txBody>
+          <a:bodyPr/>
+          <a:lstStyle/>
+          <a:p>
+            <a:endParaRPr lang="en-US"/>
+          </a:p>
+        </p:txBody>
+      </p:sp>
+      <p:sp>
+        <p:nvSpPr>
+          <p:cNvPr id="13" name="Text 11"/>
+          <p:cNvSpPr/>
+          <p:nvPr/>
+        </p:nvSpPr>
+        <p:spPr>
+          <a:xfrm>
+            <a:off x="3657600" y="2999232"/>
+            <a:ext cx="1417320" cy="228600"/>
           </a:xfrm>
           <a:prstGeom prst="rect">
             <a:avLst/>
@@ -2714,124 +2663,34 @@
           <a:bodyPr wrap="square" lIns="0" tIns="0" rIns="0" bIns="0" rtlCol="0" anchor="ctr"/>
           <a:lstStyle/>
           <a:p>
-            <a:pPr indent="0" marL="0">
-              <a:buNone/>
-            </a:pPr>
-            <a:r>
-              <a:rPr lang="en-US" sz="1800" dirty="0" b="1">
-                <a:solidFill>
-                  <a:srgbClr val="726656"/>
+            <a:pPr marL="0" indent="0">
+              <a:buNone/>
+            </a:pPr>
+            <a:r>
+              <a:rPr lang="en-US" sz="1600" b="1" dirty="0">
+                <a:solidFill>
+                  <a:srgbClr val="17306F"/>
                 </a:solidFill>
                 <a:latin typeface="Aptos Display" pitchFamily="34" charset="0"/>
                 <a:ea typeface="Aptos Display" pitchFamily="34" charset="-122"/>
                 <a:cs typeface="Aptos Display" pitchFamily="34" charset="-120"/>
               </a:rPr>
-              <a:t>Security</a:t>
-            </a:r>
-            <a:endParaRPr lang="en-US" sz="1800" dirty="0"/>
-          </a:p>
-        </p:txBody>
-      </p:sp>
-      <p:sp>
-        <p:nvSpPr>
-          <p:cNvPr id="12" name="Text 10"/>
-          <p:cNvSpPr/>
-          <p:nvPr/>
-        </p:nvSpPr>
-        <p:spPr>
-          <a:xfrm>
-            <a:off x="822960" y="2468880"/>
-            <a:ext cx="2743200" cy="1280160"/>
-          </a:xfrm>
-          <a:prstGeom prst="rect">
-            <a:avLst/>
-          </a:prstGeom>
-          <a:noFill/>
-          <a:ln/>
-        </p:spPr>
-        <p:txBody>
-          <a:bodyPr wrap="square" lIns="254" tIns="254" rIns="254" bIns="254" rtlCol="0" anchor="ctr"/>
-          <a:lstStyle/>
-          <a:p>
-            <a:pPr indent="0" marL="0">
-              <a:buNone/>
-            </a:pPr>
-            <a:r>
-              <a:rPr lang="en-US" sz="1400" dirty="0">
-                <a:solidFill>
-                  <a:srgbClr val="4D4A45"/>
-                </a:solidFill>
-                <a:latin typeface="Aptos" pitchFamily="34" charset="0"/>
-                <a:ea typeface="Aptos" pitchFamily="34" charset="-122"/>
-                <a:cs typeface="Aptos" pitchFamily="34" charset="-120"/>
-              </a:rPr>
-              <a:t>• CSRF tokens on all 13 POST forms (secrets.compare_digest)</a:t>
-            </a:r>
-            <a:endParaRPr lang="en-US" sz="1400" dirty="0"/>
-          </a:p>
-          <a:p>
-            <a:pPr indent="0" marL="0">
-              <a:buNone/>
-            </a:pPr>
-            <a:r>
-              <a:rPr lang="en-US" sz="1400" dirty="0">
-                <a:solidFill>
-                  <a:srgbClr val="4D4A45"/>
-                </a:solidFill>
-                <a:latin typeface="Aptos" pitchFamily="34" charset="0"/>
-                <a:ea typeface="Aptos" pitchFamily="34" charset="-122"/>
-                <a:cs typeface="Aptos" pitchFamily="34" charset="-120"/>
-              </a:rPr>
-              <a:t>• Security headers: CSP, X-Frame-Options, Cache-Control, COEP</a:t>
-            </a:r>
-            <a:endParaRPr lang="en-US" sz="1400" dirty="0"/>
-          </a:p>
-          <a:p>
-            <a:pPr indent="0" marL="0">
-              <a:buNone/>
-            </a:pPr>
-            <a:r>
-              <a:rPr lang="en-US" sz="1400" dirty="0">
-                <a:solidFill>
-                  <a:srgbClr val="4D4A45"/>
-                </a:solidFill>
-                <a:latin typeface="Aptos" pitchFamily="34" charset="0"/>
-                <a:ea typeface="Aptos" pitchFamily="34" charset="-122"/>
-                <a:cs typeface="Aptos" pitchFamily="34" charset="-120"/>
-              </a:rPr>
-              <a:t>• bcrypt (work factor 12) + HIBP k-anonymity breach check</a:t>
-            </a:r>
-            <a:endParaRPr lang="en-US" sz="1400" dirty="0"/>
-          </a:p>
-          <a:p>
-            <a:pPr indent="0" marL="0">
-              <a:buNone/>
-            </a:pPr>
-            <a:r>
-              <a:rPr lang="en-US" sz="1400" dirty="0">
-                <a:solidFill>
-                  <a:srgbClr val="4D4A45"/>
-                </a:solidFill>
-                <a:latin typeface="Aptos" pitchFamily="34" charset="0"/>
-                <a:ea typeface="Aptos" pitchFamily="34" charset="-122"/>
-                <a:cs typeface="Aptos" pitchFamily="34" charset="-120"/>
-              </a:rPr>
-              <a:t>• MongoDB bound to 127.0.0.1 with authentication required</a:t>
-            </a:r>
-            <a:endParaRPr lang="en-US" sz="1400" dirty="0"/>
-          </a:p>
-        </p:txBody>
-      </p:sp>
-      <p:sp>
-        <p:nvSpPr>
-          <p:cNvPr id="13" name="Text 11"/>
-          <p:cNvSpPr/>
-          <p:nvPr/>
-        </p:nvSpPr>
-        <p:spPr>
-          <a:xfrm>
-            <a:off x="822960" y="4343400"/>
-            <a:ext cx="2743200" cy="201168"/>
+              <a:t>Wyatt</a:t>
+            </a:r>
+            <a:endParaRPr lang="en-US" sz="1600" dirty="0"/>
+          </a:p>
+        </p:txBody>
+      </p:sp>
+      <p:sp>
+        <p:nvSpPr>
+          <p:cNvPr id="14" name="Text 12"/>
+          <p:cNvSpPr/>
+          <p:nvPr/>
+        </p:nvSpPr>
+        <p:spPr>
+          <a:xfrm>
+            <a:off x="3566160" y="3246120"/>
+            <a:ext cx="1600200" cy="182880"/>
           </a:xfrm>
           <a:prstGeom prst="rect">
             <a:avLst/>
@@ -2843,61 +2702,66 @@
           <a:bodyPr wrap="square" lIns="0" tIns="0" rIns="0" bIns="0" rtlCol="0" anchor="ctr"/>
           <a:lstStyle/>
           <a:p>
-            <a:pPr indent="0" marL="0">
-              <a:buNone/>
-            </a:pPr>
-            <a:r>
-              <a:rPr lang="en-US" sz="1100" dirty="0">
-                <a:solidFill>
-                  <a:srgbClr val="9E9890"/>
-                </a:solidFill>
-                <a:latin typeface="Aptos" pitchFamily="34" charset="0"/>
-                <a:ea typeface="Aptos" pitchFamily="34" charset="-122"/>
-                <a:cs typeface="Aptos" pitchFamily="34" charset="-120"/>
-              </a:rPr>
-              <a:t>ZAP: 58 PASS, 0 FAIL</a:t>
-            </a:r>
-            <a:endParaRPr lang="en-US" sz="1100" dirty="0"/>
-          </a:p>
-        </p:txBody>
-      </p:sp>
-      <p:sp>
-        <p:nvSpPr>
-          <p:cNvPr id="14" name="Shape 12"/>
-          <p:cNvSpPr/>
-          <p:nvPr/>
-        </p:nvSpPr>
-        <p:spPr>
-          <a:xfrm>
-            <a:off x="822960" y="4572000"/>
-            <a:ext cx="2743200" cy="1005840"/>
-          </a:xfrm>
-          <a:prstGeom prst="roundRect">
-            <a:avLst>
-              <a:gd name="adj" fmla="val 4545"/>
-            </a:avLst>
+            <a:pPr marL="0" indent="0">
+              <a:buNone/>
+            </a:pPr>
+            <a:r>
+              <a:rPr lang="en-US" sz="1200" dirty="0">
+                <a:solidFill>
+                  <a:srgbClr val="726656"/>
+                </a:solidFill>
+                <a:latin typeface="Aptos" pitchFamily="34" charset="0"/>
+                <a:ea typeface="Aptos" pitchFamily="34" charset="-122"/>
+                <a:cs typeface="Aptos" pitchFamily="34" charset="-120"/>
+              </a:rPr>
+              <a:t>Web Scraping (Playwright)</a:t>
+            </a:r>
+            <a:endParaRPr lang="en-US" sz="1200" dirty="0"/>
+          </a:p>
+        </p:txBody>
+      </p:sp>
+      <p:sp>
+        <p:nvSpPr>
+          <p:cNvPr id="15" name="Shape 13"/>
+          <p:cNvSpPr/>
+          <p:nvPr/>
+        </p:nvSpPr>
+        <p:spPr>
+          <a:xfrm>
+            <a:off x="6812280" y="1920240"/>
+            <a:ext cx="960120" cy="960120"/>
+          </a:xfrm>
+          <a:prstGeom prst="ellipse">
+            <a:avLst/>
           </a:prstGeom>
           <a:solidFill>
-            <a:srgbClr val="FCFBF9"/>
+            <a:srgbClr val="FBFAF8"/>
           </a:solidFill>
           <a:ln w="12700">
             <a:solidFill>
-              <a:srgbClr val="D8D0C7"/>
+              <a:srgbClr val="6BC5C5"/>
             </a:solidFill>
             <a:prstDash val="solid"/>
           </a:ln>
         </p:spPr>
-      </p:sp>
-      <p:sp>
-        <p:nvSpPr>
-          <p:cNvPr id="15" name="Text 13"/>
-          <p:cNvSpPr/>
-          <p:nvPr/>
-        </p:nvSpPr>
-        <p:spPr>
-          <a:xfrm>
-            <a:off x="4572000" y="1901952"/>
-            <a:ext cx="2743200" cy="256032"/>
+        <p:txBody>
+          <a:bodyPr/>
+          <a:lstStyle/>
+          <a:p>
+            <a:endParaRPr lang="en-US"/>
+          </a:p>
+        </p:txBody>
+      </p:sp>
+      <p:sp>
+        <p:nvSpPr>
+          <p:cNvPr id="16" name="Text 14"/>
+          <p:cNvSpPr/>
+          <p:nvPr/>
+        </p:nvSpPr>
+        <p:spPr>
+          <a:xfrm>
+            <a:off x="6583680" y="2999232"/>
+            <a:ext cx="1417320" cy="228600"/>
           </a:xfrm>
           <a:prstGeom prst="rect">
             <a:avLst/>
@@ -2909,111 +2773,21 @@
           <a:bodyPr wrap="square" lIns="0" tIns="0" rIns="0" bIns="0" rtlCol="0" anchor="ctr"/>
           <a:lstStyle/>
           <a:p>
-            <a:pPr indent="0" marL="0">
-              <a:buNone/>
-            </a:pPr>
-            <a:r>
-              <a:rPr lang="en-US" sz="1800" dirty="0" b="1">
-                <a:solidFill>
-                  <a:srgbClr val="726656"/>
+            <a:pPr marL="0" indent="0">
+              <a:buNone/>
+            </a:pPr>
+            <a:r>
+              <a:rPr lang="en-US" sz="1600" b="1" dirty="0">
+                <a:solidFill>
+                  <a:srgbClr val="17306F"/>
                 </a:solidFill>
                 <a:latin typeface="Aptos Display" pitchFamily="34" charset="0"/>
                 <a:ea typeface="Aptos Display" pitchFamily="34" charset="-122"/>
                 <a:cs typeface="Aptos Display" pitchFamily="34" charset="-120"/>
               </a:rPr>
-              <a:t>Performance &amp; Portability</a:t>
-            </a:r>
-            <a:endParaRPr lang="en-US" sz="1800" dirty="0"/>
-          </a:p>
-        </p:txBody>
-      </p:sp>
-      <p:sp>
-        <p:nvSpPr>
-          <p:cNvPr id="16" name="Text 14"/>
-          <p:cNvSpPr/>
-          <p:nvPr/>
-        </p:nvSpPr>
-        <p:spPr>
-          <a:xfrm>
-            <a:off x="4572000" y="2468880"/>
-            <a:ext cx="2743200" cy="1280160"/>
-          </a:xfrm>
-          <a:prstGeom prst="rect">
-            <a:avLst/>
-          </a:prstGeom>
-          <a:noFill/>
-          <a:ln/>
-        </p:spPr>
-        <p:txBody>
-          <a:bodyPr wrap="square" lIns="254" tIns="254" rIns="254" bIns="254" rtlCol="0" anchor="ctr"/>
-          <a:lstStyle/>
-          <a:p>
-            <a:pPr indent="0" marL="0">
-              <a:buNone/>
-            </a:pPr>
-            <a:r>
-              <a:rPr lang="en-US" sz="1400" dirty="0">
-                <a:solidFill>
-                  <a:srgbClr val="4D4A45"/>
-                </a:solidFill>
-                <a:latin typeface="Aptos" pitchFamily="34" charset="0"/>
-                <a:ea typeface="Aptos" pitchFamily="34" charset="-122"/>
-                <a:cs typeface="Aptos" pitchFamily="34" charset="-120"/>
-              </a:rPr>
-              <a:t>• 4-worker parallel extraction with per-provider semaphores</a:t>
-            </a:r>
-            <a:endParaRPr lang="en-US" sz="1400" dirty="0"/>
-          </a:p>
-          <a:p>
-            <a:pPr indent="0" marL="0">
-              <a:buNone/>
-            </a:pPr>
-            <a:r>
-              <a:rPr lang="en-US" sz="1400" dirty="0">
-                <a:solidFill>
-                  <a:srgbClr val="4D4A45"/>
-                </a:solidFill>
-                <a:latin typeface="Aptos" pitchFamily="34" charset="0"/>
-                <a:ea typeface="Aptos" pitchFamily="34" charset="-122"/>
-                <a:cs typeface="Aptos" pitchFamily="34" charset="-120"/>
-              </a:rPr>
-              <a:t>• Cloud-first LLM (Groq/NVIDIA) with local Ollama fallback</a:t>
-            </a:r>
-            <a:endParaRPr lang="en-US" sz="1400" dirty="0"/>
-          </a:p>
-          <a:p>
-            <a:pPr indent="0" marL="0">
-              <a:buNone/>
-            </a:pPr>
-            <a:r>
-              <a:rPr lang="en-US" sz="1400" dirty="0">
-                <a:solidFill>
-                  <a:srgbClr val="4D4A45"/>
-                </a:solidFill>
-                <a:latin typeface="Aptos" pitchFamily="34" charset="0"/>
-                <a:ea typeface="Aptos" pitchFamily="34" charset="-122"/>
-                <a:cs typeface="Aptos" pitchFamily="34" charset="-120"/>
-              </a:rPr>
-              <a:t>• Full stack in Docker Compose — no host dependencies</a:t>
-            </a:r>
-            <a:endParaRPr lang="en-US" sz="1400" dirty="0"/>
-          </a:p>
-          <a:p>
-            <a:pPr indent="0" marL="0">
-              <a:buNone/>
-            </a:pPr>
-            <a:r>
-              <a:rPr lang="en-US" sz="1400" dirty="0">
-                <a:solidFill>
-                  <a:srgbClr val="4D4A45"/>
-                </a:solidFill>
-                <a:latin typeface="Aptos" pitchFamily="34" charset="0"/>
-                <a:ea typeface="Aptos" pitchFamily="34" charset="-122"/>
-                <a:cs typeface="Aptos" pitchFamily="34" charset="-120"/>
-              </a:rPr>
-              <a:t>• GPU passthrough opt-in via override compose file</a:t>
-            </a:r>
-            <a:endParaRPr lang="en-US" sz="1400" dirty="0"/>
+              <a:t>Ryan</a:t>
+            </a:r>
+            <a:endParaRPr lang="en-US" sz="1600" dirty="0"/>
           </a:p>
         </p:txBody>
       </p:sp>
@@ -3025,8 +2799,8 @@
         </p:nvSpPr>
         <p:spPr>
           <a:xfrm>
-            <a:off x="4572000" y="4343400"/>
-            <a:ext cx="2743200" cy="201168"/>
+            <a:off x="6492240" y="3246120"/>
+            <a:ext cx="1600200" cy="182880"/>
           </a:xfrm>
           <a:prstGeom prst="rect">
             <a:avLst/>
@@ -3038,21 +2812,21 @@
           <a:bodyPr wrap="square" lIns="0" tIns="0" rIns="0" bIns="0" rtlCol="0" anchor="ctr"/>
           <a:lstStyle/>
           <a:p>
-            <a:pPr indent="0" marL="0">
-              <a:buNone/>
-            </a:pPr>
-            <a:r>
-              <a:rPr lang="en-US" sz="1100" dirty="0">
-                <a:solidFill>
-                  <a:srgbClr val="9E9890"/>
-                </a:solidFill>
-                <a:latin typeface="Aptos" pitchFamily="34" charset="0"/>
-                <a:ea typeface="Aptos" pitchFamily="34" charset="-122"/>
-                <a:cs typeface="Aptos" pitchFamily="34" charset="-120"/>
-              </a:rPr>
-              <a:t>Docker + cloud-first AI</a:t>
-            </a:r>
-            <a:endParaRPr lang="en-US" sz="1100" dirty="0"/>
+            <a:pPr marL="0" indent="0">
+              <a:buNone/>
+            </a:pPr>
+            <a:r>
+              <a:rPr lang="en-US" sz="1200" dirty="0">
+                <a:solidFill>
+                  <a:srgbClr val="726656"/>
+                </a:solidFill>
+                <a:latin typeface="Aptos" pitchFamily="34" charset="0"/>
+                <a:ea typeface="Aptos" pitchFamily="34" charset="-122"/>
+                <a:cs typeface="Aptos" pitchFamily="34" charset="-120"/>
+              </a:rPr>
+              <a:t>Site Adapters (YAML)</a:t>
+            </a:r>
+            <a:endParaRPr lang="en-US" sz="1200" dirty="0"/>
           </a:p>
         </p:txBody>
       </p:sp>
@@ -3064,24 +2838,29 @@
         </p:nvSpPr>
         <p:spPr>
           <a:xfrm>
-            <a:off x="4572000" y="4572000"/>
-            <a:ext cx="2743200" cy="1005840"/>
-          </a:xfrm>
-          <a:prstGeom prst="roundRect">
-            <a:avLst>
-              <a:gd name="adj" fmla="val 4545"/>
-            </a:avLst>
+            <a:off x="9738360" y="1920240"/>
+            <a:ext cx="960120" cy="960120"/>
+          </a:xfrm>
+          <a:prstGeom prst="ellipse">
+            <a:avLst/>
           </a:prstGeom>
           <a:solidFill>
-            <a:srgbClr val="FCFBF9"/>
+            <a:srgbClr val="FBFAF8"/>
           </a:solidFill>
           <a:ln w="12700">
             <a:solidFill>
-              <a:srgbClr val="D8D0C7"/>
+              <a:srgbClr val="C74642"/>
             </a:solidFill>
             <a:prstDash val="solid"/>
           </a:ln>
         </p:spPr>
+        <p:txBody>
+          <a:bodyPr/>
+          <a:lstStyle/>
+          <a:p>
+            <a:endParaRPr lang="en-US"/>
+          </a:p>
+        </p:txBody>
       </p:sp>
       <p:sp>
         <p:nvSpPr>
@@ -3091,8 +2870,8 @@
         </p:nvSpPr>
         <p:spPr>
           <a:xfrm>
-            <a:off x="8641080" y="1901952"/>
-            <a:ext cx="2743200" cy="256032"/>
+            <a:off x="9509760" y="2999232"/>
+            <a:ext cx="1417320" cy="228600"/>
           </a:xfrm>
           <a:prstGeom prst="rect">
             <a:avLst/>
@@ -3104,21 +2883,21 @@
           <a:bodyPr wrap="square" lIns="0" tIns="0" rIns="0" bIns="0" rtlCol="0" anchor="ctr"/>
           <a:lstStyle/>
           <a:p>
-            <a:pPr indent="0" marL="0">
-              <a:buNone/>
-            </a:pPr>
-            <a:r>
-              <a:rPr lang="en-US" sz="1800" dirty="0" b="1">
-                <a:solidFill>
-                  <a:srgbClr val="726656"/>
+            <a:pPr marL="0" indent="0">
+              <a:buNone/>
+            </a:pPr>
+            <a:r>
+              <a:rPr lang="en-US" sz="1600" b="1" dirty="0">
+                <a:solidFill>
+                  <a:srgbClr val="17306F"/>
                 </a:solidFill>
                 <a:latin typeface="Aptos Display" pitchFamily="34" charset="0"/>
                 <a:ea typeface="Aptos Display" pitchFamily="34" charset="-122"/>
                 <a:cs typeface="Aptos Display" pitchFamily="34" charset="-120"/>
               </a:rPr>
-              <a:t>Observability &amp; Usability</a:t>
-            </a:r>
-            <a:endParaRPr lang="en-US" sz="1800" dirty="0"/>
+              <a:t>Jason</a:t>
+            </a:r>
+            <a:endParaRPr lang="en-US" sz="1600" dirty="0"/>
           </a:p>
         </p:txBody>
       </p:sp>
@@ -3130,98 +2909,8 @@
         </p:nvSpPr>
         <p:spPr>
           <a:xfrm>
-            <a:off x="8641080" y="2468880"/>
-            <a:ext cx="2743200" cy="1280160"/>
-          </a:xfrm>
-          <a:prstGeom prst="rect">
-            <a:avLst/>
-          </a:prstGeom>
-          <a:noFill/>
-          <a:ln/>
-        </p:spPr>
-        <p:txBody>
-          <a:bodyPr wrap="square" lIns="254" tIns="254" rIns="254" bIns="254" rtlCol="0" anchor="ctr"/>
-          <a:lstStyle/>
-          <a:p>
-            <a:pPr indent="0" marL="0">
-              <a:buNone/>
-            </a:pPr>
-            <a:r>
-              <a:rPr lang="en-US" sz="1400" dirty="0">
-                <a:solidFill>
-                  <a:srgbClr val="4D4A45"/>
-                </a:solidFill>
-                <a:latin typeface="Aptos" pitchFamily="34" charset="0"/>
-                <a:ea typeface="Aptos" pitchFamily="34" charset="-122"/>
-                <a:cs typeface="Aptos" pitchFamily="34" charset="-120"/>
-              </a:rPr>
-              <a:t>• Timestamped log files with thread-name prefixes (extract_0..3)</a:t>
-            </a:r>
-            <a:endParaRPr lang="en-US" sz="1400" dirty="0"/>
-          </a:p>
-          <a:p>
-            <a:pPr indent="0" marL="0">
-              <a:buNone/>
-            </a:pPr>
-            <a:r>
-              <a:rPr lang="en-US" sz="1400" dirty="0">
-                <a:solidFill>
-                  <a:srgbClr val="4D4A45"/>
-                </a:solidFill>
-                <a:latin typeface="Aptos" pitchFamily="34" charset="0"/>
-                <a:ea typeface="Aptos" pitchFamily="34" charset="-122"/>
-                <a:cs typeface="Aptos" pitchFamily="34" charset="-120"/>
-              </a:rPr>
-              <a:t>• Real-time job status polling via /api/jobs endpoint</a:t>
-            </a:r>
-            <a:endParaRPr lang="en-US" sz="1400" dirty="0"/>
-          </a:p>
-          <a:p>
-            <a:pPr indent="0" marL="0">
-              <a:buNone/>
-            </a:pPr>
-            <a:r>
-              <a:rPr lang="en-US" sz="1400" dirty="0">
-                <a:solidFill>
-                  <a:srgbClr val="4D4A45"/>
-                </a:solidFill>
-                <a:latin typeface="Aptos" pitchFamily="34" charset="0"/>
-                <a:ea typeface="Aptos" pitchFamily="34" charset="-122"/>
-                <a:cs typeface="Aptos" pitchFamily="34" charset="-120"/>
-              </a:rPr>
-              <a:t>• Role-based dashboard views (Admin vs. Reviewer)</a:t>
-            </a:r>
-            <a:endParaRPr lang="en-US" sz="1400" dirty="0"/>
-          </a:p>
-          <a:p>
-            <a:pPr indent="0" marL="0">
-              <a:buNone/>
-            </a:pPr>
-            <a:r>
-              <a:rPr lang="en-US" sz="1400" dirty="0">
-                <a:solidFill>
-                  <a:srgbClr val="4D4A45"/>
-                </a:solidFill>
-                <a:latin typeface="Aptos" pitchFamily="34" charset="0"/>
-                <a:ea typeface="Aptos" pitchFamily="34" charset="-122"/>
-                <a:cs typeface="Aptos" pitchFamily="34" charset="-120"/>
-              </a:rPr>
-              <a:t>• Force password change on first login (blocks all routes)</a:t>
-            </a:r>
-            <a:endParaRPr lang="en-US" sz="1400" dirty="0"/>
-          </a:p>
-        </p:txBody>
-      </p:sp>
-      <p:sp>
-        <p:nvSpPr>
-          <p:cNvPr id="21" name="Text 19"/>
-          <p:cNvSpPr/>
-          <p:nvPr/>
-        </p:nvSpPr>
-        <p:spPr>
-          <a:xfrm>
-            <a:off x="8641080" y="4343400"/>
-            <a:ext cx="2743200" cy="201168"/>
+            <a:off x="9418320" y="3246120"/>
+            <a:ext cx="1600200" cy="182880"/>
           </a:xfrm>
           <a:prstGeom prst="rect">
             <a:avLst/>
@@ -3233,54 +2922,286 @@
           <a:bodyPr wrap="square" lIns="0" tIns="0" rIns="0" bIns="0" rtlCol="0" anchor="ctr"/>
           <a:lstStyle/>
           <a:p>
-            <a:pPr indent="0" marL="0">
-              <a:buNone/>
-            </a:pPr>
-            <a:r>
-              <a:rPr lang="en-US" sz="1100" dirty="0">
-                <a:solidFill>
-                  <a:srgbClr val="9E9890"/>
-                </a:solidFill>
-                <a:latin typeface="Aptos" pitchFamily="34" charset="0"/>
-                <a:ea typeface="Aptos" pitchFamily="34" charset="-122"/>
-                <a:cs typeface="Aptos" pitchFamily="34" charset="-120"/>
-              </a:rPr>
-              <a:t>Structured logs + RBAC</a:t>
-            </a:r>
-            <a:endParaRPr lang="en-US" sz="1100" dirty="0"/>
-          </a:p>
-        </p:txBody>
-      </p:sp>
-      <p:sp>
-        <p:nvSpPr>
-          <p:cNvPr id="22" name="Shape 20"/>
-          <p:cNvSpPr/>
-          <p:nvPr/>
-        </p:nvSpPr>
-        <p:spPr>
-          <a:xfrm>
-            <a:off x="8641080" y="4572000"/>
-            <a:ext cx="2743200" cy="1005840"/>
-          </a:xfrm>
-          <a:prstGeom prst="roundRect">
-            <a:avLst>
-              <a:gd name="adj" fmla="val 4545"/>
-            </a:avLst>
+            <a:pPr marL="0" indent="0">
+              <a:buNone/>
+            </a:pPr>
+            <a:r>
+              <a:rPr lang="en-US" sz="1200" dirty="0">
+                <a:solidFill>
+                  <a:srgbClr val="726656"/>
+                </a:solidFill>
+                <a:latin typeface="Aptos" pitchFamily="34" charset="0"/>
+                <a:ea typeface="Aptos" pitchFamily="34" charset="-122"/>
+                <a:cs typeface="Aptos" pitchFamily="34" charset="-120"/>
+              </a:rPr>
+              <a:t>Pipeline + Security</a:t>
+            </a:r>
+            <a:endParaRPr lang="en-US" sz="1200" dirty="0"/>
+          </a:p>
+        </p:txBody>
+      </p:sp>
+      <p:sp>
+        <p:nvSpPr>
+          <p:cNvPr id="21" name="Shape 19"/>
+          <p:cNvSpPr/>
+          <p:nvPr/>
+        </p:nvSpPr>
+        <p:spPr>
+          <a:xfrm>
+            <a:off x="2423160" y="3977640"/>
+            <a:ext cx="960120" cy="960120"/>
+          </a:xfrm>
+          <a:prstGeom prst="ellipse">
+            <a:avLst/>
           </a:prstGeom>
           <a:solidFill>
-            <a:srgbClr val="FCFBF9"/>
+            <a:srgbClr val="FBFAF8"/>
           </a:solidFill>
           <a:ln w="12700">
             <a:solidFill>
-              <a:srgbClr val="D8D0C7"/>
+              <a:srgbClr val="C74642"/>
             </a:solidFill>
             <a:prstDash val="solid"/>
           </a:ln>
         </p:spPr>
-      </p:sp>
-      <p:sp>
-        <p:nvSpPr>
-          <p:cNvPr id="25" name="Slide Number Placeholder 0"/>
+        <p:txBody>
+          <a:bodyPr/>
+          <a:lstStyle/>
+          <a:p>
+            <a:endParaRPr lang="en-US"/>
+          </a:p>
+        </p:txBody>
+      </p:sp>
+      <p:sp>
+        <p:nvSpPr>
+          <p:cNvPr id="22" name="Text 20"/>
+          <p:cNvSpPr/>
+          <p:nvPr/>
+        </p:nvSpPr>
+        <p:spPr>
+          <a:xfrm>
+            <a:off x="2194560" y="5056632"/>
+            <a:ext cx="1417320" cy="228600"/>
+          </a:xfrm>
+          <a:prstGeom prst="rect">
+            <a:avLst/>
+          </a:prstGeom>
+          <a:noFill/>
+          <a:ln/>
+        </p:spPr>
+        <p:txBody>
+          <a:bodyPr wrap="square" lIns="0" tIns="0" rIns="0" bIns="0" rtlCol="0" anchor="ctr"/>
+          <a:lstStyle/>
+          <a:p>
+            <a:pPr marL="0" indent="0">
+              <a:buNone/>
+            </a:pPr>
+            <a:r>
+              <a:rPr lang="en-US" sz="1600" b="1" dirty="0">
+                <a:solidFill>
+                  <a:srgbClr val="17306F"/>
+                </a:solidFill>
+                <a:latin typeface="Aptos Display" pitchFamily="34" charset="0"/>
+                <a:ea typeface="Aptos Display" pitchFamily="34" charset="-122"/>
+                <a:cs typeface="Aptos Display" pitchFamily="34" charset="-120"/>
+              </a:rPr>
+              <a:t>Ralph</a:t>
+            </a:r>
+            <a:endParaRPr lang="en-US" sz="1600" dirty="0"/>
+          </a:p>
+        </p:txBody>
+      </p:sp>
+      <p:sp>
+        <p:nvSpPr>
+          <p:cNvPr id="23" name="Text 21"/>
+          <p:cNvSpPr/>
+          <p:nvPr/>
+        </p:nvSpPr>
+        <p:spPr>
+          <a:xfrm>
+            <a:off x="2103120" y="5303520"/>
+            <a:ext cx="1600200" cy="182880"/>
+          </a:xfrm>
+          <a:prstGeom prst="rect">
+            <a:avLst/>
+          </a:prstGeom>
+          <a:noFill/>
+          <a:ln/>
+        </p:spPr>
+        <p:txBody>
+          <a:bodyPr wrap="square" lIns="0" tIns="0" rIns="0" bIns="0" rtlCol="0" anchor="ctr"/>
+          <a:lstStyle/>
+          <a:p>
+            <a:pPr marL="0" indent="0">
+              <a:buNone/>
+            </a:pPr>
+            <a:r>
+              <a:rPr lang="en-US" sz="1200" dirty="0">
+                <a:solidFill>
+                  <a:srgbClr val="726656"/>
+                </a:solidFill>
+                <a:latin typeface="Aptos" pitchFamily="34" charset="0"/>
+                <a:ea typeface="Aptos" pitchFamily="34" charset="-122"/>
+                <a:cs typeface="Aptos" pitchFamily="34" charset="-120"/>
+              </a:rPr>
+              <a:t>Storage (MongoDB)</a:t>
+            </a:r>
+            <a:endParaRPr lang="en-US" sz="1200" dirty="0"/>
+          </a:p>
+        </p:txBody>
+      </p:sp>
+      <p:sp>
+        <p:nvSpPr>
+          <p:cNvPr id="24" name="Shape 22"/>
+          <p:cNvSpPr/>
+          <p:nvPr/>
+        </p:nvSpPr>
+        <p:spPr>
+          <a:xfrm>
+            <a:off x="7178040" y="3977640"/>
+            <a:ext cx="960120" cy="960120"/>
+          </a:xfrm>
+          <a:prstGeom prst="ellipse">
+            <a:avLst/>
+          </a:prstGeom>
+          <a:solidFill>
+            <a:srgbClr val="FBFAF8"/>
+          </a:solidFill>
+          <a:ln w="12700">
+            <a:solidFill>
+              <a:srgbClr val="C74642"/>
+            </a:solidFill>
+            <a:prstDash val="solid"/>
+          </a:ln>
+        </p:spPr>
+        <p:txBody>
+          <a:bodyPr/>
+          <a:lstStyle/>
+          <a:p>
+            <a:endParaRPr lang="en-US"/>
+          </a:p>
+        </p:txBody>
+      </p:sp>
+      <p:sp>
+        <p:nvSpPr>
+          <p:cNvPr id="25" name="Text 23"/>
+          <p:cNvSpPr/>
+          <p:nvPr/>
+        </p:nvSpPr>
+        <p:spPr>
+          <a:xfrm>
+            <a:off x="6949440" y="5056632"/>
+            <a:ext cx="1417320" cy="228600"/>
+          </a:xfrm>
+          <a:prstGeom prst="rect">
+            <a:avLst/>
+          </a:prstGeom>
+          <a:noFill/>
+          <a:ln/>
+        </p:spPr>
+        <p:txBody>
+          <a:bodyPr wrap="square" lIns="0" tIns="0" rIns="0" bIns="0" rtlCol="0" anchor="ctr"/>
+          <a:lstStyle/>
+          <a:p>
+            <a:pPr marL="0" indent="0">
+              <a:buNone/>
+            </a:pPr>
+            <a:r>
+              <a:rPr lang="en-US" sz="1600" b="1" dirty="0">
+                <a:solidFill>
+                  <a:srgbClr val="17306F"/>
+                </a:solidFill>
+                <a:latin typeface="Aptos Display" pitchFamily="34" charset="0"/>
+                <a:ea typeface="Aptos Display" pitchFamily="34" charset="-122"/>
+                <a:cs typeface="Aptos Display" pitchFamily="34" charset="-120"/>
+              </a:rPr>
+              <a:t>Doug Greene</a:t>
+            </a:r>
+            <a:endParaRPr lang="en-US" sz="1600" dirty="0"/>
+          </a:p>
+        </p:txBody>
+      </p:sp>
+      <p:sp>
+        <p:nvSpPr>
+          <p:cNvPr id="26" name="Text 24"/>
+          <p:cNvSpPr/>
+          <p:nvPr/>
+        </p:nvSpPr>
+        <p:spPr>
+          <a:xfrm>
+            <a:off x="6858000" y="5303520"/>
+            <a:ext cx="1600200" cy="182880"/>
+          </a:xfrm>
+          <a:prstGeom prst="rect">
+            <a:avLst/>
+          </a:prstGeom>
+          <a:noFill/>
+          <a:ln/>
+        </p:spPr>
+        <p:txBody>
+          <a:bodyPr wrap="square" lIns="0" tIns="0" rIns="0" bIns="0" rtlCol="0" anchor="ctr"/>
+          <a:lstStyle/>
+          <a:p>
+            <a:pPr marL="0" indent="0">
+              <a:buNone/>
+            </a:pPr>
+            <a:r>
+              <a:rPr lang="en-US" sz="1200" dirty="0">
+                <a:solidFill>
+                  <a:srgbClr val="726656"/>
+                </a:solidFill>
+                <a:latin typeface="Aptos" pitchFamily="34" charset="0"/>
+                <a:ea typeface="Aptos" pitchFamily="34" charset="-122"/>
+                <a:cs typeface="Aptos" pitchFamily="34" charset="-120"/>
+              </a:rPr>
+              <a:t>Client — Fivos Health</a:t>
+            </a:r>
+            <a:endParaRPr lang="en-US" sz="1200" dirty="0"/>
+          </a:p>
+        </p:txBody>
+      </p:sp>
+      <p:sp>
+        <p:nvSpPr>
+          <p:cNvPr id="27" name="Text 25"/>
+          <p:cNvSpPr/>
+          <p:nvPr/>
+        </p:nvSpPr>
+        <p:spPr>
+          <a:xfrm>
+            <a:off x="2011680" y="5897880"/>
+            <a:ext cx="8046720" cy="201168"/>
+          </a:xfrm>
+          <a:prstGeom prst="rect">
+            <a:avLst/>
+          </a:prstGeom>
+          <a:noFill/>
+          <a:ln/>
+        </p:spPr>
+        <p:txBody>
+          <a:bodyPr wrap="square" lIns="0" tIns="0" rIns="0" bIns="0" rtlCol="0" anchor="ctr"/>
+          <a:lstStyle/>
+          <a:p>
+            <a:pPr marL="0" indent="0">
+              <a:buNone/>
+            </a:pPr>
+            <a:r>
+              <a:rPr lang="en-US" sz="1000" dirty="0">
+                <a:solidFill>
+                  <a:srgbClr val="9E9890"/>
+                </a:solidFill>
+                <a:latin typeface="Aptos" pitchFamily="34" charset="0"/>
+                <a:ea typeface="Aptos" pitchFamily="34" charset="-122"/>
+                <a:cs typeface="Aptos" pitchFamily="34" charset="-120"/>
+              </a:rPr>
+              <a:t>Replace circles with headshots or initials for a polished look</a:t>
+            </a:r>
+            <a:endParaRPr lang="en-US" sz="1000" dirty="0"/>
+          </a:p>
+        </p:txBody>
+      </p:sp>
+      <p:sp>
+        <p:nvSpPr>
+          <p:cNvPr id="28" name="Slide Number Placeholder 0"/>
           <p:cNvSpPr>
             <a:spLocks noGrp="1"/>
           </p:cNvSpPr>
@@ -3298,7 +3219,7 @@
           </a:prstGeom>
           <a:extLst>
             <a:ext uri="{C572A759-6A51-4108-AA02-DFA0A04FC94B}">
-              <ma14:wrappingTextBoxFlag xmlns:ma14="http://schemas.microsoft.com/office/mac/drawingml/2011/main" val="0"/>
+              <ma14:wrappingTextBoxFlag xmlns:ma14="http://schemas.microsoft.com/office/mac/drawingml/2011/main" xmlns="" val="0"/>
             </a:ext>
           </a:extLst>
         </p:spPr>
@@ -3319,8 +3240,8 @@
           <a:p>
             <a:pPr algn="r"/>
             <a:fld id="{F7021451-1387-4CA6-816F-3879F97B5CBC}" type="slidenum">
-              <a:rPr b="0" lang="en-US"/>
-              <a:t>6</a:t>
+              <a:rPr lang="en-US" b="0"/>
+              <a:t>10</a:t>
             </a:fld>
             <a:endParaRPr lang="en-US"/>
           </a:p>
@@ -3335,8 +3256,8 @@
 </file>
 
 <file path=ppt/slides/slide11.xml><?xml version="1.0" encoding="utf-8"?>
-<p:sld xmlns:a="http://schemas.openxmlformats.org/drawingml/2006/main" xmlns:p="http://schemas.openxmlformats.org/presentationml/2006/main" xmlns:r="http://schemas.openxmlformats.org/officeDocument/2006/relationships">
-  <p:cSld>
+<p:sld xmlns:a="http://schemas.openxmlformats.org/drawingml/2006/main" xmlns:r="http://schemas.openxmlformats.org/officeDocument/2006/relationships" xmlns:p="http://schemas.openxmlformats.org/presentationml/2006/main">
+  <p:cSld name="Slide 9">
     <p:spTree>
       <p:nvGrpSpPr>
         <p:cNvPr id="1" name=""/>
@@ -3377,6 +3298,13 @@
             <a:prstDash val="solid"/>
           </a:ln>
         </p:spPr>
+        <p:txBody>
+          <a:bodyPr/>
+          <a:lstStyle/>
+          <a:p>
+            <a:endParaRPr lang="en-US"/>
+          </a:p>
+        </p:txBody>
       </p:sp>
       <p:sp>
         <p:nvSpPr>
@@ -3404,6 +3332,13 @@
             <a:prstDash val="solid"/>
           </a:ln>
         </p:spPr>
+        <p:txBody>
+          <a:bodyPr/>
+          <a:lstStyle/>
+          <a:p>
+            <a:endParaRPr lang="en-US"/>
+          </a:p>
+        </p:txBody>
       </p:sp>
       <p:sp>
         <p:nvSpPr>
@@ -3431,6 +3366,13 @@
             <a:prstDash val="solid"/>
           </a:ln>
         </p:spPr>
+        <p:txBody>
+          <a:bodyPr/>
+          <a:lstStyle/>
+          <a:p>
+            <a:endParaRPr lang="en-US"/>
+          </a:p>
+        </p:txBody>
       </p:sp>
       <p:sp>
         <p:nvSpPr>
@@ -3458,6 +3400,13 @@
             <a:prstDash val="solid"/>
           </a:ln>
         </p:spPr>
+        <p:txBody>
+          <a:bodyPr/>
+          <a:lstStyle/>
+          <a:p>
+            <a:endParaRPr lang="en-US"/>
+          </a:p>
+        </p:txBody>
       </p:sp>
       <p:sp>
         <p:nvSpPr>
@@ -3467,8 +3416,8 @@
         </p:nvSpPr>
         <p:spPr>
           <a:xfrm>
-            <a:off x="749808" y="731520"/>
-            <a:ext cx="7223760" cy="411480"/>
+            <a:off x="822960" y="1417320"/>
+            <a:ext cx="3840480" cy="640080"/>
           </a:xfrm>
           <a:prstGeom prst="rect">
             <a:avLst/>
@@ -3480,11 +3429,11 @@
           <a:bodyPr wrap="square" lIns="0" tIns="0" rIns="0" bIns="0" rtlCol="0" anchor="ctr"/>
           <a:lstStyle/>
           <a:p>
-            <a:pPr indent="0" marL="0">
-              <a:buNone/>
-            </a:pPr>
-            <a:r>
-              <a:rPr lang="en-US" sz="2600" dirty="0" b="1">
+            <a:pPr marL="0" indent="0">
+              <a:buNone/>
+            </a:pPr>
+            <a:r>
+              <a:rPr lang="en-US" sz="4800" b="1" dirty="0">
                 <a:solidFill>
                   <a:srgbClr val="17306F"/>
                 </a:solidFill>
@@ -3492,9 +3441,9 @@
                 <a:ea typeface="Aptos Display" pitchFamily="34" charset="-122"/>
                 <a:cs typeface="Aptos Display" pitchFamily="34" charset="-120"/>
               </a:rPr>
-              <a:t>Methodology &amp; Solution</a:t>
-            </a:r>
-            <a:endParaRPr lang="en-US" sz="2600" dirty="0"/>
+              <a:t>Live Demo + Q&amp;A</a:t>
+            </a:r>
+            <a:endParaRPr lang="en-US" sz="4800" dirty="0"/>
           </a:p>
         </p:txBody>
       </p:sp>
@@ -3506,8 +3455,8 @@
         </p:nvSpPr>
         <p:spPr>
           <a:xfrm>
-            <a:off x="768096" y="1143000"/>
-            <a:ext cx="6766560" cy="274320"/>
+            <a:off x="822960" y="2176272"/>
+            <a:ext cx="2194560" cy="320040"/>
           </a:xfrm>
           <a:prstGeom prst="rect">
             <a:avLst/>
@@ -3519,11 +3468,50 @@
           <a:bodyPr wrap="square" lIns="0" tIns="0" rIns="0" bIns="0" rtlCol="0" anchor="ctr"/>
           <a:lstStyle/>
           <a:p>
-            <a:pPr indent="0" marL="0">
-              <a:buNone/>
-            </a:pPr>
-            <a:r>
-              <a:rPr lang="en-US" sz="1200" dirty="0">
+            <a:pPr marL="0" indent="0">
+              <a:buNone/>
+            </a:pPr>
+            <a:r>
+              <a:rPr lang="en-US" sz="2400" dirty="0">
+                <a:solidFill>
+                  <a:srgbClr val="726656"/>
+                </a:solidFill>
+                <a:latin typeface="Aptos Display" pitchFamily="34" charset="0"/>
+                <a:ea typeface="Aptos Display" pitchFamily="34" charset="-122"/>
+                <a:cs typeface="Aptos Display" pitchFamily="34" charset="-120"/>
+              </a:rPr>
+              <a:t>Thank you — Vibe Coders</a:t>
+            </a:r>
+            <a:endParaRPr lang="en-US" sz="2400" dirty="0"/>
+          </a:p>
+        </p:txBody>
+      </p:sp>
+      <p:sp>
+        <p:nvSpPr>
+          <p:cNvPr id="8" name="Text 6"/>
+          <p:cNvSpPr/>
+          <p:nvPr/>
+        </p:nvSpPr>
+        <p:spPr>
+          <a:xfrm>
+            <a:off x="822960" y="2880360"/>
+            <a:ext cx="4389120" cy="256032"/>
+          </a:xfrm>
+          <a:prstGeom prst="rect">
+            <a:avLst/>
+          </a:prstGeom>
+          <a:noFill/>
+          <a:ln/>
+        </p:spPr>
+        <p:txBody>
+          <a:bodyPr wrap="square" lIns="0" tIns="0" rIns="0" bIns="0" rtlCol="0" anchor="ctr"/>
+          <a:lstStyle/>
+          <a:p>
+            <a:pPr marL="0" indent="0">
+              <a:buNone/>
+            </a:pPr>
+            <a:r>
+              <a:rPr lang="en-US" sz="1300" dirty="0">
                 <a:solidFill>
                   <a:srgbClr val="7A746C"/>
                 </a:solidFill>
@@ -3531,34 +3519,11 @@
                 <a:ea typeface="Aptos" pitchFamily="34" charset="-122"/>
                 <a:cs typeface="Aptos" pitchFamily="34" charset="-120"/>
               </a:rPr>
-              <a:t>How we built it and what we delivered</a:t>
-            </a:r>
-            <a:endParaRPr lang="en-US" sz="1200" dirty="0"/>
-          </a:p>
-        </p:txBody>
-      </p:sp>
-      <p:sp>
-        <p:nvSpPr>
-          <p:cNvPr id="8" name="Shape 6"/>
-          <p:cNvSpPr/>
-          <p:nvPr/>
-        </p:nvSpPr>
-        <p:spPr>
-          <a:xfrm>
-            <a:off x="749808" y="1490472"/>
-            <a:ext cx="10698480" cy="0"/>
-          </a:xfrm>
-          <a:prstGeom prst="line">
-            <a:avLst/>
-          </a:prstGeom>
-          <a:noFill/>
-          <a:ln w="12700">
-            <a:solidFill>
-              <a:srgbClr val="D8D0C7"/>
-            </a:solidFill>
-            <a:prstDash val="solid"/>
-          </a:ln>
-        </p:spPr>
+              <a:t>GitHub: Fivos_Senior_Project  ·  Client: doug.greene@fivoshealth.com</a:t>
+            </a:r>
+            <a:endParaRPr lang="en-US" sz="1300" dirty="0"/>
+          </a:p>
+        </p:txBody>
       </p:sp>
       <p:sp>
         <p:nvSpPr>
@@ -3568,84 +3533,16 @@
         </p:nvSpPr>
         <p:spPr>
           <a:xfrm>
-            <a:off x="868680" y="1783080"/>
-            <a:ext cx="1051560" cy="292608"/>
+            <a:off x="6903720" y="1188720"/>
+            <a:ext cx="3657600" cy="4297680"/>
           </a:xfrm>
           <a:prstGeom prst="roundRect">
             <a:avLst>
-              <a:gd name="adj" fmla="val 25000"/>
+              <a:gd name="adj" fmla="val 1500"/>
             </a:avLst>
           </a:prstGeom>
           <a:solidFill>
-            <a:srgbClr val="C74642"/>
-          </a:solidFill>
-          <a:ln w="12700">
-            <a:solidFill>
-              <a:srgbClr val="C74642">
-                <a:alpha val="0"/>
-              </a:srgbClr>
-            </a:solidFill>
-            <a:prstDash val="solid"/>
-          </a:ln>
-        </p:spPr>
-      </p:sp>
-      <p:sp>
-        <p:nvSpPr>
-          <p:cNvPr id="10" name="Text 8"/>
-          <p:cNvSpPr/>
-          <p:nvPr/>
-        </p:nvSpPr>
-        <p:spPr>
-          <a:xfrm>
-            <a:off x="868680" y="1828800"/>
-            <a:ext cx="1051560" cy="182880"/>
-          </a:xfrm>
-          <a:prstGeom prst="rect">
-            <a:avLst/>
-          </a:prstGeom>
-          <a:noFill/>
-          <a:ln/>
-        </p:spPr>
-        <p:txBody>
-          <a:bodyPr wrap="square" lIns="0" tIns="0" rIns="0" bIns="0" rtlCol="0" anchor="ctr"/>
-          <a:lstStyle/>
-          <a:p>
-            <a:pPr indent="0" marL="0">
-              <a:buNone/>
-            </a:pPr>
-            <a:r>
-              <a:rPr lang="en-US" sz="1100" dirty="0" b="1">
-                <a:solidFill>
-                  <a:srgbClr val="FFFFFF"/>
-                </a:solidFill>
-                <a:latin typeface="Aptos" pitchFamily="34" charset="0"/>
-                <a:ea typeface="Aptos" pitchFamily="34" charset="-122"/>
-                <a:cs typeface="Aptos" pitchFamily="34" charset="-120"/>
-              </a:rPr>
-              <a:t>METHODOLOGY</a:t>
-            </a:r>
-            <a:endParaRPr lang="en-US" sz="1100" dirty="0"/>
-          </a:p>
-        </p:txBody>
-      </p:sp>
-      <p:sp>
-        <p:nvSpPr>
-          <p:cNvPr id="11" name="Shape 9"/>
-          <p:cNvSpPr/>
-          <p:nvPr/>
-        </p:nvSpPr>
-        <p:spPr>
-          <a:xfrm>
-            <a:off x="868680" y="2148840"/>
-            <a:ext cx="4754880" cy="3474720"/>
-          </a:xfrm>
-          <a:prstGeom prst="roundRect">
-            <a:avLst>
-              <a:gd name="adj" fmla="val 2105"/>
-            </a:avLst>
-          </a:prstGeom>
-          <a:solidFill>
-            <a:srgbClr val="FCFBF9"/>
+            <a:srgbClr val="FBFAF8"/>
           </a:solidFill>
           <a:ln w="12700">
             <a:solidFill>
@@ -3653,25 +3550,25 @@
             </a:solidFill>
             <a:prstDash val="solid"/>
           </a:ln>
-          <a:effectLst>
-            <a:outerShdw sx="100000" sy="100000" kx="0" ky="0" algn="bl" rotWithShape="0" blurRad="19050" dist="6350" dir="2700000">
-              <a:srgbClr val="000000">
-                <a:alpha val="12000"/>
-              </a:srgbClr>
-            </a:outerShdw>
-          </a:effectLst>
-        </p:spPr>
-      </p:sp>
-      <p:sp>
-        <p:nvSpPr>
-          <p:cNvPr id="12" name="Text 10"/>
-          <p:cNvSpPr/>
-          <p:nvPr/>
-        </p:nvSpPr>
-        <p:spPr>
-          <a:xfrm>
-            <a:off x="1069848" y="2313432"/>
-            <a:ext cx="4352544" cy="256032"/>
+        </p:spPr>
+        <p:txBody>
+          <a:bodyPr/>
+          <a:lstStyle/>
+          <a:p>
+            <a:endParaRPr lang="en-US"/>
+          </a:p>
+        </p:txBody>
+      </p:sp>
+      <p:sp>
+        <p:nvSpPr>
+          <p:cNvPr id="10" name="Text 8"/>
+          <p:cNvSpPr/>
+          <p:nvPr/>
+        </p:nvSpPr>
+        <p:spPr>
+          <a:xfrm>
+            <a:off x="7360920" y="1828800"/>
+            <a:ext cx="2743200" cy="274320"/>
           </a:xfrm>
           <a:prstGeom prst="rect">
             <a:avLst/>
@@ -3683,11 +3580,11 @@
           <a:bodyPr wrap="square" lIns="0" tIns="0" rIns="0" bIns="0" rtlCol="0" anchor="ctr"/>
           <a:lstStyle/>
           <a:p>
-            <a:pPr indent="0" marL="0">
-              <a:buNone/>
-            </a:pPr>
-            <a:r>
-              <a:rPr lang="en-US" sz="1800" dirty="0" b="1">
+            <a:pPr marL="0" indent="0">
+              <a:buNone/>
+            </a:pPr>
+            <a:r>
+              <a:rPr lang="en-US" sz="1400" b="1" dirty="0">
                 <a:solidFill>
                   <a:srgbClr val="726656"/>
                 </a:solidFill>
@@ -3695,34 +3592,34 @@
                 <a:ea typeface="Aptos Display" pitchFamily="34" charset="-122"/>
                 <a:cs typeface="Aptos Display" pitchFamily="34" charset="-120"/>
               </a:rPr>
-              <a:t>Development Approach</a:t>
-            </a:r>
-            <a:endParaRPr lang="en-US" sz="1800" dirty="0"/>
-          </a:p>
-        </p:txBody>
-      </p:sp>
-      <p:sp>
-        <p:nvSpPr>
-          <p:cNvPr id="13" name="Text 11"/>
-          <p:cNvSpPr/>
-          <p:nvPr/>
-        </p:nvSpPr>
-        <p:spPr>
-          <a:xfrm>
-            <a:off x="1088136" y="2697480"/>
-            <a:ext cx="4315968" cy="2761488"/>
-          </a:xfrm>
-          <a:prstGeom prst="rect">
-            <a:avLst/>
-          </a:prstGeom>
-          <a:noFill/>
-          <a:ln/>
-        </p:spPr>
-        <p:txBody>
-          <a:bodyPr wrap="square" lIns="254" tIns="254" rIns="254" bIns="254" rtlCol="0" anchor="t"/>
-          <a:lstStyle/>
-          <a:p>
-            <a:pPr indent="0" marL="0">
+              <a:t>Demo Script</a:t>
+            </a:r>
+            <a:endParaRPr lang="en-US" sz="1400" dirty="0"/>
+          </a:p>
+        </p:txBody>
+      </p:sp>
+      <p:sp>
+        <p:nvSpPr>
+          <p:cNvPr id="11" name="Text 9"/>
+          <p:cNvSpPr/>
+          <p:nvPr/>
+        </p:nvSpPr>
+        <p:spPr>
+          <a:xfrm>
+            <a:off x="7635240" y="2560320"/>
+            <a:ext cx="2194560" cy="1645920"/>
+          </a:xfrm>
+          <a:prstGeom prst="rect">
+            <a:avLst/>
+          </a:prstGeom>
+          <a:noFill/>
+          <a:ln/>
+        </p:spPr>
+        <p:txBody>
+          <a:bodyPr wrap="square" lIns="0" tIns="0" rIns="0" bIns="0" rtlCol="0" anchor="ctr"/>
+          <a:lstStyle/>
+          <a:p>
+            <a:pPr marL="0" indent="0">
               <a:buNone/>
             </a:pPr>
             <a:r>
@@ -3734,12 +3631,12 @@
                 <a:ea typeface="Aptos" pitchFamily="34" charset="-122"/>
                 <a:cs typeface="Aptos" pitchFamily="34" charset="-120"/>
               </a:rPr>
-              <a:t>• Agile-influenced iterative delivery</a:t>
+              <a:t>• Trigger a single-URL harvest from /harvester</a:t>
             </a:r>
             <a:endParaRPr lang="en-US" sz="1400" dirty="0"/>
           </a:p>
           <a:p>
-            <a:pPr indent="0" marL="0">
+            <a:pPr marL="0" indent="0">
               <a:buNone/>
             </a:pPr>
             <a:r>
@@ -3751,12 +3648,12 @@
                 <a:ea typeface="Aptos" pitchFamily="34" charset="-122"/>
                 <a:cs typeface="Aptos" pitchFamily="34" charset="-120"/>
               </a:rPr>
-              <a:t>• Feature spec + implementation plan before any coding</a:t>
+              <a:t>• Show the extracted device record</a:t>
             </a:r>
             <a:endParaRPr lang="en-US" sz="1400" dirty="0"/>
           </a:p>
           <a:p>
-            <a:pPr indent="0" marL="0">
+            <a:pPr marL="0" indent="0">
               <a:buNone/>
             </a:pPr>
             <a:r>
@@ -3768,12 +3665,12 @@
                 <a:ea typeface="Aptos" pitchFamily="34" charset="-122"/>
                 <a:cs typeface="Aptos" pitchFamily="34" charset="-120"/>
               </a:rPr>
-              <a:t>• Weekly standups via Google Meet</a:t>
+              <a:t>• Run GUDID validation on the batch</a:t>
             </a:r>
             <a:endParaRPr lang="en-US" sz="1400" dirty="0"/>
           </a:p>
           <a:p>
-            <a:pPr indent="0" marL="0">
+            <a:pPr marL="0" indent="0">
               <a:buNone/>
             </a:pPr>
             <a:r>
@@ -3785,12 +3682,12 @@
                 <a:ea typeface="Aptos" pitchFamily="34" charset="-122"/>
                 <a:cs typeface="Aptos" pitchFamily="34" charset="-120"/>
               </a:rPr>
-              <a:t>• Branch-per-developer workflow on GitHub</a:t>
+              <a:t>• Open a mismatch in the /review dashboard</a:t>
             </a:r>
             <a:endParaRPr lang="en-US" sz="1400" dirty="0"/>
           </a:p>
           <a:p>
-            <a:pPr indent="0" marL="0">
+            <a:pPr marL="0" indent="0">
               <a:buNone/>
             </a:pPr>
             <a:r>
@@ -3802,175 +3699,12 @@
                 <a:ea typeface="Aptos" pitchFamily="34" charset="-122"/>
                 <a:cs typeface="Aptos" pitchFamily="34" charset="-120"/>
               </a:rPr>
-              <a:t>• OWASP ZAP security scan at each major feature</a:t>
+              <a:t>• Accept or override a field value</a:t>
             </a:r>
             <a:endParaRPr lang="en-US" sz="1400" dirty="0"/>
           </a:p>
-        </p:txBody>
-      </p:sp>
-      <p:sp>
-        <p:nvSpPr>
-          <p:cNvPr id="14" name="Shape 12"/>
-          <p:cNvSpPr/>
-          <p:nvPr/>
-        </p:nvSpPr>
-        <p:spPr>
-          <a:xfrm>
-            <a:off x="5989320" y="1783080"/>
-            <a:ext cx="1051560" cy="292608"/>
-          </a:xfrm>
-          <a:prstGeom prst="roundRect">
-            <a:avLst>
-              <a:gd name="adj" fmla="val 25000"/>
-            </a:avLst>
-          </a:prstGeom>
-          <a:solidFill>
-            <a:srgbClr val="6BC5C5"/>
-          </a:solidFill>
-          <a:ln w="12700">
-            <a:solidFill>
-              <a:srgbClr val="6BC5C5">
-                <a:alpha val="0"/>
-              </a:srgbClr>
-            </a:solidFill>
-            <a:prstDash val="solid"/>
-          </a:ln>
-        </p:spPr>
-      </p:sp>
-      <p:sp>
-        <p:nvSpPr>
-          <p:cNvPr id="15" name="Text 13"/>
-          <p:cNvSpPr/>
-          <p:nvPr/>
-        </p:nvSpPr>
-        <p:spPr>
-          <a:xfrm>
-            <a:off x="5989320" y="1828800"/>
-            <a:ext cx="1051560" cy="182880"/>
-          </a:xfrm>
-          <a:prstGeom prst="rect">
-            <a:avLst/>
-          </a:prstGeom>
-          <a:noFill/>
-          <a:ln/>
-        </p:spPr>
-        <p:txBody>
-          <a:bodyPr wrap="square" lIns="0" tIns="0" rIns="0" bIns="0" rtlCol="0" anchor="ctr"/>
-          <a:lstStyle/>
-          <a:p>
-            <a:pPr indent="0" marL="0">
-              <a:buNone/>
-            </a:pPr>
-            <a:r>
-              <a:rPr lang="en-US" sz="1100" dirty="0" b="1">
-                <a:solidFill>
-                  <a:srgbClr val="FFFFFF"/>
-                </a:solidFill>
-                <a:latin typeface="Aptos" pitchFamily="34" charset="0"/>
-                <a:ea typeface="Aptos" pitchFamily="34" charset="-122"/>
-                <a:cs typeface="Aptos" pitchFamily="34" charset="-120"/>
-              </a:rPr>
-              <a:t>SOLUTION</a:t>
-            </a:r>
-            <a:endParaRPr lang="en-US" sz="1100" dirty="0"/>
-          </a:p>
-        </p:txBody>
-      </p:sp>
-      <p:sp>
-        <p:nvSpPr>
-          <p:cNvPr id="16" name="Shape 14"/>
-          <p:cNvSpPr/>
-          <p:nvPr/>
-        </p:nvSpPr>
-        <p:spPr>
-          <a:xfrm>
-            <a:off x="5989320" y="2148840"/>
-            <a:ext cx="5303520" cy="3474720"/>
-          </a:xfrm>
-          <a:prstGeom prst="roundRect">
-            <a:avLst>
-              <a:gd name="adj" fmla="val 2105"/>
-            </a:avLst>
-          </a:prstGeom>
-          <a:solidFill>
-            <a:srgbClr val="FCFBF9"/>
-          </a:solidFill>
-          <a:ln w="12700">
-            <a:solidFill>
-              <a:srgbClr val="D8D0C7"/>
-            </a:solidFill>
-            <a:prstDash val="solid"/>
-          </a:ln>
-          <a:effectLst>
-            <a:outerShdw sx="100000" sy="100000" kx="0" ky="0" algn="bl" rotWithShape="0" blurRad="19050" dist="6350" dir="2700000">
-              <a:srgbClr val="000000">
-                <a:alpha val="12000"/>
-              </a:srgbClr>
-            </a:outerShdw>
-          </a:effectLst>
-        </p:spPr>
-      </p:sp>
-      <p:sp>
-        <p:nvSpPr>
-          <p:cNvPr id="17" name="Text 15"/>
-          <p:cNvSpPr/>
-          <p:nvPr/>
-        </p:nvSpPr>
-        <p:spPr>
-          <a:xfrm>
-            <a:off x="6190488" y="2313432"/>
-            <a:ext cx="4901184" cy="256032"/>
-          </a:xfrm>
-          <a:prstGeom prst="rect">
-            <a:avLst/>
-          </a:prstGeom>
-          <a:noFill/>
-          <a:ln/>
-        </p:spPr>
-        <p:txBody>
-          <a:bodyPr wrap="square" lIns="0" tIns="0" rIns="0" bIns="0" rtlCol="0" anchor="ctr"/>
-          <a:lstStyle/>
-          <a:p>
-            <a:pPr indent="0" marL="0">
-              <a:buNone/>
-            </a:pPr>
-            <a:r>
-              <a:rPr lang="en-US" sz="1800" dirty="0" b="1">
-                <a:solidFill>
-                  <a:srgbClr val="726656"/>
-                </a:solidFill>
-                <a:latin typeface="Aptos Display" pitchFamily="34" charset="0"/>
-                <a:ea typeface="Aptos Display" pitchFamily="34" charset="-122"/>
-                <a:cs typeface="Aptos Display" pitchFamily="34" charset="-120"/>
-              </a:rPr>
-              <a:t>Tech Stack</a:t>
-            </a:r>
-            <a:endParaRPr lang="en-US" sz="1800" dirty="0"/>
-          </a:p>
-        </p:txBody>
-      </p:sp>
-      <p:sp>
-        <p:nvSpPr>
-          <p:cNvPr id="18" name="Text 16"/>
-          <p:cNvSpPr/>
-          <p:nvPr/>
-        </p:nvSpPr>
-        <p:spPr>
-          <a:xfrm>
-            <a:off x="6208776" y="2697480"/>
-            <a:ext cx="4864608" cy="2761488"/>
-          </a:xfrm>
-          <a:prstGeom prst="rect">
-            <a:avLst/>
-          </a:prstGeom>
-          <a:noFill/>
-          <a:ln/>
-        </p:spPr>
-        <p:txBody>
-          <a:bodyPr wrap="square" lIns="254" tIns="254" rIns="254" bIns="254" rtlCol="0" anchor="t"/>
-          <a:lstStyle/>
-          <a:p>
-            <a:pPr indent="0" marL="0">
+          <a:p>
+            <a:pPr marL="0" indent="0">
               <a:buNone/>
             </a:pPr>
             <a:r>
@@ -3982,92 +3716,7 @@
                 <a:ea typeface="Aptos" pitchFamily="34" charset="-122"/>
                 <a:cs typeface="Aptos" pitchFamily="34" charset="-120"/>
               </a:rPr>
-              <a:t>• FastAPI + Jinja2 web framework (Python 3.13)</a:t>
-            </a:r>
-            <a:endParaRPr lang="en-US" sz="1400" dirty="0"/>
-          </a:p>
-          <a:p>
-            <a:pPr indent="0" marL="0">
-              <a:buNone/>
-            </a:pPr>
-            <a:r>
-              <a:rPr lang="en-US" sz="1400" dirty="0">
-                <a:solidFill>
-                  <a:srgbClr val="4D4A45"/>
-                </a:solidFill>
-                <a:latin typeface="Aptos" pitchFamily="34" charset="0"/>
-                <a:ea typeface="Aptos" pitchFamily="34" charset="-122"/>
-                <a:cs typeface="Aptos" pitchFamily="34" charset="-120"/>
-              </a:rPr>
-              <a:t>• Playwright browser automation + BeautifulSoup4</a:t>
-            </a:r>
-            <a:endParaRPr lang="en-US" sz="1400" dirty="0"/>
-          </a:p>
-          <a:p>
-            <a:pPr indent="0" marL="0">
-              <a:buNone/>
-            </a:pPr>
-            <a:r>
-              <a:rPr lang="en-US" sz="1400" dirty="0">
-                <a:solidFill>
-                  <a:srgbClr val="4D4A45"/>
-                </a:solidFill>
-                <a:latin typeface="Aptos" pitchFamily="34" charset="0"/>
-                <a:ea typeface="Aptos" pitchFamily="34" charset="-122"/>
-                <a:cs typeface="Aptos" pitchFamily="34" charset="-120"/>
-              </a:rPr>
-              <a:t>• MongoDB 7 document store</a:t>
-            </a:r>
-            <a:endParaRPr lang="en-US" sz="1400" dirty="0"/>
-          </a:p>
-          <a:p>
-            <a:pPr indent="0" marL="0">
-              <a:buNone/>
-            </a:pPr>
-            <a:r>
-              <a:rPr lang="en-US" sz="1400" dirty="0">
-                <a:solidFill>
-                  <a:srgbClr val="4D4A45"/>
-                </a:solidFill>
-                <a:latin typeface="Aptos" pitchFamily="34" charset="0"/>
-                <a:ea typeface="Aptos" pitchFamily="34" charset="-122"/>
-                <a:cs typeface="Aptos" pitchFamily="34" charset="-120"/>
-              </a:rPr>
-              <a:t>• Groq API, NVIDIA NIM, Ollama LLM providers</a:t>
-            </a:r>
-            <a:endParaRPr lang="en-US" sz="1400" dirty="0"/>
-          </a:p>
-          <a:p>
-            <a:pPr indent="0" marL="0">
-              <a:buNone/>
-            </a:pPr>
-            <a:r>
-              <a:rPr lang="en-US" sz="1400" dirty="0">
-                <a:solidFill>
-                  <a:srgbClr val="4D4A45"/>
-                </a:solidFill>
-                <a:latin typeface="Aptos" pitchFamily="34" charset="0"/>
-                <a:ea typeface="Aptos" pitchFamily="34" charset="-122"/>
-                <a:cs typeface="Aptos" pitchFamily="34" charset="-120"/>
-              </a:rPr>
-              <a:t>• Docker Compose full-stack containerization</a:t>
-            </a:r>
-            <a:endParaRPr lang="en-US" sz="1400" dirty="0"/>
-          </a:p>
-          <a:p>
-            <a:pPr indent="0" marL="0">
-              <a:buNone/>
-            </a:pPr>
-            <a:r>
-              <a:rPr lang="en-US" sz="1400" dirty="0">
-                <a:solidFill>
-                  <a:srgbClr val="4D4A45"/>
-                </a:solidFill>
-                <a:latin typeface="Aptos" pitchFamily="34" charset="0"/>
-                <a:ea typeface="Aptos" pitchFamily="34" charset="-122"/>
-                <a:cs typeface="Aptos" pitchFamily="34" charset="-120"/>
-              </a:rPr>
-              <a:t>• bcrypt · OWASP ZAP · GitHub</a:t>
+              <a:t>• (Admin) Create a reviewer account at /admin/users</a:t>
             </a:r>
             <a:endParaRPr lang="en-US" sz="1400" dirty="0"/>
           </a:p>
@@ -4093,7 +3742,7 @@
           </a:prstGeom>
           <a:extLst>
             <a:ext uri="{C572A759-6A51-4108-AA02-DFA0A04FC94B}">
-              <ma14:wrappingTextBoxFlag xmlns:ma14="http://schemas.microsoft.com/office/mac/drawingml/2011/main" val="0"/>
+              <ma14:wrappingTextBoxFlag xmlns:ma14="http://schemas.microsoft.com/office/mac/drawingml/2011/main" xmlns="" val="0"/>
             </a:ext>
           </a:extLst>
         </p:spPr>
@@ -4114,8 +3763,8 @@
           <a:p>
             <a:pPr algn="r"/>
             <a:fld id="{F7021451-1387-4CA6-816F-3879F97B5CBC}" type="slidenum">
-              <a:rPr b="0" lang="en-US"/>
-              <a:t>3</a:t>
+              <a:rPr lang="en-US" b="0"/>
+              <a:t>11</a:t>
             </a:fld>
             <a:endParaRPr lang="en-US"/>
           </a:p>
@@ -4172,6 +3821,13 @@
             <a:prstDash val="solid"/>
           </a:ln>
         </p:spPr>
+        <p:txBody>
+          <a:bodyPr/>
+          <a:lstStyle/>
+          <a:p>
+            <a:endParaRPr lang="en-US"/>
+          </a:p>
+        </p:txBody>
       </p:sp>
       <p:sp>
         <p:nvSpPr>
@@ -4199,6 +3855,13 @@
             <a:prstDash val="solid"/>
           </a:ln>
         </p:spPr>
+        <p:txBody>
+          <a:bodyPr/>
+          <a:lstStyle/>
+          <a:p>
+            <a:endParaRPr lang="en-US"/>
+          </a:p>
+        </p:txBody>
       </p:sp>
       <p:sp>
         <p:nvSpPr>
@@ -4226,6 +3889,13 @@
             <a:prstDash val="solid"/>
           </a:ln>
         </p:spPr>
+        <p:txBody>
+          <a:bodyPr/>
+          <a:lstStyle/>
+          <a:p>
+            <a:endParaRPr lang="en-US"/>
+          </a:p>
+        </p:txBody>
       </p:sp>
       <p:sp>
         <p:nvSpPr>
@@ -4253,6 +3923,13 @@
             <a:prstDash val="solid"/>
           </a:ln>
         </p:spPr>
+        <p:txBody>
+          <a:bodyPr/>
+          <a:lstStyle/>
+          <a:p>
+            <a:endParaRPr lang="en-US"/>
+          </a:p>
+        </p:txBody>
       </p:sp>
       <p:sp>
         <p:nvSpPr>
@@ -4275,11 +3952,11 @@
           <a:bodyPr wrap="square" lIns="0" tIns="0" rIns="0" bIns="0" rtlCol="0" anchor="ctr"/>
           <a:lstStyle/>
           <a:p>
-            <a:pPr indent="0" marL="0">
-              <a:buNone/>
-            </a:pPr>
-            <a:r>
-              <a:rPr lang="en-US" sz="2600" dirty="0" b="1">
+            <a:pPr marL="0" indent="0">
+              <a:buNone/>
+            </a:pPr>
+            <a:r>
+              <a:rPr lang="en-US" sz="2600" b="1" dirty="0">
                 <a:solidFill>
                   <a:srgbClr val="17306F"/>
                 </a:solidFill>
@@ -4314,7 +3991,7 @@
           <a:bodyPr wrap="square" lIns="0" tIns="0" rIns="0" bIns="0" rtlCol="0" anchor="ctr"/>
           <a:lstStyle/>
           <a:p>
-            <a:pPr indent="0" marL="0">
+            <a:pPr marL="0" indent="0">
               <a:buNone/>
             </a:pPr>
             <a:r>
@@ -4354,6 +4031,13 @@
             <a:prstDash val="solid"/>
           </a:ln>
         </p:spPr>
+        <p:txBody>
+          <a:bodyPr/>
+          <a:lstStyle/>
+          <a:p>
+            <a:endParaRPr lang="en-US"/>
+          </a:p>
+        </p:txBody>
       </p:sp>
       <p:sp>
         <p:nvSpPr>
@@ -4383,6 +4067,13 @@
             <a:prstDash val="solid"/>
           </a:ln>
         </p:spPr>
+        <p:txBody>
+          <a:bodyPr/>
+          <a:lstStyle/>
+          <a:p>
+            <a:endParaRPr lang="en-US"/>
+          </a:p>
+        </p:txBody>
       </p:sp>
       <p:sp>
         <p:nvSpPr>
@@ -4405,11 +4096,11 @@
           <a:bodyPr wrap="square" lIns="0" tIns="0" rIns="0" bIns="0" rtlCol="0" anchor="ctr"/>
           <a:lstStyle/>
           <a:p>
-            <a:pPr indent="0" marL="0">
-              <a:buNone/>
-            </a:pPr>
-            <a:r>
-              <a:rPr lang="en-US" sz="1400" dirty="0" b="1">
+            <a:pPr marL="0" indent="0">
+              <a:buNone/>
+            </a:pPr>
+            <a:r>
+              <a:rPr lang="en-US" sz="1400" b="1" dirty="0">
                 <a:solidFill>
                   <a:srgbClr val="FFFFFF"/>
                 </a:solidFill>
@@ -4444,11 +4135,11 @@
           <a:bodyPr wrap="square" lIns="0" tIns="0" rIns="0" bIns="0" rtlCol="0" anchor="ctr"/>
           <a:lstStyle/>
           <a:p>
-            <a:pPr indent="0" marL="0">
-              <a:buNone/>
-            </a:pPr>
-            <a:r>
-              <a:rPr lang="en-US" sz="1400" dirty="0" b="1">
+            <a:pPr marL="0" indent="0">
+              <a:buNone/>
+            </a:pPr>
+            <a:r>
+              <a:rPr lang="en-US" sz="1400" b="1" dirty="0">
                 <a:solidFill>
                   <a:srgbClr val="17306F"/>
                 </a:solidFill>
@@ -4483,7 +4174,7 @@
           <a:bodyPr wrap="square" lIns="0" tIns="0" rIns="0" bIns="0" rtlCol="0" anchor="ctr"/>
           <a:lstStyle/>
           <a:p>
-            <a:pPr indent="0" marL="0">
+            <a:pPr marL="0" indent="0">
               <a:buNone/>
             </a:pPr>
             <a:r>
@@ -4529,6 +4220,13 @@
             <a:prstDash val="solid"/>
           </a:ln>
         </p:spPr>
+        <p:txBody>
+          <a:bodyPr/>
+          <a:lstStyle/>
+          <a:p>
+            <a:endParaRPr lang="en-US"/>
+          </a:p>
+        </p:txBody>
       </p:sp>
       <p:sp>
         <p:nvSpPr>
@@ -4551,11 +4249,11 @@
           <a:bodyPr wrap="square" lIns="0" tIns="0" rIns="0" bIns="0" rtlCol="0" anchor="ctr"/>
           <a:lstStyle/>
           <a:p>
-            <a:pPr indent="0" marL="0">
-              <a:buNone/>
-            </a:pPr>
-            <a:r>
-              <a:rPr lang="en-US" sz="1400" dirty="0" b="1">
+            <a:pPr marL="0" indent="0">
+              <a:buNone/>
+            </a:pPr>
+            <a:r>
+              <a:rPr lang="en-US" sz="1400" b="1" dirty="0">
                 <a:solidFill>
                   <a:srgbClr val="FFFFFF"/>
                 </a:solidFill>
@@ -4590,11 +4288,11 @@
           <a:bodyPr wrap="square" lIns="0" tIns="0" rIns="0" bIns="0" rtlCol="0" anchor="ctr"/>
           <a:lstStyle/>
           <a:p>
-            <a:pPr indent="0" marL="0">
-              <a:buNone/>
-            </a:pPr>
-            <a:r>
-              <a:rPr lang="en-US" sz="1400" dirty="0" b="1">
+            <a:pPr marL="0" indent="0">
+              <a:buNone/>
+            </a:pPr>
+            <a:r>
+              <a:rPr lang="en-US" sz="1400" b="1" dirty="0">
                 <a:solidFill>
                   <a:srgbClr val="17306F"/>
                 </a:solidFill>
@@ -4629,7 +4327,7 @@
           <a:bodyPr wrap="square" lIns="0" tIns="0" rIns="0" bIns="0" rtlCol="0" anchor="ctr"/>
           <a:lstStyle/>
           <a:p>
-            <a:pPr indent="0" marL="0">
+            <a:pPr marL="0" indent="0">
               <a:buNone/>
             </a:pPr>
             <a:r>
@@ -4675,6 +4373,13 @@
             <a:prstDash val="solid"/>
           </a:ln>
         </p:spPr>
+        <p:txBody>
+          <a:bodyPr/>
+          <a:lstStyle/>
+          <a:p>
+            <a:endParaRPr lang="en-US"/>
+          </a:p>
+        </p:txBody>
       </p:sp>
       <p:sp>
         <p:nvSpPr>
@@ -4697,11 +4402,11 @@
           <a:bodyPr wrap="square" lIns="0" tIns="0" rIns="0" bIns="0" rtlCol="0" anchor="ctr"/>
           <a:lstStyle/>
           <a:p>
-            <a:pPr indent="0" marL="0">
-              <a:buNone/>
-            </a:pPr>
-            <a:r>
-              <a:rPr lang="en-US" sz="1400" dirty="0" b="1">
+            <a:pPr marL="0" indent="0">
+              <a:buNone/>
+            </a:pPr>
+            <a:r>
+              <a:rPr lang="en-US" sz="1400" b="1" dirty="0">
                 <a:solidFill>
                   <a:srgbClr val="FFFFFF"/>
                 </a:solidFill>
@@ -4736,11 +4441,11 @@
           <a:bodyPr wrap="square" lIns="0" tIns="0" rIns="0" bIns="0" rtlCol="0" anchor="ctr"/>
           <a:lstStyle/>
           <a:p>
-            <a:pPr indent="0" marL="0">
-              <a:buNone/>
-            </a:pPr>
-            <a:r>
-              <a:rPr lang="en-US" sz="1400" dirty="0" b="1">
+            <a:pPr marL="0" indent="0">
+              <a:buNone/>
+            </a:pPr>
+            <a:r>
+              <a:rPr lang="en-US" sz="1400" b="1" dirty="0">
                 <a:solidFill>
                   <a:srgbClr val="17306F"/>
                 </a:solidFill>
@@ -4775,7 +4480,7 @@
           <a:bodyPr wrap="square" lIns="0" tIns="0" rIns="0" bIns="0" rtlCol="0" anchor="ctr"/>
           <a:lstStyle/>
           <a:p>
-            <a:pPr indent="0" marL="0">
+            <a:pPr marL="0" indent="0">
               <a:buNone/>
             </a:pPr>
             <a:r>
@@ -4821,6 +4526,13 @@
             <a:prstDash val="solid"/>
           </a:ln>
         </p:spPr>
+        <p:txBody>
+          <a:bodyPr/>
+          <a:lstStyle/>
+          <a:p>
+            <a:endParaRPr lang="en-US"/>
+          </a:p>
+        </p:txBody>
       </p:sp>
       <p:sp>
         <p:nvSpPr>
@@ -4843,11 +4555,11 @@
           <a:bodyPr wrap="square" lIns="0" tIns="0" rIns="0" bIns="0" rtlCol="0" anchor="ctr"/>
           <a:lstStyle/>
           <a:p>
-            <a:pPr indent="0" marL="0">
-              <a:buNone/>
-            </a:pPr>
-            <a:r>
-              <a:rPr lang="en-US" sz="1400" dirty="0" b="1">
+            <a:pPr marL="0" indent="0">
+              <a:buNone/>
+            </a:pPr>
+            <a:r>
+              <a:rPr lang="en-US" sz="1400" b="1" dirty="0">
                 <a:solidFill>
                   <a:srgbClr val="FFFFFF"/>
                 </a:solidFill>
@@ -4882,11 +4594,11 @@
           <a:bodyPr wrap="square" lIns="0" tIns="0" rIns="0" bIns="0" rtlCol="0" anchor="ctr"/>
           <a:lstStyle/>
           <a:p>
-            <a:pPr indent="0" marL="0">
-              <a:buNone/>
-            </a:pPr>
-            <a:r>
-              <a:rPr lang="en-US" sz="1400" dirty="0" b="1">
+            <a:pPr marL="0" indent="0">
+              <a:buNone/>
+            </a:pPr>
+            <a:r>
+              <a:rPr lang="en-US" sz="1400" b="1" dirty="0">
                 <a:solidFill>
                   <a:srgbClr val="17306F"/>
                 </a:solidFill>
@@ -4921,7 +4633,7 @@
           <a:bodyPr wrap="square" lIns="0" tIns="0" rIns="0" bIns="0" rtlCol="0" anchor="ctr"/>
           <a:lstStyle/>
           <a:p>
-            <a:pPr indent="0" marL="0">
+            <a:pPr marL="0" indent="0">
               <a:buNone/>
             </a:pPr>
             <a:r>
@@ -4967,6 +4679,13 @@
             <a:prstDash val="solid"/>
           </a:ln>
         </p:spPr>
+        <p:txBody>
+          <a:bodyPr/>
+          <a:lstStyle/>
+          <a:p>
+            <a:endParaRPr lang="en-US"/>
+          </a:p>
+        </p:txBody>
       </p:sp>
       <p:sp>
         <p:nvSpPr>
@@ -4989,11 +4708,11 @@
           <a:bodyPr wrap="square" lIns="0" tIns="0" rIns="0" bIns="0" rtlCol="0" anchor="ctr"/>
           <a:lstStyle/>
           <a:p>
-            <a:pPr indent="0" marL="0">
-              <a:buNone/>
-            </a:pPr>
-            <a:r>
-              <a:rPr lang="en-US" sz="1400" dirty="0" b="1">
+            <a:pPr marL="0" indent="0">
+              <a:buNone/>
+            </a:pPr>
+            <a:r>
+              <a:rPr lang="en-US" sz="1400" b="1" dirty="0">
                 <a:solidFill>
                   <a:srgbClr val="FFFFFF"/>
                 </a:solidFill>
@@ -5028,11 +4747,11 @@
           <a:bodyPr wrap="square" lIns="0" tIns="0" rIns="0" bIns="0" rtlCol="0" anchor="ctr"/>
           <a:lstStyle/>
           <a:p>
-            <a:pPr indent="0" marL="0">
-              <a:buNone/>
-            </a:pPr>
-            <a:r>
-              <a:rPr lang="en-US" sz="1400" dirty="0" b="1">
+            <a:pPr marL="0" indent="0">
+              <a:buNone/>
+            </a:pPr>
+            <a:r>
+              <a:rPr lang="en-US" sz="1400" b="1" dirty="0">
                 <a:solidFill>
                   <a:srgbClr val="17306F"/>
                 </a:solidFill>
@@ -5067,7 +4786,7 @@
           <a:bodyPr wrap="square" lIns="0" tIns="0" rIns="0" bIns="0" rtlCol="0" anchor="ctr"/>
           <a:lstStyle/>
           <a:p>
-            <a:pPr indent="0" marL="0">
+            <a:pPr marL="0" indent="0">
               <a:buNone/>
             </a:pPr>
             <a:r>
@@ -5113,6 +4832,13 @@
             <a:prstDash val="solid"/>
           </a:ln>
         </p:spPr>
+        <p:txBody>
+          <a:bodyPr/>
+          <a:lstStyle/>
+          <a:p>
+            <a:endParaRPr lang="en-US"/>
+          </a:p>
+        </p:txBody>
       </p:sp>
       <p:sp>
         <p:nvSpPr>
@@ -5135,11 +4861,11 @@
           <a:bodyPr wrap="square" lIns="0" tIns="0" rIns="0" bIns="0" rtlCol="0" anchor="ctr"/>
           <a:lstStyle/>
           <a:p>
-            <a:pPr indent="0" marL="0">
-              <a:buNone/>
-            </a:pPr>
-            <a:r>
-              <a:rPr lang="en-US" sz="1400" dirty="0" b="1">
+            <a:pPr marL="0" indent="0">
+              <a:buNone/>
+            </a:pPr>
+            <a:r>
+              <a:rPr lang="en-US" sz="1400" b="1" dirty="0">
                 <a:solidFill>
                   <a:srgbClr val="FFFFFF"/>
                 </a:solidFill>
@@ -5174,11 +4900,11 @@
           <a:bodyPr wrap="square" lIns="0" tIns="0" rIns="0" bIns="0" rtlCol="0" anchor="ctr"/>
           <a:lstStyle/>
           <a:p>
-            <a:pPr indent="0" marL="0">
-              <a:buNone/>
-            </a:pPr>
-            <a:r>
-              <a:rPr lang="en-US" sz="1400" dirty="0" b="1">
+            <a:pPr marL="0" indent="0">
+              <a:buNone/>
+            </a:pPr>
+            <a:r>
+              <a:rPr lang="en-US" sz="1400" b="1" dirty="0">
                 <a:solidFill>
                   <a:srgbClr val="17306F"/>
                 </a:solidFill>
@@ -5213,7 +4939,7 @@
           <a:bodyPr wrap="square" lIns="0" tIns="0" rIns="0" bIns="0" rtlCol="0" anchor="ctr"/>
           <a:lstStyle/>
           <a:p>
-            <a:pPr indent="0" marL="0">
+            <a:pPr marL="0" indent="0">
               <a:buNone/>
             </a:pPr>
             <a:r>
@@ -5233,7 +4959,7 @@
       </p:sp>
       <p:sp>
         <p:nvSpPr>
-          <p:cNvPr id="25" name="Slide Number Placeholder 0"/>
+          <p:cNvPr id="33" name="Slide Number Placeholder 0"/>
           <p:cNvSpPr>
             <a:spLocks noGrp="1"/>
           </p:cNvSpPr>
@@ -5251,7 +4977,7 @@
           </a:prstGeom>
           <a:extLst>
             <a:ext uri="{C572A759-6A51-4108-AA02-DFA0A04FC94B}">
-              <ma14:wrappingTextBoxFlag xmlns:ma14="http://schemas.microsoft.com/office/mac/drawingml/2011/main" val="0"/>
+              <ma14:wrappingTextBoxFlag xmlns:ma14="http://schemas.microsoft.com/office/mac/drawingml/2011/main" xmlns="" val="0"/>
             </a:ext>
           </a:extLst>
         </p:spPr>
@@ -5272,7 +4998,7 @@
           <a:p>
             <a:pPr algn="r"/>
             <a:fld id="{F7021451-1387-4CA6-816F-3879F97B5CBC}" type="slidenum">
-              <a:rPr b="0" lang="en-US"/>
+              <a:rPr lang="en-US" b="0"/>
               <a:t>2</a:t>
             </a:fld>
             <a:endParaRPr lang="en-US"/>
@@ -5330,6 +5056,13 @@
             <a:prstDash val="solid"/>
           </a:ln>
         </p:spPr>
+        <p:txBody>
+          <a:bodyPr/>
+          <a:lstStyle/>
+          <a:p>
+            <a:endParaRPr lang="en-US"/>
+          </a:p>
+        </p:txBody>
       </p:sp>
       <p:sp>
         <p:nvSpPr>
@@ -5357,6 +5090,13 @@
             <a:prstDash val="solid"/>
           </a:ln>
         </p:spPr>
+        <p:txBody>
+          <a:bodyPr/>
+          <a:lstStyle/>
+          <a:p>
+            <a:endParaRPr lang="en-US"/>
+          </a:p>
+        </p:txBody>
       </p:sp>
       <p:sp>
         <p:nvSpPr>
@@ -5384,6 +5124,13 @@
             <a:prstDash val="solid"/>
           </a:ln>
         </p:spPr>
+        <p:txBody>
+          <a:bodyPr/>
+          <a:lstStyle/>
+          <a:p>
+            <a:endParaRPr lang="en-US"/>
+          </a:p>
+        </p:txBody>
       </p:sp>
       <p:sp>
         <p:nvSpPr>
@@ -5411,6 +5158,13 @@
             <a:prstDash val="solid"/>
           </a:ln>
         </p:spPr>
+        <p:txBody>
+          <a:bodyPr/>
+          <a:lstStyle/>
+          <a:p>
+            <a:endParaRPr lang="en-US"/>
+          </a:p>
+        </p:txBody>
       </p:sp>
       <p:sp>
         <p:nvSpPr>
@@ -5433,11 +5187,11 @@
           <a:bodyPr wrap="square" lIns="0" tIns="0" rIns="0" bIns="0" rtlCol="0" anchor="ctr"/>
           <a:lstStyle/>
           <a:p>
-            <a:pPr indent="0" marL="0">
-              <a:buNone/>
-            </a:pPr>
-            <a:r>
-              <a:rPr lang="en-US" sz="2600" dirty="0" b="1">
+            <a:pPr marL="0" indent="0">
+              <a:buNone/>
+            </a:pPr>
+            <a:r>
+              <a:rPr lang="en-US" sz="2600" b="1" dirty="0">
                 <a:solidFill>
                   <a:srgbClr val="17306F"/>
                 </a:solidFill>
@@ -5472,7 +5226,7 @@
           <a:bodyPr wrap="square" lIns="0" tIns="0" rIns="0" bIns="0" rtlCol="0" anchor="ctr"/>
           <a:lstStyle/>
           <a:p>
-            <a:pPr indent="0" marL="0">
+            <a:pPr marL="0" indent="0">
               <a:buNone/>
             </a:pPr>
             <a:r>
@@ -5512,6 +5266,13 @@
             <a:prstDash val="solid"/>
           </a:ln>
         </p:spPr>
+        <p:txBody>
+          <a:bodyPr/>
+          <a:lstStyle/>
+          <a:p>
+            <a:endParaRPr lang="en-US"/>
+          </a:p>
+        </p:txBody>
       </p:sp>
       <p:sp>
         <p:nvSpPr>
@@ -5541,6 +5302,13 @@
             <a:prstDash val="solid"/>
           </a:ln>
         </p:spPr>
+        <p:txBody>
+          <a:bodyPr/>
+          <a:lstStyle/>
+          <a:p>
+            <a:endParaRPr lang="en-US"/>
+          </a:p>
+        </p:txBody>
       </p:sp>
       <p:sp>
         <p:nvSpPr>
@@ -5563,11 +5331,11 @@
           <a:bodyPr wrap="square" lIns="0" tIns="0" rIns="0" bIns="0" rtlCol="0" anchor="ctr"/>
           <a:lstStyle/>
           <a:p>
-            <a:pPr indent="0" marL="0">
-              <a:buNone/>
-            </a:pPr>
-            <a:r>
-              <a:rPr lang="en-US" sz="1100" dirty="0" b="1">
+            <a:pPr marL="0" indent="0">
+              <a:buNone/>
+            </a:pPr>
+            <a:r>
+              <a:rPr lang="en-US" sz="1100" b="1" dirty="0">
                 <a:solidFill>
                   <a:srgbClr val="FFFFFF"/>
                 </a:solidFill>
@@ -5607,13 +5375,20 @@
             <a:prstDash val="solid"/>
           </a:ln>
           <a:effectLst>
-            <a:outerShdw sx="100000" sy="100000" kx="0" ky="0" algn="bl" rotWithShape="0" blurRad="19050" dist="6350" dir="2700000">
+            <a:outerShdw blurRad="19050" dist="6350" dir="2700000" algn="bl" rotWithShape="0">
               <a:srgbClr val="000000">
                 <a:alpha val="12000"/>
               </a:srgbClr>
             </a:outerShdw>
           </a:effectLst>
         </p:spPr>
+        <p:txBody>
+          <a:bodyPr/>
+          <a:lstStyle/>
+          <a:p>
+            <a:endParaRPr lang="en-US"/>
+          </a:p>
+        </p:txBody>
       </p:sp>
       <p:sp>
         <p:nvSpPr>
@@ -5636,11 +5411,11 @@
           <a:bodyPr wrap="square" lIns="0" tIns="0" rIns="0" bIns="0" rtlCol="0" anchor="ctr"/>
           <a:lstStyle/>
           <a:p>
-            <a:pPr indent="0" marL="0">
-              <a:buNone/>
-            </a:pPr>
-            <a:r>
-              <a:rPr lang="en-US" sz="1800" dirty="0" b="1">
+            <a:pPr marL="0" indent="0">
+              <a:buNone/>
+            </a:pPr>
+            <a:r>
+              <a:rPr lang="en-US" sz="1800" b="1" dirty="0">
                 <a:solidFill>
                   <a:srgbClr val="726656"/>
                 </a:solidFill>
@@ -5675,7 +5450,7 @@
           <a:bodyPr wrap="square" lIns="254" tIns="254" rIns="254" bIns="254" rtlCol="0" anchor="t"/>
           <a:lstStyle/>
           <a:p>
-            <a:pPr indent="0" marL="0">
+            <a:pPr marL="0" indent="0">
               <a:buNone/>
             </a:pPr>
             <a:r>
@@ -5692,7 +5467,7 @@
             <a:endParaRPr lang="en-US" sz="1400" dirty="0"/>
           </a:p>
           <a:p>
-            <a:pPr indent="0" marL="0">
+            <a:pPr marL="0" indent="0">
               <a:buNone/>
             </a:pPr>
             <a:r>
@@ -5709,7 +5484,7 @@
             <a:endParaRPr lang="en-US" sz="1400" dirty="0"/>
           </a:p>
           <a:p>
-            <a:pPr indent="0" marL="0">
+            <a:pPr marL="0" indent="0">
               <a:buNone/>
             </a:pPr>
             <a:r>
@@ -5726,7 +5501,7 @@
             <a:endParaRPr lang="en-US" sz="1400" dirty="0"/>
           </a:p>
           <a:p>
-            <a:pPr indent="0" marL="0">
+            <a:pPr marL="0" indent="0">
               <a:buNone/>
             </a:pPr>
             <a:r>
@@ -5743,7 +5518,7 @@
             <a:endParaRPr lang="en-US" sz="1400" dirty="0"/>
           </a:p>
           <a:p>
-            <a:pPr indent="0" marL="0">
+            <a:pPr marL="0" indent="0">
               <a:buNone/>
             </a:pPr>
             <a:r>
@@ -5789,6 +5564,13 @@
             <a:prstDash val="solid"/>
           </a:ln>
         </p:spPr>
+        <p:txBody>
+          <a:bodyPr/>
+          <a:lstStyle/>
+          <a:p>
+            <a:endParaRPr lang="en-US"/>
+          </a:p>
+        </p:txBody>
       </p:sp>
       <p:sp>
         <p:nvSpPr>
@@ -5811,11 +5593,11 @@
           <a:bodyPr wrap="square" lIns="0" tIns="0" rIns="0" bIns="0" rtlCol="0" anchor="ctr"/>
           <a:lstStyle/>
           <a:p>
-            <a:pPr indent="0" marL="0">
-              <a:buNone/>
-            </a:pPr>
-            <a:r>
-              <a:rPr lang="en-US" sz="1100" dirty="0" b="1">
+            <a:pPr marL="0" indent="0">
+              <a:buNone/>
+            </a:pPr>
+            <a:r>
+              <a:rPr lang="en-US" sz="1100" b="1" dirty="0">
                 <a:solidFill>
                   <a:srgbClr val="FFFFFF"/>
                 </a:solidFill>
@@ -5855,13 +5637,20 @@
             <a:prstDash val="solid"/>
           </a:ln>
           <a:effectLst>
-            <a:outerShdw sx="100000" sy="100000" kx="0" ky="0" algn="bl" rotWithShape="0" blurRad="19050" dist="6350" dir="2700000">
+            <a:outerShdw blurRad="19050" dist="6350" dir="2700000" algn="bl" rotWithShape="0">
               <a:srgbClr val="000000">
                 <a:alpha val="12000"/>
               </a:srgbClr>
             </a:outerShdw>
           </a:effectLst>
         </p:spPr>
+        <p:txBody>
+          <a:bodyPr/>
+          <a:lstStyle/>
+          <a:p>
+            <a:endParaRPr lang="en-US"/>
+          </a:p>
+        </p:txBody>
       </p:sp>
       <p:sp>
         <p:nvSpPr>
@@ -5884,11 +5673,11 @@
           <a:bodyPr wrap="square" lIns="0" tIns="0" rIns="0" bIns="0" rtlCol="0" anchor="ctr"/>
           <a:lstStyle/>
           <a:p>
-            <a:pPr indent="0" marL="0">
-              <a:buNone/>
-            </a:pPr>
-            <a:r>
-              <a:rPr lang="en-US" sz="1800" dirty="0" b="1">
+            <a:pPr marL="0" indent="0">
+              <a:buNone/>
+            </a:pPr>
+            <a:r>
+              <a:rPr lang="en-US" sz="1800" b="1" dirty="0">
                 <a:solidFill>
                   <a:srgbClr val="726656"/>
                 </a:solidFill>
@@ -5923,7 +5712,7 @@
           <a:bodyPr wrap="square" lIns="254" tIns="254" rIns="254" bIns="254" rtlCol="0" anchor="t"/>
           <a:lstStyle/>
           <a:p>
-            <a:pPr indent="0" marL="0">
+            <a:pPr marL="0" indent="0">
               <a:buNone/>
             </a:pPr>
             <a:r>
@@ -5940,7 +5729,7 @@
             <a:endParaRPr lang="en-US" sz="1400" dirty="0"/>
           </a:p>
           <a:p>
-            <a:pPr indent="0" marL="0">
+            <a:pPr marL="0" indent="0">
               <a:buNone/>
             </a:pPr>
             <a:r>
@@ -5957,7 +5746,7 @@
             <a:endParaRPr lang="en-US" sz="1400" dirty="0"/>
           </a:p>
           <a:p>
-            <a:pPr indent="0" marL="0">
+            <a:pPr marL="0" indent="0">
               <a:buNone/>
             </a:pPr>
             <a:r>
@@ -5974,7 +5763,7 @@
             <a:endParaRPr lang="en-US" sz="1400" dirty="0"/>
           </a:p>
           <a:p>
-            <a:pPr indent="0" marL="0">
+            <a:pPr marL="0" indent="0">
               <a:buNone/>
             </a:pPr>
             <a:r>
@@ -5991,7 +5780,7 @@
             <a:endParaRPr lang="en-US" sz="1400" dirty="0"/>
           </a:p>
           <a:p>
-            <a:pPr indent="0" marL="0">
+            <a:pPr marL="0" indent="0">
               <a:buNone/>
             </a:pPr>
             <a:r>
@@ -6029,7 +5818,7 @@
           </a:prstGeom>
           <a:extLst>
             <a:ext uri="{C572A759-6A51-4108-AA02-DFA0A04FC94B}">
-              <ma14:wrappingTextBoxFlag xmlns:ma14="http://schemas.microsoft.com/office/mac/drawingml/2011/main" val="0"/>
+              <ma14:wrappingTextBoxFlag xmlns:ma14="http://schemas.microsoft.com/office/mac/drawingml/2011/main" xmlns="" val="0"/>
             </a:ext>
           </a:extLst>
         </p:spPr>
@@ -6050,7 +5839,7 @@
           <a:p>
             <a:pPr algn="r"/>
             <a:fld id="{F7021451-1387-4CA6-816F-3879F97B5CBC}" type="slidenum">
-              <a:rPr b="0" lang="en-US"/>
+              <a:rPr lang="en-US" b="0"/>
               <a:t>3</a:t>
             </a:fld>
             <a:endParaRPr lang="en-US"/>
@@ -6108,6 +5897,13 @@
             <a:prstDash val="solid"/>
           </a:ln>
         </p:spPr>
+        <p:txBody>
+          <a:bodyPr/>
+          <a:lstStyle/>
+          <a:p>
+            <a:endParaRPr lang="en-US"/>
+          </a:p>
+        </p:txBody>
       </p:sp>
       <p:sp>
         <p:nvSpPr>
@@ -6135,6 +5931,13 @@
             <a:prstDash val="solid"/>
           </a:ln>
         </p:spPr>
+        <p:txBody>
+          <a:bodyPr/>
+          <a:lstStyle/>
+          <a:p>
+            <a:endParaRPr lang="en-US"/>
+          </a:p>
+        </p:txBody>
       </p:sp>
       <p:sp>
         <p:nvSpPr>
@@ -6162,6 +5965,13 @@
             <a:prstDash val="solid"/>
           </a:ln>
         </p:spPr>
+        <p:txBody>
+          <a:bodyPr/>
+          <a:lstStyle/>
+          <a:p>
+            <a:endParaRPr lang="en-US"/>
+          </a:p>
+        </p:txBody>
       </p:sp>
       <p:sp>
         <p:nvSpPr>
@@ -6189,6 +5999,13 @@
             <a:prstDash val="solid"/>
           </a:ln>
         </p:spPr>
+        <p:txBody>
+          <a:bodyPr/>
+          <a:lstStyle/>
+          <a:p>
+            <a:endParaRPr lang="en-US"/>
+          </a:p>
+        </p:txBody>
       </p:sp>
       <p:sp>
         <p:nvSpPr>
@@ -6211,11 +6028,11 @@
           <a:bodyPr wrap="square" lIns="0" tIns="0" rIns="0" bIns="0" rtlCol="0" anchor="ctr"/>
           <a:lstStyle/>
           <a:p>
-            <a:pPr indent="0" marL="0">
-              <a:buNone/>
-            </a:pPr>
-            <a:r>
-              <a:rPr lang="en-US" sz="2600" dirty="0" b="1">
+            <a:pPr marL="0" indent="0">
+              <a:buNone/>
+            </a:pPr>
+            <a:r>
+              <a:rPr lang="en-US" sz="2600" b="1" dirty="0">
                 <a:solidFill>
                   <a:srgbClr val="17306F"/>
                 </a:solidFill>
@@ -6250,7 +6067,7 @@
           <a:bodyPr wrap="square" lIns="0" tIns="0" rIns="0" bIns="0" rtlCol="0" anchor="ctr"/>
           <a:lstStyle/>
           <a:p>
-            <a:pPr indent="0" marL="0">
+            <a:pPr marL="0" indent="0">
               <a:buNone/>
             </a:pPr>
             <a:r>
@@ -6290,6 +6107,13 @@
             <a:prstDash val="solid"/>
           </a:ln>
         </p:spPr>
+        <p:txBody>
+          <a:bodyPr/>
+          <a:lstStyle/>
+          <a:p>
+            <a:endParaRPr lang="en-US"/>
+          </a:p>
+        </p:txBody>
       </p:sp>
       <p:sp>
         <p:nvSpPr>
@@ -6317,13 +6141,20 @@
             <a:prstDash val="solid"/>
           </a:ln>
           <a:effectLst>
-            <a:outerShdw sx="100000" sy="100000" kx="0" ky="0" algn="bl" rotWithShape="0" blurRad="19050" dist="6350" dir="2700000">
+            <a:outerShdw blurRad="19050" dist="6350" dir="2700000" algn="bl" rotWithShape="0">
               <a:srgbClr val="000000">
                 <a:alpha val="12000"/>
               </a:srgbClr>
             </a:outerShdw>
           </a:effectLst>
         </p:spPr>
+        <p:txBody>
+          <a:bodyPr/>
+          <a:lstStyle/>
+          <a:p>
+            <a:endParaRPr lang="en-US"/>
+          </a:p>
+        </p:txBody>
       </p:sp>
       <p:sp>
         <p:nvSpPr>
@@ -6346,11 +6177,11 @@
           <a:bodyPr wrap="square" lIns="0" tIns="0" rIns="0" bIns="0" rtlCol="0" anchor="ctr"/>
           <a:lstStyle/>
           <a:p>
-            <a:pPr indent="0" marL="0">
-              <a:buNone/>
-            </a:pPr>
-            <a:r>
-              <a:rPr lang="en-US" sz="1800" dirty="0" b="1">
+            <a:pPr marL="0" indent="0">
+              <a:buNone/>
+            </a:pPr>
+            <a:r>
+              <a:rPr lang="en-US" sz="1800" b="1" dirty="0">
                 <a:solidFill>
                   <a:srgbClr val="726656"/>
                 </a:solidFill>
@@ -6385,7 +6216,7 @@
           <a:bodyPr wrap="square" lIns="254" tIns="254" rIns="254" bIns="254" rtlCol="0" anchor="t"/>
           <a:lstStyle/>
           <a:p>
-            <a:pPr indent="0" marL="0">
+            <a:pPr marL="0" indent="0">
               <a:buNone/>
             </a:pPr>
             <a:r>
@@ -6402,7 +6233,7 @@
             <a:endParaRPr lang="en-US" sz="1400" dirty="0"/>
           </a:p>
           <a:p>
-            <a:pPr indent="0" marL="0">
+            <a:pPr marL="0" indent="0">
               <a:buNone/>
             </a:pPr>
             <a:r>
@@ -6419,7 +6250,7 @@
             <a:endParaRPr lang="en-US" sz="1400" dirty="0"/>
           </a:p>
           <a:p>
-            <a:pPr indent="0" marL="0">
+            <a:pPr marL="0" indent="0">
               <a:buNone/>
             </a:pPr>
             <a:r>
@@ -6463,13 +6294,20 @@
             <a:prstDash val="solid"/>
           </a:ln>
           <a:effectLst>
-            <a:outerShdw sx="100000" sy="100000" kx="0" ky="0" algn="bl" rotWithShape="0" blurRad="19050" dist="6350" dir="2700000">
+            <a:outerShdw blurRad="19050" dist="6350" dir="2700000" algn="bl" rotWithShape="0">
               <a:srgbClr val="000000">
                 <a:alpha val="12000"/>
               </a:srgbClr>
             </a:outerShdw>
           </a:effectLst>
         </p:spPr>
+        <p:txBody>
+          <a:bodyPr/>
+          <a:lstStyle/>
+          <a:p>
+            <a:endParaRPr lang="en-US"/>
+          </a:p>
+        </p:txBody>
       </p:sp>
       <p:sp>
         <p:nvSpPr>
@@ -6492,11 +6330,11 @@
           <a:bodyPr wrap="square" lIns="0" tIns="0" rIns="0" bIns="0" rtlCol="0" anchor="ctr"/>
           <a:lstStyle/>
           <a:p>
-            <a:pPr indent="0" marL="0">
-              <a:buNone/>
-            </a:pPr>
-            <a:r>
-              <a:rPr lang="en-US" sz="1800" dirty="0" b="1">
+            <a:pPr marL="0" indent="0">
+              <a:buNone/>
+            </a:pPr>
+            <a:r>
+              <a:rPr lang="en-US" sz="1800" b="1" dirty="0">
                 <a:solidFill>
                   <a:srgbClr val="726656"/>
                 </a:solidFill>
@@ -6531,7 +6369,7 @@
           <a:bodyPr wrap="square" lIns="254" tIns="254" rIns="254" bIns="254" rtlCol="0" anchor="t"/>
           <a:lstStyle/>
           <a:p>
-            <a:pPr indent="0" marL="0">
+            <a:pPr marL="0" indent="0">
               <a:buNone/>
             </a:pPr>
             <a:r>
@@ -6548,7 +6386,7 @@
             <a:endParaRPr lang="en-US" sz="1400" dirty="0"/>
           </a:p>
           <a:p>
-            <a:pPr indent="0" marL="0">
+            <a:pPr marL="0" indent="0">
               <a:buNone/>
             </a:pPr>
             <a:r>
@@ -6565,7 +6403,7 @@
             <a:endParaRPr lang="en-US" sz="1400" dirty="0"/>
           </a:p>
           <a:p>
-            <a:pPr indent="0" marL="0">
+            <a:pPr marL="0" indent="0">
               <a:buNone/>
             </a:pPr>
             <a:r>
@@ -6609,13 +6447,20 @@
             <a:prstDash val="solid"/>
           </a:ln>
           <a:effectLst>
-            <a:outerShdw sx="100000" sy="100000" kx="0" ky="0" algn="bl" rotWithShape="0" blurRad="19050" dist="6350" dir="2700000">
+            <a:outerShdw blurRad="19050" dist="6350" dir="2700000" algn="bl" rotWithShape="0">
               <a:srgbClr val="000000">
                 <a:alpha val="12000"/>
               </a:srgbClr>
             </a:outerShdw>
           </a:effectLst>
         </p:spPr>
+        <p:txBody>
+          <a:bodyPr/>
+          <a:lstStyle/>
+          <a:p>
+            <a:endParaRPr lang="en-US"/>
+          </a:p>
+        </p:txBody>
       </p:sp>
       <p:sp>
         <p:nvSpPr>
@@ -6638,11 +6483,11 @@
           <a:bodyPr wrap="square" lIns="0" tIns="0" rIns="0" bIns="0" rtlCol="0" anchor="ctr"/>
           <a:lstStyle/>
           <a:p>
-            <a:pPr indent="0" marL="0">
-              <a:buNone/>
-            </a:pPr>
-            <a:r>
-              <a:rPr lang="en-US" sz="1800" dirty="0" b="1">
+            <a:pPr marL="0" indent="0">
+              <a:buNone/>
+            </a:pPr>
+            <a:r>
+              <a:rPr lang="en-US" sz="1800" b="1" dirty="0">
                 <a:solidFill>
                   <a:srgbClr val="726656"/>
                 </a:solidFill>
@@ -6677,7 +6522,7 @@
           <a:bodyPr wrap="square" lIns="254" tIns="254" rIns="254" bIns="254" rtlCol="0" anchor="t"/>
           <a:lstStyle/>
           <a:p>
-            <a:pPr indent="0" marL="0">
+            <a:pPr marL="0" indent="0">
               <a:buNone/>
             </a:pPr>
             <a:r>
@@ -6694,7 +6539,7 @@
             <a:endParaRPr lang="en-US" sz="1400" dirty="0"/>
           </a:p>
           <a:p>
-            <a:pPr indent="0" marL="0">
+            <a:pPr marL="0" indent="0">
               <a:buNone/>
             </a:pPr>
             <a:r>
@@ -6711,7 +6556,7 @@
             <a:endParaRPr lang="en-US" sz="1400" dirty="0"/>
           </a:p>
           <a:p>
-            <a:pPr indent="0" marL="0">
+            <a:pPr marL="0" indent="0">
               <a:buNone/>
             </a:pPr>
             <a:r>
@@ -6749,7 +6594,7 @@
           </a:prstGeom>
           <a:extLst>
             <a:ext uri="{C572A759-6A51-4108-AA02-DFA0A04FC94B}">
-              <ma14:wrappingTextBoxFlag xmlns:ma14="http://schemas.microsoft.com/office/mac/drawingml/2011/main" val="0"/>
+              <ma14:wrappingTextBoxFlag xmlns:ma14="http://schemas.microsoft.com/office/mac/drawingml/2011/main" xmlns="" val="0"/>
             </a:ext>
           </a:extLst>
         </p:spPr>
@@ -6770,7 +6615,7 @@
           <a:p>
             <a:pPr algn="r"/>
             <a:fld id="{F7021451-1387-4CA6-816F-3879F97B5CBC}" type="slidenum">
-              <a:rPr b="0" lang="en-US"/>
+              <a:rPr lang="en-US" b="0"/>
               <a:t>4</a:t>
             </a:fld>
             <a:endParaRPr lang="en-US"/>
@@ -6828,6 +6673,13 @@
             <a:prstDash val="solid"/>
           </a:ln>
         </p:spPr>
+        <p:txBody>
+          <a:bodyPr/>
+          <a:lstStyle/>
+          <a:p>
+            <a:endParaRPr lang="en-US"/>
+          </a:p>
+        </p:txBody>
       </p:sp>
       <p:sp>
         <p:nvSpPr>
@@ -6855,6 +6707,13 @@
             <a:prstDash val="solid"/>
           </a:ln>
         </p:spPr>
+        <p:txBody>
+          <a:bodyPr/>
+          <a:lstStyle/>
+          <a:p>
+            <a:endParaRPr lang="en-US"/>
+          </a:p>
+        </p:txBody>
       </p:sp>
       <p:sp>
         <p:nvSpPr>
@@ -6882,6 +6741,13 @@
             <a:prstDash val="solid"/>
           </a:ln>
         </p:spPr>
+        <p:txBody>
+          <a:bodyPr/>
+          <a:lstStyle/>
+          <a:p>
+            <a:endParaRPr lang="en-US"/>
+          </a:p>
+        </p:txBody>
       </p:sp>
       <p:sp>
         <p:nvSpPr>
@@ -6909,6 +6775,13 @@
             <a:prstDash val="solid"/>
           </a:ln>
         </p:spPr>
+        <p:txBody>
+          <a:bodyPr/>
+          <a:lstStyle/>
+          <a:p>
+            <a:endParaRPr lang="en-US"/>
+          </a:p>
+        </p:txBody>
       </p:sp>
       <p:sp>
         <p:nvSpPr>
@@ -6931,11 +6804,11 @@
           <a:bodyPr wrap="square" lIns="0" tIns="0" rIns="0" bIns="0" rtlCol="0" anchor="ctr"/>
           <a:lstStyle/>
           <a:p>
-            <a:pPr indent="0" marL="0">
-              <a:buNone/>
-            </a:pPr>
-            <a:r>
-              <a:rPr lang="en-US" sz="2600" dirty="0" b="1">
+            <a:pPr marL="0" indent="0">
+              <a:buNone/>
+            </a:pPr>
+            <a:r>
+              <a:rPr lang="en-US" sz="2600" b="1" dirty="0">
                 <a:solidFill>
                   <a:srgbClr val="17306F"/>
                 </a:solidFill>
@@ -6970,7 +6843,7 @@
           <a:bodyPr wrap="square" lIns="0" tIns="0" rIns="0" bIns="0" rtlCol="0" anchor="ctr"/>
           <a:lstStyle/>
           <a:p>
-            <a:pPr indent="0" marL="0">
+            <a:pPr marL="0" indent="0">
               <a:buNone/>
             </a:pPr>
             <a:r>
@@ -7010,6 +6883,13 @@
             <a:prstDash val="solid"/>
           </a:ln>
         </p:spPr>
+        <p:txBody>
+          <a:bodyPr/>
+          <a:lstStyle/>
+          <a:p>
+            <a:endParaRPr lang="en-US"/>
+          </a:p>
+        </p:txBody>
       </p:sp>
       <p:sp>
         <p:nvSpPr>
@@ -7037,6 +6917,13 @@
             <a:prstDash val="solid"/>
           </a:ln>
         </p:spPr>
+        <p:txBody>
+          <a:bodyPr/>
+          <a:lstStyle/>
+          <a:p>
+            <a:endParaRPr lang="en-US"/>
+          </a:p>
+        </p:txBody>
       </p:sp>
       <p:sp>
         <p:nvSpPr>
@@ -7059,11 +6946,11 @@
           <a:bodyPr wrap="square" lIns="0" tIns="0" rIns="0" bIns="0" rtlCol="0" anchor="ctr"/>
           <a:lstStyle/>
           <a:p>
-            <a:pPr indent="0" marL="0">
-              <a:buNone/>
-            </a:pPr>
-            <a:r>
-              <a:rPr lang="en-US" sz="1400" dirty="0" b="1">
+            <a:pPr marL="0" indent="0">
+              <a:buNone/>
+            </a:pPr>
+            <a:r>
+              <a:rPr lang="en-US" sz="1400" b="1" dirty="0">
                 <a:solidFill>
                   <a:srgbClr val="FFFFFF"/>
                 </a:solidFill>
@@ -7098,7 +6985,7 @@
           <a:bodyPr wrap="square" lIns="0" tIns="0" rIns="0" bIns="0" rtlCol="0" anchor="ctr"/>
           <a:lstStyle/>
           <a:p>
-            <a:pPr indent="0" marL="0">
+            <a:pPr marL="0" indent="0">
               <a:buNone/>
             </a:pPr>
             <a:r>
@@ -7115,7 +7002,7 @@
             <a:endParaRPr lang="en-US" sz="1400" dirty="0"/>
           </a:p>
           <a:p>
-            <a:pPr indent="0" marL="0">
+            <a:pPr marL="0" indent="0">
               <a:buNone/>
             </a:pPr>
             <a:r>
@@ -7132,7 +7019,7 @@
             <a:endParaRPr lang="en-US" sz="1400" dirty="0"/>
           </a:p>
           <a:p>
-            <a:pPr indent="0" marL="0">
+            <a:pPr marL="0" indent="0">
               <a:buNone/>
             </a:pPr>
             <a:r>
@@ -7176,6 +7063,13 @@
             <a:prstDash val="solid"/>
           </a:ln>
         </p:spPr>
+        <p:txBody>
+          <a:bodyPr/>
+          <a:lstStyle/>
+          <a:p>
+            <a:endParaRPr lang="en-US"/>
+          </a:p>
+        </p:txBody>
       </p:sp>
       <p:sp>
         <p:nvSpPr>
@@ -7198,11 +7092,11 @@
           <a:bodyPr wrap="square" lIns="0" tIns="0" rIns="0" bIns="0" rtlCol="0" anchor="ctr"/>
           <a:lstStyle/>
           <a:p>
-            <a:pPr indent="0" marL="0">
-              <a:buNone/>
-            </a:pPr>
-            <a:r>
-              <a:rPr lang="en-US" sz="1400" dirty="0" b="1">
+            <a:pPr marL="0" indent="0">
+              <a:buNone/>
+            </a:pPr>
+            <a:r>
+              <a:rPr lang="en-US" sz="1400" b="1" dirty="0">
                 <a:solidFill>
                   <a:srgbClr val="FFFFFF"/>
                 </a:solidFill>
@@ -7237,7 +7131,7 @@
           <a:bodyPr wrap="square" lIns="0" tIns="0" rIns="0" bIns="0" rtlCol="0" anchor="ctr"/>
           <a:lstStyle/>
           <a:p>
-            <a:pPr indent="0" marL="0">
+            <a:pPr marL="0" indent="0">
               <a:buNone/>
             </a:pPr>
             <a:r>
@@ -7254,7 +7148,7 @@
             <a:endParaRPr lang="en-US" sz="1400" dirty="0"/>
           </a:p>
           <a:p>
-            <a:pPr indent="0" marL="0">
+            <a:pPr marL="0" indent="0">
               <a:buNone/>
             </a:pPr>
             <a:r>
@@ -7271,7 +7165,7 @@
             <a:endParaRPr lang="en-US" sz="1400" dirty="0"/>
           </a:p>
           <a:p>
-            <a:pPr indent="0" marL="0">
+            <a:pPr marL="0" indent="0">
               <a:buNone/>
             </a:pPr>
             <a:r>
@@ -7315,6 +7209,13 @@
             <a:prstDash val="solid"/>
           </a:ln>
         </p:spPr>
+        <p:txBody>
+          <a:bodyPr/>
+          <a:lstStyle/>
+          <a:p>
+            <a:endParaRPr lang="en-US"/>
+          </a:p>
+        </p:txBody>
       </p:sp>
       <p:sp>
         <p:nvSpPr>
@@ -7337,11 +7238,11 @@
           <a:bodyPr wrap="square" lIns="0" tIns="0" rIns="0" bIns="0" rtlCol="0" anchor="ctr"/>
           <a:lstStyle/>
           <a:p>
-            <a:pPr indent="0" marL="0">
-              <a:buNone/>
-            </a:pPr>
-            <a:r>
-              <a:rPr lang="en-US" sz="1400" dirty="0" b="1">
+            <a:pPr marL="0" indent="0">
+              <a:buNone/>
+            </a:pPr>
+            <a:r>
+              <a:rPr lang="en-US" sz="1400" b="1" dirty="0">
                 <a:solidFill>
                   <a:srgbClr val="FFFFFF"/>
                 </a:solidFill>
@@ -7376,7 +7277,7 @@
           <a:bodyPr wrap="square" lIns="0" tIns="0" rIns="0" bIns="0" rtlCol="0" anchor="ctr"/>
           <a:lstStyle/>
           <a:p>
-            <a:pPr indent="0" marL="0">
+            <a:pPr marL="0" indent="0">
               <a:buNone/>
             </a:pPr>
             <a:r>
@@ -7393,7 +7294,7 @@
             <a:endParaRPr lang="en-US" sz="1400" dirty="0"/>
           </a:p>
           <a:p>
-            <a:pPr indent="0" marL="0">
+            <a:pPr marL="0" indent="0">
               <a:buNone/>
             </a:pPr>
             <a:r>
@@ -7410,7 +7311,7 @@
             <a:endParaRPr lang="en-US" sz="1400" dirty="0"/>
           </a:p>
           <a:p>
-            <a:pPr indent="0" marL="0">
+            <a:pPr marL="0" indent="0">
               <a:buNone/>
             </a:pPr>
             <a:r>
@@ -7454,6 +7355,13 @@
             <a:prstDash val="solid"/>
           </a:ln>
         </p:spPr>
+        <p:txBody>
+          <a:bodyPr/>
+          <a:lstStyle/>
+          <a:p>
+            <a:endParaRPr lang="en-US"/>
+          </a:p>
+        </p:txBody>
       </p:sp>
       <p:sp>
         <p:nvSpPr>
@@ -7476,11 +7384,11 @@
           <a:bodyPr wrap="square" lIns="0" tIns="0" rIns="0" bIns="0" rtlCol="0" anchor="ctr"/>
           <a:lstStyle/>
           <a:p>
-            <a:pPr indent="0" marL="0">
-              <a:buNone/>
-            </a:pPr>
-            <a:r>
-              <a:rPr lang="en-US" sz="1400" dirty="0" b="1">
+            <a:pPr marL="0" indent="0">
+              <a:buNone/>
+            </a:pPr>
+            <a:r>
+              <a:rPr lang="en-US" sz="1400" b="1" dirty="0">
                 <a:solidFill>
                   <a:srgbClr val="FFFFFF"/>
                 </a:solidFill>
@@ -7515,7 +7423,7 @@
           <a:bodyPr wrap="square" lIns="0" tIns="0" rIns="0" bIns="0" rtlCol="0" anchor="ctr"/>
           <a:lstStyle/>
           <a:p>
-            <a:pPr indent="0" marL="0">
+            <a:pPr marL="0" indent="0">
               <a:buNone/>
             </a:pPr>
             <a:r>
@@ -7532,7 +7440,7 @@
             <a:endParaRPr lang="en-US" sz="1400" dirty="0"/>
           </a:p>
           <a:p>
-            <a:pPr indent="0" marL="0">
+            <a:pPr marL="0" indent="0">
               <a:buNone/>
             </a:pPr>
             <a:r>
@@ -7549,7 +7457,7 @@
             <a:endParaRPr lang="en-US" sz="1400" dirty="0"/>
           </a:p>
           <a:p>
-            <a:pPr indent="0" marL="0">
+            <a:pPr marL="0" indent="0">
               <a:buNone/>
             </a:pPr>
             <a:r>
@@ -7588,7 +7496,7 @@
           <a:bodyPr wrap="square" lIns="0" tIns="0" rIns="0" bIns="0" rtlCol="0" anchor="ctr"/>
           <a:lstStyle/>
           <a:p>
-            <a:pPr algn="ctr" indent="0" marL="0">
+            <a:pPr marL="0" indent="0" algn="ctr">
               <a:buNone/>
             </a:pPr>
             <a:r>
@@ -7627,7 +7535,7 @@
           <a:bodyPr wrap="square" lIns="0" tIns="0" rIns="0" bIns="0" rtlCol="0" anchor="ctr"/>
           <a:lstStyle/>
           <a:p>
-            <a:pPr algn="ctr" indent="0" marL="0">
+            <a:pPr marL="0" indent="0" algn="ctr">
               <a:buNone/>
             </a:pPr>
             <a:r>
@@ -7666,7 +7574,7 @@
           <a:bodyPr wrap="square" lIns="0" tIns="0" rIns="0" bIns="0" rtlCol="0" anchor="ctr"/>
           <a:lstStyle/>
           <a:p>
-            <a:pPr algn="ctr" indent="0" marL="0">
+            <a:pPr marL="0" indent="0" algn="ctr">
               <a:buNone/>
             </a:pPr>
             <a:r>
@@ -7710,13 +7618,20 @@
             <a:prstDash val="solid"/>
           </a:ln>
           <a:effectLst>
-            <a:outerShdw sx="100000" sy="100000" kx="0" ky="0" algn="bl" rotWithShape="0" blurRad="19050" dist="6350" dir="2700000">
+            <a:outerShdw blurRad="19050" dist="6350" dir="2700000" algn="bl" rotWithShape="0">
               <a:srgbClr val="000000">
                 <a:alpha val="12000"/>
               </a:srgbClr>
             </a:outerShdw>
           </a:effectLst>
         </p:spPr>
+        <p:txBody>
+          <a:bodyPr/>
+          <a:lstStyle/>
+          <a:p>
+            <a:endParaRPr lang="en-US"/>
+          </a:p>
+        </p:txBody>
       </p:sp>
       <p:sp>
         <p:nvSpPr>
@@ -7739,11 +7654,11 @@
           <a:bodyPr wrap="square" lIns="0" tIns="0" rIns="0" bIns="0" rtlCol="0" anchor="ctr"/>
           <a:lstStyle/>
           <a:p>
-            <a:pPr indent="0" marL="0">
-              <a:buNone/>
-            </a:pPr>
-            <a:r>
-              <a:rPr lang="en-US" sz="1400" dirty="0" b="1">
+            <a:pPr marL="0" indent="0">
+              <a:buNone/>
+            </a:pPr>
+            <a:r>
+              <a:rPr lang="en-US" sz="1400" b="1" dirty="0">
                 <a:solidFill>
                   <a:srgbClr val="726656"/>
                 </a:solidFill>
@@ -7778,7 +7693,7 @@
           <a:bodyPr wrap="square" lIns="254" tIns="254" rIns="254" bIns="254" rtlCol="0" anchor="t"/>
           <a:lstStyle/>
           <a:p>
-            <a:pPr indent="0" marL="0">
+            <a:pPr marL="0" indent="0">
               <a:buNone/>
             </a:pPr>
             <a:r>
@@ -7822,13 +7737,20 @@
             <a:prstDash val="solid"/>
           </a:ln>
           <a:effectLst>
-            <a:outerShdw sx="100000" sy="100000" kx="0" ky="0" algn="bl" rotWithShape="0" blurRad="19050" dist="6350" dir="2700000">
+            <a:outerShdw blurRad="19050" dist="6350" dir="2700000" algn="bl" rotWithShape="0">
               <a:srgbClr val="000000">
                 <a:alpha val="12000"/>
               </a:srgbClr>
             </a:outerShdw>
           </a:effectLst>
         </p:spPr>
+        <p:txBody>
+          <a:bodyPr/>
+          <a:lstStyle/>
+          <a:p>
+            <a:endParaRPr lang="en-US"/>
+          </a:p>
+        </p:txBody>
       </p:sp>
       <p:sp>
         <p:nvSpPr>
@@ -7851,11 +7773,11 @@
           <a:bodyPr wrap="square" lIns="0" tIns="0" rIns="0" bIns="0" rtlCol="0" anchor="ctr"/>
           <a:lstStyle/>
           <a:p>
-            <a:pPr indent="0" marL="0">
-              <a:buNone/>
-            </a:pPr>
-            <a:r>
-              <a:rPr lang="en-US" sz="1400" dirty="0" b="1">
+            <a:pPr marL="0" indent="0">
+              <a:buNone/>
+            </a:pPr>
+            <a:r>
+              <a:rPr lang="en-US" sz="1400" b="1" dirty="0">
                 <a:solidFill>
                   <a:srgbClr val="726656"/>
                 </a:solidFill>
@@ -7890,7 +7812,7 @@
           <a:bodyPr wrap="square" lIns="254" tIns="254" rIns="254" bIns="254" rtlCol="0" anchor="t"/>
           <a:lstStyle/>
           <a:p>
-            <a:pPr indent="0" marL="0">
+            <a:pPr marL="0" indent="0">
               <a:buNone/>
             </a:pPr>
             <a:r>
@@ -7910,7 +7832,7 @@
       </p:sp>
       <p:sp>
         <p:nvSpPr>
-          <p:cNvPr id="25" name="Slide Number Placeholder 0"/>
+          <p:cNvPr id="30" name="Slide Number Placeholder 0"/>
           <p:cNvSpPr>
             <a:spLocks noGrp="1"/>
           </p:cNvSpPr>
@@ -7928,7 +7850,7 @@
           </a:prstGeom>
           <a:extLst>
             <a:ext uri="{C572A759-6A51-4108-AA02-DFA0A04FC94B}">
-              <ma14:wrappingTextBoxFlag xmlns:ma14="http://schemas.microsoft.com/office/mac/drawingml/2011/main" val="0"/>
+              <ma14:wrappingTextBoxFlag xmlns:ma14="http://schemas.microsoft.com/office/mac/drawingml/2011/main" xmlns="" val="0"/>
             </a:ext>
           </a:extLst>
         </p:spPr>
@@ -7949,7 +7871,7 @@
           <a:p>
             <a:pPr algn="r"/>
             <a:fld id="{F7021451-1387-4CA6-816F-3879F97B5CBC}" type="slidenum">
-              <a:rPr b="0" lang="en-US"/>
+              <a:rPr lang="en-US" b="0"/>
               <a:t>5</a:t>
             </a:fld>
             <a:endParaRPr lang="en-US"/>
@@ -8007,6 +7929,13 @@
             <a:prstDash val="solid"/>
           </a:ln>
         </p:spPr>
+        <p:txBody>
+          <a:bodyPr/>
+          <a:lstStyle/>
+          <a:p>
+            <a:endParaRPr lang="en-US"/>
+          </a:p>
+        </p:txBody>
       </p:sp>
       <p:sp>
         <p:nvSpPr>
@@ -8034,6 +7963,13 @@
             <a:prstDash val="solid"/>
           </a:ln>
         </p:spPr>
+        <p:txBody>
+          <a:bodyPr/>
+          <a:lstStyle/>
+          <a:p>
+            <a:endParaRPr lang="en-US"/>
+          </a:p>
+        </p:txBody>
       </p:sp>
       <p:sp>
         <p:nvSpPr>
@@ -8061,6 +7997,13 @@
             <a:prstDash val="solid"/>
           </a:ln>
         </p:spPr>
+        <p:txBody>
+          <a:bodyPr/>
+          <a:lstStyle/>
+          <a:p>
+            <a:endParaRPr lang="en-US"/>
+          </a:p>
+        </p:txBody>
       </p:sp>
       <p:sp>
         <p:nvSpPr>
@@ -8088,6 +8031,13 @@
             <a:prstDash val="solid"/>
           </a:ln>
         </p:spPr>
+        <p:txBody>
+          <a:bodyPr/>
+          <a:lstStyle/>
+          <a:p>
+            <a:endParaRPr lang="en-US"/>
+          </a:p>
+        </p:txBody>
       </p:sp>
       <p:sp>
         <p:nvSpPr>
@@ -8110,11 +8060,11 @@
           <a:bodyPr wrap="square" lIns="0" tIns="0" rIns="0" bIns="0" rtlCol="0" anchor="ctr"/>
           <a:lstStyle/>
           <a:p>
-            <a:pPr indent="0" marL="0">
-              <a:buNone/>
-            </a:pPr>
-            <a:r>
-              <a:rPr lang="en-US" sz="2600" dirty="0" b="1">
+            <a:pPr marL="0" indent="0">
+              <a:buNone/>
+            </a:pPr>
+            <a:r>
+              <a:rPr lang="en-US" sz="2600" b="1" dirty="0">
                 <a:solidFill>
                   <a:srgbClr val="17306F"/>
                 </a:solidFill>
@@ -8149,7 +8099,7 @@
           <a:bodyPr wrap="square" lIns="0" tIns="0" rIns="0" bIns="0" rtlCol="0" anchor="ctr"/>
           <a:lstStyle/>
           <a:p>
-            <a:pPr indent="0" marL="0">
+            <a:pPr marL="0" indent="0">
               <a:buNone/>
             </a:pPr>
             <a:r>
@@ -8189,6 +8139,13 @@
             <a:prstDash val="solid"/>
           </a:ln>
         </p:spPr>
+        <p:txBody>
+          <a:bodyPr/>
+          <a:lstStyle/>
+          <a:p>
+            <a:endParaRPr lang="en-US"/>
+          </a:p>
+        </p:txBody>
       </p:sp>
       <p:sp>
         <p:nvSpPr>
@@ -8212,6 +8169,13 @@
             <a:prstDash val="solid"/>
           </a:ln>
         </p:spPr>
+        <p:txBody>
+          <a:bodyPr/>
+          <a:lstStyle/>
+          <a:p>
+            <a:endParaRPr lang="en-US"/>
+          </a:p>
+        </p:txBody>
       </p:sp>
       <p:sp>
         <p:nvSpPr>
@@ -8235,6 +8199,13 @@
             <a:prstDash val="solid"/>
           </a:ln>
         </p:spPr>
+        <p:txBody>
+          <a:bodyPr/>
+          <a:lstStyle/>
+          <a:p>
+            <a:endParaRPr lang="en-US"/>
+          </a:p>
+        </p:txBody>
       </p:sp>
       <p:sp>
         <p:nvSpPr>
@@ -8257,11 +8228,11 @@
           <a:bodyPr wrap="square" lIns="0" tIns="0" rIns="0" bIns="0" rtlCol="0" anchor="ctr"/>
           <a:lstStyle/>
           <a:p>
-            <a:pPr indent="0" marL="0">
-              <a:buNone/>
-            </a:pPr>
-            <a:r>
-              <a:rPr lang="en-US" sz="1800" dirty="0" b="1">
+            <a:pPr marL="0" indent="0">
+              <a:buNone/>
+            </a:pPr>
+            <a:r>
+              <a:rPr lang="en-US" sz="1800" b="1" dirty="0">
                 <a:solidFill>
                   <a:srgbClr val="726656"/>
                 </a:solidFill>
@@ -8296,7 +8267,7 @@
           <a:bodyPr wrap="square" lIns="254" tIns="254" rIns="254" bIns="254" rtlCol="0" anchor="ctr"/>
           <a:lstStyle/>
           <a:p>
-            <a:pPr indent="0" marL="0">
+            <a:pPr marL="0" indent="0">
               <a:buNone/>
             </a:pPr>
             <a:r>
@@ -8313,7 +8284,7 @@
             <a:endParaRPr lang="en-US" sz="1400" dirty="0"/>
           </a:p>
           <a:p>
-            <a:pPr indent="0" marL="0">
+            <a:pPr marL="0" indent="0">
               <a:buNone/>
             </a:pPr>
             <a:r>
@@ -8330,7 +8301,7 @@
             <a:endParaRPr lang="en-US" sz="1400" dirty="0"/>
           </a:p>
           <a:p>
-            <a:pPr indent="0" marL="0">
+            <a:pPr marL="0" indent="0">
               <a:buNone/>
             </a:pPr>
             <a:r>
@@ -8347,7 +8318,7 @@
             <a:endParaRPr lang="en-US" sz="1400" dirty="0"/>
           </a:p>
           <a:p>
-            <a:pPr indent="0" marL="0">
+            <a:pPr marL="0" indent="0">
               <a:buNone/>
             </a:pPr>
             <a:r>
@@ -8386,7 +8357,7 @@
           <a:bodyPr wrap="square" lIns="0" tIns="0" rIns="0" bIns="0" rtlCol="0" anchor="ctr"/>
           <a:lstStyle/>
           <a:p>
-            <a:pPr indent="0" marL="0">
+            <a:pPr marL="0" indent="0">
               <a:buNone/>
             </a:pPr>
             <a:r>
@@ -8430,6 +8401,13 @@
             <a:prstDash val="solid"/>
           </a:ln>
         </p:spPr>
+        <p:txBody>
+          <a:bodyPr/>
+          <a:lstStyle/>
+          <a:p>
+            <a:endParaRPr lang="en-US"/>
+          </a:p>
+        </p:txBody>
       </p:sp>
       <p:sp>
         <p:nvSpPr>
@@ -8452,11 +8430,11 @@
           <a:bodyPr wrap="square" lIns="0" tIns="0" rIns="0" bIns="0" rtlCol="0" anchor="ctr"/>
           <a:lstStyle/>
           <a:p>
-            <a:pPr indent="0" marL="0">
-              <a:buNone/>
-            </a:pPr>
-            <a:r>
-              <a:rPr lang="en-US" sz="1800" dirty="0" b="1">
+            <a:pPr marL="0" indent="0">
+              <a:buNone/>
+            </a:pPr>
+            <a:r>
+              <a:rPr lang="en-US" sz="1800" b="1" dirty="0">
                 <a:solidFill>
                   <a:srgbClr val="726656"/>
                 </a:solidFill>
@@ -8491,7 +8469,7 @@
           <a:bodyPr wrap="square" lIns="254" tIns="254" rIns="254" bIns="254" rtlCol="0" anchor="ctr"/>
           <a:lstStyle/>
           <a:p>
-            <a:pPr indent="0" marL="0">
+            <a:pPr marL="0" indent="0">
               <a:buNone/>
             </a:pPr>
             <a:r>
@@ -8508,7 +8486,7 @@
             <a:endParaRPr lang="en-US" sz="1400" dirty="0"/>
           </a:p>
           <a:p>
-            <a:pPr indent="0" marL="0">
+            <a:pPr marL="0" indent="0">
               <a:buNone/>
             </a:pPr>
             <a:r>
@@ -8525,7 +8503,7 @@
             <a:endParaRPr lang="en-US" sz="1400" dirty="0"/>
           </a:p>
           <a:p>
-            <a:pPr indent="0" marL="0">
+            <a:pPr marL="0" indent="0">
               <a:buNone/>
             </a:pPr>
             <a:r>
@@ -8542,7 +8520,7 @@
             <a:endParaRPr lang="en-US" sz="1400" dirty="0"/>
           </a:p>
           <a:p>
-            <a:pPr indent="0" marL="0">
+            <a:pPr marL="0" indent="0">
               <a:buNone/>
             </a:pPr>
             <a:r>
@@ -8581,7 +8559,7 @@
           <a:bodyPr wrap="square" lIns="0" tIns="0" rIns="0" bIns="0" rtlCol="0" anchor="ctr"/>
           <a:lstStyle/>
           <a:p>
-            <a:pPr indent="0" marL="0">
+            <a:pPr marL="0" indent="0">
               <a:buNone/>
             </a:pPr>
             <a:r>
@@ -8625,6 +8603,13 @@
             <a:prstDash val="solid"/>
           </a:ln>
         </p:spPr>
+        <p:txBody>
+          <a:bodyPr/>
+          <a:lstStyle/>
+          <a:p>
+            <a:endParaRPr lang="en-US"/>
+          </a:p>
+        </p:txBody>
       </p:sp>
       <p:sp>
         <p:nvSpPr>
@@ -8647,11 +8632,11 @@
           <a:bodyPr wrap="square" lIns="0" tIns="0" rIns="0" bIns="0" rtlCol="0" anchor="ctr"/>
           <a:lstStyle/>
           <a:p>
-            <a:pPr indent="0" marL="0">
-              <a:buNone/>
-            </a:pPr>
-            <a:r>
-              <a:rPr lang="en-US" sz="1800" dirty="0" b="1">
+            <a:pPr marL="0" indent="0">
+              <a:buNone/>
+            </a:pPr>
+            <a:r>
+              <a:rPr lang="en-US" sz="1800" b="1" dirty="0">
                 <a:solidFill>
                   <a:srgbClr val="726656"/>
                 </a:solidFill>
@@ -8686,7 +8671,7 @@
           <a:bodyPr wrap="square" lIns="254" tIns="254" rIns="254" bIns="254" rtlCol="0" anchor="ctr"/>
           <a:lstStyle/>
           <a:p>
-            <a:pPr indent="0" marL="0">
+            <a:pPr marL="0" indent="0">
               <a:buNone/>
             </a:pPr>
             <a:r>
@@ -8703,7 +8688,7 @@
             <a:endParaRPr lang="en-US" sz="1400" dirty="0"/>
           </a:p>
           <a:p>
-            <a:pPr indent="0" marL="0">
+            <a:pPr marL="0" indent="0">
               <a:buNone/>
             </a:pPr>
             <a:r>
@@ -8720,7 +8705,7 @@
             <a:endParaRPr lang="en-US" sz="1400" dirty="0"/>
           </a:p>
           <a:p>
-            <a:pPr indent="0" marL="0">
+            <a:pPr marL="0" indent="0">
               <a:buNone/>
             </a:pPr>
             <a:r>
@@ -8737,7 +8722,7 @@
             <a:endParaRPr lang="en-US" sz="1400" dirty="0"/>
           </a:p>
           <a:p>
-            <a:pPr indent="0" marL="0">
+            <a:pPr marL="0" indent="0">
               <a:buNone/>
             </a:pPr>
             <a:r>
@@ -8754,7 +8739,7 @@
             <a:endParaRPr lang="en-US" sz="1400" dirty="0"/>
           </a:p>
           <a:p>
-            <a:pPr indent="0" marL="0">
+            <a:pPr marL="0" indent="0">
               <a:buNone/>
             </a:pPr>
             <a:r>
@@ -8793,7 +8778,7 @@
           <a:bodyPr wrap="square" lIns="0" tIns="0" rIns="0" bIns="0" rtlCol="0" anchor="ctr"/>
           <a:lstStyle/>
           <a:p>
-            <a:pPr indent="0" marL="0">
+            <a:pPr marL="0" indent="0">
               <a:buNone/>
             </a:pPr>
             <a:r>
@@ -8837,6 +8822,13 @@
             <a:prstDash val="solid"/>
           </a:ln>
         </p:spPr>
+        <p:txBody>
+          <a:bodyPr/>
+          <a:lstStyle/>
+          <a:p>
+            <a:endParaRPr lang="en-US"/>
+          </a:p>
+        </p:txBody>
       </p:sp>
       <p:sp>
         <p:nvSpPr>
@@ -8858,7 +8850,7 @@
           </a:prstGeom>
           <a:extLst>
             <a:ext uri="{C572A759-6A51-4108-AA02-DFA0A04FC94B}">
-              <ma14:wrappingTextBoxFlag xmlns:ma14="http://schemas.microsoft.com/office/mac/drawingml/2011/main" val="0"/>
+              <ma14:wrappingTextBoxFlag xmlns:ma14="http://schemas.microsoft.com/office/mac/drawingml/2011/main" xmlns="" val="0"/>
             </a:ext>
           </a:extLst>
         </p:spPr>
@@ -8879,7 +8871,7 @@
           <a:p>
             <a:pPr algn="r"/>
             <a:fld id="{F7021451-1387-4CA6-816F-3879F97B5CBC}" type="slidenum">
-              <a:rPr b="0" lang="en-US"/>
+              <a:rPr lang="en-US" b="0"/>
               <a:t>6</a:t>
             </a:fld>
             <a:endParaRPr lang="en-US"/>
@@ -8895,6 +8887,1847 @@
 </file>
 
 <file path=ppt/slides/slide7.xml><?xml version="1.0" encoding="utf-8"?>
+<p:sld xmlns:a="http://schemas.openxmlformats.org/drawingml/2006/main" xmlns:r="http://schemas.openxmlformats.org/officeDocument/2006/relationships" xmlns:p="http://schemas.openxmlformats.org/presentationml/2006/main">
+  <p:cSld>
+    <p:spTree>
+      <p:nvGrpSpPr>
+        <p:cNvPr id="1" name=""/>
+        <p:cNvGrpSpPr/>
+        <p:nvPr/>
+      </p:nvGrpSpPr>
+      <p:grpSpPr>
+        <a:xfrm>
+          <a:off x="0" y="0"/>
+          <a:ext cx="0" cy="0"/>
+          <a:chOff x="0" y="0"/>
+          <a:chExt cx="0" cy="0"/>
+        </a:xfrm>
+      </p:grpSpPr>
+      <p:sp>
+        <p:nvSpPr>
+          <p:cNvPr id="2" name="Shape 0"/>
+          <p:cNvSpPr/>
+          <p:nvPr/>
+        </p:nvSpPr>
+        <p:spPr>
+          <a:xfrm>
+            <a:off x="502920" y="347472"/>
+            <a:ext cx="914400" cy="73152"/>
+          </a:xfrm>
+          <a:prstGeom prst="rect">
+            <a:avLst/>
+          </a:prstGeom>
+          <a:solidFill>
+            <a:srgbClr val="E97886"/>
+          </a:solidFill>
+          <a:ln w="12700">
+            <a:solidFill>
+              <a:srgbClr val="E97886">
+                <a:alpha val="0"/>
+              </a:srgbClr>
+            </a:solidFill>
+            <a:prstDash val="solid"/>
+          </a:ln>
+        </p:spPr>
+        <p:txBody>
+          <a:bodyPr/>
+          <a:lstStyle/>
+          <a:p>
+            <a:endParaRPr lang="en-US"/>
+          </a:p>
+        </p:txBody>
+      </p:sp>
+      <p:sp>
+        <p:nvSpPr>
+          <p:cNvPr id="3" name="Shape 1"/>
+          <p:cNvSpPr/>
+          <p:nvPr/>
+        </p:nvSpPr>
+        <p:spPr>
+          <a:xfrm>
+            <a:off x="1481328" y="347472"/>
+            <a:ext cx="1325880" cy="73152"/>
+          </a:xfrm>
+          <a:prstGeom prst="rect">
+            <a:avLst/>
+          </a:prstGeom>
+          <a:solidFill>
+            <a:srgbClr val="E8D0D0"/>
+          </a:solidFill>
+          <a:ln w="12700">
+            <a:solidFill>
+              <a:srgbClr val="E8D0D0">
+                <a:alpha val="0"/>
+              </a:srgbClr>
+            </a:solidFill>
+            <a:prstDash val="solid"/>
+          </a:ln>
+        </p:spPr>
+        <p:txBody>
+          <a:bodyPr/>
+          <a:lstStyle/>
+          <a:p>
+            <a:endParaRPr lang="en-US"/>
+          </a:p>
+        </p:txBody>
+      </p:sp>
+      <p:sp>
+        <p:nvSpPr>
+          <p:cNvPr id="4" name="Shape 2"/>
+          <p:cNvSpPr/>
+          <p:nvPr/>
+        </p:nvSpPr>
+        <p:spPr>
+          <a:xfrm>
+            <a:off x="2816352" y="347472"/>
+            <a:ext cx="1554480" cy="73152"/>
+          </a:xfrm>
+          <a:prstGeom prst="rect">
+            <a:avLst/>
+          </a:prstGeom>
+          <a:solidFill>
+            <a:srgbClr val="D65F63"/>
+          </a:solidFill>
+          <a:ln w="12700">
+            <a:solidFill>
+              <a:srgbClr val="D65F63">
+                <a:alpha val="0"/>
+              </a:srgbClr>
+            </a:solidFill>
+            <a:prstDash val="solid"/>
+          </a:ln>
+        </p:spPr>
+        <p:txBody>
+          <a:bodyPr/>
+          <a:lstStyle/>
+          <a:p>
+            <a:endParaRPr lang="en-US"/>
+          </a:p>
+        </p:txBody>
+      </p:sp>
+      <p:sp>
+        <p:nvSpPr>
+          <p:cNvPr id="5" name="Shape 3"/>
+          <p:cNvSpPr/>
+          <p:nvPr/>
+        </p:nvSpPr>
+        <p:spPr>
+          <a:xfrm>
+            <a:off x="4379976" y="347472"/>
+            <a:ext cx="1097280" cy="73152"/>
+          </a:xfrm>
+          <a:prstGeom prst="rect">
+            <a:avLst/>
+          </a:prstGeom>
+          <a:solidFill>
+            <a:srgbClr val="C74642"/>
+          </a:solidFill>
+          <a:ln w="12700">
+            <a:solidFill>
+              <a:srgbClr val="C74642">
+                <a:alpha val="0"/>
+              </a:srgbClr>
+            </a:solidFill>
+            <a:prstDash val="solid"/>
+          </a:ln>
+        </p:spPr>
+        <p:txBody>
+          <a:bodyPr/>
+          <a:lstStyle/>
+          <a:p>
+            <a:endParaRPr lang="en-US"/>
+          </a:p>
+        </p:txBody>
+      </p:sp>
+      <p:sp>
+        <p:nvSpPr>
+          <p:cNvPr id="6" name="Text 4"/>
+          <p:cNvSpPr/>
+          <p:nvPr/>
+        </p:nvSpPr>
+        <p:spPr>
+          <a:xfrm>
+            <a:off x="749808" y="731520"/>
+            <a:ext cx="7223760" cy="411480"/>
+          </a:xfrm>
+          <a:prstGeom prst="rect">
+            <a:avLst/>
+          </a:prstGeom>
+          <a:noFill/>
+          <a:ln/>
+        </p:spPr>
+        <p:txBody>
+          <a:bodyPr wrap="square" lIns="0" tIns="0" rIns="0" bIns="0" rtlCol="0" anchor="ctr"/>
+          <a:lstStyle/>
+          <a:p>
+            <a:pPr marL="0" indent="0">
+              <a:buNone/>
+            </a:pPr>
+            <a:r>
+              <a:rPr lang="en-US" sz="2600" b="1" dirty="0">
+                <a:solidFill>
+                  <a:srgbClr val="17306F"/>
+                </a:solidFill>
+                <a:latin typeface="Aptos Display" pitchFamily="34" charset="0"/>
+                <a:ea typeface="Aptos Display" pitchFamily="34" charset="-122"/>
+                <a:cs typeface="Aptos Display" pitchFamily="34" charset="-120"/>
+              </a:rPr>
+              <a:t>Non-Functional Requirements</a:t>
+            </a:r>
+            <a:endParaRPr lang="en-US" sz="2600" dirty="0"/>
+          </a:p>
+        </p:txBody>
+      </p:sp>
+      <p:sp>
+        <p:nvSpPr>
+          <p:cNvPr id="7" name="Text 5"/>
+          <p:cNvSpPr/>
+          <p:nvPr/>
+        </p:nvSpPr>
+        <p:spPr>
+          <a:xfrm>
+            <a:off x="768096" y="1143000"/>
+            <a:ext cx="6766560" cy="274320"/>
+          </a:xfrm>
+          <a:prstGeom prst="rect">
+            <a:avLst/>
+          </a:prstGeom>
+          <a:noFill/>
+          <a:ln/>
+        </p:spPr>
+        <p:txBody>
+          <a:bodyPr wrap="square" lIns="0" tIns="0" rIns="0" bIns="0" rtlCol="0" anchor="ctr"/>
+          <a:lstStyle/>
+          <a:p>
+            <a:pPr marL="0" indent="0">
+              <a:buNone/>
+            </a:pPr>
+            <a:r>
+              <a:rPr lang="en-US" sz="1200" dirty="0">
+                <a:solidFill>
+                  <a:srgbClr val="7A746C"/>
+                </a:solidFill>
+                <a:latin typeface="Aptos" pitchFamily="34" charset="0"/>
+                <a:ea typeface="Aptos" pitchFamily="34" charset="-122"/>
+                <a:cs typeface="Aptos" pitchFamily="34" charset="-120"/>
+              </a:rPr>
+              <a:t>Quality attributes and operational constraints</a:t>
+            </a:r>
+            <a:endParaRPr lang="en-US" sz="1200" dirty="0"/>
+          </a:p>
+        </p:txBody>
+      </p:sp>
+      <p:sp>
+        <p:nvSpPr>
+          <p:cNvPr id="8" name="Shape 6"/>
+          <p:cNvSpPr/>
+          <p:nvPr/>
+        </p:nvSpPr>
+        <p:spPr>
+          <a:xfrm>
+            <a:off x="749808" y="1490472"/>
+            <a:ext cx="10698480" cy="0"/>
+          </a:xfrm>
+          <a:prstGeom prst="line">
+            <a:avLst/>
+          </a:prstGeom>
+          <a:noFill/>
+          <a:ln w="12700">
+            <a:solidFill>
+              <a:srgbClr val="D8D0C7"/>
+            </a:solidFill>
+            <a:prstDash val="solid"/>
+          </a:ln>
+        </p:spPr>
+        <p:txBody>
+          <a:bodyPr/>
+          <a:lstStyle/>
+          <a:p>
+            <a:endParaRPr lang="en-US"/>
+          </a:p>
+        </p:txBody>
+      </p:sp>
+      <p:sp>
+        <p:nvSpPr>
+          <p:cNvPr id="9" name="Shape 7"/>
+          <p:cNvSpPr/>
+          <p:nvPr/>
+        </p:nvSpPr>
+        <p:spPr>
+          <a:xfrm>
+            <a:off x="4059936" y="1783080"/>
+            <a:ext cx="0" cy="3611880"/>
+          </a:xfrm>
+          <a:prstGeom prst="line">
+            <a:avLst/>
+          </a:prstGeom>
+          <a:noFill/>
+          <a:ln w="12700">
+            <a:solidFill>
+              <a:srgbClr val="D8D0C7"/>
+            </a:solidFill>
+            <a:prstDash val="solid"/>
+          </a:ln>
+        </p:spPr>
+        <p:txBody>
+          <a:bodyPr/>
+          <a:lstStyle/>
+          <a:p>
+            <a:endParaRPr lang="en-US"/>
+          </a:p>
+        </p:txBody>
+      </p:sp>
+      <p:sp>
+        <p:nvSpPr>
+          <p:cNvPr id="10" name="Shape 8"/>
+          <p:cNvSpPr/>
+          <p:nvPr/>
+        </p:nvSpPr>
+        <p:spPr>
+          <a:xfrm>
+            <a:off x="8119872" y="1783080"/>
+            <a:ext cx="0" cy="3611880"/>
+          </a:xfrm>
+          <a:prstGeom prst="line">
+            <a:avLst/>
+          </a:prstGeom>
+          <a:noFill/>
+          <a:ln w="12700">
+            <a:solidFill>
+              <a:srgbClr val="D8D0C7"/>
+            </a:solidFill>
+            <a:prstDash val="solid"/>
+          </a:ln>
+        </p:spPr>
+        <p:txBody>
+          <a:bodyPr/>
+          <a:lstStyle/>
+          <a:p>
+            <a:endParaRPr lang="en-US"/>
+          </a:p>
+        </p:txBody>
+      </p:sp>
+      <p:sp>
+        <p:nvSpPr>
+          <p:cNvPr id="11" name="Text 9"/>
+          <p:cNvSpPr/>
+          <p:nvPr/>
+        </p:nvSpPr>
+        <p:spPr>
+          <a:xfrm>
+            <a:off x="822960" y="1901952"/>
+            <a:ext cx="2743200" cy="256032"/>
+          </a:xfrm>
+          <a:prstGeom prst="rect">
+            <a:avLst/>
+          </a:prstGeom>
+          <a:noFill/>
+          <a:ln/>
+        </p:spPr>
+        <p:txBody>
+          <a:bodyPr wrap="square" lIns="0" tIns="0" rIns="0" bIns="0" rtlCol="0" anchor="ctr"/>
+          <a:lstStyle/>
+          <a:p>
+            <a:pPr marL="0" indent="0">
+              <a:buNone/>
+            </a:pPr>
+            <a:r>
+              <a:rPr lang="en-US" sz="1800" b="1" dirty="0">
+                <a:solidFill>
+                  <a:srgbClr val="726656"/>
+                </a:solidFill>
+                <a:latin typeface="Aptos Display" pitchFamily="34" charset="0"/>
+                <a:ea typeface="Aptos Display" pitchFamily="34" charset="-122"/>
+                <a:cs typeface="Aptos Display" pitchFamily="34" charset="-120"/>
+              </a:rPr>
+              <a:t>Security</a:t>
+            </a:r>
+            <a:endParaRPr lang="en-US" sz="1800" dirty="0"/>
+          </a:p>
+        </p:txBody>
+      </p:sp>
+      <p:sp>
+        <p:nvSpPr>
+          <p:cNvPr id="12" name="Text 10"/>
+          <p:cNvSpPr/>
+          <p:nvPr/>
+        </p:nvSpPr>
+        <p:spPr>
+          <a:xfrm>
+            <a:off x="822960" y="2468880"/>
+            <a:ext cx="2743200" cy="1280160"/>
+          </a:xfrm>
+          <a:prstGeom prst="rect">
+            <a:avLst/>
+          </a:prstGeom>
+          <a:noFill/>
+          <a:ln/>
+        </p:spPr>
+        <p:txBody>
+          <a:bodyPr wrap="square" lIns="254" tIns="254" rIns="254" bIns="254" rtlCol="0" anchor="ctr"/>
+          <a:lstStyle/>
+          <a:p>
+            <a:pPr marL="0" indent="0">
+              <a:buNone/>
+            </a:pPr>
+            <a:r>
+              <a:rPr lang="en-US" sz="1400" dirty="0">
+                <a:solidFill>
+                  <a:srgbClr val="4D4A45"/>
+                </a:solidFill>
+                <a:latin typeface="Aptos" pitchFamily="34" charset="0"/>
+                <a:ea typeface="Aptos" pitchFamily="34" charset="-122"/>
+                <a:cs typeface="Aptos" pitchFamily="34" charset="-120"/>
+              </a:rPr>
+              <a:t>• CSRF tokens on all 13 POST forms (secrets.compare_digest)</a:t>
+            </a:r>
+            <a:endParaRPr lang="en-US" sz="1400" dirty="0"/>
+          </a:p>
+          <a:p>
+            <a:pPr marL="0" indent="0">
+              <a:buNone/>
+            </a:pPr>
+            <a:r>
+              <a:rPr lang="en-US" sz="1400" dirty="0">
+                <a:solidFill>
+                  <a:srgbClr val="4D4A45"/>
+                </a:solidFill>
+                <a:latin typeface="Aptos" pitchFamily="34" charset="0"/>
+                <a:ea typeface="Aptos" pitchFamily="34" charset="-122"/>
+                <a:cs typeface="Aptos" pitchFamily="34" charset="-120"/>
+              </a:rPr>
+              <a:t>• Security headers: CSP, X-Frame-Options, Cache-Control, COEP</a:t>
+            </a:r>
+            <a:endParaRPr lang="en-US" sz="1400" dirty="0"/>
+          </a:p>
+          <a:p>
+            <a:pPr marL="0" indent="0">
+              <a:buNone/>
+            </a:pPr>
+            <a:r>
+              <a:rPr lang="en-US" sz="1400" dirty="0">
+                <a:solidFill>
+                  <a:srgbClr val="4D4A45"/>
+                </a:solidFill>
+                <a:latin typeface="Aptos" pitchFamily="34" charset="0"/>
+                <a:ea typeface="Aptos" pitchFamily="34" charset="-122"/>
+                <a:cs typeface="Aptos" pitchFamily="34" charset="-120"/>
+              </a:rPr>
+              <a:t>• bcrypt (work factor 12) + HIBP k-anonymity breach check</a:t>
+            </a:r>
+            <a:endParaRPr lang="en-US" sz="1400" dirty="0"/>
+          </a:p>
+          <a:p>
+            <a:pPr marL="0" indent="0">
+              <a:buNone/>
+            </a:pPr>
+            <a:r>
+              <a:rPr lang="en-US" sz="1400" dirty="0">
+                <a:solidFill>
+                  <a:srgbClr val="4D4A45"/>
+                </a:solidFill>
+                <a:latin typeface="Aptos" pitchFamily="34" charset="0"/>
+                <a:ea typeface="Aptos" pitchFamily="34" charset="-122"/>
+                <a:cs typeface="Aptos" pitchFamily="34" charset="-120"/>
+              </a:rPr>
+              <a:t>• MongoDB bound to 127.0.0.1 with authentication required</a:t>
+            </a:r>
+            <a:endParaRPr lang="en-US" sz="1400" dirty="0"/>
+          </a:p>
+        </p:txBody>
+      </p:sp>
+      <p:sp>
+        <p:nvSpPr>
+          <p:cNvPr id="13" name="Text 11"/>
+          <p:cNvSpPr/>
+          <p:nvPr/>
+        </p:nvSpPr>
+        <p:spPr>
+          <a:xfrm>
+            <a:off x="822960" y="4343400"/>
+            <a:ext cx="2743200" cy="201168"/>
+          </a:xfrm>
+          <a:prstGeom prst="rect">
+            <a:avLst/>
+          </a:prstGeom>
+          <a:noFill/>
+          <a:ln/>
+        </p:spPr>
+        <p:txBody>
+          <a:bodyPr wrap="square" lIns="0" tIns="0" rIns="0" bIns="0" rtlCol="0" anchor="ctr"/>
+          <a:lstStyle/>
+          <a:p>
+            <a:pPr marL="0" indent="0">
+              <a:buNone/>
+            </a:pPr>
+            <a:r>
+              <a:rPr lang="en-US" sz="1100" dirty="0">
+                <a:solidFill>
+                  <a:srgbClr val="9E9890"/>
+                </a:solidFill>
+                <a:latin typeface="Aptos" pitchFamily="34" charset="0"/>
+                <a:ea typeface="Aptos" pitchFamily="34" charset="-122"/>
+                <a:cs typeface="Aptos" pitchFamily="34" charset="-120"/>
+              </a:rPr>
+              <a:t>ZAP: 58 PASS, 0 FAIL</a:t>
+            </a:r>
+            <a:endParaRPr lang="en-US" sz="1100" dirty="0"/>
+          </a:p>
+        </p:txBody>
+      </p:sp>
+      <p:sp>
+        <p:nvSpPr>
+          <p:cNvPr id="14" name="Shape 12"/>
+          <p:cNvSpPr/>
+          <p:nvPr/>
+        </p:nvSpPr>
+        <p:spPr>
+          <a:xfrm>
+            <a:off x="822960" y="4572000"/>
+            <a:ext cx="2743200" cy="1005840"/>
+          </a:xfrm>
+          <a:prstGeom prst="roundRect">
+            <a:avLst>
+              <a:gd name="adj" fmla="val 4545"/>
+            </a:avLst>
+          </a:prstGeom>
+          <a:solidFill>
+            <a:srgbClr val="FCFBF9"/>
+          </a:solidFill>
+          <a:ln w="12700">
+            <a:solidFill>
+              <a:srgbClr val="D8D0C7"/>
+            </a:solidFill>
+            <a:prstDash val="solid"/>
+          </a:ln>
+        </p:spPr>
+        <p:txBody>
+          <a:bodyPr/>
+          <a:lstStyle/>
+          <a:p>
+            <a:endParaRPr lang="en-US"/>
+          </a:p>
+        </p:txBody>
+      </p:sp>
+      <p:sp>
+        <p:nvSpPr>
+          <p:cNvPr id="15" name="Text 13"/>
+          <p:cNvSpPr/>
+          <p:nvPr/>
+        </p:nvSpPr>
+        <p:spPr>
+          <a:xfrm>
+            <a:off x="4572000" y="1901952"/>
+            <a:ext cx="2743200" cy="256032"/>
+          </a:xfrm>
+          <a:prstGeom prst="rect">
+            <a:avLst/>
+          </a:prstGeom>
+          <a:noFill/>
+          <a:ln/>
+        </p:spPr>
+        <p:txBody>
+          <a:bodyPr wrap="square" lIns="0" tIns="0" rIns="0" bIns="0" rtlCol="0" anchor="ctr"/>
+          <a:lstStyle/>
+          <a:p>
+            <a:pPr marL="0" indent="0">
+              <a:buNone/>
+            </a:pPr>
+            <a:r>
+              <a:rPr lang="en-US" sz="1800" b="1" dirty="0">
+                <a:solidFill>
+                  <a:srgbClr val="726656"/>
+                </a:solidFill>
+                <a:latin typeface="Aptos Display" pitchFamily="34" charset="0"/>
+                <a:ea typeface="Aptos Display" pitchFamily="34" charset="-122"/>
+                <a:cs typeface="Aptos Display" pitchFamily="34" charset="-120"/>
+              </a:rPr>
+              <a:t>Performance &amp; Portability</a:t>
+            </a:r>
+            <a:endParaRPr lang="en-US" sz="1800" dirty="0"/>
+          </a:p>
+        </p:txBody>
+      </p:sp>
+      <p:sp>
+        <p:nvSpPr>
+          <p:cNvPr id="16" name="Text 14"/>
+          <p:cNvSpPr/>
+          <p:nvPr/>
+        </p:nvSpPr>
+        <p:spPr>
+          <a:xfrm>
+            <a:off x="4572000" y="2468880"/>
+            <a:ext cx="2743200" cy="1280160"/>
+          </a:xfrm>
+          <a:prstGeom prst="rect">
+            <a:avLst/>
+          </a:prstGeom>
+          <a:noFill/>
+          <a:ln/>
+        </p:spPr>
+        <p:txBody>
+          <a:bodyPr wrap="square" lIns="254" tIns="254" rIns="254" bIns="254" rtlCol="0" anchor="ctr"/>
+          <a:lstStyle/>
+          <a:p>
+            <a:pPr marL="0" indent="0">
+              <a:buNone/>
+            </a:pPr>
+            <a:r>
+              <a:rPr lang="en-US" sz="1400" dirty="0">
+                <a:solidFill>
+                  <a:srgbClr val="4D4A45"/>
+                </a:solidFill>
+                <a:latin typeface="Aptos" pitchFamily="34" charset="0"/>
+                <a:ea typeface="Aptos" pitchFamily="34" charset="-122"/>
+                <a:cs typeface="Aptos" pitchFamily="34" charset="-120"/>
+              </a:rPr>
+              <a:t>• 4-worker parallel extraction with per-provider semaphores</a:t>
+            </a:r>
+            <a:endParaRPr lang="en-US" sz="1400" dirty="0"/>
+          </a:p>
+          <a:p>
+            <a:pPr marL="0" indent="0">
+              <a:buNone/>
+            </a:pPr>
+            <a:r>
+              <a:rPr lang="en-US" sz="1400" dirty="0">
+                <a:solidFill>
+                  <a:srgbClr val="4D4A45"/>
+                </a:solidFill>
+                <a:latin typeface="Aptos" pitchFamily="34" charset="0"/>
+                <a:ea typeface="Aptos" pitchFamily="34" charset="-122"/>
+                <a:cs typeface="Aptos" pitchFamily="34" charset="-120"/>
+              </a:rPr>
+              <a:t>• Cloud-first LLM (Groq/NVIDIA) with local Ollama fallback</a:t>
+            </a:r>
+            <a:endParaRPr lang="en-US" sz="1400" dirty="0"/>
+          </a:p>
+          <a:p>
+            <a:pPr marL="0" indent="0">
+              <a:buNone/>
+            </a:pPr>
+            <a:r>
+              <a:rPr lang="en-US" sz="1400" dirty="0">
+                <a:solidFill>
+                  <a:srgbClr val="4D4A45"/>
+                </a:solidFill>
+                <a:latin typeface="Aptos" pitchFamily="34" charset="0"/>
+                <a:ea typeface="Aptos" pitchFamily="34" charset="-122"/>
+                <a:cs typeface="Aptos" pitchFamily="34" charset="-120"/>
+              </a:rPr>
+              <a:t>• Full stack in Docker Compose — no host dependencies</a:t>
+            </a:r>
+            <a:endParaRPr lang="en-US" sz="1400" dirty="0"/>
+          </a:p>
+          <a:p>
+            <a:pPr marL="0" indent="0">
+              <a:buNone/>
+            </a:pPr>
+            <a:r>
+              <a:rPr lang="en-US" sz="1400" dirty="0">
+                <a:solidFill>
+                  <a:srgbClr val="4D4A45"/>
+                </a:solidFill>
+                <a:latin typeface="Aptos" pitchFamily="34" charset="0"/>
+                <a:ea typeface="Aptos" pitchFamily="34" charset="-122"/>
+                <a:cs typeface="Aptos" pitchFamily="34" charset="-120"/>
+              </a:rPr>
+              <a:t>• GPU passthrough opt-in via override compose file</a:t>
+            </a:r>
+            <a:endParaRPr lang="en-US" sz="1400" dirty="0"/>
+          </a:p>
+        </p:txBody>
+      </p:sp>
+      <p:sp>
+        <p:nvSpPr>
+          <p:cNvPr id="17" name="Text 15"/>
+          <p:cNvSpPr/>
+          <p:nvPr/>
+        </p:nvSpPr>
+        <p:spPr>
+          <a:xfrm>
+            <a:off x="4572000" y="4343400"/>
+            <a:ext cx="2743200" cy="201168"/>
+          </a:xfrm>
+          <a:prstGeom prst="rect">
+            <a:avLst/>
+          </a:prstGeom>
+          <a:noFill/>
+          <a:ln/>
+        </p:spPr>
+        <p:txBody>
+          <a:bodyPr wrap="square" lIns="0" tIns="0" rIns="0" bIns="0" rtlCol="0" anchor="ctr"/>
+          <a:lstStyle/>
+          <a:p>
+            <a:pPr marL="0" indent="0">
+              <a:buNone/>
+            </a:pPr>
+            <a:r>
+              <a:rPr lang="en-US" sz="1100" dirty="0">
+                <a:solidFill>
+                  <a:srgbClr val="9E9890"/>
+                </a:solidFill>
+                <a:latin typeface="Aptos" pitchFamily="34" charset="0"/>
+                <a:ea typeface="Aptos" pitchFamily="34" charset="-122"/>
+                <a:cs typeface="Aptos" pitchFamily="34" charset="-120"/>
+              </a:rPr>
+              <a:t>Docker + cloud-first AI</a:t>
+            </a:r>
+            <a:endParaRPr lang="en-US" sz="1100" dirty="0"/>
+          </a:p>
+        </p:txBody>
+      </p:sp>
+      <p:sp>
+        <p:nvSpPr>
+          <p:cNvPr id="18" name="Shape 16"/>
+          <p:cNvSpPr/>
+          <p:nvPr/>
+        </p:nvSpPr>
+        <p:spPr>
+          <a:xfrm>
+            <a:off x="4572000" y="4572000"/>
+            <a:ext cx="2743200" cy="1005840"/>
+          </a:xfrm>
+          <a:prstGeom prst="roundRect">
+            <a:avLst>
+              <a:gd name="adj" fmla="val 4545"/>
+            </a:avLst>
+          </a:prstGeom>
+          <a:solidFill>
+            <a:srgbClr val="FCFBF9"/>
+          </a:solidFill>
+          <a:ln w="12700">
+            <a:solidFill>
+              <a:srgbClr val="D8D0C7"/>
+            </a:solidFill>
+            <a:prstDash val="solid"/>
+          </a:ln>
+        </p:spPr>
+        <p:txBody>
+          <a:bodyPr/>
+          <a:lstStyle/>
+          <a:p>
+            <a:endParaRPr lang="en-US"/>
+          </a:p>
+        </p:txBody>
+      </p:sp>
+      <p:sp>
+        <p:nvSpPr>
+          <p:cNvPr id="19" name="Text 17"/>
+          <p:cNvSpPr/>
+          <p:nvPr/>
+        </p:nvSpPr>
+        <p:spPr>
+          <a:xfrm>
+            <a:off x="8641080" y="1901952"/>
+            <a:ext cx="2743200" cy="256032"/>
+          </a:xfrm>
+          <a:prstGeom prst="rect">
+            <a:avLst/>
+          </a:prstGeom>
+          <a:noFill/>
+          <a:ln/>
+        </p:spPr>
+        <p:txBody>
+          <a:bodyPr wrap="square" lIns="0" tIns="0" rIns="0" bIns="0" rtlCol="0" anchor="ctr"/>
+          <a:lstStyle/>
+          <a:p>
+            <a:pPr marL="0" indent="0">
+              <a:buNone/>
+            </a:pPr>
+            <a:r>
+              <a:rPr lang="en-US" sz="1800" b="1" dirty="0">
+                <a:solidFill>
+                  <a:srgbClr val="726656"/>
+                </a:solidFill>
+                <a:latin typeface="Aptos Display" pitchFamily="34" charset="0"/>
+                <a:ea typeface="Aptos Display" pitchFamily="34" charset="-122"/>
+                <a:cs typeface="Aptos Display" pitchFamily="34" charset="-120"/>
+              </a:rPr>
+              <a:t>Observability &amp; Usability</a:t>
+            </a:r>
+            <a:endParaRPr lang="en-US" sz="1800" dirty="0"/>
+          </a:p>
+        </p:txBody>
+      </p:sp>
+      <p:sp>
+        <p:nvSpPr>
+          <p:cNvPr id="20" name="Text 18"/>
+          <p:cNvSpPr/>
+          <p:nvPr/>
+        </p:nvSpPr>
+        <p:spPr>
+          <a:xfrm>
+            <a:off x="8641080" y="2468880"/>
+            <a:ext cx="2743200" cy="1280160"/>
+          </a:xfrm>
+          <a:prstGeom prst="rect">
+            <a:avLst/>
+          </a:prstGeom>
+          <a:noFill/>
+          <a:ln/>
+        </p:spPr>
+        <p:txBody>
+          <a:bodyPr wrap="square" lIns="254" tIns="254" rIns="254" bIns="254" rtlCol="0" anchor="ctr"/>
+          <a:lstStyle/>
+          <a:p>
+            <a:pPr marL="0" indent="0">
+              <a:buNone/>
+            </a:pPr>
+            <a:r>
+              <a:rPr lang="en-US" sz="1400" dirty="0">
+                <a:solidFill>
+                  <a:srgbClr val="4D4A45"/>
+                </a:solidFill>
+                <a:latin typeface="Aptos" pitchFamily="34" charset="0"/>
+                <a:ea typeface="Aptos" pitchFamily="34" charset="-122"/>
+                <a:cs typeface="Aptos" pitchFamily="34" charset="-120"/>
+              </a:rPr>
+              <a:t>• Timestamped log files with thread-name prefixes (extract_0..3)</a:t>
+            </a:r>
+            <a:endParaRPr lang="en-US" sz="1400" dirty="0"/>
+          </a:p>
+          <a:p>
+            <a:pPr marL="0" indent="0">
+              <a:buNone/>
+            </a:pPr>
+            <a:r>
+              <a:rPr lang="en-US" sz="1400" dirty="0">
+                <a:solidFill>
+                  <a:srgbClr val="4D4A45"/>
+                </a:solidFill>
+                <a:latin typeface="Aptos" pitchFamily="34" charset="0"/>
+                <a:ea typeface="Aptos" pitchFamily="34" charset="-122"/>
+                <a:cs typeface="Aptos" pitchFamily="34" charset="-120"/>
+              </a:rPr>
+              <a:t>• Real-time job status polling via /api/jobs endpoint</a:t>
+            </a:r>
+            <a:endParaRPr lang="en-US" sz="1400" dirty="0"/>
+          </a:p>
+          <a:p>
+            <a:pPr marL="0" indent="0">
+              <a:buNone/>
+            </a:pPr>
+            <a:r>
+              <a:rPr lang="en-US" sz="1400" dirty="0">
+                <a:solidFill>
+                  <a:srgbClr val="4D4A45"/>
+                </a:solidFill>
+                <a:latin typeface="Aptos" pitchFamily="34" charset="0"/>
+                <a:ea typeface="Aptos" pitchFamily="34" charset="-122"/>
+                <a:cs typeface="Aptos" pitchFamily="34" charset="-120"/>
+              </a:rPr>
+              <a:t>• Role-based dashboard views (Admin vs. Reviewer)</a:t>
+            </a:r>
+            <a:endParaRPr lang="en-US" sz="1400" dirty="0"/>
+          </a:p>
+          <a:p>
+            <a:pPr marL="0" indent="0">
+              <a:buNone/>
+            </a:pPr>
+            <a:r>
+              <a:rPr lang="en-US" sz="1400" dirty="0">
+                <a:solidFill>
+                  <a:srgbClr val="4D4A45"/>
+                </a:solidFill>
+                <a:latin typeface="Aptos" pitchFamily="34" charset="0"/>
+                <a:ea typeface="Aptos" pitchFamily="34" charset="-122"/>
+                <a:cs typeface="Aptos" pitchFamily="34" charset="-120"/>
+              </a:rPr>
+              <a:t>• Force password change on first login (blocks all routes)</a:t>
+            </a:r>
+            <a:endParaRPr lang="en-US" sz="1400" dirty="0"/>
+          </a:p>
+        </p:txBody>
+      </p:sp>
+      <p:sp>
+        <p:nvSpPr>
+          <p:cNvPr id="21" name="Text 19"/>
+          <p:cNvSpPr/>
+          <p:nvPr/>
+        </p:nvSpPr>
+        <p:spPr>
+          <a:xfrm>
+            <a:off x="8641080" y="4343400"/>
+            <a:ext cx="2743200" cy="201168"/>
+          </a:xfrm>
+          <a:prstGeom prst="rect">
+            <a:avLst/>
+          </a:prstGeom>
+          <a:noFill/>
+          <a:ln/>
+        </p:spPr>
+        <p:txBody>
+          <a:bodyPr wrap="square" lIns="0" tIns="0" rIns="0" bIns="0" rtlCol="0" anchor="ctr"/>
+          <a:lstStyle/>
+          <a:p>
+            <a:pPr marL="0" indent="0">
+              <a:buNone/>
+            </a:pPr>
+            <a:r>
+              <a:rPr lang="en-US" sz="1100" dirty="0">
+                <a:solidFill>
+                  <a:srgbClr val="9E9890"/>
+                </a:solidFill>
+                <a:latin typeface="Aptos" pitchFamily="34" charset="0"/>
+                <a:ea typeface="Aptos" pitchFamily="34" charset="-122"/>
+                <a:cs typeface="Aptos" pitchFamily="34" charset="-120"/>
+              </a:rPr>
+              <a:t>Structured logs + RBAC</a:t>
+            </a:r>
+            <a:endParaRPr lang="en-US" sz="1100" dirty="0"/>
+          </a:p>
+        </p:txBody>
+      </p:sp>
+      <p:sp>
+        <p:nvSpPr>
+          <p:cNvPr id="22" name="Shape 20"/>
+          <p:cNvSpPr/>
+          <p:nvPr/>
+        </p:nvSpPr>
+        <p:spPr>
+          <a:xfrm>
+            <a:off x="8641080" y="4572000"/>
+            <a:ext cx="2743200" cy="1005840"/>
+          </a:xfrm>
+          <a:prstGeom prst="roundRect">
+            <a:avLst>
+              <a:gd name="adj" fmla="val 4545"/>
+            </a:avLst>
+          </a:prstGeom>
+          <a:solidFill>
+            <a:srgbClr val="FCFBF9"/>
+          </a:solidFill>
+          <a:ln w="12700">
+            <a:solidFill>
+              <a:srgbClr val="D8D0C7"/>
+            </a:solidFill>
+            <a:prstDash val="solid"/>
+          </a:ln>
+        </p:spPr>
+        <p:txBody>
+          <a:bodyPr/>
+          <a:lstStyle/>
+          <a:p>
+            <a:endParaRPr lang="en-US"/>
+          </a:p>
+        </p:txBody>
+      </p:sp>
+      <p:sp>
+        <p:nvSpPr>
+          <p:cNvPr id="25" name="Slide Number Placeholder 0"/>
+          <p:cNvSpPr>
+            <a:spLocks noGrp="1"/>
+          </p:cNvSpPr>
+          <p:nvPr>
+            <p:ph type="sldNum" sz="quarter" idx="4294967295"/>
+          </p:nvPr>
+        </p:nvSpPr>
+        <p:spPr>
+          <a:xfrm>
+            <a:off x="11631168" y="6419088"/>
+            <a:ext cx="201168" cy="182880"/>
+          </a:xfrm>
+          <a:prstGeom prst="rect">
+            <a:avLst/>
+          </a:prstGeom>
+          <a:extLst>
+            <a:ext uri="{C572A759-6A51-4108-AA02-DFA0A04FC94B}">
+              <ma14:wrappingTextBoxFlag xmlns:ma14="http://schemas.microsoft.com/office/mac/drawingml/2011/main" xmlns="" val="0"/>
+            </a:ext>
+          </a:extLst>
+        </p:spPr>
+        <p:txBody>
+          <a:bodyPr/>
+          <a:lstStyle>
+            <a:lvl1pPr>
+              <a:defRPr sz="900">
+                <a:solidFill>
+                  <a:srgbClr val="7A746C"/>
+                </a:solidFill>
+                <a:latin typeface="Aptos"/>
+                <a:ea typeface="Aptos"/>
+                <a:cs typeface="Aptos"/>
+              </a:defRPr>
+            </a:lvl1pPr>
+          </a:lstStyle>
+          <a:p>
+            <a:pPr algn="r"/>
+            <a:fld id="{F7021451-1387-4CA6-816F-3879F97B5CBC}" type="slidenum">
+              <a:rPr lang="en-US" b="0"/>
+              <a:t>7</a:t>
+            </a:fld>
+            <a:endParaRPr lang="en-US"/>
+          </a:p>
+        </p:txBody>
+      </p:sp>
+    </p:spTree>
+  </p:cSld>
+  <p:clrMapOvr>
+    <a:masterClrMapping/>
+  </p:clrMapOvr>
+</p:sld>
+</file>
+
+<file path=ppt/slides/slide8.xml><?xml version="1.0" encoding="utf-8"?>
+<p:sld xmlns:a="http://schemas.openxmlformats.org/drawingml/2006/main" xmlns:r="http://schemas.openxmlformats.org/officeDocument/2006/relationships" xmlns:p="http://schemas.openxmlformats.org/presentationml/2006/main">
+  <p:cSld>
+    <p:spTree>
+      <p:nvGrpSpPr>
+        <p:cNvPr id="1" name=""/>
+        <p:cNvGrpSpPr/>
+        <p:nvPr/>
+      </p:nvGrpSpPr>
+      <p:grpSpPr>
+        <a:xfrm>
+          <a:off x="0" y="0"/>
+          <a:ext cx="0" cy="0"/>
+          <a:chOff x="0" y="0"/>
+          <a:chExt cx="0" cy="0"/>
+        </a:xfrm>
+      </p:grpSpPr>
+      <p:sp>
+        <p:nvSpPr>
+          <p:cNvPr id="2" name="Shape 0"/>
+          <p:cNvSpPr/>
+          <p:nvPr/>
+        </p:nvSpPr>
+        <p:spPr>
+          <a:xfrm>
+            <a:off x="502920" y="347472"/>
+            <a:ext cx="914400" cy="73152"/>
+          </a:xfrm>
+          <a:prstGeom prst="rect">
+            <a:avLst/>
+          </a:prstGeom>
+          <a:solidFill>
+            <a:srgbClr val="E97886"/>
+          </a:solidFill>
+          <a:ln w="12700">
+            <a:solidFill>
+              <a:srgbClr val="E97886">
+                <a:alpha val="0"/>
+              </a:srgbClr>
+            </a:solidFill>
+            <a:prstDash val="solid"/>
+          </a:ln>
+        </p:spPr>
+        <p:txBody>
+          <a:bodyPr/>
+          <a:lstStyle/>
+          <a:p>
+            <a:endParaRPr lang="en-US"/>
+          </a:p>
+        </p:txBody>
+      </p:sp>
+      <p:sp>
+        <p:nvSpPr>
+          <p:cNvPr id="3" name="Shape 1"/>
+          <p:cNvSpPr/>
+          <p:nvPr/>
+        </p:nvSpPr>
+        <p:spPr>
+          <a:xfrm>
+            <a:off x="1481328" y="347472"/>
+            <a:ext cx="1325880" cy="73152"/>
+          </a:xfrm>
+          <a:prstGeom prst="rect">
+            <a:avLst/>
+          </a:prstGeom>
+          <a:solidFill>
+            <a:srgbClr val="E8D0D0"/>
+          </a:solidFill>
+          <a:ln w="12700">
+            <a:solidFill>
+              <a:srgbClr val="E8D0D0">
+                <a:alpha val="0"/>
+              </a:srgbClr>
+            </a:solidFill>
+            <a:prstDash val="solid"/>
+          </a:ln>
+        </p:spPr>
+        <p:txBody>
+          <a:bodyPr/>
+          <a:lstStyle/>
+          <a:p>
+            <a:endParaRPr lang="en-US"/>
+          </a:p>
+        </p:txBody>
+      </p:sp>
+      <p:sp>
+        <p:nvSpPr>
+          <p:cNvPr id="4" name="Shape 2"/>
+          <p:cNvSpPr/>
+          <p:nvPr/>
+        </p:nvSpPr>
+        <p:spPr>
+          <a:xfrm>
+            <a:off x="2816352" y="347472"/>
+            <a:ext cx="1554480" cy="73152"/>
+          </a:xfrm>
+          <a:prstGeom prst="rect">
+            <a:avLst/>
+          </a:prstGeom>
+          <a:solidFill>
+            <a:srgbClr val="D65F63"/>
+          </a:solidFill>
+          <a:ln w="12700">
+            <a:solidFill>
+              <a:srgbClr val="D65F63">
+                <a:alpha val="0"/>
+              </a:srgbClr>
+            </a:solidFill>
+            <a:prstDash val="solid"/>
+          </a:ln>
+        </p:spPr>
+        <p:txBody>
+          <a:bodyPr/>
+          <a:lstStyle/>
+          <a:p>
+            <a:endParaRPr lang="en-US"/>
+          </a:p>
+        </p:txBody>
+      </p:sp>
+      <p:sp>
+        <p:nvSpPr>
+          <p:cNvPr id="5" name="Shape 3"/>
+          <p:cNvSpPr/>
+          <p:nvPr/>
+        </p:nvSpPr>
+        <p:spPr>
+          <a:xfrm>
+            <a:off x="4379976" y="347472"/>
+            <a:ext cx="1097280" cy="73152"/>
+          </a:xfrm>
+          <a:prstGeom prst="rect">
+            <a:avLst/>
+          </a:prstGeom>
+          <a:solidFill>
+            <a:srgbClr val="C74642"/>
+          </a:solidFill>
+          <a:ln w="12700">
+            <a:solidFill>
+              <a:srgbClr val="C74642">
+                <a:alpha val="0"/>
+              </a:srgbClr>
+            </a:solidFill>
+            <a:prstDash val="solid"/>
+          </a:ln>
+        </p:spPr>
+        <p:txBody>
+          <a:bodyPr/>
+          <a:lstStyle/>
+          <a:p>
+            <a:endParaRPr lang="en-US"/>
+          </a:p>
+        </p:txBody>
+      </p:sp>
+      <p:sp>
+        <p:nvSpPr>
+          <p:cNvPr id="6" name="Text 4"/>
+          <p:cNvSpPr/>
+          <p:nvPr/>
+        </p:nvSpPr>
+        <p:spPr>
+          <a:xfrm>
+            <a:off x="749808" y="731520"/>
+            <a:ext cx="7223760" cy="411480"/>
+          </a:xfrm>
+          <a:prstGeom prst="rect">
+            <a:avLst/>
+          </a:prstGeom>
+          <a:noFill/>
+          <a:ln/>
+        </p:spPr>
+        <p:txBody>
+          <a:bodyPr wrap="square" lIns="0" tIns="0" rIns="0" bIns="0" rtlCol="0" anchor="ctr"/>
+          <a:lstStyle/>
+          <a:p>
+            <a:pPr marL="0" indent="0">
+              <a:buNone/>
+            </a:pPr>
+            <a:r>
+              <a:rPr lang="en-US" sz="2600" b="1" dirty="0">
+                <a:solidFill>
+                  <a:srgbClr val="17306F"/>
+                </a:solidFill>
+                <a:latin typeface="Aptos Display" pitchFamily="34" charset="0"/>
+                <a:ea typeface="Aptos Display" pitchFamily="34" charset="-122"/>
+                <a:cs typeface="Aptos Display" pitchFamily="34" charset="-120"/>
+              </a:rPr>
+              <a:t>Methodology &amp; Solution</a:t>
+            </a:r>
+            <a:endParaRPr lang="en-US" sz="2600" dirty="0"/>
+          </a:p>
+        </p:txBody>
+      </p:sp>
+      <p:sp>
+        <p:nvSpPr>
+          <p:cNvPr id="7" name="Text 5"/>
+          <p:cNvSpPr/>
+          <p:nvPr/>
+        </p:nvSpPr>
+        <p:spPr>
+          <a:xfrm>
+            <a:off x="768096" y="1143000"/>
+            <a:ext cx="6766560" cy="274320"/>
+          </a:xfrm>
+          <a:prstGeom prst="rect">
+            <a:avLst/>
+          </a:prstGeom>
+          <a:noFill/>
+          <a:ln/>
+        </p:spPr>
+        <p:txBody>
+          <a:bodyPr wrap="square" lIns="0" tIns="0" rIns="0" bIns="0" rtlCol="0" anchor="ctr"/>
+          <a:lstStyle/>
+          <a:p>
+            <a:pPr marL="0" indent="0">
+              <a:buNone/>
+            </a:pPr>
+            <a:r>
+              <a:rPr lang="en-US" sz="1200" dirty="0">
+                <a:solidFill>
+                  <a:srgbClr val="7A746C"/>
+                </a:solidFill>
+                <a:latin typeface="Aptos" pitchFamily="34" charset="0"/>
+                <a:ea typeface="Aptos" pitchFamily="34" charset="-122"/>
+                <a:cs typeface="Aptos" pitchFamily="34" charset="-120"/>
+              </a:rPr>
+              <a:t>How we built it and what we delivered</a:t>
+            </a:r>
+            <a:endParaRPr lang="en-US" sz="1200" dirty="0"/>
+          </a:p>
+        </p:txBody>
+      </p:sp>
+      <p:sp>
+        <p:nvSpPr>
+          <p:cNvPr id="8" name="Shape 6"/>
+          <p:cNvSpPr/>
+          <p:nvPr/>
+        </p:nvSpPr>
+        <p:spPr>
+          <a:xfrm>
+            <a:off x="749808" y="1490472"/>
+            <a:ext cx="10698480" cy="0"/>
+          </a:xfrm>
+          <a:prstGeom prst="line">
+            <a:avLst/>
+          </a:prstGeom>
+          <a:noFill/>
+          <a:ln w="12700">
+            <a:solidFill>
+              <a:srgbClr val="D8D0C7"/>
+            </a:solidFill>
+            <a:prstDash val="solid"/>
+          </a:ln>
+        </p:spPr>
+        <p:txBody>
+          <a:bodyPr/>
+          <a:lstStyle/>
+          <a:p>
+            <a:endParaRPr lang="en-US"/>
+          </a:p>
+        </p:txBody>
+      </p:sp>
+      <p:sp>
+        <p:nvSpPr>
+          <p:cNvPr id="9" name="Shape 7"/>
+          <p:cNvSpPr/>
+          <p:nvPr/>
+        </p:nvSpPr>
+        <p:spPr>
+          <a:xfrm>
+            <a:off x="868680" y="1783080"/>
+            <a:ext cx="1051560" cy="292608"/>
+          </a:xfrm>
+          <a:prstGeom prst="roundRect">
+            <a:avLst>
+              <a:gd name="adj" fmla="val 25000"/>
+            </a:avLst>
+          </a:prstGeom>
+          <a:solidFill>
+            <a:srgbClr val="C74642"/>
+          </a:solidFill>
+          <a:ln w="12700">
+            <a:solidFill>
+              <a:srgbClr val="C74642">
+                <a:alpha val="0"/>
+              </a:srgbClr>
+            </a:solidFill>
+            <a:prstDash val="solid"/>
+          </a:ln>
+        </p:spPr>
+        <p:txBody>
+          <a:bodyPr/>
+          <a:lstStyle/>
+          <a:p>
+            <a:endParaRPr lang="en-US"/>
+          </a:p>
+        </p:txBody>
+      </p:sp>
+      <p:sp>
+        <p:nvSpPr>
+          <p:cNvPr id="10" name="Text 8"/>
+          <p:cNvSpPr/>
+          <p:nvPr/>
+        </p:nvSpPr>
+        <p:spPr>
+          <a:xfrm>
+            <a:off x="868680" y="1828800"/>
+            <a:ext cx="1051560" cy="182880"/>
+          </a:xfrm>
+          <a:prstGeom prst="rect">
+            <a:avLst/>
+          </a:prstGeom>
+          <a:noFill/>
+          <a:ln/>
+        </p:spPr>
+        <p:txBody>
+          <a:bodyPr wrap="square" lIns="0" tIns="0" rIns="0" bIns="0" rtlCol="0" anchor="ctr"/>
+          <a:lstStyle/>
+          <a:p>
+            <a:pPr marL="0" indent="0">
+              <a:buNone/>
+            </a:pPr>
+            <a:r>
+              <a:rPr lang="en-US" sz="1100" b="1" dirty="0">
+                <a:solidFill>
+                  <a:srgbClr val="FFFFFF"/>
+                </a:solidFill>
+                <a:latin typeface="Aptos" pitchFamily="34" charset="0"/>
+                <a:ea typeface="Aptos" pitchFamily="34" charset="-122"/>
+                <a:cs typeface="Aptos" pitchFamily="34" charset="-120"/>
+              </a:rPr>
+              <a:t>METHODOLOGY</a:t>
+            </a:r>
+            <a:endParaRPr lang="en-US" sz="1100" dirty="0"/>
+          </a:p>
+        </p:txBody>
+      </p:sp>
+      <p:sp>
+        <p:nvSpPr>
+          <p:cNvPr id="11" name="Shape 9"/>
+          <p:cNvSpPr/>
+          <p:nvPr/>
+        </p:nvSpPr>
+        <p:spPr>
+          <a:xfrm>
+            <a:off x="868680" y="2148840"/>
+            <a:ext cx="4754880" cy="3474720"/>
+          </a:xfrm>
+          <a:prstGeom prst="roundRect">
+            <a:avLst>
+              <a:gd name="adj" fmla="val 2105"/>
+            </a:avLst>
+          </a:prstGeom>
+          <a:solidFill>
+            <a:srgbClr val="FCFBF9"/>
+          </a:solidFill>
+          <a:ln w="12700">
+            <a:solidFill>
+              <a:srgbClr val="D8D0C7"/>
+            </a:solidFill>
+            <a:prstDash val="solid"/>
+          </a:ln>
+          <a:effectLst>
+            <a:outerShdw blurRad="19050" dist="6350" dir="2700000" algn="bl" rotWithShape="0">
+              <a:srgbClr val="000000">
+                <a:alpha val="12000"/>
+              </a:srgbClr>
+            </a:outerShdw>
+          </a:effectLst>
+        </p:spPr>
+        <p:txBody>
+          <a:bodyPr/>
+          <a:lstStyle/>
+          <a:p>
+            <a:endParaRPr lang="en-US"/>
+          </a:p>
+        </p:txBody>
+      </p:sp>
+      <p:sp>
+        <p:nvSpPr>
+          <p:cNvPr id="12" name="Text 10"/>
+          <p:cNvSpPr/>
+          <p:nvPr/>
+        </p:nvSpPr>
+        <p:spPr>
+          <a:xfrm>
+            <a:off x="1069848" y="2313432"/>
+            <a:ext cx="4352544" cy="256032"/>
+          </a:xfrm>
+          <a:prstGeom prst="rect">
+            <a:avLst/>
+          </a:prstGeom>
+          <a:noFill/>
+          <a:ln/>
+        </p:spPr>
+        <p:txBody>
+          <a:bodyPr wrap="square" lIns="0" tIns="0" rIns="0" bIns="0" rtlCol="0" anchor="ctr"/>
+          <a:lstStyle/>
+          <a:p>
+            <a:pPr marL="0" indent="0">
+              <a:buNone/>
+            </a:pPr>
+            <a:r>
+              <a:rPr lang="en-US" sz="1800" b="1" dirty="0">
+                <a:solidFill>
+                  <a:srgbClr val="726656"/>
+                </a:solidFill>
+                <a:latin typeface="Aptos Display" pitchFamily="34" charset="0"/>
+                <a:ea typeface="Aptos Display" pitchFamily="34" charset="-122"/>
+                <a:cs typeface="Aptos Display" pitchFamily="34" charset="-120"/>
+              </a:rPr>
+              <a:t>Development Approach</a:t>
+            </a:r>
+            <a:endParaRPr lang="en-US" sz="1800" dirty="0"/>
+          </a:p>
+        </p:txBody>
+      </p:sp>
+      <p:sp>
+        <p:nvSpPr>
+          <p:cNvPr id="13" name="Text 11"/>
+          <p:cNvSpPr/>
+          <p:nvPr/>
+        </p:nvSpPr>
+        <p:spPr>
+          <a:xfrm>
+            <a:off x="1088136" y="2697480"/>
+            <a:ext cx="4315968" cy="2761488"/>
+          </a:xfrm>
+          <a:prstGeom prst="rect">
+            <a:avLst/>
+          </a:prstGeom>
+          <a:noFill/>
+          <a:ln/>
+        </p:spPr>
+        <p:txBody>
+          <a:bodyPr wrap="square" lIns="254" tIns="254" rIns="254" bIns="254" rtlCol="0" anchor="t"/>
+          <a:lstStyle/>
+          <a:p>
+            <a:pPr marL="0" indent="0">
+              <a:buNone/>
+            </a:pPr>
+            <a:r>
+              <a:rPr lang="en-US" sz="1400" dirty="0">
+                <a:solidFill>
+                  <a:srgbClr val="4D4A45"/>
+                </a:solidFill>
+                <a:latin typeface="Aptos" pitchFamily="34" charset="0"/>
+                <a:ea typeface="Aptos" pitchFamily="34" charset="-122"/>
+                <a:cs typeface="Aptos" pitchFamily="34" charset="-120"/>
+              </a:rPr>
+              <a:t>• Agile-influenced iterative delivery</a:t>
+            </a:r>
+            <a:endParaRPr lang="en-US" sz="1400" dirty="0"/>
+          </a:p>
+          <a:p>
+            <a:pPr marL="0" indent="0">
+              <a:buNone/>
+            </a:pPr>
+            <a:r>
+              <a:rPr lang="en-US" sz="1400" dirty="0">
+                <a:solidFill>
+                  <a:srgbClr val="4D4A45"/>
+                </a:solidFill>
+                <a:latin typeface="Aptos" pitchFamily="34" charset="0"/>
+                <a:ea typeface="Aptos" pitchFamily="34" charset="-122"/>
+                <a:cs typeface="Aptos" pitchFamily="34" charset="-120"/>
+              </a:rPr>
+              <a:t>• Feature spec + implementation plan before any coding</a:t>
+            </a:r>
+            <a:endParaRPr lang="en-US" sz="1400" dirty="0"/>
+          </a:p>
+          <a:p>
+            <a:pPr marL="0" indent="0">
+              <a:buNone/>
+            </a:pPr>
+            <a:r>
+              <a:rPr lang="en-US" sz="1400" dirty="0">
+                <a:solidFill>
+                  <a:srgbClr val="4D4A45"/>
+                </a:solidFill>
+                <a:latin typeface="Aptos" pitchFamily="34" charset="0"/>
+                <a:ea typeface="Aptos" pitchFamily="34" charset="-122"/>
+                <a:cs typeface="Aptos" pitchFamily="34" charset="-120"/>
+              </a:rPr>
+              <a:t>• Weekly standups via Google Meet</a:t>
+            </a:r>
+            <a:endParaRPr lang="en-US" sz="1400" dirty="0"/>
+          </a:p>
+          <a:p>
+            <a:pPr marL="0" indent="0">
+              <a:buNone/>
+            </a:pPr>
+            <a:r>
+              <a:rPr lang="en-US" sz="1400" dirty="0">
+                <a:solidFill>
+                  <a:srgbClr val="4D4A45"/>
+                </a:solidFill>
+                <a:latin typeface="Aptos" pitchFamily="34" charset="0"/>
+                <a:ea typeface="Aptos" pitchFamily="34" charset="-122"/>
+                <a:cs typeface="Aptos" pitchFamily="34" charset="-120"/>
+              </a:rPr>
+              <a:t>• Branch-per-developer workflow on GitHub</a:t>
+            </a:r>
+            <a:endParaRPr lang="en-US" sz="1400" dirty="0"/>
+          </a:p>
+          <a:p>
+            <a:pPr marL="0" indent="0">
+              <a:buNone/>
+            </a:pPr>
+            <a:r>
+              <a:rPr lang="en-US" sz="1400" dirty="0">
+                <a:solidFill>
+                  <a:srgbClr val="4D4A45"/>
+                </a:solidFill>
+                <a:latin typeface="Aptos" pitchFamily="34" charset="0"/>
+                <a:ea typeface="Aptos" pitchFamily="34" charset="-122"/>
+                <a:cs typeface="Aptos" pitchFamily="34" charset="-120"/>
+              </a:rPr>
+              <a:t>• OWASP ZAP security scan at each major feature</a:t>
+            </a:r>
+            <a:endParaRPr lang="en-US" sz="1400" dirty="0"/>
+          </a:p>
+        </p:txBody>
+      </p:sp>
+      <p:sp>
+        <p:nvSpPr>
+          <p:cNvPr id="14" name="Shape 12"/>
+          <p:cNvSpPr/>
+          <p:nvPr/>
+        </p:nvSpPr>
+        <p:spPr>
+          <a:xfrm>
+            <a:off x="5989320" y="1783080"/>
+            <a:ext cx="1051560" cy="292608"/>
+          </a:xfrm>
+          <a:prstGeom prst="roundRect">
+            <a:avLst>
+              <a:gd name="adj" fmla="val 25000"/>
+            </a:avLst>
+          </a:prstGeom>
+          <a:solidFill>
+            <a:srgbClr val="6BC5C5"/>
+          </a:solidFill>
+          <a:ln w="12700">
+            <a:solidFill>
+              <a:srgbClr val="6BC5C5">
+                <a:alpha val="0"/>
+              </a:srgbClr>
+            </a:solidFill>
+            <a:prstDash val="solid"/>
+          </a:ln>
+        </p:spPr>
+        <p:txBody>
+          <a:bodyPr/>
+          <a:lstStyle/>
+          <a:p>
+            <a:endParaRPr lang="en-US"/>
+          </a:p>
+        </p:txBody>
+      </p:sp>
+      <p:sp>
+        <p:nvSpPr>
+          <p:cNvPr id="15" name="Text 13"/>
+          <p:cNvSpPr/>
+          <p:nvPr/>
+        </p:nvSpPr>
+        <p:spPr>
+          <a:xfrm>
+            <a:off x="5989320" y="1828800"/>
+            <a:ext cx="1051560" cy="182880"/>
+          </a:xfrm>
+          <a:prstGeom prst="rect">
+            <a:avLst/>
+          </a:prstGeom>
+          <a:noFill/>
+          <a:ln/>
+        </p:spPr>
+        <p:txBody>
+          <a:bodyPr wrap="square" lIns="0" tIns="0" rIns="0" bIns="0" rtlCol="0" anchor="ctr"/>
+          <a:lstStyle/>
+          <a:p>
+            <a:pPr marL="0" indent="0">
+              <a:buNone/>
+            </a:pPr>
+            <a:r>
+              <a:rPr lang="en-US" sz="1100" b="1" dirty="0">
+                <a:solidFill>
+                  <a:srgbClr val="FFFFFF"/>
+                </a:solidFill>
+                <a:latin typeface="Aptos" pitchFamily="34" charset="0"/>
+                <a:ea typeface="Aptos" pitchFamily="34" charset="-122"/>
+                <a:cs typeface="Aptos" pitchFamily="34" charset="-120"/>
+              </a:rPr>
+              <a:t>SOLUTION</a:t>
+            </a:r>
+            <a:endParaRPr lang="en-US" sz="1100" dirty="0"/>
+          </a:p>
+        </p:txBody>
+      </p:sp>
+      <p:sp>
+        <p:nvSpPr>
+          <p:cNvPr id="16" name="Shape 14"/>
+          <p:cNvSpPr/>
+          <p:nvPr/>
+        </p:nvSpPr>
+        <p:spPr>
+          <a:xfrm>
+            <a:off x="5989320" y="2148840"/>
+            <a:ext cx="5303520" cy="3474720"/>
+          </a:xfrm>
+          <a:prstGeom prst="roundRect">
+            <a:avLst>
+              <a:gd name="adj" fmla="val 2105"/>
+            </a:avLst>
+          </a:prstGeom>
+          <a:solidFill>
+            <a:srgbClr val="FCFBF9"/>
+          </a:solidFill>
+          <a:ln w="12700">
+            <a:solidFill>
+              <a:srgbClr val="D8D0C7"/>
+            </a:solidFill>
+            <a:prstDash val="solid"/>
+          </a:ln>
+          <a:effectLst>
+            <a:outerShdw blurRad="19050" dist="6350" dir="2700000" algn="bl" rotWithShape="0">
+              <a:srgbClr val="000000">
+                <a:alpha val="12000"/>
+              </a:srgbClr>
+            </a:outerShdw>
+          </a:effectLst>
+        </p:spPr>
+        <p:txBody>
+          <a:bodyPr/>
+          <a:lstStyle/>
+          <a:p>
+            <a:endParaRPr lang="en-US"/>
+          </a:p>
+        </p:txBody>
+      </p:sp>
+      <p:sp>
+        <p:nvSpPr>
+          <p:cNvPr id="17" name="Text 15"/>
+          <p:cNvSpPr/>
+          <p:nvPr/>
+        </p:nvSpPr>
+        <p:spPr>
+          <a:xfrm>
+            <a:off x="6190488" y="2313432"/>
+            <a:ext cx="4901184" cy="256032"/>
+          </a:xfrm>
+          <a:prstGeom prst="rect">
+            <a:avLst/>
+          </a:prstGeom>
+          <a:noFill/>
+          <a:ln/>
+        </p:spPr>
+        <p:txBody>
+          <a:bodyPr wrap="square" lIns="0" tIns="0" rIns="0" bIns="0" rtlCol="0" anchor="ctr"/>
+          <a:lstStyle/>
+          <a:p>
+            <a:pPr marL="0" indent="0">
+              <a:buNone/>
+            </a:pPr>
+            <a:r>
+              <a:rPr lang="en-US" sz="1800" b="1" dirty="0">
+                <a:solidFill>
+                  <a:srgbClr val="726656"/>
+                </a:solidFill>
+                <a:latin typeface="Aptos Display" pitchFamily="34" charset="0"/>
+                <a:ea typeface="Aptos Display" pitchFamily="34" charset="-122"/>
+                <a:cs typeface="Aptos Display" pitchFamily="34" charset="-120"/>
+              </a:rPr>
+              <a:t>Tech Stack</a:t>
+            </a:r>
+            <a:endParaRPr lang="en-US" sz="1800" dirty="0"/>
+          </a:p>
+        </p:txBody>
+      </p:sp>
+      <p:sp>
+        <p:nvSpPr>
+          <p:cNvPr id="18" name="Text 16"/>
+          <p:cNvSpPr/>
+          <p:nvPr/>
+        </p:nvSpPr>
+        <p:spPr>
+          <a:xfrm>
+            <a:off x="6208776" y="2697480"/>
+            <a:ext cx="4864608" cy="2761488"/>
+          </a:xfrm>
+          <a:prstGeom prst="rect">
+            <a:avLst/>
+          </a:prstGeom>
+          <a:noFill/>
+          <a:ln/>
+        </p:spPr>
+        <p:txBody>
+          <a:bodyPr wrap="square" lIns="254" tIns="254" rIns="254" bIns="254" rtlCol="0" anchor="t"/>
+          <a:lstStyle/>
+          <a:p>
+            <a:pPr marL="0" indent="0">
+              <a:buNone/>
+            </a:pPr>
+            <a:r>
+              <a:rPr lang="en-US" sz="1400" dirty="0">
+                <a:solidFill>
+                  <a:srgbClr val="4D4A45"/>
+                </a:solidFill>
+                <a:latin typeface="Aptos" pitchFamily="34" charset="0"/>
+                <a:ea typeface="Aptos" pitchFamily="34" charset="-122"/>
+                <a:cs typeface="Aptos" pitchFamily="34" charset="-120"/>
+              </a:rPr>
+              <a:t>• FastAPI + Jinja2 web framework (Python 3.13)</a:t>
+            </a:r>
+            <a:endParaRPr lang="en-US" sz="1400" dirty="0"/>
+          </a:p>
+          <a:p>
+            <a:pPr marL="0" indent="0">
+              <a:buNone/>
+            </a:pPr>
+            <a:r>
+              <a:rPr lang="en-US" sz="1400" dirty="0">
+                <a:solidFill>
+                  <a:srgbClr val="4D4A45"/>
+                </a:solidFill>
+                <a:latin typeface="Aptos" pitchFamily="34" charset="0"/>
+                <a:ea typeface="Aptos" pitchFamily="34" charset="-122"/>
+                <a:cs typeface="Aptos" pitchFamily="34" charset="-120"/>
+              </a:rPr>
+              <a:t>• Playwright browser automation + BeautifulSoup4</a:t>
+            </a:r>
+            <a:endParaRPr lang="en-US" sz="1400" dirty="0"/>
+          </a:p>
+          <a:p>
+            <a:pPr marL="0" indent="0">
+              <a:buNone/>
+            </a:pPr>
+            <a:r>
+              <a:rPr lang="en-US" sz="1400" dirty="0">
+                <a:solidFill>
+                  <a:srgbClr val="4D4A45"/>
+                </a:solidFill>
+                <a:latin typeface="Aptos" pitchFamily="34" charset="0"/>
+                <a:ea typeface="Aptos" pitchFamily="34" charset="-122"/>
+                <a:cs typeface="Aptos" pitchFamily="34" charset="-120"/>
+              </a:rPr>
+              <a:t>• MongoDB 7 document store</a:t>
+            </a:r>
+            <a:endParaRPr lang="en-US" sz="1400" dirty="0"/>
+          </a:p>
+          <a:p>
+            <a:pPr marL="0" indent="0">
+              <a:buNone/>
+            </a:pPr>
+            <a:r>
+              <a:rPr lang="en-US" sz="1400" dirty="0">
+                <a:solidFill>
+                  <a:srgbClr val="4D4A45"/>
+                </a:solidFill>
+                <a:latin typeface="Aptos" pitchFamily="34" charset="0"/>
+                <a:ea typeface="Aptos" pitchFamily="34" charset="-122"/>
+                <a:cs typeface="Aptos" pitchFamily="34" charset="-120"/>
+              </a:rPr>
+              <a:t>• Groq API, NVIDIA NIM, Ollama LLM providers</a:t>
+            </a:r>
+            <a:endParaRPr lang="en-US" sz="1400" dirty="0"/>
+          </a:p>
+          <a:p>
+            <a:pPr marL="0" indent="0">
+              <a:buNone/>
+            </a:pPr>
+            <a:r>
+              <a:rPr lang="en-US" sz="1400" dirty="0">
+                <a:solidFill>
+                  <a:srgbClr val="4D4A45"/>
+                </a:solidFill>
+                <a:latin typeface="Aptos" pitchFamily="34" charset="0"/>
+                <a:ea typeface="Aptos" pitchFamily="34" charset="-122"/>
+                <a:cs typeface="Aptos" pitchFamily="34" charset="-120"/>
+              </a:rPr>
+              <a:t>• Docker Compose full-stack containerization</a:t>
+            </a:r>
+            <a:endParaRPr lang="en-US" sz="1400" dirty="0"/>
+          </a:p>
+          <a:p>
+            <a:pPr marL="0" indent="0">
+              <a:buNone/>
+            </a:pPr>
+            <a:r>
+              <a:rPr lang="en-US" sz="1400" dirty="0">
+                <a:solidFill>
+                  <a:srgbClr val="4D4A45"/>
+                </a:solidFill>
+                <a:latin typeface="Aptos" pitchFamily="34" charset="0"/>
+                <a:ea typeface="Aptos" pitchFamily="34" charset="-122"/>
+                <a:cs typeface="Aptos" pitchFamily="34" charset="-120"/>
+              </a:rPr>
+              <a:t>• bcrypt · OWASP ZAP · GitHub</a:t>
+            </a:r>
+            <a:endParaRPr lang="en-US" sz="1400" dirty="0"/>
+          </a:p>
+        </p:txBody>
+      </p:sp>
+      <p:sp>
+        <p:nvSpPr>
+          <p:cNvPr id="25" name="Slide Number Placeholder 0"/>
+          <p:cNvSpPr>
+            <a:spLocks noGrp="1"/>
+          </p:cNvSpPr>
+          <p:nvPr>
+            <p:ph type="sldNum" sz="quarter" idx="4294967295"/>
+          </p:nvPr>
+        </p:nvSpPr>
+        <p:spPr>
+          <a:xfrm>
+            <a:off x="11631168" y="6419088"/>
+            <a:ext cx="201168" cy="182880"/>
+          </a:xfrm>
+          <a:prstGeom prst="rect">
+            <a:avLst/>
+          </a:prstGeom>
+          <a:extLst>
+            <a:ext uri="{C572A759-6A51-4108-AA02-DFA0A04FC94B}">
+              <ma14:wrappingTextBoxFlag xmlns:ma14="http://schemas.microsoft.com/office/mac/drawingml/2011/main" xmlns="" val="0"/>
+            </a:ext>
+          </a:extLst>
+        </p:spPr>
+        <p:txBody>
+          <a:bodyPr/>
+          <a:lstStyle>
+            <a:lvl1pPr>
+              <a:defRPr sz="900">
+                <a:solidFill>
+                  <a:srgbClr val="7A746C"/>
+                </a:solidFill>
+                <a:latin typeface="Aptos"/>
+                <a:ea typeface="Aptos"/>
+                <a:cs typeface="Aptos"/>
+              </a:defRPr>
+            </a:lvl1pPr>
+          </a:lstStyle>
+          <a:p>
+            <a:pPr algn="r"/>
+            <a:fld id="{F7021451-1387-4CA6-816F-3879F97B5CBC}" type="slidenum">
+              <a:rPr lang="en-US" b="0"/>
+              <a:t>8</a:t>
+            </a:fld>
+            <a:endParaRPr lang="en-US"/>
+          </a:p>
+        </p:txBody>
+      </p:sp>
+    </p:spTree>
+  </p:cSld>
+  <p:clrMapOvr>
+    <a:masterClrMapping/>
+  </p:clrMapOvr>
+</p:sld>
+</file>
+
+<file path=ppt/slides/slide9.xml><?xml version="1.0" encoding="utf-8"?>
 <p:sld xmlns:a="http://schemas.openxmlformats.org/drawingml/2006/main" xmlns:r="http://schemas.openxmlformats.org/officeDocument/2006/relationships" xmlns:p="http://schemas.openxmlformats.org/presentationml/2006/main">
   <p:cSld name="Slide 7">
     <p:spTree>
@@ -8937,6 +10770,13 @@
             <a:prstDash val="solid"/>
           </a:ln>
         </p:spPr>
+        <p:txBody>
+          <a:bodyPr/>
+          <a:lstStyle/>
+          <a:p>
+            <a:endParaRPr lang="en-US"/>
+          </a:p>
+        </p:txBody>
       </p:sp>
       <p:sp>
         <p:nvSpPr>
@@ -8964,6 +10804,13 @@
             <a:prstDash val="solid"/>
           </a:ln>
         </p:spPr>
+        <p:txBody>
+          <a:bodyPr/>
+          <a:lstStyle/>
+          <a:p>
+            <a:endParaRPr lang="en-US"/>
+          </a:p>
+        </p:txBody>
       </p:sp>
       <p:sp>
         <p:nvSpPr>
@@ -8991,6 +10838,13 @@
             <a:prstDash val="solid"/>
           </a:ln>
         </p:spPr>
+        <p:txBody>
+          <a:bodyPr/>
+          <a:lstStyle/>
+          <a:p>
+            <a:endParaRPr lang="en-US"/>
+          </a:p>
+        </p:txBody>
       </p:sp>
       <p:sp>
         <p:nvSpPr>
@@ -9018,6 +10872,13 @@
             <a:prstDash val="solid"/>
           </a:ln>
         </p:spPr>
+        <p:txBody>
+          <a:bodyPr/>
+          <a:lstStyle/>
+          <a:p>
+            <a:endParaRPr lang="en-US"/>
+          </a:p>
+        </p:txBody>
       </p:sp>
       <p:sp>
         <p:nvSpPr>
@@ -9040,11 +10901,11 @@
           <a:bodyPr wrap="square" lIns="0" tIns="0" rIns="0" bIns="0" rtlCol="0" anchor="ctr"/>
           <a:lstStyle/>
           <a:p>
-            <a:pPr indent="0" marL="0">
-              <a:buNone/>
-            </a:pPr>
-            <a:r>
-              <a:rPr lang="en-US" sz="2600" dirty="0" b="1">
+            <a:pPr marL="0" indent="0">
+              <a:buNone/>
+            </a:pPr>
+            <a:r>
+              <a:rPr lang="en-US" sz="2600" b="1" dirty="0">
                 <a:solidFill>
                   <a:srgbClr val="17306F"/>
                 </a:solidFill>
@@ -9079,7 +10940,7 @@
           <a:bodyPr wrap="square" lIns="0" tIns="0" rIns="0" bIns="0" rtlCol="0" anchor="ctr"/>
           <a:lstStyle/>
           <a:p>
-            <a:pPr indent="0" marL="0">
+            <a:pPr marL="0" indent="0">
               <a:buNone/>
             </a:pPr>
             <a:r>
@@ -9119,6 +10980,13 @@
             <a:prstDash val="solid"/>
           </a:ln>
         </p:spPr>
+        <p:txBody>
+          <a:bodyPr/>
+          <a:lstStyle/>
+          <a:p>
+            <a:endParaRPr lang="en-US"/>
+          </a:p>
+        </p:txBody>
       </p:sp>
       <p:sp>
         <p:nvSpPr>
@@ -9146,6 +11014,13 @@
             <a:prstDash val="solid"/>
           </a:ln>
         </p:spPr>
+        <p:txBody>
+          <a:bodyPr/>
+          <a:lstStyle/>
+          <a:p>
+            <a:endParaRPr lang="en-US"/>
+          </a:p>
+        </p:txBody>
       </p:sp>
       <p:sp>
         <p:nvSpPr>
@@ -9168,7 +11043,7 @@
           <a:bodyPr wrap="square" lIns="0" tIns="0" rIns="0" bIns="0" rtlCol="0" anchor="ctr"/>
           <a:lstStyle/>
           <a:p>
-            <a:pPr indent="0" marL="0">
+            <a:pPr marL="0" indent="0">
               <a:buNone/>
             </a:pPr>
             <a:r>
@@ -9207,11 +11082,11 @@
           <a:bodyPr wrap="square" lIns="0" tIns="0" rIns="0" bIns="0" rtlCol="0" anchor="ctr"/>
           <a:lstStyle/>
           <a:p>
-            <a:pPr indent="0" marL="0">
-              <a:buNone/>
-            </a:pPr>
-            <a:r>
-              <a:rPr lang="en-US" sz="3600" dirty="0" b="1">
+            <a:pPr marL="0" indent="0">
+              <a:buNone/>
+            </a:pPr>
+            <a:r>
+              <a:rPr lang="en-US" sz="3600" b="1" dirty="0">
                 <a:solidFill>
                   <a:srgbClr val="17306F"/>
                 </a:solidFill>
@@ -9246,7 +11121,7 @@
           <a:bodyPr wrap="square" lIns="0" tIns="0" rIns="0" bIns="0" rtlCol="0" anchor="ctr"/>
           <a:lstStyle/>
           <a:p>
-            <a:pPr indent="0" marL="0">
+            <a:pPr marL="0" indent="0">
               <a:buNone/>
             </a:pPr>
             <a:r>
@@ -9290,6 +11165,13 @@
             <a:prstDash val="solid"/>
           </a:ln>
         </p:spPr>
+        <p:txBody>
+          <a:bodyPr/>
+          <a:lstStyle/>
+          <a:p>
+            <a:endParaRPr lang="en-US"/>
+          </a:p>
+        </p:txBody>
       </p:sp>
       <p:sp>
         <p:nvSpPr>
@@ -9312,7 +11194,7 @@
           <a:bodyPr wrap="square" lIns="0" tIns="0" rIns="0" bIns="0" rtlCol="0" anchor="ctr"/>
           <a:lstStyle/>
           <a:p>
-            <a:pPr indent="0" marL="0">
+            <a:pPr marL="0" indent="0">
               <a:buNone/>
             </a:pPr>
             <a:r>
@@ -9351,11 +11233,11 @@
           <a:bodyPr wrap="square" lIns="0" tIns="0" rIns="0" bIns="0" rtlCol="0" anchor="ctr"/>
           <a:lstStyle/>
           <a:p>
-            <a:pPr indent="0" marL="0">
-              <a:buNone/>
-            </a:pPr>
-            <a:r>
-              <a:rPr lang="en-US" sz="3600" dirty="0" b="1">
+            <a:pPr marL="0" indent="0">
+              <a:buNone/>
+            </a:pPr>
+            <a:r>
+              <a:rPr lang="en-US" sz="3600" b="1" dirty="0">
                 <a:solidFill>
                   <a:srgbClr val="17306F"/>
                 </a:solidFill>
@@ -9390,7 +11272,7 @@
           <a:bodyPr wrap="square" lIns="0" tIns="0" rIns="0" bIns="0" rtlCol="0" anchor="ctr"/>
           <a:lstStyle/>
           <a:p>
-            <a:pPr indent="0" marL="0">
+            <a:pPr marL="0" indent="0">
               <a:buNone/>
             </a:pPr>
             <a:r>
@@ -9434,6 +11316,13 @@
             <a:prstDash val="solid"/>
           </a:ln>
         </p:spPr>
+        <p:txBody>
+          <a:bodyPr/>
+          <a:lstStyle/>
+          <a:p>
+            <a:endParaRPr lang="en-US"/>
+          </a:p>
+        </p:txBody>
       </p:sp>
       <p:sp>
         <p:nvSpPr>
@@ -9456,7 +11345,7 @@
           <a:bodyPr wrap="square" lIns="0" tIns="0" rIns="0" bIns="0" rtlCol="0" anchor="ctr"/>
           <a:lstStyle/>
           <a:p>
-            <a:pPr indent="0" marL="0">
+            <a:pPr marL="0" indent="0">
               <a:buNone/>
             </a:pPr>
             <a:r>
@@ -9495,11 +11384,11 @@
           <a:bodyPr wrap="square" lIns="0" tIns="0" rIns="0" bIns="0" rtlCol="0" anchor="ctr"/>
           <a:lstStyle/>
           <a:p>
-            <a:pPr indent="0" marL="0">
-              <a:buNone/>
-            </a:pPr>
-            <a:r>
-              <a:rPr lang="en-US" sz="3600" dirty="0" b="1">
+            <a:pPr marL="0" indent="0">
+              <a:buNone/>
+            </a:pPr>
+            <a:r>
+              <a:rPr lang="en-US" sz="3600" b="1" dirty="0">
                 <a:solidFill>
                   <a:srgbClr val="17306F"/>
                 </a:solidFill>
@@ -9534,7 +11423,7 @@
           <a:bodyPr wrap="square" lIns="0" tIns="0" rIns="0" bIns="0" rtlCol="0" anchor="ctr"/>
           <a:lstStyle/>
           <a:p>
-            <a:pPr indent="0" marL="0">
+            <a:pPr marL="0" indent="0">
               <a:buNone/>
             </a:pPr>
             <a:r>
@@ -9578,13 +11467,20 @@
             <a:prstDash val="solid"/>
           </a:ln>
           <a:effectLst>
-            <a:outerShdw sx="100000" sy="100000" kx="0" ky="0" algn="bl" rotWithShape="0" blurRad="19050" dist="6350" dir="2700000">
+            <a:outerShdw blurRad="19050" dist="6350" dir="2700000" algn="bl" rotWithShape="0">
               <a:srgbClr val="000000">
                 <a:alpha val="12000"/>
               </a:srgbClr>
             </a:outerShdw>
           </a:effectLst>
         </p:spPr>
+        <p:txBody>
+          <a:bodyPr/>
+          <a:lstStyle/>
+          <a:p>
+            <a:endParaRPr lang="en-US"/>
+          </a:p>
+        </p:txBody>
       </p:sp>
       <p:sp>
         <p:nvSpPr>
@@ -9607,11 +11503,11 @@
           <a:bodyPr wrap="square" lIns="0" tIns="0" rIns="0" bIns="0" rtlCol="0" anchor="ctr"/>
           <a:lstStyle/>
           <a:p>
-            <a:pPr indent="0" marL="0">
-              <a:buNone/>
-            </a:pPr>
-            <a:r>
-              <a:rPr lang="en-US" sz="1400" dirty="0" b="1">
+            <a:pPr marL="0" indent="0">
+              <a:buNone/>
+            </a:pPr>
+            <a:r>
+              <a:rPr lang="en-US" sz="1400" b="1" dirty="0">
                 <a:solidFill>
                   <a:srgbClr val="726656"/>
                 </a:solidFill>
@@ -9646,7 +11542,7 @@
           <a:bodyPr wrap="square" lIns="254" tIns="254" rIns="254" bIns="254" rtlCol="0" anchor="t"/>
           <a:lstStyle/>
           <a:p>
-            <a:pPr indent="0" marL="0">
+            <a:pPr marL="0" indent="0">
               <a:buNone/>
             </a:pPr>
             <a:r>
@@ -9663,7 +11559,7 @@
             <a:endParaRPr lang="en-US" sz="1400" dirty="0"/>
           </a:p>
           <a:p>
-            <a:pPr indent="0" marL="0">
+            <a:pPr marL="0" indent="0">
               <a:buNone/>
             </a:pPr>
             <a:r>
@@ -9680,7 +11576,7 @@
             <a:endParaRPr lang="en-US" sz="1400" dirty="0"/>
           </a:p>
           <a:p>
-            <a:pPr indent="0" marL="0">
+            <a:pPr marL="0" indent="0">
               <a:buNone/>
             </a:pPr>
             <a:r>
@@ -9697,7 +11593,7 @@
             <a:endParaRPr lang="en-US" sz="1400" dirty="0"/>
           </a:p>
           <a:p>
-            <a:pPr indent="0" marL="0">
+            <a:pPr marL="0" indent="0">
               <a:buNone/>
             </a:pPr>
             <a:r>
@@ -9714,7 +11610,7 @@
             <a:endParaRPr lang="en-US" sz="1400" dirty="0"/>
           </a:p>
           <a:p>
-            <a:pPr indent="0" marL="0">
+            <a:pPr marL="0" indent="0">
               <a:buNone/>
             </a:pPr>
             <a:r>
@@ -9731,7 +11627,7 @@
             <a:endParaRPr lang="en-US" sz="1400" dirty="0"/>
           </a:p>
           <a:p>
-            <a:pPr indent="0" marL="0">
+            <a:pPr marL="0" indent="0">
               <a:buNone/>
             </a:pPr>
             <a:r>
@@ -9775,13 +11671,20 @@
             <a:prstDash val="solid"/>
           </a:ln>
           <a:effectLst>
-            <a:outerShdw sx="100000" sy="100000" kx="0" ky="0" algn="bl" rotWithShape="0" blurRad="19050" dist="6350" dir="2700000">
+            <a:outerShdw blurRad="19050" dist="6350" dir="2700000" algn="bl" rotWithShape="0">
               <a:srgbClr val="000000">
                 <a:alpha val="12000"/>
               </a:srgbClr>
             </a:outerShdw>
           </a:effectLst>
         </p:spPr>
+        <p:txBody>
+          <a:bodyPr/>
+          <a:lstStyle/>
+          <a:p>
+            <a:endParaRPr lang="en-US"/>
+          </a:p>
+        </p:txBody>
       </p:sp>
       <p:sp>
         <p:nvSpPr>
@@ -9804,11 +11707,11 @@
           <a:bodyPr wrap="square" lIns="0" tIns="0" rIns="0" bIns="0" rtlCol="0" anchor="ctr"/>
           <a:lstStyle/>
           <a:p>
-            <a:pPr indent="0" marL="0">
-              <a:buNone/>
-            </a:pPr>
-            <a:r>
-              <a:rPr lang="en-US" sz="1400" dirty="0" b="1">
+            <a:pPr marL="0" indent="0">
+              <a:buNone/>
+            </a:pPr>
+            <a:r>
+              <a:rPr lang="en-US" sz="1400" b="1" dirty="0">
                 <a:solidFill>
                   <a:srgbClr val="726656"/>
                 </a:solidFill>
@@ -9843,7 +11746,7 @@
           <a:bodyPr wrap="square" lIns="254" tIns="254" rIns="254" bIns="254" rtlCol="0" anchor="t"/>
           <a:lstStyle/>
           <a:p>
-            <a:pPr indent="0" marL="0">
+            <a:pPr marL="0" indent="0">
               <a:buNone/>
             </a:pPr>
             <a:r>
@@ -9860,7 +11763,7 @@
             <a:endParaRPr lang="en-US" sz="1400" dirty="0"/>
           </a:p>
           <a:p>
-            <a:pPr indent="0" marL="0">
+            <a:pPr marL="0" indent="0">
               <a:buNone/>
             </a:pPr>
             <a:r>
@@ -9877,7 +11780,7 @@
             <a:endParaRPr lang="en-US" sz="1400" dirty="0"/>
           </a:p>
           <a:p>
-            <a:pPr indent="0" marL="0">
+            <a:pPr marL="0" indent="0">
               <a:buNone/>
             </a:pPr>
             <a:r>
@@ -9894,7 +11797,7 @@
             <a:endParaRPr lang="en-US" sz="1400" dirty="0"/>
           </a:p>
           <a:p>
-            <a:pPr indent="0" marL="0">
+            <a:pPr marL="0" indent="0">
               <a:buNone/>
             </a:pPr>
             <a:r>
@@ -9914,7 +11817,7 @@
       </p:sp>
       <p:sp>
         <p:nvSpPr>
-          <p:cNvPr id="25" name="Slide Number Placeholder 0"/>
+          <p:cNvPr id="27" name="Slide Number Placeholder 0"/>
           <p:cNvSpPr>
             <a:spLocks noGrp="1"/>
           </p:cNvSpPr>
@@ -9932,7 +11835,7 @@
           </a:prstGeom>
           <a:extLst>
             <a:ext uri="{C572A759-6A51-4108-AA02-DFA0A04FC94B}">
-              <ma14:wrappingTextBoxFlag xmlns:ma14="http://schemas.microsoft.com/office/mac/drawingml/2011/main" val="0"/>
+              <ma14:wrappingTextBoxFlag xmlns:ma14="http://schemas.microsoft.com/office/mac/drawingml/2011/main" xmlns="" val="0"/>
             </a:ext>
           </a:extLst>
         </p:spPr>
@@ -9953,1434 +11856,7 @@
           <a:p>
             <a:pPr algn="r"/>
             <a:fld id="{F7021451-1387-4CA6-816F-3879F97B5CBC}" type="slidenum">
-              <a:rPr b="0" lang="en-US"/>
-              <a:t>7</a:t>
-            </a:fld>
-            <a:endParaRPr lang="en-US"/>
-          </a:p>
-        </p:txBody>
-      </p:sp>
-    </p:spTree>
-  </p:cSld>
-  <p:clrMapOvr>
-    <a:masterClrMapping/>
-  </p:clrMapOvr>
-</p:sld>
-</file>
-
-<file path=ppt/slides/slide8.xml><?xml version="1.0" encoding="utf-8"?>
-<p:sld xmlns:a="http://schemas.openxmlformats.org/drawingml/2006/main" xmlns:r="http://schemas.openxmlformats.org/officeDocument/2006/relationships" xmlns:p="http://schemas.openxmlformats.org/presentationml/2006/main">
-  <p:cSld name="Slide 8">
-    <p:spTree>
-      <p:nvGrpSpPr>
-        <p:cNvPr id="1" name=""/>
-        <p:cNvGrpSpPr/>
-        <p:nvPr/>
-      </p:nvGrpSpPr>
-      <p:grpSpPr>
-        <a:xfrm>
-          <a:off x="0" y="0"/>
-          <a:ext cx="0" cy="0"/>
-          <a:chOff x="0" y="0"/>
-          <a:chExt cx="0" cy="0"/>
-        </a:xfrm>
-      </p:grpSpPr>
-      <p:sp>
-        <p:nvSpPr>
-          <p:cNvPr id="2" name="Shape 0"/>
-          <p:cNvSpPr/>
-          <p:nvPr/>
-        </p:nvSpPr>
-        <p:spPr>
-          <a:xfrm>
-            <a:off x="502920" y="347472"/>
-            <a:ext cx="914400" cy="73152"/>
-          </a:xfrm>
-          <a:prstGeom prst="rect">
-            <a:avLst/>
-          </a:prstGeom>
-          <a:solidFill>
-            <a:srgbClr val="E97886"/>
-          </a:solidFill>
-          <a:ln w="12700">
-            <a:solidFill>
-              <a:srgbClr val="E97886">
-                <a:alpha val="0"/>
-              </a:srgbClr>
-            </a:solidFill>
-            <a:prstDash val="solid"/>
-          </a:ln>
-        </p:spPr>
-      </p:sp>
-      <p:sp>
-        <p:nvSpPr>
-          <p:cNvPr id="3" name="Shape 1"/>
-          <p:cNvSpPr/>
-          <p:nvPr/>
-        </p:nvSpPr>
-        <p:spPr>
-          <a:xfrm>
-            <a:off x="1481328" y="347472"/>
-            <a:ext cx="1325880" cy="73152"/>
-          </a:xfrm>
-          <a:prstGeom prst="rect">
-            <a:avLst/>
-          </a:prstGeom>
-          <a:solidFill>
-            <a:srgbClr val="E8D0D0"/>
-          </a:solidFill>
-          <a:ln w="12700">
-            <a:solidFill>
-              <a:srgbClr val="E8D0D0">
-                <a:alpha val="0"/>
-              </a:srgbClr>
-            </a:solidFill>
-            <a:prstDash val="solid"/>
-          </a:ln>
-        </p:spPr>
-      </p:sp>
-      <p:sp>
-        <p:nvSpPr>
-          <p:cNvPr id="4" name="Shape 2"/>
-          <p:cNvSpPr/>
-          <p:nvPr/>
-        </p:nvSpPr>
-        <p:spPr>
-          <a:xfrm>
-            <a:off x="2816352" y="347472"/>
-            <a:ext cx="1554480" cy="73152"/>
-          </a:xfrm>
-          <a:prstGeom prst="rect">
-            <a:avLst/>
-          </a:prstGeom>
-          <a:solidFill>
-            <a:srgbClr val="D65F63"/>
-          </a:solidFill>
-          <a:ln w="12700">
-            <a:solidFill>
-              <a:srgbClr val="D65F63">
-                <a:alpha val="0"/>
-              </a:srgbClr>
-            </a:solidFill>
-            <a:prstDash val="solid"/>
-          </a:ln>
-        </p:spPr>
-      </p:sp>
-      <p:sp>
-        <p:nvSpPr>
-          <p:cNvPr id="5" name="Shape 3"/>
-          <p:cNvSpPr/>
-          <p:nvPr/>
-        </p:nvSpPr>
-        <p:spPr>
-          <a:xfrm>
-            <a:off x="4379976" y="347472"/>
-            <a:ext cx="1097280" cy="73152"/>
-          </a:xfrm>
-          <a:prstGeom prst="rect">
-            <a:avLst/>
-          </a:prstGeom>
-          <a:solidFill>
-            <a:srgbClr val="C74642"/>
-          </a:solidFill>
-          <a:ln w="12700">
-            <a:solidFill>
-              <a:srgbClr val="C74642">
-                <a:alpha val="0"/>
-              </a:srgbClr>
-            </a:solidFill>
-            <a:prstDash val="solid"/>
-          </a:ln>
-        </p:spPr>
-      </p:sp>
-      <p:sp>
-        <p:nvSpPr>
-          <p:cNvPr id="6" name="Text 4"/>
-          <p:cNvSpPr/>
-          <p:nvPr/>
-        </p:nvSpPr>
-        <p:spPr>
-          <a:xfrm>
-            <a:off x="749808" y="731520"/>
-            <a:ext cx="7223760" cy="411480"/>
-          </a:xfrm>
-          <a:prstGeom prst="rect">
-            <a:avLst/>
-          </a:prstGeom>
-          <a:noFill/>
-          <a:ln/>
-        </p:spPr>
-        <p:txBody>
-          <a:bodyPr wrap="square" lIns="0" tIns="0" rIns="0" bIns="0" rtlCol="0" anchor="ctr"/>
-          <a:lstStyle/>
-          <a:p>
-            <a:pPr indent="0" marL="0">
-              <a:buNone/>
-            </a:pPr>
-            <a:r>
-              <a:rPr lang="en-US" sz="2600" dirty="0" b="1">
-                <a:solidFill>
-                  <a:srgbClr val="17306F"/>
-                </a:solidFill>
-                <a:latin typeface="Aptos Display" pitchFamily="34" charset="0"/>
-                <a:ea typeface="Aptos Display" pitchFamily="34" charset="-122"/>
-                <a:cs typeface="Aptos Display" pitchFamily="34" charset="-120"/>
-              </a:rPr>
-              <a:t>Meet the Team — Vibe Coders</a:t>
-            </a:r>
-            <a:endParaRPr lang="en-US" sz="2600" dirty="0"/>
-          </a:p>
-        </p:txBody>
-      </p:sp>
-      <p:sp>
-        <p:nvSpPr>
-          <p:cNvPr id="7" name="Text 5"/>
-          <p:cNvSpPr/>
-          <p:nvPr/>
-        </p:nvSpPr>
-        <p:spPr>
-          <a:xfrm>
-            <a:off x="768096" y="1143000"/>
-            <a:ext cx="6766560" cy="274320"/>
-          </a:xfrm>
-          <a:prstGeom prst="rect">
-            <a:avLst/>
-          </a:prstGeom>
-          <a:noFill/>
-          <a:ln/>
-        </p:spPr>
-        <p:txBody>
-          <a:bodyPr wrap="square" lIns="0" tIns="0" rIns="0" bIns="0" rtlCol="0" anchor="ctr"/>
-          <a:lstStyle/>
-          <a:p>
-            <a:pPr indent="0" marL="0">
-              <a:buNone/>
-            </a:pPr>
-            <a:r>
-              <a:rPr lang="en-US" sz="1200" dirty="0">
-                <a:solidFill>
-                  <a:srgbClr val="7A746C"/>
-                </a:solidFill>
-                <a:latin typeface="Aptos" pitchFamily="34" charset="0"/>
-                <a:ea typeface="Aptos" pitchFamily="34" charset="-122"/>
-                <a:cs typeface="Aptos" pitchFamily="34" charset="-120"/>
-              </a:rPr>
-              <a:t>CIS 497 Senior Design, Spring 2026  |  Client: Doug Greene, Fivos Health</a:t>
-            </a:r>
-            <a:endParaRPr lang="en-US" sz="1200" dirty="0"/>
-          </a:p>
-        </p:txBody>
-      </p:sp>
-      <p:sp>
-        <p:nvSpPr>
-          <p:cNvPr id="8" name="Shape 6"/>
-          <p:cNvSpPr/>
-          <p:nvPr/>
-        </p:nvSpPr>
-        <p:spPr>
-          <a:xfrm>
-            <a:off x="749808" y="1490472"/>
-            <a:ext cx="10698480" cy="0"/>
-          </a:xfrm>
-          <a:prstGeom prst="line">
-            <a:avLst/>
-          </a:prstGeom>
-          <a:noFill/>
-          <a:ln w="12700">
-            <a:solidFill>
-              <a:srgbClr val="D8D0C7"/>
-            </a:solidFill>
-            <a:prstDash val="solid"/>
-          </a:ln>
-        </p:spPr>
-      </p:sp>
-      <p:sp>
-        <p:nvSpPr>
-          <p:cNvPr id="9" name="Shape 7"/>
-          <p:cNvSpPr/>
-          <p:nvPr/>
-        </p:nvSpPr>
-        <p:spPr>
-          <a:xfrm>
-            <a:off x="960120" y="1920240"/>
-            <a:ext cx="960120" cy="960120"/>
-          </a:xfrm>
-          <a:prstGeom prst="ellipse">
-            <a:avLst/>
-          </a:prstGeom>
-          <a:solidFill>
-            <a:srgbClr val="FBFAF8"/>
-          </a:solidFill>
-          <a:ln w="12700">
-            <a:solidFill>
-              <a:srgbClr val="6BC5C5"/>
-            </a:solidFill>
-            <a:prstDash val="solid"/>
-          </a:ln>
-        </p:spPr>
-      </p:sp>
-      <p:sp>
-        <p:nvSpPr>
-          <p:cNvPr id="10" name="Text 8"/>
-          <p:cNvSpPr/>
-          <p:nvPr/>
-        </p:nvSpPr>
-        <p:spPr>
-          <a:xfrm>
-            <a:off x="731520" y="2999232"/>
-            <a:ext cx="1417320" cy="228600"/>
-          </a:xfrm>
-          <a:prstGeom prst="rect">
-            <a:avLst/>
-          </a:prstGeom>
-          <a:noFill/>
-          <a:ln/>
-        </p:spPr>
-        <p:txBody>
-          <a:bodyPr wrap="square" lIns="0" tIns="0" rIns="0" bIns="0" rtlCol="0" anchor="ctr"/>
-          <a:lstStyle/>
-          <a:p>
-            <a:pPr indent="0" marL="0">
-              <a:buNone/>
-            </a:pPr>
-            <a:r>
-              <a:rPr lang="en-US" sz="1600" dirty="0" b="1">
-                <a:solidFill>
-                  <a:srgbClr val="17306F"/>
-                </a:solidFill>
-                <a:latin typeface="Aptos Display" pitchFamily="34" charset="0"/>
-                <a:ea typeface="Aptos Display" pitchFamily="34" charset="-122"/>
-                <a:cs typeface="Aptos Display" pitchFamily="34" charset="-120"/>
-              </a:rPr>
-              <a:t>Jonathan</a:t>
-            </a:r>
-            <a:endParaRPr lang="en-US" sz="1600" dirty="0"/>
-          </a:p>
-        </p:txBody>
-      </p:sp>
-      <p:sp>
-        <p:nvSpPr>
-          <p:cNvPr id="11" name="Text 9"/>
-          <p:cNvSpPr/>
-          <p:nvPr/>
-        </p:nvSpPr>
-        <p:spPr>
-          <a:xfrm>
-            <a:off x="640080" y="3246120"/>
-            <a:ext cx="1600200" cy="182880"/>
-          </a:xfrm>
-          <a:prstGeom prst="rect">
-            <a:avLst/>
-          </a:prstGeom>
-          <a:noFill/>
-          <a:ln/>
-        </p:spPr>
-        <p:txBody>
-          <a:bodyPr wrap="square" lIns="0" tIns="0" rIns="0" bIns="0" rtlCol="0" anchor="ctr"/>
-          <a:lstStyle/>
-          <a:p>
-            <a:pPr indent="0" marL="0">
-              <a:buNone/>
-            </a:pPr>
-            <a:r>
-              <a:rPr lang="en-US" sz="1200" dirty="0">
-                <a:solidFill>
-                  <a:srgbClr val="726656"/>
-                </a:solidFill>
-                <a:latin typeface="Aptos" pitchFamily="34" charset="0"/>
-                <a:ea typeface="Aptos" pitchFamily="34" charset="-122"/>
-                <a:cs typeface="Aptos" pitchFamily="34" charset="-120"/>
-              </a:rPr>
-              <a:t>Orchestration &amp; Runner</a:t>
-            </a:r>
-            <a:endParaRPr lang="en-US" sz="1200" dirty="0"/>
-          </a:p>
-        </p:txBody>
-      </p:sp>
-      <p:sp>
-        <p:nvSpPr>
-          <p:cNvPr id="12" name="Shape 10"/>
-          <p:cNvSpPr/>
-          <p:nvPr/>
-        </p:nvSpPr>
-        <p:spPr>
-          <a:xfrm>
-            <a:off x="3886200" y="1920240"/>
-            <a:ext cx="960120" cy="960120"/>
-          </a:xfrm>
-          <a:prstGeom prst="ellipse">
-            <a:avLst/>
-          </a:prstGeom>
-          <a:solidFill>
-            <a:srgbClr val="FBFAF8"/>
-          </a:solidFill>
-          <a:ln w="12700">
-            <a:solidFill>
-              <a:srgbClr val="6BC5C5"/>
-            </a:solidFill>
-            <a:prstDash val="solid"/>
-          </a:ln>
-        </p:spPr>
-      </p:sp>
-      <p:sp>
-        <p:nvSpPr>
-          <p:cNvPr id="13" name="Text 11"/>
-          <p:cNvSpPr/>
-          <p:nvPr/>
-        </p:nvSpPr>
-        <p:spPr>
-          <a:xfrm>
-            <a:off x="3657600" y="2999232"/>
-            <a:ext cx="1417320" cy="228600"/>
-          </a:xfrm>
-          <a:prstGeom prst="rect">
-            <a:avLst/>
-          </a:prstGeom>
-          <a:noFill/>
-          <a:ln/>
-        </p:spPr>
-        <p:txBody>
-          <a:bodyPr wrap="square" lIns="0" tIns="0" rIns="0" bIns="0" rtlCol="0" anchor="ctr"/>
-          <a:lstStyle/>
-          <a:p>
-            <a:pPr indent="0" marL="0">
-              <a:buNone/>
-            </a:pPr>
-            <a:r>
-              <a:rPr lang="en-US" sz="1600" dirty="0" b="1">
-                <a:solidFill>
-                  <a:srgbClr val="17306F"/>
-                </a:solidFill>
-                <a:latin typeface="Aptos Display" pitchFamily="34" charset="0"/>
-                <a:ea typeface="Aptos Display" pitchFamily="34" charset="-122"/>
-                <a:cs typeface="Aptos Display" pitchFamily="34" charset="-120"/>
-              </a:rPr>
-              <a:t>Wyatt</a:t>
-            </a:r>
-            <a:endParaRPr lang="en-US" sz="1600" dirty="0"/>
-          </a:p>
-        </p:txBody>
-      </p:sp>
-      <p:sp>
-        <p:nvSpPr>
-          <p:cNvPr id="14" name="Text 12"/>
-          <p:cNvSpPr/>
-          <p:nvPr/>
-        </p:nvSpPr>
-        <p:spPr>
-          <a:xfrm>
-            <a:off x="3566160" y="3246120"/>
-            <a:ext cx="1600200" cy="182880"/>
-          </a:xfrm>
-          <a:prstGeom prst="rect">
-            <a:avLst/>
-          </a:prstGeom>
-          <a:noFill/>
-          <a:ln/>
-        </p:spPr>
-        <p:txBody>
-          <a:bodyPr wrap="square" lIns="0" tIns="0" rIns="0" bIns="0" rtlCol="0" anchor="ctr"/>
-          <a:lstStyle/>
-          <a:p>
-            <a:pPr indent="0" marL="0">
-              <a:buNone/>
-            </a:pPr>
-            <a:r>
-              <a:rPr lang="en-US" sz="1200" dirty="0">
-                <a:solidFill>
-                  <a:srgbClr val="726656"/>
-                </a:solidFill>
-                <a:latin typeface="Aptos" pitchFamily="34" charset="0"/>
-                <a:ea typeface="Aptos" pitchFamily="34" charset="-122"/>
-                <a:cs typeface="Aptos" pitchFamily="34" charset="-120"/>
-              </a:rPr>
-              <a:t>Web Scraping (Playwright)</a:t>
-            </a:r>
-            <a:endParaRPr lang="en-US" sz="1200" dirty="0"/>
-          </a:p>
-        </p:txBody>
-      </p:sp>
-      <p:sp>
-        <p:nvSpPr>
-          <p:cNvPr id="15" name="Shape 13"/>
-          <p:cNvSpPr/>
-          <p:nvPr/>
-        </p:nvSpPr>
-        <p:spPr>
-          <a:xfrm>
-            <a:off x="6812280" y="1920240"/>
-            <a:ext cx="960120" cy="960120"/>
-          </a:xfrm>
-          <a:prstGeom prst="ellipse">
-            <a:avLst/>
-          </a:prstGeom>
-          <a:solidFill>
-            <a:srgbClr val="FBFAF8"/>
-          </a:solidFill>
-          <a:ln w="12700">
-            <a:solidFill>
-              <a:srgbClr val="6BC5C5"/>
-            </a:solidFill>
-            <a:prstDash val="solid"/>
-          </a:ln>
-        </p:spPr>
-      </p:sp>
-      <p:sp>
-        <p:nvSpPr>
-          <p:cNvPr id="16" name="Text 14"/>
-          <p:cNvSpPr/>
-          <p:nvPr/>
-        </p:nvSpPr>
-        <p:spPr>
-          <a:xfrm>
-            <a:off x="6583680" y="2999232"/>
-            <a:ext cx="1417320" cy="228600"/>
-          </a:xfrm>
-          <a:prstGeom prst="rect">
-            <a:avLst/>
-          </a:prstGeom>
-          <a:noFill/>
-          <a:ln/>
-        </p:spPr>
-        <p:txBody>
-          <a:bodyPr wrap="square" lIns="0" tIns="0" rIns="0" bIns="0" rtlCol="0" anchor="ctr"/>
-          <a:lstStyle/>
-          <a:p>
-            <a:pPr indent="0" marL="0">
-              <a:buNone/>
-            </a:pPr>
-            <a:r>
-              <a:rPr lang="en-US" sz="1600" dirty="0" b="1">
-                <a:solidFill>
-                  <a:srgbClr val="17306F"/>
-                </a:solidFill>
-                <a:latin typeface="Aptos Display" pitchFamily="34" charset="0"/>
-                <a:ea typeface="Aptos Display" pitchFamily="34" charset="-122"/>
-                <a:cs typeface="Aptos Display" pitchFamily="34" charset="-120"/>
-              </a:rPr>
-              <a:t>Ryan</a:t>
-            </a:r>
-            <a:endParaRPr lang="en-US" sz="1600" dirty="0"/>
-          </a:p>
-        </p:txBody>
-      </p:sp>
-      <p:sp>
-        <p:nvSpPr>
-          <p:cNvPr id="17" name="Text 15"/>
-          <p:cNvSpPr/>
-          <p:nvPr/>
-        </p:nvSpPr>
-        <p:spPr>
-          <a:xfrm>
-            <a:off x="6492240" y="3246120"/>
-            <a:ext cx="1600200" cy="182880"/>
-          </a:xfrm>
-          <a:prstGeom prst="rect">
-            <a:avLst/>
-          </a:prstGeom>
-          <a:noFill/>
-          <a:ln/>
-        </p:spPr>
-        <p:txBody>
-          <a:bodyPr wrap="square" lIns="0" tIns="0" rIns="0" bIns="0" rtlCol="0" anchor="ctr"/>
-          <a:lstStyle/>
-          <a:p>
-            <a:pPr indent="0" marL="0">
-              <a:buNone/>
-            </a:pPr>
-            <a:r>
-              <a:rPr lang="en-US" sz="1200" dirty="0">
-                <a:solidFill>
-                  <a:srgbClr val="726656"/>
-                </a:solidFill>
-                <a:latin typeface="Aptos" pitchFamily="34" charset="0"/>
-                <a:ea typeface="Aptos" pitchFamily="34" charset="-122"/>
-                <a:cs typeface="Aptos" pitchFamily="34" charset="-120"/>
-              </a:rPr>
-              <a:t>Site Adapters (YAML)</a:t>
-            </a:r>
-            <a:endParaRPr lang="en-US" sz="1200" dirty="0"/>
-          </a:p>
-        </p:txBody>
-      </p:sp>
-      <p:sp>
-        <p:nvSpPr>
-          <p:cNvPr id="18" name="Shape 16"/>
-          <p:cNvSpPr/>
-          <p:nvPr/>
-        </p:nvSpPr>
-        <p:spPr>
-          <a:xfrm>
-            <a:off x="9738360" y="1920240"/>
-            <a:ext cx="960120" cy="960120"/>
-          </a:xfrm>
-          <a:prstGeom prst="ellipse">
-            <a:avLst/>
-          </a:prstGeom>
-          <a:solidFill>
-            <a:srgbClr val="FBFAF8"/>
-          </a:solidFill>
-          <a:ln w="12700">
-            <a:solidFill>
-              <a:srgbClr val="C74642"/>
-            </a:solidFill>
-            <a:prstDash val="solid"/>
-          </a:ln>
-        </p:spPr>
-      </p:sp>
-      <p:sp>
-        <p:nvSpPr>
-          <p:cNvPr id="19" name="Text 17"/>
-          <p:cNvSpPr/>
-          <p:nvPr/>
-        </p:nvSpPr>
-        <p:spPr>
-          <a:xfrm>
-            <a:off x="9509760" y="2999232"/>
-            <a:ext cx="1417320" cy="228600"/>
-          </a:xfrm>
-          <a:prstGeom prst="rect">
-            <a:avLst/>
-          </a:prstGeom>
-          <a:noFill/>
-          <a:ln/>
-        </p:spPr>
-        <p:txBody>
-          <a:bodyPr wrap="square" lIns="0" tIns="0" rIns="0" bIns="0" rtlCol="0" anchor="ctr"/>
-          <a:lstStyle/>
-          <a:p>
-            <a:pPr indent="0" marL="0">
-              <a:buNone/>
-            </a:pPr>
-            <a:r>
-              <a:rPr lang="en-US" sz="1600" dirty="0" b="1">
-                <a:solidFill>
-                  <a:srgbClr val="17306F"/>
-                </a:solidFill>
-                <a:latin typeface="Aptos Display" pitchFamily="34" charset="0"/>
-                <a:ea typeface="Aptos Display" pitchFamily="34" charset="-122"/>
-                <a:cs typeface="Aptos Display" pitchFamily="34" charset="-120"/>
-              </a:rPr>
-              <a:t>Jason</a:t>
-            </a:r>
-            <a:endParaRPr lang="en-US" sz="1600" dirty="0"/>
-          </a:p>
-        </p:txBody>
-      </p:sp>
-      <p:sp>
-        <p:nvSpPr>
-          <p:cNvPr id="20" name="Text 18"/>
-          <p:cNvSpPr/>
-          <p:nvPr/>
-        </p:nvSpPr>
-        <p:spPr>
-          <a:xfrm>
-            <a:off x="9418320" y="3246120"/>
-            <a:ext cx="1600200" cy="182880"/>
-          </a:xfrm>
-          <a:prstGeom prst="rect">
-            <a:avLst/>
-          </a:prstGeom>
-          <a:noFill/>
-          <a:ln/>
-        </p:spPr>
-        <p:txBody>
-          <a:bodyPr wrap="square" lIns="0" tIns="0" rIns="0" bIns="0" rtlCol="0" anchor="ctr"/>
-          <a:lstStyle/>
-          <a:p>
-            <a:pPr indent="0" marL="0">
-              <a:buNone/>
-            </a:pPr>
-            <a:r>
-              <a:rPr lang="en-US" sz="1200" dirty="0">
-                <a:solidFill>
-                  <a:srgbClr val="726656"/>
-                </a:solidFill>
-                <a:latin typeface="Aptos" pitchFamily="34" charset="0"/>
-                <a:ea typeface="Aptos" pitchFamily="34" charset="-122"/>
-                <a:cs typeface="Aptos" pitchFamily="34" charset="-120"/>
-              </a:rPr>
-              <a:t>Pipeline + Security</a:t>
-            </a:r>
-            <a:endParaRPr lang="en-US" sz="1200" dirty="0"/>
-          </a:p>
-        </p:txBody>
-      </p:sp>
-      <p:sp>
-        <p:nvSpPr>
-          <p:cNvPr id="21" name="Shape 19"/>
-          <p:cNvSpPr/>
-          <p:nvPr/>
-        </p:nvSpPr>
-        <p:spPr>
-          <a:xfrm>
-            <a:off x="2423160" y="3977640"/>
-            <a:ext cx="960120" cy="960120"/>
-          </a:xfrm>
-          <a:prstGeom prst="ellipse">
-            <a:avLst/>
-          </a:prstGeom>
-          <a:solidFill>
-            <a:srgbClr val="FBFAF8"/>
-          </a:solidFill>
-          <a:ln w="12700">
-            <a:solidFill>
-              <a:srgbClr val="C74642"/>
-            </a:solidFill>
-            <a:prstDash val="solid"/>
-          </a:ln>
-        </p:spPr>
-      </p:sp>
-      <p:sp>
-        <p:nvSpPr>
-          <p:cNvPr id="22" name="Text 20"/>
-          <p:cNvSpPr/>
-          <p:nvPr/>
-        </p:nvSpPr>
-        <p:spPr>
-          <a:xfrm>
-            <a:off x="2194560" y="5056632"/>
-            <a:ext cx="1417320" cy="228600"/>
-          </a:xfrm>
-          <a:prstGeom prst="rect">
-            <a:avLst/>
-          </a:prstGeom>
-          <a:noFill/>
-          <a:ln/>
-        </p:spPr>
-        <p:txBody>
-          <a:bodyPr wrap="square" lIns="0" tIns="0" rIns="0" bIns="0" rtlCol="0" anchor="ctr"/>
-          <a:lstStyle/>
-          <a:p>
-            <a:pPr indent="0" marL="0">
-              <a:buNone/>
-            </a:pPr>
-            <a:r>
-              <a:rPr lang="en-US" sz="1600" dirty="0" b="1">
-                <a:solidFill>
-                  <a:srgbClr val="17306F"/>
-                </a:solidFill>
-                <a:latin typeface="Aptos Display" pitchFamily="34" charset="0"/>
-                <a:ea typeface="Aptos Display" pitchFamily="34" charset="-122"/>
-                <a:cs typeface="Aptos Display" pitchFamily="34" charset="-120"/>
-              </a:rPr>
-              <a:t>Ralph</a:t>
-            </a:r>
-            <a:endParaRPr lang="en-US" sz="1600" dirty="0"/>
-          </a:p>
-        </p:txBody>
-      </p:sp>
-      <p:sp>
-        <p:nvSpPr>
-          <p:cNvPr id="23" name="Text 21"/>
-          <p:cNvSpPr/>
-          <p:nvPr/>
-        </p:nvSpPr>
-        <p:spPr>
-          <a:xfrm>
-            <a:off x="2103120" y="5303520"/>
-            <a:ext cx="1600200" cy="182880"/>
-          </a:xfrm>
-          <a:prstGeom prst="rect">
-            <a:avLst/>
-          </a:prstGeom>
-          <a:noFill/>
-          <a:ln/>
-        </p:spPr>
-        <p:txBody>
-          <a:bodyPr wrap="square" lIns="0" tIns="0" rIns="0" bIns="0" rtlCol="0" anchor="ctr"/>
-          <a:lstStyle/>
-          <a:p>
-            <a:pPr indent="0" marL="0">
-              <a:buNone/>
-            </a:pPr>
-            <a:r>
-              <a:rPr lang="en-US" sz="1200" dirty="0">
-                <a:solidFill>
-                  <a:srgbClr val="726656"/>
-                </a:solidFill>
-                <a:latin typeface="Aptos" pitchFamily="34" charset="0"/>
-                <a:ea typeface="Aptos" pitchFamily="34" charset="-122"/>
-                <a:cs typeface="Aptos" pitchFamily="34" charset="-120"/>
-              </a:rPr>
-              <a:t>Storage (MongoDB)</a:t>
-            </a:r>
-            <a:endParaRPr lang="en-US" sz="1200" dirty="0"/>
-          </a:p>
-        </p:txBody>
-      </p:sp>
-      <p:sp>
-        <p:nvSpPr>
-          <p:cNvPr id="24" name="Shape 22"/>
-          <p:cNvSpPr/>
-          <p:nvPr/>
-        </p:nvSpPr>
-        <p:spPr>
-          <a:xfrm>
-            <a:off x="7178040" y="3977640"/>
-            <a:ext cx="960120" cy="960120"/>
-          </a:xfrm>
-          <a:prstGeom prst="ellipse">
-            <a:avLst/>
-          </a:prstGeom>
-          <a:solidFill>
-            <a:srgbClr val="FBFAF8"/>
-          </a:solidFill>
-          <a:ln w="12700">
-            <a:solidFill>
-              <a:srgbClr val="C74642"/>
-            </a:solidFill>
-            <a:prstDash val="solid"/>
-          </a:ln>
-        </p:spPr>
-      </p:sp>
-      <p:sp>
-        <p:nvSpPr>
-          <p:cNvPr id="25" name="Text 23"/>
-          <p:cNvSpPr/>
-          <p:nvPr/>
-        </p:nvSpPr>
-        <p:spPr>
-          <a:xfrm>
-            <a:off x="6949440" y="5056632"/>
-            <a:ext cx="1417320" cy="228600"/>
-          </a:xfrm>
-          <a:prstGeom prst="rect">
-            <a:avLst/>
-          </a:prstGeom>
-          <a:noFill/>
-          <a:ln/>
-        </p:spPr>
-        <p:txBody>
-          <a:bodyPr wrap="square" lIns="0" tIns="0" rIns="0" bIns="0" rtlCol="0" anchor="ctr"/>
-          <a:lstStyle/>
-          <a:p>
-            <a:pPr indent="0" marL="0">
-              <a:buNone/>
-            </a:pPr>
-            <a:r>
-              <a:rPr lang="en-US" sz="1600" dirty="0" b="1">
-                <a:solidFill>
-                  <a:srgbClr val="17306F"/>
-                </a:solidFill>
-                <a:latin typeface="Aptos Display" pitchFamily="34" charset="0"/>
-                <a:ea typeface="Aptos Display" pitchFamily="34" charset="-122"/>
-                <a:cs typeface="Aptos Display" pitchFamily="34" charset="-120"/>
-              </a:rPr>
-              <a:t>Doug Greene</a:t>
-            </a:r>
-            <a:endParaRPr lang="en-US" sz="1600" dirty="0"/>
-          </a:p>
-        </p:txBody>
-      </p:sp>
-      <p:sp>
-        <p:nvSpPr>
-          <p:cNvPr id="26" name="Text 24"/>
-          <p:cNvSpPr/>
-          <p:nvPr/>
-        </p:nvSpPr>
-        <p:spPr>
-          <a:xfrm>
-            <a:off x="6858000" y="5303520"/>
-            <a:ext cx="1600200" cy="182880"/>
-          </a:xfrm>
-          <a:prstGeom prst="rect">
-            <a:avLst/>
-          </a:prstGeom>
-          <a:noFill/>
-          <a:ln/>
-        </p:spPr>
-        <p:txBody>
-          <a:bodyPr wrap="square" lIns="0" tIns="0" rIns="0" bIns="0" rtlCol="0" anchor="ctr"/>
-          <a:lstStyle/>
-          <a:p>
-            <a:pPr indent="0" marL="0">
-              <a:buNone/>
-            </a:pPr>
-            <a:r>
-              <a:rPr lang="en-US" sz="1200" dirty="0">
-                <a:solidFill>
-                  <a:srgbClr val="726656"/>
-                </a:solidFill>
-                <a:latin typeface="Aptos" pitchFamily="34" charset="0"/>
-                <a:ea typeface="Aptos" pitchFamily="34" charset="-122"/>
-                <a:cs typeface="Aptos" pitchFamily="34" charset="-120"/>
-              </a:rPr>
-              <a:t>Client — Fivos Health</a:t>
-            </a:r>
-            <a:endParaRPr lang="en-US" sz="1200" dirty="0"/>
-          </a:p>
-        </p:txBody>
-      </p:sp>
-      <p:sp>
-        <p:nvSpPr>
-          <p:cNvPr id="27" name="Text 25"/>
-          <p:cNvSpPr/>
-          <p:nvPr/>
-        </p:nvSpPr>
-        <p:spPr>
-          <a:xfrm>
-            <a:off x="2011680" y="5897880"/>
-            <a:ext cx="8046720" cy="201168"/>
-          </a:xfrm>
-          <a:prstGeom prst="rect">
-            <a:avLst/>
-          </a:prstGeom>
-          <a:noFill/>
-          <a:ln/>
-        </p:spPr>
-        <p:txBody>
-          <a:bodyPr wrap="square" lIns="0" tIns="0" rIns="0" bIns="0" rtlCol="0" anchor="ctr"/>
-          <a:lstStyle/>
-          <a:p>
-            <a:pPr indent="0" marL="0">
-              <a:buNone/>
-            </a:pPr>
-            <a:r>
-              <a:rPr lang="en-US" sz="1000" dirty="0">
-                <a:solidFill>
-                  <a:srgbClr val="9E9890"/>
-                </a:solidFill>
-                <a:latin typeface="Aptos" pitchFamily="34" charset="0"/>
-                <a:ea typeface="Aptos" pitchFamily="34" charset="-122"/>
-                <a:cs typeface="Aptos" pitchFamily="34" charset="-120"/>
-              </a:rPr>
-              <a:t>Replace circles with headshots or initials for a polished look</a:t>
-            </a:r>
-            <a:endParaRPr lang="en-US" sz="1000" dirty="0"/>
-          </a:p>
-        </p:txBody>
-      </p:sp>
-      <p:sp>
-        <p:nvSpPr>
-          <p:cNvPr id="25" name="Slide Number Placeholder 0"/>
-          <p:cNvSpPr>
-            <a:spLocks noGrp="1"/>
-          </p:cNvSpPr>
-          <p:nvPr>
-            <p:ph type="sldNum" sz="quarter" idx="4294967295"/>
-          </p:nvPr>
-        </p:nvSpPr>
-        <p:spPr>
-          <a:xfrm>
-            <a:off x="11631168" y="6419088"/>
-            <a:ext cx="201168" cy="182880"/>
-          </a:xfrm>
-          <a:prstGeom prst="rect">
-            <a:avLst/>
-          </a:prstGeom>
-          <a:extLst>
-            <a:ext uri="{C572A759-6A51-4108-AA02-DFA0A04FC94B}">
-              <ma14:wrappingTextBoxFlag xmlns:ma14="http://schemas.microsoft.com/office/mac/drawingml/2011/main" val="0"/>
-            </a:ext>
-          </a:extLst>
-        </p:spPr>
-        <p:txBody>
-          <a:bodyPr/>
-          <a:lstStyle>
-            <a:lvl1pPr>
-              <a:defRPr sz="900">
-                <a:solidFill>
-                  <a:srgbClr val="7A746C"/>
-                </a:solidFill>
-                <a:latin typeface="Aptos"/>
-                <a:ea typeface="Aptos"/>
-                <a:cs typeface="Aptos"/>
-              </a:defRPr>
-            </a:lvl1pPr>
-          </a:lstStyle>
-          <a:p>
-            <a:pPr algn="r"/>
-            <a:fld id="{F7021451-1387-4CA6-816F-3879F97B5CBC}" type="slidenum">
-              <a:rPr b="0" lang="en-US"/>
-              <a:t>8</a:t>
-            </a:fld>
-            <a:endParaRPr lang="en-US"/>
-          </a:p>
-        </p:txBody>
-      </p:sp>
-    </p:spTree>
-  </p:cSld>
-  <p:clrMapOvr>
-    <a:masterClrMapping/>
-  </p:clrMapOvr>
-</p:sld>
-</file>
-
-<file path=ppt/slides/slide9.xml><?xml version="1.0" encoding="utf-8"?>
-<p:sld xmlns:a="http://schemas.openxmlformats.org/drawingml/2006/main" xmlns:r="http://schemas.openxmlformats.org/officeDocument/2006/relationships" xmlns:p="http://schemas.openxmlformats.org/presentationml/2006/main">
-  <p:cSld name="Slide 9">
-    <p:spTree>
-      <p:nvGrpSpPr>
-        <p:cNvPr id="1" name=""/>
-        <p:cNvGrpSpPr/>
-        <p:nvPr/>
-      </p:nvGrpSpPr>
-      <p:grpSpPr>
-        <a:xfrm>
-          <a:off x="0" y="0"/>
-          <a:ext cx="0" cy="0"/>
-          <a:chOff x="0" y="0"/>
-          <a:chExt cx="0" cy="0"/>
-        </a:xfrm>
-      </p:grpSpPr>
-      <p:sp>
-        <p:nvSpPr>
-          <p:cNvPr id="2" name="Shape 0"/>
-          <p:cNvSpPr/>
-          <p:nvPr/>
-        </p:nvSpPr>
-        <p:spPr>
-          <a:xfrm>
-            <a:off x="502920" y="347472"/>
-            <a:ext cx="914400" cy="73152"/>
-          </a:xfrm>
-          <a:prstGeom prst="rect">
-            <a:avLst/>
-          </a:prstGeom>
-          <a:solidFill>
-            <a:srgbClr val="E97886"/>
-          </a:solidFill>
-          <a:ln w="12700">
-            <a:solidFill>
-              <a:srgbClr val="E97886">
-                <a:alpha val="0"/>
-              </a:srgbClr>
-            </a:solidFill>
-            <a:prstDash val="solid"/>
-          </a:ln>
-        </p:spPr>
-      </p:sp>
-      <p:sp>
-        <p:nvSpPr>
-          <p:cNvPr id="3" name="Shape 1"/>
-          <p:cNvSpPr/>
-          <p:nvPr/>
-        </p:nvSpPr>
-        <p:spPr>
-          <a:xfrm>
-            <a:off x="1481328" y="347472"/>
-            <a:ext cx="1325880" cy="73152"/>
-          </a:xfrm>
-          <a:prstGeom prst="rect">
-            <a:avLst/>
-          </a:prstGeom>
-          <a:solidFill>
-            <a:srgbClr val="E8D0D0"/>
-          </a:solidFill>
-          <a:ln w="12700">
-            <a:solidFill>
-              <a:srgbClr val="E8D0D0">
-                <a:alpha val="0"/>
-              </a:srgbClr>
-            </a:solidFill>
-            <a:prstDash val="solid"/>
-          </a:ln>
-        </p:spPr>
-      </p:sp>
-      <p:sp>
-        <p:nvSpPr>
-          <p:cNvPr id="4" name="Shape 2"/>
-          <p:cNvSpPr/>
-          <p:nvPr/>
-        </p:nvSpPr>
-        <p:spPr>
-          <a:xfrm>
-            <a:off x="2816352" y="347472"/>
-            <a:ext cx="1554480" cy="73152"/>
-          </a:xfrm>
-          <a:prstGeom prst="rect">
-            <a:avLst/>
-          </a:prstGeom>
-          <a:solidFill>
-            <a:srgbClr val="D65F63"/>
-          </a:solidFill>
-          <a:ln w="12700">
-            <a:solidFill>
-              <a:srgbClr val="D65F63">
-                <a:alpha val="0"/>
-              </a:srgbClr>
-            </a:solidFill>
-            <a:prstDash val="solid"/>
-          </a:ln>
-        </p:spPr>
-      </p:sp>
-      <p:sp>
-        <p:nvSpPr>
-          <p:cNvPr id="5" name="Shape 3"/>
-          <p:cNvSpPr/>
-          <p:nvPr/>
-        </p:nvSpPr>
-        <p:spPr>
-          <a:xfrm>
-            <a:off x="4379976" y="347472"/>
-            <a:ext cx="1097280" cy="73152"/>
-          </a:xfrm>
-          <a:prstGeom prst="rect">
-            <a:avLst/>
-          </a:prstGeom>
-          <a:solidFill>
-            <a:srgbClr val="C74642"/>
-          </a:solidFill>
-          <a:ln w="12700">
-            <a:solidFill>
-              <a:srgbClr val="C74642">
-                <a:alpha val="0"/>
-              </a:srgbClr>
-            </a:solidFill>
-            <a:prstDash val="solid"/>
-          </a:ln>
-        </p:spPr>
-      </p:sp>
-      <p:sp>
-        <p:nvSpPr>
-          <p:cNvPr id="6" name="Text 4"/>
-          <p:cNvSpPr/>
-          <p:nvPr/>
-        </p:nvSpPr>
-        <p:spPr>
-          <a:xfrm>
-            <a:off x="822960" y="1417320"/>
-            <a:ext cx="3840480" cy="640080"/>
-          </a:xfrm>
-          <a:prstGeom prst="rect">
-            <a:avLst/>
-          </a:prstGeom>
-          <a:noFill/>
-          <a:ln/>
-        </p:spPr>
-        <p:txBody>
-          <a:bodyPr wrap="square" lIns="0" tIns="0" rIns="0" bIns="0" rtlCol="0" anchor="ctr"/>
-          <a:lstStyle/>
-          <a:p>
-            <a:pPr indent="0" marL="0">
-              <a:buNone/>
-            </a:pPr>
-            <a:r>
-              <a:rPr lang="en-US" sz="4800" dirty="0" b="1">
-                <a:solidFill>
-                  <a:srgbClr val="17306F"/>
-                </a:solidFill>
-                <a:latin typeface="Aptos Display" pitchFamily="34" charset="0"/>
-                <a:ea typeface="Aptos Display" pitchFamily="34" charset="-122"/>
-                <a:cs typeface="Aptos Display" pitchFamily="34" charset="-120"/>
-              </a:rPr>
-              <a:t>Live Demo + Q&amp;A</a:t>
-            </a:r>
-            <a:endParaRPr lang="en-US" sz="4800" dirty="0"/>
-          </a:p>
-        </p:txBody>
-      </p:sp>
-      <p:sp>
-        <p:nvSpPr>
-          <p:cNvPr id="7" name="Text 5"/>
-          <p:cNvSpPr/>
-          <p:nvPr/>
-        </p:nvSpPr>
-        <p:spPr>
-          <a:xfrm>
-            <a:off x="822960" y="2176272"/>
-            <a:ext cx="2194560" cy="320040"/>
-          </a:xfrm>
-          <a:prstGeom prst="rect">
-            <a:avLst/>
-          </a:prstGeom>
-          <a:noFill/>
-          <a:ln/>
-        </p:spPr>
-        <p:txBody>
-          <a:bodyPr wrap="square" lIns="0" tIns="0" rIns="0" bIns="0" rtlCol="0" anchor="ctr"/>
-          <a:lstStyle/>
-          <a:p>
-            <a:pPr indent="0" marL="0">
-              <a:buNone/>
-            </a:pPr>
-            <a:r>
-              <a:rPr lang="en-US" sz="2400" dirty="0">
-                <a:solidFill>
-                  <a:srgbClr val="726656"/>
-                </a:solidFill>
-                <a:latin typeface="Aptos Display" pitchFamily="34" charset="0"/>
-                <a:ea typeface="Aptos Display" pitchFamily="34" charset="-122"/>
-                <a:cs typeface="Aptos Display" pitchFamily="34" charset="-120"/>
-              </a:rPr>
-              <a:t>Thank you — Vibe Coders</a:t>
-            </a:r>
-            <a:endParaRPr lang="en-US" sz="2400" dirty="0"/>
-          </a:p>
-        </p:txBody>
-      </p:sp>
-      <p:sp>
-        <p:nvSpPr>
-          <p:cNvPr id="8" name="Text 6"/>
-          <p:cNvSpPr/>
-          <p:nvPr/>
-        </p:nvSpPr>
-        <p:spPr>
-          <a:xfrm>
-            <a:off x="822960" y="2880360"/>
-            <a:ext cx="4389120" cy="256032"/>
-          </a:xfrm>
-          <a:prstGeom prst="rect">
-            <a:avLst/>
-          </a:prstGeom>
-          <a:noFill/>
-          <a:ln/>
-        </p:spPr>
-        <p:txBody>
-          <a:bodyPr wrap="square" lIns="0" tIns="0" rIns="0" bIns="0" rtlCol="0" anchor="ctr"/>
-          <a:lstStyle/>
-          <a:p>
-            <a:pPr indent="0" marL="0">
-              <a:buNone/>
-            </a:pPr>
-            <a:r>
-              <a:rPr lang="en-US" sz="1300" dirty="0">
-                <a:solidFill>
-                  <a:srgbClr val="7A746C"/>
-                </a:solidFill>
-                <a:latin typeface="Aptos" pitchFamily="34" charset="0"/>
-                <a:ea typeface="Aptos" pitchFamily="34" charset="-122"/>
-                <a:cs typeface="Aptos" pitchFamily="34" charset="-120"/>
-              </a:rPr>
-              <a:t>GitHub: Fivos_Senior_Project  ·  Client: doug.greene@fivoshealth.com</a:t>
-            </a:r>
-            <a:endParaRPr lang="en-US" sz="1300" dirty="0"/>
-          </a:p>
-        </p:txBody>
-      </p:sp>
-      <p:sp>
-        <p:nvSpPr>
-          <p:cNvPr id="9" name="Shape 7"/>
-          <p:cNvSpPr/>
-          <p:nvPr/>
-        </p:nvSpPr>
-        <p:spPr>
-          <a:xfrm>
-            <a:off x="6903720" y="1188720"/>
-            <a:ext cx="3657600" cy="4297680"/>
-          </a:xfrm>
-          <a:prstGeom prst="roundRect">
-            <a:avLst>
-              <a:gd name="adj" fmla="val 1500"/>
-            </a:avLst>
-          </a:prstGeom>
-          <a:solidFill>
-            <a:srgbClr val="FBFAF8"/>
-          </a:solidFill>
-          <a:ln w="12700">
-            <a:solidFill>
-              <a:srgbClr val="D8D0C7"/>
-            </a:solidFill>
-            <a:prstDash val="solid"/>
-          </a:ln>
-        </p:spPr>
-      </p:sp>
-      <p:sp>
-        <p:nvSpPr>
-          <p:cNvPr id="10" name="Text 8"/>
-          <p:cNvSpPr/>
-          <p:nvPr/>
-        </p:nvSpPr>
-        <p:spPr>
-          <a:xfrm>
-            <a:off x="7360920" y="1828800"/>
-            <a:ext cx="2743200" cy="274320"/>
-          </a:xfrm>
-          <a:prstGeom prst="rect">
-            <a:avLst/>
-          </a:prstGeom>
-          <a:noFill/>
-          <a:ln/>
-        </p:spPr>
-        <p:txBody>
-          <a:bodyPr wrap="square" lIns="0" tIns="0" rIns="0" bIns="0" rtlCol="0" anchor="ctr"/>
-          <a:lstStyle/>
-          <a:p>
-            <a:pPr indent="0" marL="0">
-              <a:buNone/>
-            </a:pPr>
-            <a:r>
-              <a:rPr lang="en-US" sz="1400" dirty="0" b="1">
-                <a:solidFill>
-                  <a:srgbClr val="726656"/>
-                </a:solidFill>
-                <a:latin typeface="Aptos Display" pitchFamily="34" charset="0"/>
-                <a:ea typeface="Aptos Display" pitchFamily="34" charset="-122"/>
-                <a:cs typeface="Aptos Display" pitchFamily="34" charset="-120"/>
-              </a:rPr>
-              <a:t>Demo Script</a:t>
-            </a:r>
-            <a:endParaRPr lang="en-US" sz="1400" dirty="0"/>
-          </a:p>
-        </p:txBody>
-      </p:sp>
-      <p:sp>
-        <p:nvSpPr>
-          <p:cNvPr id="11" name="Text 9"/>
-          <p:cNvSpPr/>
-          <p:nvPr/>
-        </p:nvSpPr>
-        <p:spPr>
-          <a:xfrm>
-            <a:off x="7635240" y="2560320"/>
-            <a:ext cx="2194560" cy="1645920"/>
-          </a:xfrm>
-          <a:prstGeom prst="rect">
-            <a:avLst/>
-          </a:prstGeom>
-          <a:noFill/>
-          <a:ln/>
-        </p:spPr>
-        <p:txBody>
-          <a:bodyPr wrap="square" lIns="0" tIns="0" rIns="0" bIns="0" rtlCol="0" anchor="ctr"/>
-          <a:lstStyle/>
-          <a:p>
-            <a:pPr indent="0" marL="0">
-              <a:buNone/>
-            </a:pPr>
-            <a:r>
-              <a:rPr lang="en-US" sz="1400" dirty="0">
-                <a:solidFill>
-                  <a:srgbClr val="4D4A45"/>
-                </a:solidFill>
-                <a:latin typeface="Aptos" pitchFamily="34" charset="0"/>
-                <a:ea typeface="Aptos" pitchFamily="34" charset="-122"/>
-                <a:cs typeface="Aptos" pitchFamily="34" charset="-120"/>
-              </a:rPr>
-              <a:t>• Trigger a single-URL harvest from /harvester</a:t>
-            </a:r>
-            <a:endParaRPr lang="en-US" sz="1400" dirty="0"/>
-          </a:p>
-          <a:p>
-            <a:pPr indent="0" marL="0">
-              <a:buNone/>
-            </a:pPr>
-            <a:r>
-              <a:rPr lang="en-US" sz="1400" dirty="0">
-                <a:solidFill>
-                  <a:srgbClr val="4D4A45"/>
-                </a:solidFill>
-                <a:latin typeface="Aptos" pitchFamily="34" charset="0"/>
-                <a:ea typeface="Aptos" pitchFamily="34" charset="-122"/>
-                <a:cs typeface="Aptos" pitchFamily="34" charset="-120"/>
-              </a:rPr>
-              <a:t>• Show the extracted device record</a:t>
-            </a:r>
-            <a:endParaRPr lang="en-US" sz="1400" dirty="0"/>
-          </a:p>
-          <a:p>
-            <a:pPr indent="0" marL="0">
-              <a:buNone/>
-            </a:pPr>
-            <a:r>
-              <a:rPr lang="en-US" sz="1400" dirty="0">
-                <a:solidFill>
-                  <a:srgbClr val="4D4A45"/>
-                </a:solidFill>
-                <a:latin typeface="Aptos" pitchFamily="34" charset="0"/>
-                <a:ea typeface="Aptos" pitchFamily="34" charset="-122"/>
-                <a:cs typeface="Aptos" pitchFamily="34" charset="-120"/>
-              </a:rPr>
-              <a:t>• Run GUDID validation on the batch</a:t>
-            </a:r>
-            <a:endParaRPr lang="en-US" sz="1400" dirty="0"/>
-          </a:p>
-          <a:p>
-            <a:pPr indent="0" marL="0">
-              <a:buNone/>
-            </a:pPr>
-            <a:r>
-              <a:rPr lang="en-US" sz="1400" dirty="0">
-                <a:solidFill>
-                  <a:srgbClr val="4D4A45"/>
-                </a:solidFill>
-                <a:latin typeface="Aptos" pitchFamily="34" charset="0"/>
-                <a:ea typeface="Aptos" pitchFamily="34" charset="-122"/>
-                <a:cs typeface="Aptos" pitchFamily="34" charset="-120"/>
-              </a:rPr>
-              <a:t>• Open a mismatch in the /review dashboard</a:t>
-            </a:r>
-            <a:endParaRPr lang="en-US" sz="1400" dirty="0"/>
-          </a:p>
-          <a:p>
-            <a:pPr indent="0" marL="0">
-              <a:buNone/>
-            </a:pPr>
-            <a:r>
-              <a:rPr lang="en-US" sz="1400" dirty="0">
-                <a:solidFill>
-                  <a:srgbClr val="4D4A45"/>
-                </a:solidFill>
-                <a:latin typeface="Aptos" pitchFamily="34" charset="0"/>
-                <a:ea typeface="Aptos" pitchFamily="34" charset="-122"/>
-                <a:cs typeface="Aptos" pitchFamily="34" charset="-120"/>
-              </a:rPr>
-              <a:t>• Accept or override a field value</a:t>
-            </a:r>
-            <a:endParaRPr lang="en-US" sz="1400" dirty="0"/>
-          </a:p>
-          <a:p>
-            <a:pPr indent="0" marL="0">
-              <a:buNone/>
-            </a:pPr>
-            <a:r>
-              <a:rPr lang="en-US" sz="1400" dirty="0">
-                <a:solidFill>
-                  <a:srgbClr val="4D4A45"/>
-                </a:solidFill>
-                <a:latin typeface="Aptos" pitchFamily="34" charset="0"/>
-                <a:ea typeface="Aptos" pitchFamily="34" charset="-122"/>
-                <a:cs typeface="Aptos" pitchFamily="34" charset="-120"/>
-              </a:rPr>
-              <a:t>• (Admin) Create a reviewer account at /admin/users</a:t>
-            </a:r>
-            <a:endParaRPr lang="en-US" sz="1400" dirty="0"/>
-          </a:p>
-        </p:txBody>
-      </p:sp>
-      <p:sp>
-        <p:nvSpPr>
-          <p:cNvPr id="25" name="Slide Number Placeholder 0"/>
-          <p:cNvSpPr>
-            <a:spLocks noGrp="1"/>
-          </p:cNvSpPr>
-          <p:nvPr>
-            <p:ph type="sldNum" sz="quarter" idx="4294967295"/>
-          </p:nvPr>
-        </p:nvSpPr>
-        <p:spPr>
-          <a:xfrm>
-            <a:off x="11631168" y="6419088"/>
-            <a:ext cx="201168" cy="182880"/>
-          </a:xfrm>
-          <a:prstGeom prst="rect">
-            <a:avLst/>
-          </a:prstGeom>
-          <a:extLst>
-            <a:ext uri="{C572A759-6A51-4108-AA02-DFA0A04FC94B}">
-              <ma14:wrappingTextBoxFlag xmlns:ma14="http://schemas.microsoft.com/office/mac/drawingml/2011/main" val="0"/>
-            </a:ext>
-          </a:extLst>
-        </p:spPr>
-        <p:txBody>
-          <a:bodyPr/>
-          <a:lstStyle>
-            <a:lvl1pPr>
-              <a:defRPr sz="900">
-                <a:solidFill>
-                  <a:srgbClr val="7A746C"/>
-                </a:solidFill>
-                <a:latin typeface="Aptos"/>
-                <a:ea typeface="Aptos"/>
-                <a:cs typeface="Aptos"/>
-              </a:defRPr>
-            </a:lvl1pPr>
-          </a:lstStyle>
-          <a:p>
-            <a:pPr algn="r"/>
-            <a:fld id="{F7021451-1387-4CA6-816F-3879F97B5CBC}" type="slidenum">
-              <a:rPr b="0" lang="en-US"/>
+              <a:rPr lang="en-US" b="0"/>
               <a:t>9</a:t>
             </a:fld>
             <a:endParaRPr lang="en-US"/>
@@ -11688,4 +12164,319 @@
     </a:ext>
   </a:extLst>
 </a:theme>
+</file>
+
+<file path=ppt/theme/theme2.xml><?xml version="1.0" encoding="utf-8"?>
+<a:theme xmlns:a="http://schemas.openxmlformats.org/drawingml/2006/main" name="Office Theme">
+  <a:themeElements>
+    <a:clrScheme name="Office">
+      <a:dk1>
+        <a:sysClr val="windowText" lastClr="000000"/>
+      </a:dk1>
+      <a:lt1>
+        <a:sysClr val="window" lastClr="FFFFFF"/>
+      </a:lt1>
+      <a:dk2>
+        <a:srgbClr val="0E2841"/>
+      </a:dk2>
+      <a:lt2>
+        <a:srgbClr val="E8E8E8"/>
+      </a:lt2>
+      <a:accent1>
+        <a:srgbClr val="156082"/>
+      </a:accent1>
+      <a:accent2>
+        <a:srgbClr val="E97132"/>
+      </a:accent2>
+      <a:accent3>
+        <a:srgbClr val="196B24"/>
+      </a:accent3>
+      <a:accent4>
+        <a:srgbClr val="0F9ED5"/>
+      </a:accent4>
+      <a:accent5>
+        <a:srgbClr val="A02B93"/>
+      </a:accent5>
+      <a:accent6>
+        <a:srgbClr val="4EA72E"/>
+      </a:accent6>
+      <a:hlink>
+        <a:srgbClr val="467886"/>
+      </a:hlink>
+      <a:folHlink>
+        <a:srgbClr val="96607D"/>
+      </a:folHlink>
+    </a:clrScheme>
+    <a:fontScheme name="Office">
+      <a:majorFont>
+        <a:latin typeface="Aptos Display" panose="02110004020202020204"/>
+        <a:ea typeface=""/>
+        <a:cs typeface=""/>
+        <a:font script="Jpan" typeface="游ゴシック Light"/>
+        <a:font script="Hang" typeface="맑은 고딕"/>
+        <a:font script="Hans" typeface="等线 Light"/>
+        <a:font script="Hant" typeface="新細明體"/>
+        <a:font script="Arab" typeface="Times New Roman"/>
+        <a:font script="Hebr" typeface="Times New Roman"/>
+        <a:font script="Thai" typeface="Angsana New"/>
+        <a:font script="Ethi" typeface="Nyala"/>
+        <a:font script="Beng" typeface="Vrinda"/>
+        <a:font script="Gujr" typeface="Shruti"/>
+        <a:font script="Khmr" typeface="MoolBoran"/>
+        <a:font script="Knda" typeface="Tunga"/>
+        <a:font script="Guru" typeface="Raavi"/>
+        <a:font script="Cans" typeface="Euphemia"/>
+        <a:font script="Cher" typeface="Plantagenet Cherokee"/>
+        <a:font script="Yiii" typeface="Microsoft Yi Baiti"/>
+        <a:font script="Tibt" typeface="Microsoft Himalaya"/>
+        <a:font script="Thaa" typeface="MV Boli"/>
+        <a:font script="Deva" typeface="Mangal"/>
+        <a:font script="Telu" typeface="Gautami"/>
+        <a:font script="Taml" typeface="Latha"/>
+        <a:font script="Syrc" typeface="Estrangelo Edessa"/>
+        <a:font script="Orya" typeface="Kalinga"/>
+        <a:font script="Mlym" typeface="Kartika"/>
+        <a:font script="Laoo" typeface="DokChampa"/>
+        <a:font script="Sinh" typeface="Iskoola Pota"/>
+        <a:font script="Mong" typeface="Mongolian Baiti"/>
+        <a:font script="Viet" typeface="Times New Roman"/>
+        <a:font script="Uigh" typeface="Microsoft Uighur"/>
+        <a:font script="Geor" typeface="Sylfaen"/>
+        <a:font script="Armn" typeface="Arial"/>
+        <a:font script="Bugi" typeface="Leelawadee UI"/>
+        <a:font script="Bopo" typeface="Microsoft JhengHei"/>
+        <a:font script="Java" typeface="Javanese Text"/>
+        <a:font script="Lisu" typeface="Segoe UI"/>
+        <a:font script="Mymr" typeface="Myanmar Text"/>
+        <a:font script="Nkoo" typeface="Ebrima"/>
+        <a:font script="Olck" typeface="Nirmala UI"/>
+        <a:font script="Osma" typeface="Ebrima"/>
+        <a:font script="Phag" typeface="Phagspa"/>
+        <a:font script="Syrn" typeface="Estrangelo Edessa"/>
+        <a:font script="Syrj" typeface="Estrangelo Edessa"/>
+        <a:font script="Syre" typeface="Estrangelo Edessa"/>
+        <a:font script="Sora" typeface="Nirmala UI"/>
+        <a:font script="Tale" typeface="Microsoft Tai Le"/>
+        <a:font script="Talu" typeface="Microsoft New Tai Lue"/>
+        <a:font script="Tfng" typeface="Ebrima"/>
+      </a:majorFont>
+      <a:minorFont>
+        <a:latin typeface="Aptos" panose="02110004020202020204"/>
+        <a:ea typeface=""/>
+        <a:cs typeface=""/>
+        <a:font script="Jpan" typeface="游ゴシック"/>
+        <a:font script="Hang" typeface="맑은 고딕"/>
+        <a:font script="Hans" typeface="等线"/>
+        <a:font script="Hant" typeface="新細明體"/>
+        <a:font script="Arab" typeface="Arial"/>
+        <a:font script="Hebr" typeface="Arial"/>
+        <a:font script="Thai" typeface="Cordia New"/>
+        <a:font script="Ethi" typeface="Nyala"/>
+        <a:font script="Beng" typeface="Vrinda"/>
+        <a:font script="Gujr" typeface="Shruti"/>
+        <a:font script="Khmr" typeface="DaunPenh"/>
+        <a:font script="Knda" typeface="Tunga"/>
+        <a:font script="Guru" typeface="Raavi"/>
+        <a:font script="Cans" typeface="Euphemia"/>
+        <a:font script="Cher" typeface="Plantagenet Cherokee"/>
+        <a:font script="Yiii" typeface="Microsoft Yi Baiti"/>
+        <a:font script="Tibt" typeface="Microsoft Himalaya"/>
+        <a:font script="Thaa" typeface="MV Boli"/>
+        <a:font script="Deva" typeface="Mangal"/>
+        <a:font script="Telu" typeface="Gautami"/>
+        <a:font script="Taml" typeface="Latha"/>
+        <a:font script="Syrc" typeface="Estrangelo Edessa"/>
+        <a:font script="Orya" typeface="Kalinga"/>
+        <a:font script="Mlym" typeface="Kartika"/>
+        <a:font script="Laoo" typeface="DokChampa"/>
+        <a:font script="Sinh" typeface="Iskoola Pota"/>
+        <a:font script="Mong" typeface="Mongolian Baiti"/>
+        <a:font script="Viet" typeface="Arial"/>
+        <a:font script="Uigh" typeface="Microsoft Uighur"/>
+        <a:font script="Geor" typeface="Sylfaen"/>
+        <a:font script="Armn" typeface="Arial"/>
+        <a:font script="Bugi" typeface="Leelawadee UI"/>
+        <a:font script="Bopo" typeface="Microsoft JhengHei"/>
+        <a:font script="Java" typeface="Javanese Text"/>
+        <a:font script="Lisu" typeface="Segoe UI"/>
+        <a:font script="Mymr" typeface="Myanmar Text"/>
+        <a:font script="Nkoo" typeface="Ebrima"/>
+        <a:font script="Olck" typeface="Nirmala UI"/>
+        <a:font script="Osma" typeface="Ebrima"/>
+        <a:font script="Phag" typeface="Phagspa"/>
+        <a:font script="Syrn" typeface="Estrangelo Edessa"/>
+        <a:font script="Syrj" typeface="Estrangelo Edessa"/>
+        <a:font script="Syre" typeface="Estrangelo Edessa"/>
+        <a:font script="Sora" typeface="Nirmala UI"/>
+        <a:font script="Tale" typeface="Microsoft Tai Le"/>
+        <a:font script="Talu" typeface="Microsoft New Tai Lue"/>
+        <a:font script="Tfng" typeface="Ebrima"/>
+      </a:minorFont>
+    </a:fontScheme>
+    <a:fmtScheme name="Office">
+      <a:fillStyleLst>
+        <a:solidFill>
+          <a:schemeClr val="phClr"/>
+        </a:solidFill>
+        <a:gradFill rotWithShape="1">
+          <a:gsLst>
+            <a:gs pos="0">
+              <a:schemeClr val="phClr">
+                <a:lumMod val="110000"/>
+                <a:satMod val="105000"/>
+                <a:tint val="67000"/>
+              </a:schemeClr>
+            </a:gs>
+            <a:gs pos="50000">
+              <a:schemeClr val="phClr">
+                <a:lumMod val="105000"/>
+                <a:satMod val="103000"/>
+                <a:tint val="73000"/>
+              </a:schemeClr>
+            </a:gs>
+            <a:gs pos="100000">
+              <a:schemeClr val="phClr">
+                <a:lumMod val="105000"/>
+                <a:satMod val="109000"/>
+                <a:tint val="81000"/>
+              </a:schemeClr>
+            </a:gs>
+          </a:gsLst>
+          <a:lin ang="5400000" scaled="0"/>
+        </a:gradFill>
+        <a:gradFill rotWithShape="1">
+          <a:gsLst>
+            <a:gs pos="0">
+              <a:schemeClr val="phClr">
+                <a:satMod val="103000"/>
+                <a:lumMod val="102000"/>
+                <a:tint val="94000"/>
+              </a:schemeClr>
+            </a:gs>
+            <a:gs pos="50000">
+              <a:schemeClr val="phClr">
+                <a:satMod val="110000"/>
+                <a:lumMod val="100000"/>
+                <a:shade val="100000"/>
+              </a:schemeClr>
+            </a:gs>
+            <a:gs pos="100000">
+              <a:schemeClr val="phClr">
+                <a:lumMod val="99000"/>
+                <a:satMod val="120000"/>
+                <a:shade val="78000"/>
+              </a:schemeClr>
+            </a:gs>
+          </a:gsLst>
+          <a:lin ang="5400000" scaled="0"/>
+        </a:gradFill>
+      </a:fillStyleLst>
+      <a:lnStyleLst>
+        <a:ln w="12700" cap="flat" cmpd="sng" algn="ctr">
+          <a:solidFill>
+            <a:schemeClr val="phClr"/>
+          </a:solidFill>
+          <a:prstDash val="solid"/>
+          <a:miter lim="800000"/>
+        </a:ln>
+        <a:ln w="19050" cap="flat" cmpd="sng" algn="ctr">
+          <a:solidFill>
+            <a:schemeClr val="phClr"/>
+          </a:solidFill>
+          <a:prstDash val="solid"/>
+          <a:miter lim="800000"/>
+        </a:ln>
+        <a:ln w="25400" cap="flat" cmpd="sng" algn="ctr">
+          <a:solidFill>
+            <a:schemeClr val="phClr"/>
+          </a:solidFill>
+          <a:prstDash val="solid"/>
+          <a:miter lim="800000"/>
+        </a:ln>
+      </a:lnStyleLst>
+      <a:effectStyleLst>
+        <a:effectStyle>
+          <a:effectLst/>
+        </a:effectStyle>
+        <a:effectStyle>
+          <a:effectLst/>
+        </a:effectStyle>
+        <a:effectStyle>
+          <a:effectLst>
+            <a:outerShdw blurRad="57150" dist="19050" dir="5400000" algn="ctr" rotWithShape="0">
+              <a:srgbClr val="000000">
+                <a:alpha val="63000"/>
+              </a:srgbClr>
+            </a:outerShdw>
+          </a:effectLst>
+        </a:effectStyle>
+      </a:effectStyleLst>
+      <a:bgFillStyleLst>
+        <a:solidFill>
+          <a:schemeClr val="phClr"/>
+        </a:solidFill>
+        <a:solidFill>
+          <a:schemeClr val="phClr">
+            <a:tint val="95000"/>
+            <a:satMod val="170000"/>
+          </a:schemeClr>
+        </a:solidFill>
+        <a:gradFill rotWithShape="1">
+          <a:gsLst>
+            <a:gs pos="0">
+              <a:schemeClr val="phClr">
+                <a:tint val="93000"/>
+                <a:satMod val="150000"/>
+                <a:shade val="98000"/>
+                <a:lumMod val="102000"/>
+              </a:schemeClr>
+            </a:gs>
+            <a:gs pos="50000">
+              <a:schemeClr val="phClr">
+                <a:tint val="98000"/>
+                <a:satMod val="130000"/>
+                <a:shade val="90000"/>
+                <a:lumMod val="103000"/>
+              </a:schemeClr>
+            </a:gs>
+            <a:gs pos="100000">
+              <a:schemeClr val="phClr">
+                <a:shade val="63000"/>
+                <a:satMod val="120000"/>
+              </a:schemeClr>
+            </a:gs>
+          </a:gsLst>
+          <a:lin ang="5400000" scaled="0"/>
+        </a:gradFill>
+      </a:bgFillStyleLst>
+    </a:fmtScheme>
+  </a:themeElements>
+  <a:objectDefaults>
+    <a:lnDef>
+      <a:spPr/>
+      <a:bodyPr/>
+      <a:lstStyle/>
+      <a:style>
+        <a:lnRef idx="2">
+          <a:schemeClr val="accent1"/>
+        </a:lnRef>
+        <a:fillRef idx="0">
+          <a:schemeClr val="accent1"/>
+        </a:fillRef>
+        <a:effectRef idx="1">
+          <a:schemeClr val="accent1"/>
+        </a:effectRef>
+        <a:fontRef idx="minor">
+          <a:schemeClr val="tx1"/>
+        </a:fontRef>
+      </a:style>
+    </a:lnDef>
+  </a:objectDefaults>
+  <a:extraClrSchemeLst/>
+  <a:extLst>
+    <a:ext uri="{05A4C25C-085E-4340-85A3-A5531E510DB2}">
+      <thm15:themeFamily xmlns:thm15="http://schemas.microsoft.com/office/thememl/2012/main" name="Office Theme" id="{2E142A2C-CD16-42D6-873A-C26D2A0506FA}" vid="{1BDDFF52-6CD6-40A5-AB3C-68EB2F1E4D0A}"/>
+    </a:ext>
+  </a:extLst>
+</a:theme>
 </file>